--- a/docs/youngcha_1nd_poc_scope_deck.pptx
+++ b/docs/youngcha_1nd_poc_scope_deck.pptx
@@ -4,16 +4,17 @@
   <p:sldMasterIdLst>
     <p:sldMasterId id="2147483648" r:id="rId1"/>
   </p:sldMasterIdLst>
+  <p:notesMasterIdLst>
+    <p:notesMasterId r:id="rId8"/>
+  </p:notesMasterIdLst>
   <p:sldIdLst>
     <p:sldId id="256" r:id="rId2"/>
     <p:sldId id="257" r:id="rId3"/>
     <p:sldId id="258" r:id="rId4"/>
     <p:sldId id="259" r:id="rId5"/>
     <p:sldId id="260" r:id="rId6"/>
+    <p:sldId id="261" r:id="rId7"/>
   </p:sldIdLst>
-  <p:notesMasterIdLst>
-    <p:notesMasterId r:id="rId7"/>
-  </p:notesMasterIdLst>
   <p:sldSz cx="12192000" cy="6858000"/>
   <p:notesSz cx="6858000" cy="12192000"/>
   <p:defaultTextStyle>
@@ -108,7 +109,436 @@
       </a:defRPr>
     </a:lvl9pPr>
   </p:defaultTextStyle>
+  <p:extLst>
+    <p:ext uri="{EFAFB233-063F-42B5-8137-9DF3F51BA10A}">
+      <p15:sldGuideLst xmlns:p15="http://schemas.microsoft.com/office/powerpoint/2012/main"/>
+    </p:ext>
+  </p:extLst>
 </p:presentation>
+</file>
+
+<file path=ppt/changesInfos/changesInfo1.xml><?xml version="1.0" encoding="utf-8"?>
+<pc:chgInfo xmlns:a="http://schemas.openxmlformats.org/drawingml/2006/main" xmlns:r="http://schemas.openxmlformats.org/officeDocument/2006/relationships" xmlns:ac="http://schemas.microsoft.com/office/drawing/2013/main/command" xmlns:pc="http://schemas.microsoft.com/office/powerpoint/2013/main/command">
+  <pc:docChgLst>
+    <pc:chgData name="우영하" userId="16326280-4b73-49c6-ae55-d757829f7f37" providerId="ADAL" clId="{6381D7DB-60F0-4D71-A0B3-1498DE4C6E33}"/>
+    <pc:docChg chg="undo custSel addSld delSld modSld">
+      <pc:chgData name="우영하" userId="16326280-4b73-49c6-ae55-d757829f7f37" providerId="ADAL" clId="{6381D7DB-60F0-4D71-A0B3-1498DE4C6E33}" dt="2026-07-20T01:11:22.256" v="152" actId="47"/>
+      <pc:docMkLst>
+        <pc:docMk/>
+      </pc:docMkLst>
+      <pc:sldChg chg="addSp modSp mod">
+        <pc:chgData name="우영하" userId="16326280-4b73-49c6-ae55-d757829f7f37" providerId="ADAL" clId="{6381D7DB-60F0-4D71-A0B3-1498DE4C6E33}" dt="2026-07-16T01:55:24.225" v="150" actId="2085"/>
+        <pc:sldMkLst>
+          <pc:docMk/>
+          <pc:sldMk cId="0" sldId="256"/>
+        </pc:sldMkLst>
+        <pc:spChg chg="mod">
+          <ac:chgData name="우영하" userId="16326280-4b73-49c6-ae55-d757829f7f37" providerId="ADAL" clId="{6381D7DB-60F0-4D71-A0B3-1498DE4C6E33}" dt="2026-07-16T01:54:51.208" v="143" actId="6549"/>
+          <ac:spMkLst>
+            <pc:docMk/>
+            <pc:sldMk cId="0" sldId="256"/>
+            <ac:spMk id="15" creationId="{00000000-0000-0000-0000-000000000000}"/>
+          </ac:spMkLst>
+        </pc:spChg>
+        <pc:spChg chg="mod">
+          <ac:chgData name="우영하" userId="16326280-4b73-49c6-ae55-d757829f7f37" providerId="ADAL" clId="{6381D7DB-60F0-4D71-A0B3-1498DE4C6E33}" dt="2026-07-16T01:55:18.187" v="148" actId="6549"/>
+          <ac:spMkLst>
+            <pc:docMk/>
+            <pc:sldMk cId="0" sldId="256"/>
+            <ac:spMk id="16" creationId="{00000000-0000-0000-0000-000000000000}"/>
+          </ac:spMkLst>
+        </pc:spChg>
+        <pc:spChg chg="add mod">
+          <ac:chgData name="우영하" userId="16326280-4b73-49c6-ae55-d757829f7f37" providerId="ADAL" clId="{6381D7DB-60F0-4D71-A0B3-1498DE4C6E33}" dt="2026-07-16T01:55:05.222" v="146" actId="2710"/>
+          <ac:spMkLst>
+            <pc:docMk/>
+            <pc:sldMk cId="0" sldId="256"/>
+            <ac:spMk id="18" creationId="{30612BA8-4B81-9C34-3E83-417755F1F9F9}"/>
+          </ac:spMkLst>
+        </pc:spChg>
+        <pc:spChg chg="add mod">
+          <ac:chgData name="우영하" userId="16326280-4b73-49c6-ae55-d757829f7f37" providerId="ADAL" clId="{6381D7DB-60F0-4D71-A0B3-1498DE4C6E33}" dt="2026-07-16T01:55:24.225" v="150" actId="2085"/>
+          <ac:spMkLst>
+            <pc:docMk/>
+            <pc:sldMk cId="0" sldId="256"/>
+            <ac:spMk id="19" creationId="{0029BE50-2B29-7F8B-8E37-4362EAE3C735}"/>
+          </ac:spMkLst>
+        </pc:spChg>
+      </pc:sldChg>
+      <pc:sldChg chg="addSp modSp mod">
+        <pc:chgData name="우영하" userId="16326280-4b73-49c6-ae55-d757829f7f37" providerId="ADAL" clId="{6381D7DB-60F0-4D71-A0B3-1498DE4C6E33}" dt="2026-07-16T01:27:05.669" v="41" actId="2710"/>
+        <pc:sldMkLst>
+          <pc:docMk/>
+          <pc:sldMk cId="0" sldId="257"/>
+        </pc:sldMkLst>
+        <pc:spChg chg="mod">
+          <ac:chgData name="우영하" userId="16326280-4b73-49c6-ae55-d757829f7f37" providerId="ADAL" clId="{6381D7DB-60F0-4D71-A0B3-1498DE4C6E33}" dt="2026-07-16T01:25:49.504" v="16" actId="6549"/>
+          <ac:spMkLst>
+            <pc:docMk/>
+            <pc:sldMk cId="0" sldId="257"/>
+            <ac:spMk id="10" creationId="{00000000-0000-0000-0000-000000000000}"/>
+          </ac:spMkLst>
+        </pc:spChg>
+        <pc:spChg chg="mod">
+          <ac:chgData name="우영하" userId="16326280-4b73-49c6-ae55-d757829f7f37" providerId="ADAL" clId="{6381D7DB-60F0-4D71-A0B3-1498DE4C6E33}" dt="2026-07-16T01:26:29.225" v="32" actId="6549"/>
+          <ac:spMkLst>
+            <pc:docMk/>
+            <pc:sldMk cId="0" sldId="257"/>
+            <ac:spMk id="11" creationId="{00000000-0000-0000-0000-000000000000}"/>
+          </ac:spMkLst>
+        </pc:spChg>
+        <pc:spChg chg="mod">
+          <ac:chgData name="우영하" userId="16326280-4b73-49c6-ae55-d757829f7f37" providerId="ADAL" clId="{6381D7DB-60F0-4D71-A0B3-1498DE4C6E33}" dt="2026-07-16T01:26:58.303" v="39" actId="6549"/>
+          <ac:spMkLst>
+            <pc:docMk/>
+            <pc:sldMk cId="0" sldId="257"/>
+            <ac:spMk id="12" creationId="{00000000-0000-0000-0000-000000000000}"/>
+          </ac:spMkLst>
+        </pc:spChg>
+        <pc:spChg chg="add mod">
+          <ac:chgData name="우영하" userId="16326280-4b73-49c6-ae55-d757829f7f37" providerId="ADAL" clId="{6381D7DB-60F0-4D71-A0B3-1498DE4C6E33}" dt="2026-07-16T01:26:40.070" v="34" actId="2710"/>
+          <ac:spMkLst>
+            <pc:docMk/>
+            <pc:sldMk cId="0" sldId="257"/>
+            <ac:spMk id="16" creationId="{F1D56BC6-8DDF-0622-91CC-AA941B7FB928}"/>
+          </ac:spMkLst>
+        </pc:spChg>
+        <pc:spChg chg="add mod">
+          <ac:chgData name="우영하" userId="16326280-4b73-49c6-ae55-d757829f7f37" providerId="ADAL" clId="{6381D7DB-60F0-4D71-A0B3-1498DE4C6E33}" dt="2026-07-16T01:26:42.692" v="35" actId="2710"/>
+          <ac:spMkLst>
+            <pc:docMk/>
+            <pc:sldMk cId="0" sldId="257"/>
+            <ac:spMk id="17" creationId="{29CC625F-5C6E-639E-FCB9-8996932D15A1}"/>
+          </ac:spMkLst>
+        </pc:spChg>
+        <pc:spChg chg="add mod">
+          <ac:chgData name="우영하" userId="16326280-4b73-49c6-ae55-d757829f7f37" providerId="ADAL" clId="{6381D7DB-60F0-4D71-A0B3-1498DE4C6E33}" dt="2026-07-16T01:27:05.669" v="41" actId="2710"/>
+          <ac:spMkLst>
+            <pc:docMk/>
+            <pc:sldMk cId="0" sldId="257"/>
+            <ac:spMk id="18" creationId="{247F0DD2-27DD-BEC1-B8C8-8F49D5BF2C9F}"/>
+          </ac:spMkLst>
+        </pc:spChg>
+      </pc:sldChg>
+      <pc:sldChg chg="addSp modSp mod">
+        <pc:chgData name="우영하" userId="16326280-4b73-49c6-ae55-d757829f7f37" providerId="ADAL" clId="{6381D7DB-60F0-4D71-A0B3-1498DE4C6E33}" dt="2026-07-16T01:33:22.170" v="90" actId="14100"/>
+        <pc:sldMkLst>
+          <pc:docMk/>
+          <pc:sldMk cId="0" sldId="258"/>
+        </pc:sldMkLst>
+        <pc:spChg chg="mod">
+          <ac:chgData name="우영하" userId="16326280-4b73-49c6-ae55-d757829f7f37" providerId="ADAL" clId="{6381D7DB-60F0-4D71-A0B3-1498DE4C6E33}" dt="2026-07-16T01:29:07.816" v="61" actId="1035"/>
+          <ac:spMkLst>
+            <pc:docMk/>
+            <pc:sldMk cId="0" sldId="258"/>
+            <ac:spMk id="6" creationId="{00000000-0000-0000-0000-000000000000}"/>
+          </ac:spMkLst>
+        </pc:spChg>
+        <pc:spChg chg="mod">
+          <ac:chgData name="우영하" userId="16326280-4b73-49c6-ae55-d757829f7f37" providerId="ADAL" clId="{6381D7DB-60F0-4D71-A0B3-1498DE4C6E33}" dt="2026-07-16T01:29:44.762" v="63" actId="6549"/>
+          <ac:spMkLst>
+            <pc:docMk/>
+            <pc:sldMk cId="0" sldId="258"/>
+            <ac:spMk id="7" creationId="{00000000-0000-0000-0000-000000000000}"/>
+          </ac:spMkLst>
+        </pc:spChg>
+        <pc:spChg chg="mod">
+          <ac:chgData name="우영하" userId="16326280-4b73-49c6-ae55-d757829f7f37" providerId="ADAL" clId="{6381D7DB-60F0-4D71-A0B3-1498DE4C6E33}" dt="2026-07-16T01:30:17.421" v="69" actId="6549"/>
+          <ac:spMkLst>
+            <pc:docMk/>
+            <pc:sldMk cId="0" sldId="258"/>
+            <ac:spMk id="8" creationId="{00000000-0000-0000-0000-000000000000}"/>
+          </ac:spMkLst>
+        </pc:spChg>
+        <pc:spChg chg="mod">
+          <ac:chgData name="우영하" userId="16326280-4b73-49c6-ae55-d757829f7f37" providerId="ADAL" clId="{6381D7DB-60F0-4D71-A0B3-1498DE4C6E33}" dt="2026-07-16T01:33:22.170" v="90" actId="14100"/>
+          <ac:spMkLst>
+            <pc:docMk/>
+            <pc:sldMk cId="0" sldId="258"/>
+            <ac:spMk id="9" creationId="{00000000-0000-0000-0000-000000000000}"/>
+          </ac:spMkLst>
+        </pc:spChg>
+        <pc:spChg chg="mod">
+          <ac:chgData name="우영하" userId="16326280-4b73-49c6-ae55-d757829f7f37" providerId="ADAL" clId="{6381D7DB-60F0-4D71-A0B3-1498DE4C6E33}" dt="2026-07-16T01:33:22.170" v="90" actId="14100"/>
+          <ac:spMkLst>
+            <pc:docMk/>
+            <pc:sldMk cId="0" sldId="258"/>
+            <ac:spMk id="10" creationId="{00000000-0000-0000-0000-000000000000}"/>
+          </ac:spMkLst>
+        </pc:spChg>
+        <pc:spChg chg="add mod">
+          <ac:chgData name="우영하" userId="16326280-4b73-49c6-ae55-d757829f7f37" providerId="ADAL" clId="{6381D7DB-60F0-4D71-A0B3-1498DE4C6E33}" dt="2026-07-16T01:29:07.816" v="61" actId="1035"/>
+          <ac:spMkLst>
+            <pc:docMk/>
+            <pc:sldMk cId="0" sldId="258"/>
+            <ac:spMk id="12" creationId="{EDB390D9-3001-6D2F-DA19-96DE6B1A228F}"/>
+          </ac:spMkLst>
+        </pc:spChg>
+        <pc:spChg chg="add mod">
+          <ac:chgData name="우영하" userId="16326280-4b73-49c6-ae55-d757829f7f37" providerId="ADAL" clId="{6381D7DB-60F0-4D71-A0B3-1498DE4C6E33}" dt="2026-07-16T01:30:07.603" v="67" actId="12"/>
+          <ac:spMkLst>
+            <pc:docMk/>
+            <pc:sldMk cId="0" sldId="258"/>
+            <ac:spMk id="13" creationId="{3DA22FC9-2E6E-AF4A-B442-FFF2D558CD55}"/>
+          </ac:spMkLst>
+        </pc:spChg>
+        <pc:spChg chg="add mod">
+          <ac:chgData name="우영하" userId="16326280-4b73-49c6-ae55-d757829f7f37" providerId="ADAL" clId="{6381D7DB-60F0-4D71-A0B3-1498DE4C6E33}" dt="2026-07-16T01:30:38.722" v="73" actId="2710"/>
+          <ac:spMkLst>
+            <pc:docMk/>
+            <pc:sldMk cId="0" sldId="258"/>
+            <ac:spMk id="14" creationId="{739CE40B-21B1-C6E1-A36F-805AF88C6621}"/>
+          </ac:spMkLst>
+        </pc:spChg>
+        <pc:spChg chg="add mod">
+          <ac:chgData name="우영하" userId="16326280-4b73-49c6-ae55-d757829f7f37" providerId="ADAL" clId="{6381D7DB-60F0-4D71-A0B3-1498DE4C6E33}" dt="2026-07-16T01:33:12.607" v="89" actId="27636"/>
+          <ac:spMkLst>
+            <pc:docMk/>
+            <pc:sldMk cId="0" sldId="258"/>
+            <ac:spMk id="15" creationId="{75C8C1D9-2727-340B-D644-B69F216E0E54}"/>
+          </ac:spMkLst>
+        </pc:spChg>
+        <pc:spChg chg="add mod">
+          <ac:chgData name="우영하" userId="16326280-4b73-49c6-ae55-d757829f7f37" providerId="ADAL" clId="{6381D7DB-60F0-4D71-A0B3-1498DE4C6E33}" dt="2026-07-16T01:33:06.923" v="87" actId="1076"/>
+          <ac:spMkLst>
+            <pc:docMk/>
+            <pc:sldMk cId="0" sldId="258"/>
+            <ac:spMk id="16" creationId="{784B349F-F737-5E1B-0231-DCF883762494}"/>
+          </ac:spMkLst>
+        </pc:spChg>
+      </pc:sldChg>
+      <pc:sldChg chg="addSp modSp mod">
+        <pc:chgData name="우영하" userId="16326280-4b73-49c6-ae55-d757829f7f37" providerId="ADAL" clId="{6381D7DB-60F0-4D71-A0B3-1498DE4C6E33}" dt="2026-07-16T01:37:17.961" v="121" actId="14100"/>
+        <pc:sldMkLst>
+          <pc:docMk/>
+          <pc:sldMk cId="0" sldId="260"/>
+        </pc:sldMkLst>
+        <pc:spChg chg="mod">
+          <ac:chgData name="우영하" userId="16326280-4b73-49c6-ae55-d757829f7f37" providerId="ADAL" clId="{6381D7DB-60F0-4D71-A0B3-1498DE4C6E33}" dt="2026-07-16T01:34:55.670" v="92" actId="6549"/>
+          <ac:spMkLst>
+            <pc:docMk/>
+            <pc:sldMk cId="0" sldId="260"/>
+            <ac:spMk id="6" creationId="{00000000-0000-0000-0000-000000000000}"/>
+          </ac:spMkLst>
+        </pc:spChg>
+        <pc:spChg chg="mod">
+          <ac:chgData name="우영하" userId="16326280-4b73-49c6-ae55-d757829f7f37" providerId="ADAL" clId="{6381D7DB-60F0-4D71-A0B3-1498DE4C6E33}" dt="2026-07-16T01:35:12.758" v="96" actId="6549"/>
+          <ac:spMkLst>
+            <pc:docMk/>
+            <pc:sldMk cId="0" sldId="260"/>
+            <ac:spMk id="9" creationId="{00000000-0000-0000-0000-000000000000}"/>
+          </ac:spMkLst>
+        </pc:spChg>
+        <pc:spChg chg="mod">
+          <ac:chgData name="우영하" userId="16326280-4b73-49c6-ae55-d757829f7f37" providerId="ADAL" clId="{6381D7DB-60F0-4D71-A0B3-1498DE4C6E33}" dt="2026-07-16T01:35:25.179" v="100" actId="6549"/>
+          <ac:spMkLst>
+            <pc:docMk/>
+            <pc:sldMk cId="0" sldId="260"/>
+            <ac:spMk id="12" creationId="{00000000-0000-0000-0000-000000000000}"/>
+          </ac:spMkLst>
+        </pc:spChg>
+        <pc:spChg chg="mod">
+          <ac:chgData name="우영하" userId="16326280-4b73-49c6-ae55-d757829f7f37" providerId="ADAL" clId="{6381D7DB-60F0-4D71-A0B3-1498DE4C6E33}" dt="2026-07-16T01:35:32.870" v="104" actId="6549"/>
+          <ac:spMkLst>
+            <pc:docMk/>
+            <pc:sldMk cId="0" sldId="260"/>
+            <ac:spMk id="15" creationId="{00000000-0000-0000-0000-000000000000}"/>
+          </ac:spMkLst>
+        </pc:spChg>
+        <pc:spChg chg="mod">
+          <ac:chgData name="우영하" userId="16326280-4b73-49c6-ae55-d757829f7f37" providerId="ADAL" clId="{6381D7DB-60F0-4D71-A0B3-1498DE4C6E33}" dt="2026-07-16T01:36:42.033" v="118" actId="1076"/>
+          <ac:spMkLst>
+            <pc:docMk/>
+            <pc:sldMk cId="0" sldId="260"/>
+            <ac:spMk id="16" creationId="{00000000-0000-0000-0000-000000000000}"/>
+          </ac:spMkLst>
+        </pc:spChg>
+        <pc:spChg chg="mod">
+          <ac:chgData name="우영하" userId="16326280-4b73-49c6-ae55-d757829f7f37" providerId="ADAL" clId="{6381D7DB-60F0-4D71-A0B3-1498DE4C6E33}" dt="2026-07-16T01:37:12.313" v="119" actId="14100"/>
+          <ac:spMkLst>
+            <pc:docMk/>
+            <pc:sldMk cId="0" sldId="260"/>
+            <ac:spMk id="17" creationId="{00000000-0000-0000-0000-000000000000}"/>
+          </ac:spMkLst>
+        </pc:spChg>
+        <pc:spChg chg="mod">
+          <ac:chgData name="우영하" userId="16326280-4b73-49c6-ae55-d757829f7f37" providerId="ADAL" clId="{6381D7DB-60F0-4D71-A0B3-1498DE4C6E33}" dt="2026-07-16T01:36:42.033" v="118" actId="1076"/>
+          <ac:spMkLst>
+            <pc:docMk/>
+            <pc:sldMk cId="0" sldId="260"/>
+            <ac:spMk id="18" creationId="{00000000-0000-0000-0000-000000000000}"/>
+          </ac:spMkLst>
+        </pc:spChg>
+        <pc:spChg chg="mod">
+          <ac:chgData name="우영하" userId="16326280-4b73-49c6-ae55-d757829f7f37" providerId="ADAL" clId="{6381D7DB-60F0-4D71-A0B3-1498DE4C6E33}" dt="2026-07-16T01:37:17.961" v="121" actId="14100"/>
+          <ac:spMkLst>
+            <pc:docMk/>
+            <pc:sldMk cId="0" sldId="260"/>
+            <ac:spMk id="19" creationId="{00000000-0000-0000-0000-000000000000}"/>
+          </ac:spMkLst>
+        </pc:spChg>
+        <pc:spChg chg="mod">
+          <ac:chgData name="우영하" userId="16326280-4b73-49c6-ae55-d757829f7f37" providerId="ADAL" clId="{6381D7DB-60F0-4D71-A0B3-1498DE4C6E33}" dt="2026-07-16T01:36:42.033" v="118" actId="1076"/>
+          <ac:spMkLst>
+            <pc:docMk/>
+            <pc:sldMk cId="0" sldId="260"/>
+            <ac:spMk id="20" creationId="{00000000-0000-0000-0000-000000000000}"/>
+          </ac:spMkLst>
+        </pc:spChg>
+        <pc:spChg chg="mod">
+          <ac:chgData name="우영하" userId="16326280-4b73-49c6-ae55-d757829f7f37" providerId="ADAL" clId="{6381D7DB-60F0-4D71-A0B3-1498DE4C6E33}" dt="2026-07-16T01:36:36.867" v="117" actId="1076"/>
+          <ac:spMkLst>
+            <pc:docMk/>
+            <pc:sldMk cId="0" sldId="260"/>
+            <ac:spMk id="21" creationId="{00000000-0000-0000-0000-000000000000}"/>
+          </ac:spMkLst>
+        </pc:spChg>
+        <pc:spChg chg="add mod">
+          <ac:chgData name="우영하" userId="16326280-4b73-49c6-ae55-d757829f7f37" providerId="ADAL" clId="{6381D7DB-60F0-4D71-A0B3-1498DE4C6E33}" dt="2026-07-16T01:34:59.688" v="94" actId="207"/>
+          <ac:spMkLst>
+            <pc:docMk/>
+            <pc:sldMk cId="0" sldId="260"/>
+            <ac:spMk id="22" creationId="{D1BA2EC2-FC0C-4D26-CAAA-BC02BFEC708D}"/>
+          </ac:spMkLst>
+        </pc:spChg>
+        <pc:spChg chg="add mod">
+          <ac:chgData name="우영하" userId="16326280-4b73-49c6-ae55-d757829f7f37" providerId="ADAL" clId="{6381D7DB-60F0-4D71-A0B3-1498DE4C6E33}" dt="2026-07-16T01:35:16.482" v="98" actId="207"/>
+          <ac:spMkLst>
+            <pc:docMk/>
+            <pc:sldMk cId="0" sldId="260"/>
+            <ac:spMk id="23" creationId="{11CEBAFB-22A2-EAE1-42E1-112BB1127738}"/>
+          </ac:spMkLst>
+        </pc:spChg>
+        <pc:spChg chg="add mod">
+          <ac:chgData name="우영하" userId="16326280-4b73-49c6-ae55-d757829f7f37" providerId="ADAL" clId="{6381D7DB-60F0-4D71-A0B3-1498DE4C6E33}" dt="2026-07-16T01:35:28.312" v="102" actId="207"/>
+          <ac:spMkLst>
+            <pc:docMk/>
+            <pc:sldMk cId="0" sldId="260"/>
+            <ac:spMk id="24" creationId="{9F045E33-F14B-0649-596E-761184B3C82E}"/>
+          </ac:spMkLst>
+        </pc:spChg>
+        <pc:spChg chg="add mod">
+          <ac:chgData name="우영하" userId="16326280-4b73-49c6-ae55-d757829f7f37" providerId="ADAL" clId="{6381D7DB-60F0-4D71-A0B3-1498DE4C6E33}" dt="2026-07-16T01:35:36.725" v="106" actId="2085"/>
+          <ac:spMkLst>
+            <pc:docMk/>
+            <pc:sldMk cId="0" sldId="260"/>
+            <ac:spMk id="25" creationId="{FDCC4CB6-B51F-285B-A284-FECA21FC694B}"/>
+          </ac:spMkLst>
+        </pc:spChg>
+        <pc:spChg chg="add mod">
+          <ac:chgData name="우영하" userId="16326280-4b73-49c6-ae55-d757829f7f37" providerId="ADAL" clId="{6381D7DB-60F0-4D71-A0B3-1498DE4C6E33}" dt="2026-07-16T01:36:42.033" v="118" actId="1076"/>
+          <ac:spMkLst>
+            <pc:docMk/>
+            <pc:sldMk cId="0" sldId="260"/>
+            <ac:spMk id="26" creationId="{1DDEA393-DB92-B5D1-33C7-BC0112C34049}"/>
+          </ac:spMkLst>
+        </pc:spChg>
+        <pc:spChg chg="add mod">
+          <ac:chgData name="우영하" userId="16326280-4b73-49c6-ae55-d757829f7f37" providerId="ADAL" clId="{6381D7DB-60F0-4D71-A0B3-1498DE4C6E33}" dt="2026-07-16T01:37:15.263" v="120" actId="1076"/>
+          <ac:spMkLst>
+            <pc:docMk/>
+            <pc:sldMk cId="0" sldId="260"/>
+            <ac:spMk id="27" creationId="{3EC41F1B-5E45-7F31-D253-1ECEA3228013}"/>
+          </ac:spMkLst>
+        </pc:spChg>
+      </pc:sldChg>
+      <pc:sldChg chg="addSp delSp modSp add mod">
+        <pc:chgData name="우영하" userId="16326280-4b73-49c6-ae55-d757829f7f37" providerId="ADAL" clId="{6381D7DB-60F0-4D71-A0B3-1498DE4C6E33}" dt="2026-07-16T01:54:00.325" v="141" actId="20577"/>
+        <pc:sldMkLst>
+          <pc:docMk/>
+          <pc:sldMk cId="4399073" sldId="261"/>
+        </pc:sldMkLst>
+        <pc:spChg chg="add">
+          <ac:chgData name="우영하" userId="16326280-4b73-49c6-ae55-d757829f7f37" providerId="ADAL" clId="{6381D7DB-60F0-4D71-A0B3-1498DE4C6E33}" dt="2026-07-16T01:53:28.638" v="124" actId="22"/>
+          <ac:spMkLst>
+            <pc:docMk/>
+            <pc:sldMk cId="4399073" sldId="261"/>
+            <ac:spMk id="37" creationId="{3AC2FB4D-5D97-1CC7-B5C9-D089D24AA962}"/>
+          </ac:spMkLst>
+        </pc:spChg>
+        <pc:spChg chg="add">
+          <ac:chgData name="우영하" userId="16326280-4b73-49c6-ae55-d757829f7f37" providerId="ADAL" clId="{6381D7DB-60F0-4D71-A0B3-1498DE4C6E33}" dt="2026-07-16T01:53:28.638" v="124" actId="22"/>
+          <ac:spMkLst>
+            <pc:docMk/>
+            <pc:sldMk cId="4399073" sldId="261"/>
+            <ac:spMk id="39" creationId="{6AB96477-69B0-EFFE-29CA-AF52902FFEDA}"/>
+          </ac:spMkLst>
+        </pc:spChg>
+        <pc:spChg chg="add">
+          <ac:chgData name="우영하" userId="16326280-4b73-49c6-ae55-d757829f7f37" providerId="ADAL" clId="{6381D7DB-60F0-4D71-A0B3-1498DE4C6E33}" dt="2026-07-16T01:53:28.638" v="124" actId="22"/>
+          <ac:spMkLst>
+            <pc:docMk/>
+            <pc:sldMk cId="4399073" sldId="261"/>
+            <ac:spMk id="47" creationId="{8A43BA3B-4231-D9B2-978F-E12A3B3F9A64}"/>
+          </ac:spMkLst>
+        </pc:spChg>
+        <pc:spChg chg="add">
+          <ac:chgData name="우영하" userId="16326280-4b73-49c6-ae55-d757829f7f37" providerId="ADAL" clId="{6381D7DB-60F0-4D71-A0B3-1498DE4C6E33}" dt="2026-07-16T01:53:28.638" v="124" actId="22"/>
+          <ac:spMkLst>
+            <pc:docMk/>
+            <pc:sldMk cId="4399073" sldId="261"/>
+            <ac:spMk id="49" creationId="{FDBB63BB-9045-65B0-A22E-18A0FDC4E9EA}"/>
+          </ac:spMkLst>
+        </pc:spChg>
+        <pc:spChg chg="add">
+          <ac:chgData name="우영하" userId="16326280-4b73-49c6-ae55-d757829f7f37" providerId="ADAL" clId="{6381D7DB-60F0-4D71-A0B3-1498DE4C6E33}" dt="2026-07-16T01:53:28.638" v="124" actId="22"/>
+          <ac:spMkLst>
+            <pc:docMk/>
+            <pc:sldMk cId="4399073" sldId="261"/>
+            <ac:spMk id="55" creationId="{EC0AE000-E881-4D37-7D01-F4AD66BDF4EF}"/>
+          </ac:spMkLst>
+        </pc:spChg>
+        <pc:spChg chg="add mod">
+          <ac:chgData name="우영하" userId="16326280-4b73-49c6-ae55-d757829f7f37" providerId="ADAL" clId="{6381D7DB-60F0-4D71-A0B3-1498DE4C6E33}" dt="2026-07-16T01:54:00.325" v="141" actId="20577"/>
+          <ac:spMkLst>
+            <pc:docMk/>
+            <pc:sldMk cId="4399073" sldId="261"/>
+            <ac:spMk id="61" creationId="{81CCA012-7566-42AC-B0D7-F4D246E3037F}"/>
+          </ac:spMkLst>
+        </pc:spChg>
+        <pc:spChg chg="add">
+          <ac:chgData name="우영하" userId="16326280-4b73-49c6-ae55-d757829f7f37" providerId="ADAL" clId="{6381D7DB-60F0-4D71-A0B3-1498DE4C6E33}" dt="2026-07-16T01:53:28.638" v="124" actId="22"/>
+          <ac:spMkLst>
+            <pc:docMk/>
+            <pc:sldMk cId="4399073" sldId="261"/>
+            <ac:spMk id="63" creationId="{C5593417-3FFB-DC7E-6CC2-7770E5AB3700}"/>
+          </ac:spMkLst>
+        </pc:spChg>
+        <pc:spChg chg="add">
+          <ac:chgData name="우영하" userId="16326280-4b73-49c6-ae55-d757829f7f37" providerId="ADAL" clId="{6381D7DB-60F0-4D71-A0B3-1498DE4C6E33}" dt="2026-07-16T01:53:28.638" v="124" actId="22"/>
+          <ac:spMkLst>
+            <pc:docMk/>
+            <pc:sldMk cId="4399073" sldId="261"/>
+            <ac:spMk id="65" creationId="{7F3C31AA-7970-13C9-157F-9C037D265092}"/>
+          </ac:spMkLst>
+        </pc:spChg>
+        <pc:spChg chg="add">
+          <ac:chgData name="우영하" userId="16326280-4b73-49c6-ae55-d757829f7f37" providerId="ADAL" clId="{6381D7DB-60F0-4D71-A0B3-1498DE4C6E33}" dt="2026-07-16T01:53:28.638" v="124" actId="22"/>
+          <ac:spMkLst>
+            <pc:docMk/>
+            <pc:sldMk cId="4399073" sldId="261"/>
+            <ac:spMk id="73" creationId="{AA66B504-AB3B-F4BF-F311-F63007859A27}"/>
+          </ac:spMkLst>
+        </pc:spChg>
+        <pc:spChg chg="add">
+          <ac:chgData name="우영하" userId="16326280-4b73-49c6-ae55-d757829f7f37" providerId="ADAL" clId="{6381D7DB-60F0-4D71-A0B3-1498DE4C6E33}" dt="2026-07-16T01:53:28.638" v="124" actId="22"/>
+          <ac:spMkLst>
+            <pc:docMk/>
+            <pc:sldMk cId="4399073" sldId="261"/>
+            <ac:spMk id="81" creationId="{D664F620-70A0-D867-6BC1-00AEECEA436B}"/>
+          </ac:spMkLst>
+        </pc:spChg>
+      </pc:sldChg>
+      <pc:sldChg chg="add del">
+        <pc:chgData name="우영하" userId="16326280-4b73-49c6-ae55-d757829f7f37" providerId="ADAL" clId="{6381D7DB-60F0-4D71-A0B3-1498DE4C6E33}" dt="2026-07-20T01:11:22.256" v="152" actId="47"/>
+        <pc:sldMkLst>
+          <pc:docMk/>
+          <pc:sldMk cId="3289563305" sldId="262"/>
+        </pc:sldMkLst>
+      </pc:sldChg>
+    </pc:docChg>
+  </pc:docChgLst>
+</pc:chgInfo>
 </file>
 
 <file path=ppt/notesMasters/notesMaster1.xml><?xml version="1.0" encoding="utf-8"?>
@@ -133,240 +563,16 @@
           <a:chExt cx="0" cy="0"/>
         </a:xfrm>
       </p:grpSpPr>
-      <p:sp>
-        <p:nvSpPr>
-          <p:cNvPr id="2" name="Header Placeholder 1"/>
-          <p:cNvSpPr>
-            <a:spLocks noGrp="1"/>
-          </p:cNvSpPr>
-          <p:nvPr>
-            <p:ph type="hdr" sz="quarter"/>
-          </p:nvPr>
-        </p:nvSpPr>
-        <p:spPr>
-          <a:xfrm>
-            <a:off x="0" y="0"/>
-            <a:ext cx="2971800" cy="458788"/>
-          </a:xfrm>
-          <a:prstGeom prst="rect">
-            <a:avLst/>
-          </a:prstGeom>
-        </p:spPr>
-        <p:txBody>
-          <a:bodyPr vert="horz" lIns="91440" tIns="45720" rIns="91440" bIns="45720" rtlCol="0"/>
-          <a:lstStyle>
-            <a:lvl1pPr algn="l">
-              <a:defRPr sz="1200"/>
-            </a:lvl1pPr>
-          </a:lstStyle>
-          <a:p>
-            <a:endParaRPr lang="en-US"/>
-          </a:p>
-        </p:txBody>
-      </p:sp>
-      <p:sp>
-        <p:nvSpPr>
-          <p:cNvPr id="3" name="Date Placeholder 2"/>
-          <p:cNvSpPr>
-            <a:spLocks noGrp="1"/>
-          </p:cNvSpPr>
-          <p:nvPr>
-            <p:ph type="dt" idx="1"/>
-          </p:nvPr>
-        </p:nvSpPr>
-        <p:spPr>
-          <a:xfrm>
-            <a:off x="3884613" y="0"/>
-            <a:ext cx="2971800" cy="458788"/>
-          </a:xfrm>
-          <a:prstGeom prst="rect">
-            <a:avLst/>
-          </a:prstGeom>
-        </p:spPr>
-        <p:txBody>
-          <a:bodyPr vert="horz" lIns="91440" tIns="45720" rIns="91440" bIns="45720" rtlCol="0"/>
-          <a:lstStyle>
-            <a:lvl1pPr algn="r">
-              <a:defRPr sz="1200"/>
-            </a:lvl1pPr>
-          </a:lstStyle>
-          <a:p>
-            <a:fld id="{5282F153-3F37-0F45-9E97-73ACFA13230C}" type="datetimeFigureOut">
-              <a:rPr lang="en-US"/>
-              <a:t>7/23/19</a:t>
-            </a:fld>
-            <a:endParaRPr lang="en-US"/>
-          </a:p>
-        </p:txBody>
-      </p:sp>
-      <p:sp>
-        <p:nvSpPr>
-          <p:cNvPr id="4" name="Slide Image Placeholder 3"/>
-          <p:cNvSpPr>
-            <a:spLocks noGrp="1" noRot="1" noChangeAspect="1"/>
-          </p:cNvSpPr>
-          <p:nvPr>
-            <p:ph type="sldImg" idx="2"/>
-          </p:nvPr>
-        </p:nvSpPr>
-        <p:spPr>
-          <a:xfrm>
-            <a:off x="685800" y="1143000"/>
-            <a:ext cx="5486400" cy="3086100"/>
-          </a:xfrm>
-          <a:prstGeom prst="rect">
-            <a:avLst/>
-          </a:prstGeom>
-          <a:noFill/>
-          <a:ln w="12700">
-            <a:solidFill>
-              <a:prstClr val="black"/>
-            </a:solidFill>
-          </a:ln>
-        </p:spPr>
-        <p:txBody>
-          <a:bodyPr vert="horz" lIns="91440" tIns="45720" rIns="91440" bIns="45720" rtlCol="0" anchor="ctr"/>
-          <a:lstStyle/>
-          <a:p>
-            <a:endParaRPr lang="en-US"/>
-          </a:p>
-        </p:txBody>
-      </p:sp>
-      <p:sp>
-        <p:nvSpPr>
-          <p:cNvPr id="5" name="Notes Placeholder 4"/>
-          <p:cNvSpPr>
-            <a:spLocks noGrp="1"/>
-          </p:cNvSpPr>
-          <p:nvPr>
-            <p:ph type="body" sz="quarter" idx="3"/>
-          </p:nvPr>
-        </p:nvSpPr>
-        <p:spPr>
-          <a:xfrm>
-            <a:off x="685800" y="4400550"/>
-            <a:ext cx="5486400" cy="3600450"/>
-          </a:xfrm>
-          <a:prstGeom prst="rect">
-            <a:avLst/>
-          </a:prstGeom>
-        </p:spPr>
-        <p:txBody>
-          <a:bodyPr vert="horz" lIns="91440" tIns="45720" rIns="91440" bIns="45720" rtlCol="0"/>
-          <a:lstStyle/>
-          <a:p>
-            <a:pPr lvl="0"/>
-            <a:r>
-              <a:rPr lang="en-US"/>
-              <a:t>Click to edit Master text styles</a:t>
-            </a:r>
-          </a:p>
-          <a:p>
-            <a:pPr lvl="1"/>
-            <a:r>
-              <a:rPr lang="en-US"/>
-              <a:t>Second level</a:t>
-            </a:r>
-          </a:p>
-          <a:p>
-            <a:pPr lvl="2"/>
-            <a:r>
-              <a:rPr lang="en-US"/>
-              <a:t>Third level</a:t>
-            </a:r>
-          </a:p>
-          <a:p>
-            <a:pPr lvl="3"/>
-            <a:r>
-              <a:rPr lang="en-US"/>
-              <a:t>Fourth level</a:t>
-            </a:r>
-          </a:p>
-          <a:p>
-            <a:pPr lvl="4"/>
-            <a:r>
-              <a:rPr lang="en-US"/>
-              <a:t>Fifth level</a:t>
-            </a:r>
-          </a:p>
-        </p:txBody>
-      </p:sp>
-      <p:sp>
-        <p:nvSpPr>
-          <p:cNvPr id="6" name="Footer Placeholder 5"/>
-          <p:cNvSpPr>
-            <a:spLocks noGrp="1"/>
-          </p:cNvSpPr>
-          <p:nvPr>
-            <p:ph type="ftr" sz="quarter" idx="4"/>
-          </p:nvPr>
-        </p:nvSpPr>
-        <p:spPr>
-          <a:xfrm>
-            <a:off x="0" y="8685213"/>
-            <a:ext cx="2971800" cy="458787"/>
-          </a:xfrm>
-          <a:prstGeom prst="rect">
-            <a:avLst/>
-          </a:prstGeom>
-        </p:spPr>
-        <p:txBody>
-          <a:bodyPr vert="horz" lIns="91440" tIns="45720" rIns="91440" bIns="45720" rtlCol="0" anchor="b"/>
-          <a:lstStyle>
-            <a:lvl1pPr algn="l">
-              <a:defRPr sz="1200"/>
-            </a:lvl1pPr>
-          </a:lstStyle>
-          <a:p>
-            <a:endParaRPr lang="en-US"/>
-          </a:p>
-        </p:txBody>
-      </p:sp>
-      <p:sp>
-        <p:nvSpPr>
-          <p:cNvPr id="7" name="Slide Number Placeholder 6"/>
-          <p:cNvSpPr>
-            <a:spLocks noGrp="1"/>
-          </p:cNvSpPr>
-          <p:nvPr>
-            <p:ph type="sldNum" sz="quarter" idx="5"/>
-          </p:nvPr>
-        </p:nvSpPr>
-        <p:spPr>
-          <a:xfrm>
-            <a:off x="3884613" y="8685213"/>
-            <a:ext cx="2971800" cy="458787"/>
-          </a:xfrm>
-          <a:prstGeom prst="rect">
-            <a:avLst/>
-          </a:prstGeom>
-        </p:spPr>
-        <p:txBody>
-          <a:bodyPr vert="horz" lIns="91440" tIns="45720" rIns="91440" bIns="45720" rtlCol="0" anchor="b"/>
-          <a:lstStyle>
-            <a:lvl1pPr algn="r">
-              <a:defRPr sz="1200"/>
-            </a:lvl1pPr>
-          </a:lstStyle>
-          <a:p>
-            <a:fld id="{CE5E9CC1-C706-0F49-92D6-E571CC5EEA8F}" type="slidenum">
-              <a:rPr lang="en-US"/>
-              <a:t>‹#›</a:t>
-            </a:fld>
-            <a:endParaRPr lang="en-US"/>
-          </a:p>
-        </p:txBody>
-      </p:sp>
     </p:spTree>
     <p:extLst>
       <p:ext uri="{BB962C8B-B14F-4D97-AF65-F5344CB8AC3E}">
-        <p14:creationId xmlns:p14="http://schemas.microsoft.com/office/powerpoint/2010/main" val="1024086991"/>
+        <p14:creationId xmlns:p14="http://schemas.microsoft.com/office/powerpoint/2010/main" val="1045424541"/>
       </p:ext>
     </p:extLst>
   </p:cSld>
   <p:clrMap bg1="lt1" tx1="dk1" bg2="lt2" tx2="dk2" accent1="accent1" accent2="accent2" accent3="accent3" accent4="accent4" accent5="accent5" accent6="accent6" hlink="hlink" folHlink="folHlink"/>
   <p:notesStyle>
-    <a:lvl1pPr marL="0" algn="l" defTabSz="914400" rtl="0" eaLnBrk="1" latinLnBrk="0" hangingPunct="1">
+    <a:lvl1pPr marL="0" algn="l" defTabSz="914400" rtl="0" eaLnBrk="1" latinLnBrk="1" hangingPunct="1">
       <a:defRPr sz="1200" kern="1200">
         <a:solidFill>
           <a:schemeClr val="tx1"/>
@@ -376,7 +582,7 @@
         <a:cs typeface="+mn-cs"/>
       </a:defRPr>
     </a:lvl1pPr>
-    <a:lvl2pPr marL="457200" algn="l" defTabSz="914400" rtl="0" eaLnBrk="1" latinLnBrk="0" hangingPunct="1">
+    <a:lvl2pPr marL="457200" algn="l" defTabSz="914400" rtl="0" eaLnBrk="1" latinLnBrk="1" hangingPunct="1">
       <a:defRPr sz="1200" kern="1200">
         <a:solidFill>
           <a:schemeClr val="tx1"/>
@@ -386,7 +592,7 @@
         <a:cs typeface="+mn-cs"/>
       </a:defRPr>
     </a:lvl2pPr>
-    <a:lvl3pPr marL="914400" algn="l" defTabSz="914400" rtl="0" eaLnBrk="1" latinLnBrk="0" hangingPunct="1">
+    <a:lvl3pPr marL="914400" algn="l" defTabSz="914400" rtl="0" eaLnBrk="1" latinLnBrk="1" hangingPunct="1">
       <a:defRPr sz="1200" kern="1200">
         <a:solidFill>
           <a:schemeClr val="tx1"/>
@@ -396,7 +602,7 @@
         <a:cs typeface="+mn-cs"/>
       </a:defRPr>
     </a:lvl3pPr>
-    <a:lvl4pPr marL="1371600" algn="l" defTabSz="914400" rtl="0" eaLnBrk="1" latinLnBrk="0" hangingPunct="1">
+    <a:lvl4pPr marL="1371600" algn="l" defTabSz="914400" rtl="0" eaLnBrk="1" latinLnBrk="1" hangingPunct="1">
       <a:defRPr sz="1200" kern="1200">
         <a:solidFill>
           <a:schemeClr val="tx1"/>
@@ -406,7 +612,7 @@
         <a:cs typeface="+mn-cs"/>
       </a:defRPr>
     </a:lvl4pPr>
-    <a:lvl5pPr marL="1828800" algn="l" defTabSz="914400" rtl="0" eaLnBrk="1" latinLnBrk="0" hangingPunct="1">
+    <a:lvl5pPr marL="1828800" algn="l" defTabSz="914400" rtl="0" eaLnBrk="1" latinLnBrk="1" hangingPunct="1">
       <a:defRPr sz="1200" kern="1200">
         <a:solidFill>
           <a:schemeClr val="tx1"/>
@@ -416,7 +622,7 @@
         <a:cs typeface="+mn-cs"/>
       </a:defRPr>
     </a:lvl5pPr>
-    <a:lvl6pPr marL="2286000" algn="l" defTabSz="914400" rtl="0" eaLnBrk="1" latinLnBrk="0" hangingPunct="1">
+    <a:lvl6pPr marL="2286000" algn="l" defTabSz="914400" rtl="0" eaLnBrk="1" latinLnBrk="1" hangingPunct="1">
       <a:defRPr sz="1200" kern="1200">
         <a:solidFill>
           <a:schemeClr val="tx1"/>
@@ -426,7 +632,7 @@
         <a:cs typeface="+mn-cs"/>
       </a:defRPr>
     </a:lvl6pPr>
-    <a:lvl7pPr marL="2743200" algn="l" defTabSz="914400" rtl="0" eaLnBrk="1" latinLnBrk="0" hangingPunct="1">
+    <a:lvl7pPr marL="2743200" algn="l" defTabSz="914400" rtl="0" eaLnBrk="1" latinLnBrk="1" hangingPunct="1">
       <a:defRPr sz="1200" kern="1200">
         <a:solidFill>
           <a:schemeClr val="tx1"/>
@@ -436,7 +642,7 @@
         <a:cs typeface="+mn-cs"/>
       </a:defRPr>
     </a:lvl7pPr>
-    <a:lvl8pPr marL="3200400" algn="l" defTabSz="914400" rtl="0" eaLnBrk="1" latinLnBrk="0" hangingPunct="1">
+    <a:lvl8pPr marL="3200400" algn="l" defTabSz="914400" rtl="0" eaLnBrk="1" latinLnBrk="1" hangingPunct="1">
       <a:defRPr sz="1200" kern="1200">
         <a:solidFill>
           <a:schemeClr val="tx1"/>
@@ -446,7 +652,7 @@
         <a:cs typeface="+mn-cs"/>
       </a:defRPr>
     </a:lvl8pPr>
-    <a:lvl9pPr marL="3657600" algn="l" defTabSz="914400" rtl="0" eaLnBrk="1" latinLnBrk="0" hangingPunct="1">
+    <a:lvl9pPr marL="3657600" algn="l" defTabSz="914400" rtl="0" eaLnBrk="1" latinLnBrk="1" hangingPunct="1">
       <a:defRPr sz="1200" kern="1200">
         <a:solidFill>
           <a:schemeClr val="tx1"/>
@@ -504,10 +710,6 @@
           <a:bodyPr/>
           <a:lstStyle/>
           <a:p>
-            <a:r>
-              <a:rPr lang="en-US" dirty="0"/>
-              <a:t/>
-            </a:r>
             <a:endParaRPr lang="en-US" dirty="0"/>
           </a:p>
         </p:txBody>
@@ -592,10 +794,6 @@
           <a:bodyPr/>
           <a:lstStyle/>
           <a:p>
-            <a:r>
-              <a:rPr lang="en-US" dirty="0"/>
-              <a:t/>
-            </a:r>
             <a:endParaRPr lang="en-US" dirty="0"/>
           </a:p>
         </p:txBody>
@@ -680,10 +878,6 @@
           <a:bodyPr/>
           <a:lstStyle/>
           <a:p>
-            <a:r>
-              <a:rPr lang="en-US" dirty="0"/>
-              <a:t/>
-            </a:r>
             <a:endParaRPr lang="en-US" dirty="0"/>
           </a:p>
         </p:txBody>
@@ -768,10 +962,6 @@
           <a:bodyPr/>
           <a:lstStyle/>
           <a:p>
-            <a:r>
-              <a:rPr lang="en-US" dirty="0"/>
-              <a:t/>
-            </a:r>
             <a:endParaRPr lang="en-US" dirty="0"/>
           </a:p>
         </p:txBody>
@@ -856,10 +1046,6 @@
           <a:bodyPr/>
           <a:lstStyle/>
           <a:p>
-            <a:r>
-              <a:rPr lang="en-US" dirty="0"/>
-              <a:t/>
-            </a:r>
             <a:endParaRPr lang="en-US" dirty="0"/>
           </a:p>
         </p:txBody>
@@ -891,6 +1077,114 @@
     <p:extLst>
       <p:ext uri="{BB962C8B-B14F-4D97-AF65-F5344CB8AC3E}">
         <p14:creationId xmlns:p14="http://schemas.microsoft.com/office/powerpoint/2010/main" val="1024086991"/>
+      </p:ext>
+    </p:extLst>
+  </p:cSld>
+  <p:clrMapOvr>
+    <a:masterClrMapping/>
+  </p:clrMapOvr>
+</p:notes>
+</file>
+
+<file path=ppt/notesSlides/notesSlide6.xml><?xml version="1.0" encoding="utf-8"?>
+<p:notes xmlns:a="http://schemas.openxmlformats.org/drawingml/2006/main" xmlns:r="http://schemas.openxmlformats.org/officeDocument/2006/relationships" xmlns:p="http://schemas.openxmlformats.org/presentationml/2006/main">
+  <p:cSld>
+    <p:spTree>
+      <p:nvGrpSpPr>
+        <p:cNvPr id="1" name="">
+          <a:extLst>
+            <a:ext uri="{FF2B5EF4-FFF2-40B4-BE49-F238E27FC236}">
+              <a16:creationId xmlns:a16="http://schemas.microsoft.com/office/drawing/2014/main" id="{EAF8DB75-16C1-C802-CAA7-893C52F0C71C}"/>
+            </a:ext>
+          </a:extLst>
+        </p:cNvPr>
+        <p:cNvGrpSpPr/>
+        <p:nvPr/>
+      </p:nvGrpSpPr>
+      <p:grpSpPr>
+        <a:xfrm>
+          <a:off x="0" y="0"/>
+          <a:ext cx="0" cy="0"/>
+          <a:chOff x="0" y="0"/>
+          <a:chExt cx="0" cy="0"/>
+        </a:xfrm>
+      </p:grpSpPr>
+      <p:sp>
+        <p:nvSpPr>
+          <p:cNvPr id="2" name="Slide Image Placeholder 1">
+            <a:extLst>
+              <a:ext uri="{FF2B5EF4-FFF2-40B4-BE49-F238E27FC236}">
+                <a16:creationId xmlns:a16="http://schemas.microsoft.com/office/drawing/2014/main" id="{3A105138-A835-0AEF-ACFC-6824A51D8D7A}"/>
+              </a:ext>
+            </a:extLst>
+          </p:cNvPr>
+          <p:cNvSpPr>
+            <a:spLocks noGrp="1" noRot="1" noChangeAspect="1"/>
+          </p:cNvSpPr>
+          <p:nvPr>
+            <p:ph type="sldImg"/>
+          </p:nvPr>
+        </p:nvSpPr>
+        <p:spPr/>
+      </p:sp>
+      <p:sp>
+        <p:nvSpPr>
+          <p:cNvPr id="3" name="Notes Placeholder 2">
+            <a:extLst>
+              <a:ext uri="{FF2B5EF4-FFF2-40B4-BE49-F238E27FC236}">
+                <a16:creationId xmlns:a16="http://schemas.microsoft.com/office/drawing/2014/main" id="{B82A82C2-E630-90E6-E729-869933D64EE8}"/>
+              </a:ext>
+            </a:extLst>
+          </p:cNvPr>
+          <p:cNvSpPr>
+            <a:spLocks noGrp="1"/>
+          </p:cNvSpPr>
+          <p:nvPr>
+            <p:ph type="body" idx="1"/>
+          </p:nvPr>
+        </p:nvSpPr>
+        <p:spPr/>
+        <p:txBody>
+          <a:bodyPr/>
+          <a:lstStyle/>
+          <a:p>
+            <a:endParaRPr lang="en-US" dirty="0"/>
+          </a:p>
+        </p:txBody>
+      </p:sp>
+      <p:sp>
+        <p:nvSpPr>
+          <p:cNvPr id="4" name="Slide Number Placeholder 3">
+            <a:extLst>
+              <a:ext uri="{FF2B5EF4-FFF2-40B4-BE49-F238E27FC236}">
+                <a16:creationId xmlns:a16="http://schemas.microsoft.com/office/drawing/2014/main" id="{C6824A5E-C4CB-9F7A-D826-30D72765EF0C}"/>
+              </a:ext>
+            </a:extLst>
+          </p:cNvPr>
+          <p:cNvSpPr>
+            <a:spLocks noGrp="1"/>
+          </p:cNvSpPr>
+          <p:nvPr>
+            <p:ph type="sldNum" sz="quarter" idx="10"/>
+          </p:nvPr>
+        </p:nvSpPr>
+        <p:spPr/>
+        <p:txBody>
+          <a:bodyPr/>
+          <a:lstStyle/>
+          <a:p>
+            <a:fld id="{F7021451-1387-4CA6-816F-3879F97B5CBC}" type="slidenum">
+              <a:rPr lang="en-US"/>
+              <a:t>6</a:t>
+            </a:fld>
+            <a:endParaRPr lang="en-US"/>
+          </a:p>
+        </p:txBody>
+      </p:sp>
+    </p:spTree>
+    <p:extLst>
+      <p:ext uri="{BB962C8B-B14F-4D97-AF65-F5344CB8AC3E}">
+        <p14:creationId xmlns:p14="http://schemas.microsoft.com/office/powerpoint/2010/main" val="3576974152"/>
       </p:ext>
     </p:extLst>
   </p:cSld>
@@ -933,6 +1227,11 @@
 <file path=ppt/slideMasters/slideMaster1.xml><?xml version="1.0" encoding="utf-8"?>
 <p:sldMaster xmlns:a="http://schemas.openxmlformats.org/drawingml/2006/main" xmlns:r="http://schemas.openxmlformats.org/officeDocument/2006/relationships" xmlns:p="http://schemas.openxmlformats.org/presentationml/2006/main">
   <p:cSld>
+    <p:bg>
+      <p:bgRef idx="1001">
+        <a:schemeClr val="bg1"/>
+      </p:bgRef>
+    </p:bg>
     <p:spTree>
       <p:nvGrpSpPr>
         <p:cNvPr id="1" name=""/>
@@ -1215,6 +1514,7 @@
         <a:solidFill>
           <a:srgbClr val="F5F8FC"/>
         </a:solidFill>
+        <a:effectLst/>
       </p:bgPr>
     </p:bg>
     <p:spTree>
@@ -1254,7 +1554,7 @@
           </a:bodyPr>
           <a:lstStyle/>
           <a:p>
-            <a:pPr indent="0" marL="0">
+            <a:pPr marL="0" indent="0">
               <a:buNone/>
             </a:pPr>
             <a:r>
@@ -1262,16 +1562,18 @@
                 <a:solidFill>
                   <a:srgbClr val="172B53"/>
                 </a:solidFill>
-                <a:latin typeface="Malgun Gothic" pitchFamily="34" charset="0"/>
-                <a:ea typeface="Malgun Gothic" pitchFamily="34" charset="-122"/>
+                <a:latin typeface="맑은 고딕" panose="020B0503020000020004" pitchFamily="34" charset="-127"/>
+                <a:ea typeface="맑은 고딕" panose="020B0503020000020004" pitchFamily="34" charset="-127"/>
                 <a:cs typeface="Malgun Gothic" pitchFamily="34" charset="-120"/>
               </a:rPr>
               <a:t>영차 1차 POC 범위 및</a:t>
             </a:r>
-            <a:endParaRPr lang="en-US" sz="3100" dirty="0"/>
-          </a:p>
-          <a:p>
-            <a:pPr indent="0" marL="0">
+            <a:endParaRPr lang="en-US" sz="3100" dirty="0">
+              <a:latin typeface="맑은 고딕" panose="020B0503020000020004" pitchFamily="34" charset="-127"/>
+            </a:endParaRPr>
+          </a:p>
+          <a:p>
+            <a:pPr marL="0" indent="0">
               <a:buNone/>
             </a:pPr>
             <a:r>
@@ -1279,13 +1581,15 @@
                 <a:solidFill>
                   <a:srgbClr val="172B53"/>
                 </a:solidFill>
-                <a:latin typeface="Malgun Gothic" pitchFamily="34" charset="0"/>
-                <a:ea typeface="Malgun Gothic" pitchFamily="34" charset="-122"/>
+                <a:latin typeface="맑은 고딕" panose="020B0503020000020004" pitchFamily="34" charset="-127"/>
+                <a:ea typeface="맑은 고딕" panose="020B0503020000020004" pitchFamily="34" charset="-127"/>
                 <a:cs typeface="Malgun Gothic" pitchFamily="34" charset="-120"/>
               </a:rPr>
               <a:t>구현·검수 정의서 공유</a:t>
             </a:r>
-            <a:endParaRPr lang="en-US" sz="3100" dirty="0"/>
+            <a:endParaRPr lang="en-US" sz="3100" dirty="0">
+              <a:latin typeface="맑은 고딕" panose="020B0503020000020004" pitchFamily="34" charset="-127"/>
+            </a:endParaRPr>
           </a:p>
         </p:txBody>
       </p:sp>
@@ -1316,7 +1620,7 @@
           <a:bodyPr wrap="square" lIns="254" tIns="254" rIns="254" bIns="254" rtlCol="0" anchor="ctr"/>
           <a:lstStyle/>
           <a:p>
-            <a:pPr algn="ctr" indent="0" marL="0">
+            <a:pPr marL="0" indent="0" algn="ctr">
               <a:buNone/>
             </a:pPr>
             <a:r>
@@ -1324,13 +1628,15 @@
                 <a:solidFill>
                   <a:srgbClr val="0B50D0"/>
                 </a:solidFill>
-                <a:latin typeface="Malgun Gothic" pitchFamily="34" charset="0"/>
-                <a:ea typeface="Malgun Gothic" pitchFamily="34" charset="-122"/>
+                <a:latin typeface="맑은 고딕" panose="020B0503020000020004" pitchFamily="34" charset="-127"/>
+                <a:ea typeface="맑은 고딕" panose="020B0503020000020004" pitchFamily="34" charset="-127"/>
                 <a:cs typeface="Malgun Gothic" pitchFamily="34" charset="-120"/>
               </a:rPr>
               <a:t>대표님·상무님 보고용</a:t>
             </a:r>
-            <a:endParaRPr lang="en-US" sz="1100" dirty="0"/>
+            <a:endParaRPr lang="en-US" sz="1100" dirty="0">
+              <a:latin typeface="맑은 고딕" panose="020B0503020000020004" pitchFamily="34" charset="-127"/>
+            </a:endParaRPr>
           </a:p>
         </p:txBody>
       </p:sp>
@@ -1357,7 +1663,7 @@
           </a:bodyPr>
           <a:lstStyle/>
           <a:p>
-            <a:pPr indent="0" marL="0">
+            <a:pPr marL="0" indent="0">
               <a:buNone/>
             </a:pPr>
             <a:r>
@@ -1365,13 +1671,15 @@
                 <a:solidFill>
                   <a:srgbClr val="475569"/>
                 </a:solidFill>
-                <a:latin typeface="Malgun Gothic" pitchFamily="34" charset="0"/>
-                <a:ea typeface="Malgun Gothic" pitchFamily="34" charset="-122"/>
+                <a:latin typeface="맑은 고딕" panose="020B0503020000020004" pitchFamily="34" charset="-127"/>
+                <a:ea typeface="맑은 고딕" panose="020B0503020000020004" pitchFamily="34" charset="-127"/>
                 <a:cs typeface="Malgun Gothic" pitchFamily="34" charset="-120"/>
               </a:rPr>
               <a:t>목표는 완성형 제품 개발이 아니라, 고객 앱과 관리자 화면이 하나의 베이 상태 데이터를 공유하는 핵심 가능성 검증입니다.</a:t>
             </a:r>
-            <a:endParaRPr lang="en-US" sz="1420" dirty="0"/>
+            <a:endParaRPr lang="en-US" sz="1420" dirty="0">
+              <a:latin typeface="맑은 고딕" panose="020B0503020000020004" pitchFamily="34" charset="-127"/>
+            </a:endParaRPr>
           </a:p>
         </p:txBody>
       </p:sp>
@@ -1404,7 +1712,7 @@
           </a:bodyPr>
           <a:lstStyle/>
           <a:p>
-            <a:pPr algn="ctr" indent="0" marL="0">
+            <a:pPr marL="0" indent="0" algn="ctr">
               <a:buNone/>
             </a:pPr>
             <a:r>
@@ -1412,16 +1720,18 @@
                 <a:solidFill>
                   <a:srgbClr val="06A85B"/>
                 </a:solidFill>
-                <a:latin typeface="Malgun Gothic" pitchFamily="34" charset="0"/>
-                <a:ea typeface="Malgun Gothic" pitchFamily="34" charset="-122"/>
+                <a:latin typeface="맑은 고딕" panose="020B0503020000020004" pitchFamily="34" charset="-127"/>
+                <a:ea typeface="맑은 고딕" panose="020B0503020000020004" pitchFamily="34" charset="-127"/>
                 <a:cs typeface="Malgun Gothic" pitchFamily="34" charset="-120"/>
               </a:rPr>
               <a:t>사용 가능</a:t>
             </a:r>
-            <a:endParaRPr lang="en-US" sz="1100" dirty="0"/>
-          </a:p>
-          <a:p>
-            <a:pPr algn="ctr" indent="0" marL="0">
+            <a:endParaRPr lang="en-US" sz="1100" dirty="0">
+              <a:latin typeface="맑은 고딕" panose="020B0503020000020004" pitchFamily="34" charset="-127"/>
+            </a:endParaRPr>
+          </a:p>
+          <a:p>
+            <a:pPr marL="0" indent="0" algn="ctr">
               <a:buNone/>
             </a:pPr>
             <a:r>
@@ -1429,13 +1739,15 @@
                 <a:solidFill>
                   <a:srgbClr val="06A85B"/>
                 </a:solidFill>
-                <a:latin typeface="Malgun Gothic" pitchFamily="34" charset="0"/>
-                <a:ea typeface="Malgun Gothic" pitchFamily="34" charset="-122"/>
+                <a:latin typeface="맑은 고딕" panose="020B0503020000020004" pitchFamily="34" charset="-127"/>
+                <a:ea typeface="맑은 고딕" panose="020B0503020000020004" pitchFamily="34" charset="-127"/>
                 <a:cs typeface="Malgun Gothic" pitchFamily="34" charset="-120"/>
               </a:rPr>
               <a:t>베이 확인</a:t>
             </a:r>
-            <a:endParaRPr lang="en-US" sz="1100" dirty="0"/>
+            <a:endParaRPr lang="en-US" sz="1100" dirty="0">
+              <a:latin typeface="맑은 고딕" panose="020B0503020000020004" pitchFamily="34" charset="-127"/>
+            </a:endParaRPr>
           </a:p>
         </p:txBody>
       </p:sp>
@@ -1460,7 +1772,7 @@
           <a:bodyPr wrap="square" lIns="0" tIns="0" rIns="0" bIns="0" rtlCol="0" anchor="ctr"/>
           <a:lstStyle/>
           <a:p>
-            <a:pPr algn="ctr" indent="0" marL="0">
+            <a:pPr marL="0" indent="0" algn="ctr">
               <a:buNone/>
             </a:pPr>
             <a:r>
@@ -1468,10 +1780,13 @@
                 <a:solidFill>
                   <a:srgbClr val="475569"/>
                 </a:solidFill>
+                <a:latin typeface="맑은 고딕" panose="020B0503020000020004" pitchFamily="34" charset="-127"/>
               </a:rPr>
               <a:t>→</a:t>
             </a:r>
-            <a:endParaRPr lang="en-US" sz="2000" dirty="0"/>
+            <a:endParaRPr lang="en-US" sz="2000" dirty="0">
+              <a:latin typeface="맑은 고딕" panose="020B0503020000020004" pitchFamily="34" charset="-127"/>
+            </a:endParaRPr>
           </a:p>
         </p:txBody>
       </p:sp>
@@ -1504,7 +1819,7 @@
           </a:bodyPr>
           <a:lstStyle/>
           <a:p>
-            <a:pPr algn="ctr" indent="0" marL="0">
+            <a:pPr marL="0" indent="0" algn="ctr">
               <a:buNone/>
             </a:pPr>
             <a:r>
@@ -1512,13 +1827,15 @@
                 <a:solidFill>
                   <a:srgbClr val="0B50D0"/>
                 </a:solidFill>
-                <a:latin typeface="Malgun Gothic" pitchFamily="34" charset="0"/>
-                <a:ea typeface="Malgun Gothic" pitchFamily="34" charset="-122"/>
+                <a:latin typeface="맑은 고딕" panose="020B0503020000020004" pitchFamily="34" charset="-127"/>
+                <a:ea typeface="맑은 고딕" panose="020B0503020000020004" pitchFamily="34" charset="-127"/>
                 <a:cs typeface="Malgun Gothic" pitchFamily="34" charset="-120"/>
               </a:rPr>
               <a:t>즉시 결제</a:t>
             </a:r>
-            <a:endParaRPr lang="en-US" sz="1100" dirty="0"/>
+            <a:endParaRPr lang="en-US" sz="1100" dirty="0">
+              <a:latin typeface="맑은 고딕" panose="020B0503020000020004" pitchFamily="34" charset="-127"/>
+            </a:endParaRPr>
           </a:p>
         </p:txBody>
       </p:sp>
@@ -1543,7 +1860,7 @@
           <a:bodyPr wrap="square" lIns="0" tIns="0" rIns="0" bIns="0" rtlCol="0" anchor="ctr"/>
           <a:lstStyle/>
           <a:p>
-            <a:pPr algn="ctr" indent="0" marL="0">
+            <a:pPr marL="0" indent="0" algn="ctr">
               <a:buNone/>
             </a:pPr>
             <a:r>
@@ -1551,10 +1868,13 @@
                 <a:solidFill>
                   <a:srgbClr val="475569"/>
                 </a:solidFill>
+                <a:latin typeface="맑은 고딕" panose="020B0503020000020004" pitchFamily="34" charset="-127"/>
               </a:rPr>
               <a:t>→</a:t>
             </a:r>
-            <a:endParaRPr lang="en-US" sz="2000" dirty="0"/>
+            <a:endParaRPr lang="en-US" sz="2000" dirty="0">
+              <a:latin typeface="맑은 고딕" panose="020B0503020000020004" pitchFamily="34" charset="-127"/>
+            </a:endParaRPr>
           </a:p>
         </p:txBody>
       </p:sp>
@@ -1587,7 +1907,7 @@
           </a:bodyPr>
           <a:lstStyle/>
           <a:p>
-            <a:pPr algn="ctr" indent="0" marL="0">
+            <a:pPr marL="0" indent="0" algn="ctr">
               <a:buNone/>
             </a:pPr>
             <a:r>
@@ -1595,16 +1915,18 @@
                 <a:solidFill>
                   <a:srgbClr val="EC8913"/>
                 </a:solidFill>
-                <a:latin typeface="Malgun Gothic" pitchFamily="34" charset="0"/>
-                <a:ea typeface="Malgun Gothic" pitchFamily="34" charset="-122"/>
+                <a:latin typeface="맑은 고딕" panose="020B0503020000020004" pitchFamily="34" charset="-127"/>
+                <a:ea typeface="맑은 고딕" panose="020B0503020000020004" pitchFamily="34" charset="-127"/>
                 <a:cs typeface="Malgun Gothic" pitchFamily="34" charset="-120"/>
               </a:rPr>
               <a:t>사용 중</a:t>
             </a:r>
-            <a:endParaRPr lang="en-US" sz="1100" dirty="0"/>
-          </a:p>
-          <a:p>
-            <a:pPr algn="ctr" indent="0" marL="0">
+            <a:endParaRPr lang="en-US" sz="1100" dirty="0">
+              <a:latin typeface="맑은 고딕" panose="020B0503020000020004" pitchFamily="34" charset="-127"/>
+            </a:endParaRPr>
+          </a:p>
+          <a:p>
+            <a:pPr marL="0" indent="0" algn="ctr">
               <a:buNone/>
             </a:pPr>
             <a:r>
@@ -1612,13 +1934,15 @@
                 <a:solidFill>
                   <a:srgbClr val="EC8913"/>
                 </a:solidFill>
-                <a:latin typeface="Malgun Gothic" pitchFamily="34" charset="0"/>
-                <a:ea typeface="Malgun Gothic" pitchFamily="34" charset="-122"/>
+                <a:latin typeface="맑은 고딕" panose="020B0503020000020004" pitchFamily="34" charset="-127"/>
+                <a:ea typeface="맑은 고딕" panose="020B0503020000020004" pitchFamily="34" charset="-127"/>
                 <a:cs typeface="Malgun Gothic" pitchFamily="34" charset="-120"/>
               </a:rPr>
               <a:t>세차 진행</a:t>
             </a:r>
-            <a:endParaRPr lang="en-US" sz="1100" dirty="0"/>
+            <a:endParaRPr lang="en-US" sz="1100" dirty="0">
+              <a:latin typeface="맑은 고딕" panose="020B0503020000020004" pitchFamily="34" charset="-127"/>
+            </a:endParaRPr>
           </a:p>
         </p:txBody>
       </p:sp>
@@ -1643,7 +1967,7 @@
           <a:bodyPr wrap="square" lIns="0" tIns="0" rIns="0" bIns="0" rtlCol="0" anchor="ctr"/>
           <a:lstStyle/>
           <a:p>
-            <a:pPr algn="ctr" indent="0" marL="0">
+            <a:pPr marL="0" indent="0" algn="ctr">
               <a:buNone/>
             </a:pPr>
             <a:r>
@@ -1651,10 +1975,13 @@
                 <a:solidFill>
                   <a:srgbClr val="475569"/>
                 </a:solidFill>
+                <a:latin typeface="맑은 고딕" panose="020B0503020000020004" pitchFamily="34" charset="-127"/>
               </a:rPr>
               <a:t>→</a:t>
             </a:r>
-            <a:endParaRPr lang="en-US" sz="2000" dirty="0"/>
+            <a:endParaRPr lang="en-US" sz="2000" dirty="0">
+              <a:latin typeface="맑은 고딕" panose="020B0503020000020004" pitchFamily="34" charset="-127"/>
+            </a:endParaRPr>
           </a:p>
         </p:txBody>
       </p:sp>
@@ -1687,7 +2014,7 @@
           </a:bodyPr>
           <a:lstStyle/>
           <a:p>
-            <a:pPr algn="ctr" indent="0" marL="0">
+            <a:pPr marL="0" indent="0" algn="ctr">
               <a:buNone/>
             </a:pPr>
             <a:r>
@@ -1695,13 +2022,15 @@
                 <a:solidFill>
                   <a:srgbClr val="636CCC"/>
                 </a:solidFill>
-                <a:latin typeface="Malgun Gothic" pitchFamily="34" charset="0"/>
-                <a:ea typeface="Malgun Gothic" pitchFamily="34" charset="-122"/>
+                <a:latin typeface="맑은 고딕" panose="020B0503020000020004" pitchFamily="34" charset="-127"/>
+                <a:ea typeface="맑은 고딕" panose="020B0503020000020004" pitchFamily="34" charset="-127"/>
                 <a:cs typeface="Malgun Gothic" pitchFamily="34" charset="-120"/>
               </a:rPr>
               <a:t>완료 처리</a:t>
             </a:r>
-            <a:endParaRPr lang="en-US" sz="1100" dirty="0"/>
+            <a:endParaRPr lang="en-US" sz="1100" dirty="0">
+              <a:latin typeface="맑은 고딕" panose="020B0503020000020004" pitchFamily="34" charset="-127"/>
+            </a:endParaRPr>
           </a:p>
         </p:txBody>
       </p:sp>
@@ -1726,7 +2055,7 @@
           <a:bodyPr wrap="square" lIns="0" tIns="0" rIns="0" bIns="0" rtlCol="0" anchor="ctr"/>
           <a:lstStyle/>
           <a:p>
-            <a:pPr algn="ctr" indent="0" marL="0">
+            <a:pPr marL="0" indent="0" algn="ctr">
               <a:buNone/>
             </a:pPr>
             <a:r>
@@ -1734,10 +2063,13 @@
                 <a:solidFill>
                   <a:srgbClr val="475569"/>
                 </a:solidFill>
+                <a:latin typeface="맑은 고딕" panose="020B0503020000020004" pitchFamily="34" charset="-127"/>
               </a:rPr>
               <a:t>→</a:t>
             </a:r>
-            <a:endParaRPr lang="en-US" sz="2000" dirty="0"/>
+            <a:endParaRPr lang="en-US" sz="2000" dirty="0">
+              <a:latin typeface="맑은 고딕" panose="020B0503020000020004" pitchFamily="34" charset="-127"/>
+            </a:endParaRPr>
           </a:p>
         </p:txBody>
       </p:sp>
@@ -1770,7 +2102,7 @@
           </a:bodyPr>
           <a:lstStyle/>
           <a:p>
-            <a:pPr algn="ctr" indent="0" marL="0">
+            <a:pPr marL="0" indent="0" algn="ctr">
               <a:buNone/>
             </a:pPr>
             <a:r>
@@ -1778,16 +2110,18 @@
                 <a:solidFill>
                   <a:srgbClr val="06A85B"/>
                 </a:solidFill>
-                <a:latin typeface="Malgun Gothic" pitchFamily="34" charset="0"/>
-                <a:ea typeface="Malgun Gothic" pitchFamily="34" charset="-122"/>
+                <a:latin typeface="맑은 고딕" panose="020B0503020000020004" pitchFamily="34" charset="-127"/>
+                <a:ea typeface="맑은 고딕" panose="020B0503020000020004" pitchFamily="34" charset="-127"/>
                 <a:cs typeface="Malgun Gothic" pitchFamily="34" charset="-120"/>
               </a:rPr>
               <a:t>사용 가능</a:t>
             </a:r>
-            <a:endParaRPr lang="en-US" sz="1100" dirty="0"/>
-          </a:p>
-          <a:p>
-            <a:pPr algn="ctr" indent="0" marL="0">
+            <a:endParaRPr lang="en-US" sz="1100" dirty="0">
+              <a:latin typeface="맑은 고딕" panose="020B0503020000020004" pitchFamily="34" charset="-127"/>
+            </a:endParaRPr>
+          </a:p>
+          <a:p>
+            <a:pPr marL="0" indent="0" algn="ctr">
               <a:buNone/>
             </a:pPr>
             <a:r>
@@ -1795,13 +2129,15 @@
                 <a:solidFill>
                   <a:srgbClr val="06A85B"/>
                 </a:solidFill>
-                <a:latin typeface="Malgun Gothic" pitchFamily="34" charset="0"/>
-                <a:ea typeface="Malgun Gothic" pitchFamily="34" charset="-122"/>
+                <a:latin typeface="맑은 고딕" panose="020B0503020000020004" pitchFamily="34" charset="-127"/>
+                <a:ea typeface="맑은 고딕" panose="020B0503020000020004" pitchFamily="34" charset="-127"/>
                 <a:cs typeface="Malgun Gothic" pitchFamily="34" charset="-120"/>
               </a:rPr>
               <a:t>복귀</a:t>
             </a:r>
-            <a:endParaRPr lang="en-US" sz="1100" dirty="0"/>
+            <a:endParaRPr lang="en-US" sz="1100" dirty="0">
+              <a:latin typeface="맑은 고딕" panose="020B0503020000020004" pitchFamily="34" charset="-127"/>
+            </a:endParaRPr>
           </a:p>
         </p:txBody>
       </p:sp>
@@ -1832,7 +2168,7 @@
           <a:bodyPr wrap="square" lIns="254" tIns="254" rIns="254" bIns="254" rtlCol="0" anchor="ctr"/>
           <a:lstStyle/>
           <a:p>
-            <a:pPr algn="ctr" indent="0" marL="0">
+            <a:pPr marL="0" indent="0" algn="ctr">
               <a:buNone/>
             </a:pPr>
             <a:r>
@@ -1840,13 +2176,15 @@
                 <a:solidFill>
                   <a:srgbClr val="E05C6A"/>
                 </a:solidFill>
-                <a:latin typeface="Malgun Gothic" pitchFamily="34" charset="0"/>
-                <a:ea typeface="Malgun Gothic" pitchFamily="34" charset="-122"/>
+                <a:latin typeface="맑은 고딕" panose="020B0503020000020004" pitchFamily="34" charset="-127"/>
+                <a:ea typeface="맑은 고딕" panose="020B0503020000020004" pitchFamily="34" charset="-127"/>
                 <a:cs typeface="Malgun Gothic" pitchFamily="34" charset="-120"/>
               </a:rPr>
               <a:t>예약 기능은 서비스 정책상 미제공</a:t>
             </a:r>
-            <a:endParaRPr lang="en-US" sz="1100" dirty="0"/>
+            <a:endParaRPr lang="en-US" sz="1100" dirty="0">
+              <a:latin typeface="맑은 고딕" panose="020B0503020000020004" pitchFamily="34" charset="-127"/>
+            </a:endParaRPr>
           </a:p>
         </p:txBody>
       </p:sp>
@@ -1879,95 +2217,12 @@
           </a:bodyPr>
           <a:lstStyle/>
           <a:p>
-            <a:pPr algn="l" indent="0" marL="0">
-              <a:buNone/>
-            </a:pPr>
-            <a:r>
-              <a:rPr lang="en-US" sz="1400" b="1" dirty="0">
-                <a:solidFill>
-                  <a:srgbClr val="FFFFFF"/>
-                </a:solidFill>
-                <a:latin typeface="Malgun Gothic" pitchFamily="34" charset="0"/>
-                <a:ea typeface="Malgun Gothic" pitchFamily="34" charset="-122"/>
-                <a:cs typeface="Malgun Gothic" pitchFamily="34" charset="-120"/>
-              </a:rPr>
-              <a:t>핵심 의사결정</a:t>
-            </a:r>
-            <a:endParaRPr lang="en-US" sz="1400" dirty="0"/>
-          </a:p>
-          <a:p>
-            <a:pPr algn="l" indent="0" marL="0">
-              <a:buNone/>
-            </a:pPr>
-            <a:endParaRPr lang="en-US" sz="1400" dirty="0"/>
-          </a:p>
-          <a:p>
-            <a:pPr algn="l" indent="0" marL="0">
-              <a:buNone/>
-            </a:pPr>
-            <a:r>
-              <a:rPr lang="en-US" sz="1400" b="1" dirty="0">
-                <a:solidFill>
-                  <a:srgbClr val="FFFFFF"/>
-                </a:solidFill>
-                <a:latin typeface="Malgun Gothic" pitchFamily="34" charset="0"/>
-                <a:ea typeface="Malgun Gothic" pitchFamily="34" charset="-122"/>
-                <a:cs typeface="Malgun Gothic" pitchFamily="34" charset="-120"/>
-              </a:rPr>
-              <a:t>① 1차 POC 범위는 베이 상태 동기화로 고정</a:t>
-            </a:r>
-            <a:endParaRPr lang="en-US" sz="1400" dirty="0"/>
-          </a:p>
-          <a:p>
-            <a:pPr algn="l" indent="0" marL="0">
-              <a:buNone/>
-            </a:pPr>
-            <a:r>
-              <a:rPr lang="en-US" sz="1400" b="1" dirty="0">
-                <a:solidFill>
-                  <a:srgbClr val="FFFFFF"/>
-                </a:solidFill>
-                <a:latin typeface="Malgun Gothic" pitchFamily="34" charset="0"/>
-                <a:ea typeface="Malgun Gothic" pitchFamily="34" charset="-122"/>
-                <a:cs typeface="Malgun Gothic" pitchFamily="34" charset="-120"/>
-              </a:rPr>
-              <a:t>② 앱·관리자 모두 6개 베이만 사용</a:t>
-            </a:r>
-            <a:endParaRPr lang="en-US" sz="1400" dirty="0"/>
-          </a:p>
-          <a:p>
-            <a:pPr algn="l" indent="0" marL="0">
-              <a:buNone/>
-            </a:pPr>
-            <a:r>
-              <a:rPr lang="en-US" sz="1400" b="1" dirty="0">
-                <a:solidFill>
-                  <a:srgbClr val="FFFFFF"/>
-                </a:solidFill>
-                <a:latin typeface="Malgun Gothic" pitchFamily="34" charset="0"/>
-                <a:ea typeface="Malgun Gothic" pitchFamily="34" charset="-122"/>
-                <a:cs typeface="Malgun Gothic" pitchFamily="34" charset="-120"/>
-              </a:rPr>
-              <a:t>③ 결제는 실제 PG 없이 “완료 상태”만 생성</a:t>
-            </a:r>
-            <a:endParaRPr lang="en-US" sz="1400" dirty="0"/>
-          </a:p>
-          <a:p>
-            <a:pPr algn="l" indent="0" marL="0">
-              <a:buNone/>
-            </a:pPr>
-            <a:r>
-              <a:rPr lang="en-US" sz="1400" b="1" dirty="0">
-                <a:solidFill>
-                  <a:srgbClr val="FFFFFF"/>
-                </a:solidFill>
-                <a:latin typeface="Malgun Gothic" pitchFamily="34" charset="0"/>
-                <a:ea typeface="Malgun Gothic" pitchFamily="34" charset="-122"/>
-                <a:cs typeface="Malgun Gothic" pitchFamily="34" charset="-120"/>
-              </a:rPr>
-              <a:t>④ 예약 상태·예약 UI·예약 API는 제거 대상</a:t>
-            </a:r>
-            <a:endParaRPr lang="en-US" sz="1400" dirty="0"/>
+            <a:pPr marL="0" indent="0" algn="l">
+              <a:buNone/>
+            </a:pPr>
+            <a:endParaRPr lang="en-US" sz="1400" dirty="0">
+              <a:latin typeface="맑은 고딕" panose="020B0503020000020004" pitchFamily="34" charset="-127"/>
+            </a:endParaRPr>
           </a:p>
         </p:txBody>
       </p:sp>
@@ -2000,55 +2255,12 @@
           </a:bodyPr>
           <a:lstStyle/>
           <a:p>
-            <a:pPr algn="l" indent="0" marL="0">
-              <a:buNone/>
-            </a:pPr>
-            <a:r>
-              <a:rPr lang="en-US" sz="1300" b="1" dirty="0">
-                <a:solidFill>
-                  <a:srgbClr val="172B53"/>
-                </a:solidFill>
-                <a:latin typeface="Malgun Gothic" pitchFamily="34" charset="0"/>
-                <a:ea typeface="Malgun Gothic" pitchFamily="34" charset="-122"/>
-                <a:cs typeface="Malgun Gothic" pitchFamily="34" charset="-120"/>
-              </a:rPr>
-              <a:t>완료 기준</a:t>
-            </a:r>
-            <a:endParaRPr lang="en-US" sz="1300" dirty="0"/>
-          </a:p>
-          <a:p>
-            <a:pPr algn="l" indent="0" marL="0">
-              <a:buNone/>
-            </a:pPr>
-            <a:r>
-              <a:rPr lang="en-US" sz="1300" b="1" dirty="0">
-                <a:solidFill>
-                  <a:srgbClr val="172B53"/>
-                </a:solidFill>
-                <a:latin typeface="Malgun Gothic" pitchFamily="34" charset="0"/>
-                <a:ea typeface="Malgun Gothic" pitchFamily="34" charset="-122"/>
-                <a:cs typeface="Malgun Gothic" pitchFamily="34" charset="-120"/>
-              </a:rPr>
-              <a:t>앱 결제 → 관리자 사용 중 반영 → 완료 → 양쪽 사용 가능 복귀</a:t>
-            </a:r>
-            <a:endParaRPr lang="en-US" sz="1300" dirty="0"/>
-          </a:p>
-          <a:p>
-            <a:pPr algn="l" indent="0" marL="0">
-              <a:buNone/>
-            </a:pPr>
-            <a:r>
-              <a:rPr lang="en-US" sz="1300" b="1" dirty="0">
-                <a:solidFill>
-                  <a:srgbClr val="172B53"/>
-                </a:solidFill>
-                <a:latin typeface="Malgun Gothic" pitchFamily="34" charset="0"/>
-                <a:ea typeface="Malgun Gothic" pitchFamily="34" charset="-122"/>
-                <a:cs typeface="Malgun Gothic" pitchFamily="34" charset="-120"/>
-              </a:rPr>
-              <a:t>이 흐름이 개발자 조작 없이 3회 연속 동작</a:t>
-            </a:r>
-            <a:endParaRPr lang="en-US" sz="1300" dirty="0"/>
+            <a:pPr marL="0" indent="0" algn="l">
+              <a:buNone/>
+            </a:pPr>
+            <a:endParaRPr lang="en-US" sz="1300" dirty="0">
+              <a:latin typeface="맑은 고딕" panose="020B0503020000020004" pitchFamily="34" charset="-127"/>
+            </a:endParaRPr>
           </a:p>
         </p:txBody>
       </p:sp>
@@ -2073,7 +2285,7 @@
           <a:bodyPr wrap="square" lIns="0" tIns="0" rIns="0" bIns="0" rtlCol="0" anchor="ctr"/>
           <a:lstStyle/>
           <a:p>
-            <a:pPr indent="0" marL="0">
+            <a:pPr marL="0" indent="0">
               <a:buNone/>
             </a:pPr>
             <a:r>
@@ -2081,13 +2293,257 @@
                 <a:solidFill>
                   <a:srgbClr val="7A8797"/>
                 </a:solidFill>
-                <a:latin typeface="Malgun Gothic" pitchFamily="34" charset="0"/>
-                <a:ea typeface="Malgun Gothic" pitchFamily="34" charset="-122"/>
+                <a:latin typeface="맑은 고딕" panose="020B0503020000020004" pitchFamily="34" charset="-127"/>
+                <a:ea typeface="맑은 고딕" panose="020B0503020000020004" pitchFamily="34" charset="-127"/>
                 <a:cs typeface="Malgun Gothic" pitchFamily="34" charset="-120"/>
               </a:rPr>
               <a:t>영차 1차 POC 범위 공유  |  1</a:t>
             </a:r>
-            <a:endParaRPr lang="en-US" sz="750" dirty="0"/>
+            <a:endParaRPr lang="en-US" sz="750" dirty="0">
+              <a:latin typeface="맑은 고딕" panose="020B0503020000020004" pitchFamily="34" charset="-127"/>
+            </a:endParaRPr>
+          </a:p>
+        </p:txBody>
+      </p:sp>
+      <p:sp>
+        <p:nvSpPr>
+          <p:cNvPr id="18" name="Text 13">
+            <a:extLst>
+              <a:ext uri="{FF2B5EF4-FFF2-40B4-BE49-F238E27FC236}">
+                <a16:creationId xmlns:a16="http://schemas.microsoft.com/office/drawing/2014/main" id="{30612BA8-4B81-9C34-3E83-417755F1F9F9}"/>
+              </a:ext>
+            </a:extLst>
+          </p:cNvPr>
+          <p:cNvSpPr/>
+          <p:nvPr/>
+        </p:nvSpPr>
+        <p:spPr>
+          <a:xfrm>
+            <a:off x="7513320" y="1066800"/>
+            <a:ext cx="4160520" cy="3657600"/>
+          </a:xfrm>
+          <a:prstGeom prst="rect">
+            <a:avLst/>
+          </a:prstGeom>
+          <a:noFill/>
+          <a:ln>
+            <a:noFill/>
+          </a:ln>
+        </p:spPr>
+        <p:txBody>
+          <a:bodyPr wrap="square" lIns="3556" tIns="3556" rIns="3556" bIns="3556" rtlCol="0" anchor="t">
+            <a:normAutofit/>
+          </a:bodyPr>
+          <a:lstStyle/>
+          <a:p>
+            <a:pPr marL="0" indent="0" algn="l">
+              <a:lnSpc>
+                <a:spcPct val="150000"/>
+              </a:lnSpc>
+              <a:buNone/>
+            </a:pPr>
+            <a:r>
+              <a:rPr lang="en-US" sz="1400" b="1" dirty="0">
+                <a:solidFill>
+                  <a:srgbClr val="FFFFFF"/>
+                </a:solidFill>
+                <a:latin typeface="맑은 고딕" panose="020B0503020000020004" pitchFamily="34" charset="-127"/>
+                <a:ea typeface="맑은 고딕" panose="020B0503020000020004" pitchFamily="34" charset="-127"/>
+                <a:cs typeface="Malgun Gothic" pitchFamily="34" charset="-120"/>
+              </a:rPr>
+              <a:t>핵심 의사결정</a:t>
+            </a:r>
+            <a:endParaRPr lang="en-US" sz="1400" dirty="0">
+              <a:latin typeface="맑은 고딕" panose="020B0503020000020004" pitchFamily="34" charset="-127"/>
+            </a:endParaRPr>
+          </a:p>
+          <a:p>
+            <a:pPr marL="0" indent="0" algn="l">
+              <a:lnSpc>
+                <a:spcPct val="150000"/>
+              </a:lnSpc>
+              <a:buNone/>
+            </a:pPr>
+            <a:endParaRPr lang="en-US" sz="1400" dirty="0">
+              <a:latin typeface="맑은 고딕" panose="020B0503020000020004" pitchFamily="34" charset="-127"/>
+            </a:endParaRPr>
+          </a:p>
+          <a:p>
+            <a:pPr marL="0" indent="0" algn="l">
+              <a:lnSpc>
+                <a:spcPct val="150000"/>
+              </a:lnSpc>
+              <a:buNone/>
+            </a:pPr>
+            <a:r>
+              <a:rPr lang="en-US" sz="1400" b="1" dirty="0">
+                <a:solidFill>
+                  <a:srgbClr val="FFFFFF"/>
+                </a:solidFill>
+                <a:latin typeface="맑은 고딕" panose="020B0503020000020004" pitchFamily="34" charset="-127"/>
+                <a:ea typeface="맑은 고딕" panose="020B0503020000020004" pitchFamily="34" charset="-127"/>
+                <a:cs typeface="Malgun Gothic" pitchFamily="34" charset="-120"/>
+              </a:rPr>
+              <a:t>① 1차 POC 범위는 베이 상태 동기화로 고정</a:t>
+            </a:r>
+            <a:endParaRPr lang="en-US" sz="1400" dirty="0">
+              <a:latin typeface="맑은 고딕" panose="020B0503020000020004" pitchFamily="34" charset="-127"/>
+            </a:endParaRPr>
+          </a:p>
+          <a:p>
+            <a:pPr marL="0" indent="0" algn="l">
+              <a:lnSpc>
+                <a:spcPct val="150000"/>
+              </a:lnSpc>
+              <a:buNone/>
+            </a:pPr>
+            <a:r>
+              <a:rPr lang="en-US" sz="1400" b="1" dirty="0">
+                <a:solidFill>
+                  <a:srgbClr val="FFFFFF"/>
+                </a:solidFill>
+                <a:latin typeface="맑은 고딕" panose="020B0503020000020004" pitchFamily="34" charset="-127"/>
+                <a:ea typeface="맑은 고딕" panose="020B0503020000020004" pitchFamily="34" charset="-127"/>
+                <a:cs typeface="Malgun Gothic" pitchFamily="34" charset="-120"/>
+              </a:rPr>
+              <a:t>② 앱·관리자 모두 6개 베이만 사용</a:t>
+            </a:r>
+            <a:endParaRPr lang="en-US" sz="1400" dirty="0">
+              <a:latin typeface="맑은 고딕" panose="020B0503020000020004" pitchFamily="34" charset="-127"/>
+            </a:endParaRPr>
+          </a:p>
+          <a:p>
+            <a:pPr marL="0" indent="0" algn="l">
+              <a:lnSpc>
+                <a:spcPct val="150000"/>
+              </a:lnSpc>
+              <a:buNone/>
+            </a:pPr>
+            <a:r>
+              <a:rPr lang="en-US" sz="1400" b="1" dirty="0">
+                <a:solidFill>
+                  <a:srgbClr val="FFFFFF"/>
+                </a:solidFill>
+                <a:latin typeface="맑은 고딕" panose="020B0503020000020004" pitchFamily="34" charset="-127"/>
+                <a:ea typeface="맑은 고딕" panose="020B0503020000020004" pitchFamily="34" charset="-127"/>
+                <a:cs typeface="Malgun Gothic" pitchFamily="34" charset="-120"/>
+              </a:rPr>
+              <a:t>③ 결제는 실제 PG 없이 “완료 상태”만 생성</a:t>
+            </a:r>
+            <a:endParaRPr lang="en-US" sz="1400" dirty="0">
+              <a:latin typeface="맑은 고딕" panose="020B0503020000020004" pitchFamily="34" charset="-127"/>
+            </a:endParaRPr>
+          </a:p>
+          <a:p>
+            <a:pPr marL="0" indent="0" algn="l">
+              <a:lnSpc>
+                <a:spcPct val="150000"/>
+              </a:lnSpc>
+              <a:buNone/>
+            </a:pPr>
+            <a:r>
+              <a:rPr lang="en-US" sz="1400" b="1" dirty="0">
+                <a:solidFill>
+                  <a:srgbClr val="FFFFFF"/>
+                </a:solidFill>
+                <a:latin typeface="맑은 고딕" panose="020B0503020000020004" pitchFamily="34" charset="-127"/>
+                <a:ea typeface="맑은 고딕" panose="020B0503020000020004" pitchFamily="34" charset="-127"/>
+                <a:cs typeface="Malgun Gothic" pitchFamily="34" charset="-120"/>
+              </a:rPr>
+              <a:t>④ 예약 상태·예약 UI·예약 API는 제거 대상</a:t>
+            </a:r>
+            <a:endParaRPr lang="en-US" sz="1400" dirty="0">
+              <a:latin typeface="맑은 고딕" panose="020B0503020000020004" pitchFamily="34" charset="-127"/>
+            </a:endParaRPr>
+          </a:p>
+        </p:txBody>
+      </p:sp>
+      <p:sp>
+        <p:nvSpPr>
+          <p:cNvPr id="19" name="Text 14">
+            <a:extLst>
+              <a:ext uri="{FF2B5EF4-FFF2-40B4-BE49-F238E27FC236}">
+                <a16:creationId xmlns:a16="http://schemas.microsoft.com/office/drawing/2014/main" id="{0029BE50-2B29-7F8B-8E37-4362EAE3C735}"/>
+              </a:ext>
+            </a:extLst>
+          </p:cNvPr>
+          <p:cNvSpPr/>
+          <p:nvPr/>
+        </p:nvSpPr>
+        <p:spPr>
+          <a:xfrm>
+            <a:off x="7513320" y="4980432"/>
+            <a:ext cx="4160520" cy="1097280"/>
+          </a:xfrm>
+          <a:prstGeom prst="rect">
+            <a:avLst/>
+          </a:prstGeom>
+          <a:noFill/>
+          <a:ln>
+            <a:noFill/>
+          </a:ln>
+        </p:spPr>
+        <p:txBody>
+          <a:bodyPr wrap="square" lIns="2286" tIns="2286" rIns="2286" bIns="2286" rtlCol="0" anchor="t">
+            <a:normAutofit/>
+          </a:bodyPr>
+          <a:lstStyle/>
+          <a:p>
+            <a:pPr marL="0" indent="0" algn="l">
+              <a:buNone/>
+            </a:pPr>
+            <a:r>
+              <a:rPr lang="en-US" sz="1300" b="1" dirty="0">
+                <a:solidFill>
+                  <a:srgbClr val="172B53"/>
+                </a:solidFill>
+                <a:latin typeface="맑은 고딕" panose="020B0503020000020004" pitchFamily="34" charset="-127"/>
+                <a:ea typeface="맑은 고딕" panose="020B0503020000020004" pitchFamily="34" charset="-127"/>
+                <a:cs typeface="Malgun Gothic" pitchFamily="34" charset="-120"/>
+              </a:rPr>
+              <a:t>완료 기준</a:t>
+            </a:r>
+            <a:endParaRPr lang="en-US" sz="1300" dirty="0">
+              <a:latin typeface="맑은 고딕" panose="020B0503020000020004" pitchFamily="34" charset="-127"/>
+            </a:endParaRPr>
+          </a:p>
+          <a:p>
+            <a:pPr marL="0" indent="0" algn="l">
+              <a:buNone/>
+            </a:pPr>
+            <a:r>
+              <a:rPr lang="en-US" sz="1300" b="1" dirty="0">
+                <a:solidFill>
+                  <a:srgbClr val="172B53"/>
+                </a:solidFill>
+                <a:latin typeface="맑은 고딕" panose="020B0503020000020004" pitchFamily="34" charset="-127"/>
+                <a:ea typeface="맑은 고딕" panose="020B0503020000020004" pitchFamily="34" charset="-127"/>
+                <a:cs typeface="Malgun Gothic" pitchFamily="34" charset="-120"/>
+              </a:rPr>
+              <a:t>앱 결제 → 관리자 사용 중 반영 → 완료 → 양쪽 사용 가능 복귀</a:t>
+            </a:r>
+            <a:endParaRPr lang="en-US" sz="1300" dirty="0">
+              <a:latin typeface="맑은 고딕" panose="020B0503020000020004" pitchFamily="34" charset="-127"/>
+            </a:endParaRPr>
+          </a:p>
+          <a:p>
+            <a:pPr marL="0" indent="0" algn="l">
+              <a:buNone/>
+            </a:pPr>
+            <a:r>
+              <a:rPr lang="en-US" sz="1300" b="1" dirty="0">
+                <a:solidFill>
+                  <a:srgbClr val="172B53"/>
+                </a:solidFill>
+                <a:latin typeface="맑은 고딕" panose="020B0503020000020004" pitchFamily="34" charset="-127"/>
+                <a:ea typeface="맑은 고딕" panose="020B0503020000020004" pitchFamily="34" charset="-127"/>
+                <a:cs typeface="Malgun Gothic" pitchFamily="34" charset="-120"/>
+              </a:rPr>
+              <a:t>이 흐름이 개발자 조작 없이 3회 연속 동작</a:t>
+            </a:r>
+            <a:endParaRPr lang="en-US" sz="1300" dirty="0">
+              <a:latin typeface="맑은 고딕" panose="020B0503020000020004" pitchFamily="34" charset="-127"/>
+            </a:endParaRPr>
           </a:p>
         </p:txBody>
       </p:sp>
@@ -2107,6 +2563,7 @@
         <a:solidFill>
           <a:srgbClr val="F5F8FC"/>
         </a:solidFill>
+        <a:effectLst/>
       </p:bgPr>
     </p:bg>
     <p:spTree>
@@ -2144,7 +2601,7 @@
           <a:bodyPr wrap="square" lIns="0" tIns="0" rIns="0" bIns="0" rtlCol="0" anchor="ctr"/>
           <a:lstStyle/>
           <a:p>
-            <a:pPr indent="0" marL="0">
+            <a:pPr marL="0" indent="0">
               <a:buNone/>
             </a:pPr>
             <a:r>
@@ -2152,13 +2609,15 @@
                 <a:solidFill>
                   <a:srgbClr val="172B53"/>
                 </a:solidFill>
-                <a:latin typeface="Malgun Gothic" pitchFamily="34" charset="0"/>
-                <a:ea typeface="Malgun Gothic" pitchFamily="34" charset="-122"/>
+                <a:latin typeface="맑은 고딕" panose="020B0503020000020004" pitchFamily="34" charset="-127"/>
+                <a:ea typeface="맑은 고딕" panose="020B0503020000020004" pitchFamily="34" charset="-127"/>
                 <a:cs typeface="Malgun Gothic" pitchFamily="34" charset="-120"/>
               </a:rPr>
               <a:t>왜 범위를 좁히는가</a:t>
             </a:r>
-            <a:endParaRPr lang="en-US" sz="2200" dirty="0"/>
+            <a:endParaRPr lang="en-US" sz="2200" dirty="0">
+              <a:latin typeface="맑은 고딕" panose="020B0503020000020004" pitchFamily="34" charset="-127"/>
+            </a:endParaRPr>
           </a:p>
         </p:txBody>
       </p:sp>
@@ -2183,7 +2642,7 @@
           <a:bodyPr wrap="square" lIns="0" tIns="0" rIns="0" bIns="0" rtlCol="0" anchor="ctr"/>
           <a:lstStyle/>
           <a:p>
-            <a:pPr indent="0" marL="0">
+            <a:pPr marL="0" indent="0">
               <a:buNone/>
             </a:pPr>
             <a:r>
@@ -2191,13 +2650,15 @@
                 <a:solidFill>
                   <a:srgbClr val="475569"/>
                 </a:solidFill>
-                <a:latin typeface="Malgun Gothic" pitchFamily="34" charset="0"/>
-                <a:ea typeface="Malgun Gothic" pitchFamily="34" charset="-122"/>
+                <a:latin typeface="맑은 고딕" panose="020B0503020000020004" pitchFamily="34" charset="-127"/>
+                <a:ea typeface="맑은 고딕" panose="020B0503020000020004" pitchFamily="34" charset="-127"/>
                 <a:cs typeface="Malgun Gothic" pitchFamily="34" charset="-120"/>
               </a:rPr>
               <a:t>현재 데모는 화면 완성도가 있지만, POC는 “보이는 화면”보다 “하나의 데이터로 동작하는가”를 증명해야 합니다.</a:t>
             </a:r>
-            <a:endParaRPr lang="en-US" sz="950" dirty="0"/>
+            <a:endParaRPr lang="en-US" sz="950" dirty="0">
+              <a:latin typeface="맑은 고딕" panose="020B0503020000020004" pitchFamily="34" charset="-127"/>
+            </a:endParaRPr>
           </a:p>
         </p:txBody>
       </p:sp>
@@ -2228,7 +2689,7 @@
           <a:bodyPr wrap="square" lIns="254" tIns="254" rIns="254" bIns="254" rtlCol="0" anchor="ctr"/>
           <a:lstStyle/>
           <a:p>
-            <a:pPr algn="ctr" indent="0" marL="0">
+            <a:pPr marL="0" indent="0" algn="ctr">
               <a:buNone/>
             </a:pPr>
             <a:r>
@@ -2236,13 +2697,15 @@
                 <a:solidFill>
                   <a:srgbClr val="0B50D0"/>
                 </a:solidFill>
-                <a:latin typeface="Malgun Gothic" pitchFamily="34" charset="0"/>
-                <a:ea typeface="Malgun Gothic" pitchFamily="34" charset="-122"/>
+                <a:latin typeface="맑은 고딕" panose="020B0503020000020004" pitchFamily="34" charset="-127"/>
+                <a:ea typeface="맑은 고딕" panose="020B0503020000020004" pitchFamily="34" charset="-127"/>
                 <a:cs typeface="Malgun Gothic" pitchFamily="34" charset="-120"/>
               </a:rPr>
               <a:t>YOUNGCHA POC</a:t>
             </a:r>
-            <a:endParaRPr lang="en-US" sz="800" dirty="0"/>
+            <a:endParaRPr lang="en-US" sz="800" dirty="0">
+              <a:latin typeface="맑은 고딕" panose="020B0503020000020004" pitchFamily="34" charset="-127"/>
+            </a:endParaRPr>
           </a:p>
         </p:txBody>
       </p:sp>
@@ -2275,7 +2738,7 @@
           </a:bodyPr>
           <a:lstStyle/>
           <a:p>
-            <a:pPr algn="ctr" indent="0" marL="0">
+            <a:pPr marL="0" indent="0" algn="ctr">
               <a:buNone/>
             </a:pPr>
             <a:r>
@@ -2283,13 +2746,15 @@
                 <a:solidFill>
                   <a:srgbClr val="FFFFFF"/>
                 </a:solidFill>
-                <a:latin typeface="Malgun Gothic" pitchFamily="34" charset="0"/>
-                <a:ea typeface="Malgun Gothic" pitchFamily="34" charset="-122"/>
+                <a:latin typeface="맑은 고딕" panose="020B0503020000020004" pitchFamily="34" charset="-127"/>
+                <a:ea typeface="맑은 고딕" panose="020B0503020000020004" pitchFamily="34" charset="-127"/>
                 <a:cs typeface="Malgun Gothic" pitchFamily="34" charset="-120"/>
               </a:rPr>
               <a:t>현재 데모 상태</a:t>
             </a:r>
-            <a:endParaRPr lang="en-US" sz="1400" dirty="0"/>
+            <a:endParaRPr lang="en-US" sz="1400" dirty="0">
+              <a:latin typeface="맑은 고딕" panose="020B0503020000020004" pitchFamily="34" charset="-127"/>
+            </a:endParaRPr>
           </a:p>
         </p:txBody>
       </p:sp>
@@ -2322,7 +2787,7 @@
           </a:bodyPr>
           <a:lstStyle/>
           <a:p>
-            <a:pPr algn="ctr" indent="0" marL="0">
+            <a:pPr marL="0" indent="0" algn="ctr">
               <a:buNone/>
             </a:pPr>
             <a:r>
@@ -2330,13 +2795,15 @@
                 <a:solidFill>
                   <a:srgbClr val="FFFFFF"/>
                 </a:solidFill>
-                <a:latin typeface="Malgun Gothic" pitchFamily="34" charset="0"/>
-                <a:ea typeface="Malgun Gothic" pitchFamily="34" charset="-122"/>
+                <a:latin typeface="맑은 고딕" panose="020B0503020000020004" pitchFamily="34" charset="-127"/>
+                <a:ea typeface="맑은 고딕" panose="020B0503020000020004" pitchFamily="34" charset="-127"/>
                 <a:cs typeface="Malgun Gothic" pitchFamily="34" charset="-120"/>
               </a:rPr>
               <a:t>POC에서 증명할 것</a:t>
             </a:r>
-            <a:endParaRPr lang="en-US" sz="1400" dirty="0"/>
+            <a:endParaRPr lang="en-US" sz="1400" dirty="0">
+              <a:latin typeface="맑은 고딕" panose="020B0503020000020004" pitchFamily="34" charset="-127"/>
+            </a:endParaRPr>
           </a:p>
         </p:txBody>
       </p:sp>
@@ -2369,7 +2836,7 @@
           </a:bodyPr>
           <a:lstStyle/>
           <a:p>
-            <a:pPr algn="ctr" indent="0" marL="0">
+            <a:pPr marL="0" indent="0" algn="ctr">
               <a:buNone/>
             </a:pPr>
             <a:r>
@@ -2377,13 +2844,15 @@
                 <a:solidFill>
                   <a:srgbClr val="FFFFFF"/>
                 </a:solidFill>
-                <a:latin typeface="Malgun Gothic" pitchFamily="34" charset="0"/>
-                <a:ea typeface="Malgun Gothic" pitchFamily="34" charset="-122"/>
+                <a:latin typeface="맑은 고딕" panose="020B0503020000020004" pitchFamily="34" charset="-127"/>
+                <a:ea typeface="맑은 고딕" panose="020B0503020000020004" pitchFamily="34" charset="-127"/>
                 <a:cs typeface="Malgun Gothic" pitchFamily="34" charset="-120"/>
               </a:rPr>
               <a:t>개발자에게 전달한 기준</a:t>
             </a:r>
-            <a:endParaRPr lang="en-US" sz="1400" dirty="0"/>
+            <a:endParaRPr lang="en-US" sz="1400" dirty="0">
+              <a:latin typeface="맑은 고딕" panose="020B0503020000020004" pitchFamily="34" charset="-127"/>
+            </a:endParaRPr>
           </a:p>
         </p:txBody>
       </p:sp>
@@ -2408,7 +2877,7 @@
           <a:bodyPr wrap="square" lIns="0" tIns="0" rIns="0" bIns="0" rtlCol="0" anchor="ctr"/>
           <a:lstStyle/>
           <a:p>
-            <a:pPr algn="ctr" indent="0" marL="0">
+            <a:pPr marL="0" indent="0" algn="ctr">
               <a:buNone/>
             </a:pPr>
             <a:r>
@@ -2416,10 +2885,13 @@
                 <a:solidFill>
                   <a:srgbClr val="475569"/>
                 </a:solidFill>
+                <a:latin typeface="맑은 고딕" panose="020B0503020000020004" pitchFamily="34" charset="-127"/>
               </a:rPr>
               <a:t>→</a:t>
             </a:r>
-            <a:endParaRPr lang="en-US" sz="2500" dirty="0"/>
+            <a:endParaRPr lang="en-US" sz="2500" dirty="0">
+              <a:latin typeface="맑은 고딕" panose="020B0503020000020004" pitchFamily="34" charset="-127"/>
+            </a:endParaRPr>
           </a:p>
         </p:txBody>
       </p:sp>
@@ -2444,7 +2916,7 @@
           <a:bodyPr wrap="square" lIns="0" tIns="0" rIns="0" bIns="0" rtlCol="0" anchor="ctr"/>
           <a:lstStyle/>
           <a:p>
-            <a:pPr algn="ctr" indent="0" marL="0">
+            <a:pPr marL="0" indent="0" algn="ctr">
               <a:buNone/>
             </a:pPr>
             <a:r>
@@ -2452,10 +2924,13 @@
                 <a:solidFill>
                   <a:srgbClr val="475569"/>
                 </a:solidFill>
+                <a:latin typeface="맑은 고딕" panose="020B0503020000020004" pitchFamily="34" charset="-127"/>
               </a:rPr>
               <a:t>→</a:t>
             </a:r>
-            <a:endParaRPr lang="en-US" sz="2500" dirty="0"/>
+            <a:endParaRPr lang="en-US" sz="2500" dirty="0">
+              <a:latin typeface="맑은 고딕" panose="020B0503020000020004" pitchFamily="34" charset="-127"/>
+            </a:endParaRPr>
           </a:p>
         </p:txBody>
       </p:sp>
@@ -2488,72 +2963,12 @@
           </a:bodyPr>
           <a:lstStyle/>
           <a:p>
-            <a:pPr algn="l" indent="0" marL="0">
-              <a:buNone/>
-            </a:pPr>
-            <a:r>
-              <a:rPr lang="en-US" sz="1220" dirty="0">
-                <a:solidFill>
-                  <a:srgbClr val="111827"/>
-                </a:solidFill>
-                <a:latin typeface="Malgun Gothic" pitchFamily="34" charset="0"/>
-                <a:ea typeface="Malgun Gothic" pitchFamily="34" charset="-122"/>
-                <a:cs typeface="Malgun Gothic" pitchFamily="34" charset="-120"/>
-              </a:rPr>
-              <a:t>앱과 관리자 화면이 분리</a:t>
-            </a:r>
-            <a:endParaRPr lang="en-US" sz="1220" dirty="0"/>
-          </a:p>
-          <a:p>
-            <a:pPr algn="l" indent="0" marL="0">
-              <a:buNone/>
-            </a:pPr>
-            <a:r>
-              <a:rPr lang="en-US" sz="1220" dirty="0">
-                <a:solidFill>
-                  <a:srgbClr val="111827"/>
-                </a:solidFill>
-                <a:latin typeface="Malgun Gothic" pitchFamily="34" charset="0"/>
-                <a:ea typeface="Malgun Gothic" pitchFamily="34" charset="-122"/>
-                <a:cs typeface="Malgun Gothic" pitchFamily="34" charset="-120"/>
-              </a:rPr>
-              <a:t>API 연결 없음</a:t>
-            </a:r>
-            <a:endParaRPr lang="en-US" sz="1220" dirty="0"/>
-          </a:p>
-          <a:p>
-            <a:pPr algn="l" indent="0" marL="0">
-              <a:buNone/>
-            </a:pPr>
-            <a:r>
-              <a:rPr lang="en-US" sz="1220" dirty="0">
-                <a:solidFill>
-                  <a:srgbClr val="111827"/>
-                </a:solidFill>
-                <a:latin typeface="Malgun Gothic" pitchFamily="34" charset="0"/>
-                <a:ea typeface="Malgun Gothic" pitchFamily="34" charset="-122"/>
-                <a:cs typeface="Malgun Gothic" pitchFamily="34" charset="-120"/>
-              </a:rPr>
-              <a:t>목업·localStorage 중심</a:t>
-            </a:r>
-            <a:endParaRPr lang="en-US" sz="1220" dirty="0"/>
-          </a:p>
-          <a:p>
-            <a:pPr algn="l" indent="0" marL="0">
-              <a:buNone/>
-            </a:pPr>
-            <a:r>
-              <a:rPr lang="en-US" sz="1220" dirty="0">
-                <a:solidFill>
-                  <a:srgbClr val="111827"/>
-                </a:solidFill>
-                <a:latin typeface="Malgun Gothic" pitchFamily="34" charset="0"/>
-                <a:ea typeface="Malgun Gothic" pitchFamily="34" charset="-122"/>
-                <a:cs typeface="Malgun Gothic" pitchFamily="34" charset="-120"/>
-              </a:rPr>
-              <a:t>앱 6베이 / 관리자 12베이 불일치</a:t>
-            </a:r>
-            <a:endParaRPr lang="en-US" sz="1220" dirty="0"/>
+            <a:pPr marL="0" indent="0" algn="l">
+              <a:buNone/>
+            </a:pPr>
+            <a:endParaRPr lang="en-US" sz="1220" dirty="0">
+              <a:latin typeface="맑은 고딕" panose="020B0503020000020004" pitchFamily="34" charset="-127"/>
+            </a:endParaRPr>
           </a:p>
         </p:txBody>
       </p:sp>
@@ -2586,72 +3001,12 @@
           </a:bodyPr>
           <a:lstStyle/>
           <a:p>
-            <a:pPr algn="l" indent="0" marL="0">
-              <a:buNone/>
-            </a:pPr>
-            <a:r>
-              <a:rPr lang="en-US" sz="1220" dirty="0">
-                <a:solidFill>
-                  <a:srgbClr val="111827"/>
-                </a:solidFill>
-                <a:latin typeface="Malgun Gothic" pitchFamily="34" charset="0"/>
-                <a:ea typeface="Malgun Gothic" pitchFamily="34" charset="-122"/>
-                <a:cs typeface="Malgun Gothic" pitchFamily="34" charset="-120"/>
-              </a:rPr>
-              <a:t>같은 베이 데이터 사용</a:t>
-            </a:r>
-            <a:endParaRPr lang="en-US" sz="1220" dirty="0"/>
-          </a:p>
-          <a:p>
-            <a:pPr algn="l" indent="0" marL="0">
-              <a:buNone/>
-            </a:pPr>
-            <a:r>
-              <a:rPr lang="en-US" sz="1220" dirty="0">
-                <a:solidFill>
-                  <a:srgbClr val="111827"/>
-                </a:solidFill>
-                <a:latin typeface="Malgun Gothic" pitchFamily="34" charset="0"/>
-                <a:ea typeface="Malgun Gothic" pitchFamily="34" charset="-122"/>
-                <a:cs typeface="Malgun Gothic" pitchFamily="34" charset="-120"/>
-              </a:rPr>
-              <a:t>즉시 결제 후 사용 중 반영</a:t>
-            </a:r>
-            <a:endParaRPr lang="en-US" sz="1220" dirty="0"/>
-          </a:p>
-          <a:p>
-            <a:pPr algn="l" indent="0" marL="0">
-              <a:buNone/>
-            </a:pPr>
-            <a:r>
-              <a:rPr lang="en-US" sz="1220" dirty="0">
-                <a:solidFill>
-                  <a:srgbClr val="111827"/>
-                </a:solidFill>
-                <a:latin typeface="Malgun Gothic" pitchFamily="34" charset="0"/>
-                <a:ea typeface="Malgun Gothic" pitchFamily="34" charset="-122"/>
-                <a:cs typeface="Malgun Gothic" pitchFamily="34" charset="-120"/>
-              </a:rPr>
-              <a:t>완료 후 사용 가능 복귀</a:t>
-            </a:r>
-            <a:endParaRPr lang="en-US" sz="1220" dirty="0"/>
-          </a:p>
-          <a:p>
-            <a:pPr algn="l" indent="0" marL="0">
-              <a:buNone/>
-            </a:pPr>
-            <a:r>
-              <a:rPr lang="en-US" sz="1220" dirty="0">
-                <a:solidFill>
-                  <a:srgbClr val="111827"/>
-                </a:solidFill>
-                <a:latin typeface="Malgun Gothic" pitchFamily="34" charset="0"/>
-                <a:ea typeface="Malgun Gothic" pitchFamily="34" charset="-122"/>
-                <a:cs typeface="Malgun Gothic" pitchFamily="34" charset="-120"/>
-              </a:rPr>
-              <a:t>새로고침·재접속 유지</a:t>
-            </a:r>
-            <a:endParaRPr lang="en-US" sz="1220" dirty="0"/>
+            <a:pPr marL="0" indent="0" algn="l">
+              <a:buNone/>
+            </a:pPr>
+            <a:endParaRPr lang="en-US" sz="1220" dirty="0">
+              <a:latin typeface="맑은 고딕" panose="020B0503020000020004" pitchFamily="34" charset="-127"/>
+            </a:endParaRPr>
           </a:p>
         </p:txBody>
       </p:sp>
@@ -2684,72 +3039,12 @@
           </a:bodyPr>
           <a:lstStyle/>
           <a:p>
-            <a:pPr algn="l" indent="0" marL="0">
-              <a:buNone/>
-            </a:pPr>
-            <a:r>
-              <a:rPr lang="en-US" sz="1220" dirty="0">
-                <a:solidFill>
-                  <a:srgbClr val="111827"/>
-                </a:solidFill>
-                <a:latin typeface="Malgun Gothic" pitchFamily="34" charset="0"/>
-                <a:ea typeface="Malgun Gothic" pitchFamily="34" charset="-122"/>
-                <a:cs typeface="Malgun Gothic" pitchFamily="34" charset="-120"/>
-              </a:rPr>
-              <a:t>기능 7개로 개발 범위 고정</a:t>
-            </a:r>
-            <a:endParaRPr lang="en-US" sz="1220" dirty="0"/>
-          </a:p>
-          <a:p>
-            <a:pPr algn="l" indent="0" marL="0">
-              <a:buNone/>
-            </a:pPr>
-            <a:r>
-              <a:rPr lang="en-US" sz="1220" dirty="0">
-                <a:solidFill>
-                  <a:srgbClr val="111827"/>
-                </a:solidFill>
-                <a:latin typeface="Malgun Gothic" pitchFamily="34" charset="0"/>
-                <a:ea typeface="Malgun Gothic" pitchFamily="34" charset="-122"/>
-                <a:cs typeface="Malgun Gothic" pitchFamily="34" charset="-120"/>
-              </a:rPr>
-              <a:t>예약 기능 완전 제거</a:t>
-            </a:r>
-            <a:endParaRPr lang="en-US" sz="1220" dirty="0"/>
-          </a:p>
-          <a:p>
-            <a:pPr algn="l" indent="0" marL="0">
-              <a:buNone/>
-            </a:pPr>
-            <a:r>
-              <a:rPr lang="en-US" sz="1220" dirty="0">
-                <a:solidFill>
-                  <a:srgbClr val="111827"/>
-                </a:solidFill>
-                <a:latin typeface="Malgun Gothic" pitchFamily="34" charset="0"/>
-                <a:ea typeface="Malgun Gothic" pitchFamily="34" charset="-122"/>
-                <a:cs typeface="Malgun Gothic" pitchFamily="34" charset="-120"/>
-              </a:rPr>
-              <a:t>화면 모의·제외 범위 명시</a:t>
-            </a:r>
-            <a:endParaRPr lang="en-US" sz="1220" dirty="0"/>
-          </a:p>
-          <a:p>
-            <a:pPr algn="l" indent="0" marL="0">
-              <a:buNone/>
-            </a:pPr>
-            <a:r>
-              <a:rPr lang="en-US" sz="1220" dirty="0">
-                <a:solidFill>
-                  <a:srgbClr val="111827"/>
-                </a:solidFill>
-                <a:latin typeface="Malgun Gothic" pitchFamily="34" charset="0"/>
-                <a:ea typeface="Malgun Gothic" pitchFamily="34" charset="-122"/>
-                <a:cs typeface="Malgun Gothic" pitchFamily="34" charset="-120"/>
-              </a:rPr>
-              <a:t>13개 체크리스트로 검수</a:t>
-            </a:r>
-            <a:endParaRPr lang="en-US" sz="1220" dirty="0"/>
+            <a:pPr marL="0" indent="0" algn="l">
+              <a:buNone/>
+            </a:pPr>
+            <a:endParaRPr lang="en-US" sz="1220" dirty="0">
+              <a:latin typeface="맑은 고딕" panose="020B0503020000020004" pitchFamily="34" charset="-127"/>
+            </a:endParaRPr>
           </a:p>
         </p:txBody>
       </p:sp>
@@ -2774,7 +3069,7 @@
           <a:bodyPr wrap="square" lIns="0" tIns="0" rIns="0" bIns="0" rtlCol="0" anchor="ctr"/>
           <a:lstStyle/>
           <a:p>
-            <a:pPr indent="0" marL="0">
+            <a:pPr marL="0" indent="0">
               <a:buNone/>
             </a:pPr>
             <a:r>
@@ -2782,13 +3077,15 @@
                 <a:solidFill>
                   <a:srgbClr val="0B50D0"/>
                 </a:solidFill>
-                <a:latin typeface="Malgun Gothic" pitchFamily="34" charset="0"/>
-                <a:ea typeface="Malgun Gothic" pitchFamily="34" charset="-122"/>
+                <a:latin typeface="맑은 고딕" panose="020B0503020000020004" pitchFamily="34" charset="-127"/>
+                <a:ea typeface="맑은 고딕" panose="020B0503020000020004" pitchFamily="34" charset="-127"/>
                 <a:cs typeface="Malgun Gothic" pitchFamily="34" charset="-120"/>
               </a:rPr>
               <a:t>POC 범위 설정 원칙</a:t>
             </a:r>
-            <a:endParaRPr lang="en-US" sz="1100" dirty="0"/>
+            <a:endParaRPr lang="en-US" sz="1100" dirty="0">
+              <a:latin typeface="맑은 고딕" panose="020B0503020000020004" pitchFamily="34" charset="-127"/>
+            </a:endParaRPr>
           </a:p>
         </p:txBody>
       </p:sp>
@@ -2821,7 +3118,7 @@
           </a:bodyPr>
           <a:lstStyle/>
           <a:p>
-            <a:pPr algn="ctr" indent="0" marL="0">
+            <a:pPr marL="0" indent="0" algn="ctr">
               <a:buNone/>
             </a:pPr>
             <a:r>
@@ -2829,13 +3126,15 @@
                 <a:solidFill>
                   <a:srgbClr val="172B53"/>
                 </a:solidFill>
-                <a:latin typeface="Malgun Gothic" pitchFamily="34" charset="0"/>
-                <a:ea typeface="Malgun Gothic" pitchFamily="34" charset="-122"/>
+                <a:latin typeface="맑은 고딕" panose="020B0503020000020004" pitchFamily="34" charset="-127"/>
+                <a:ea typeface="맑은 고딕" panose="020B0503020000020004" pitchFamily="34" charset="-127"/>
                 <a:cs typeface="Malgun Gothic" pitchFamily="34" charset="-120"/>
               </a:rPr>
               <a:t>완성형 기능을 많이 만드는 것이 아니라, 고객 시연에서 반드시 보여줄 하나의 흐름을 실제 데이터로 안정화합니다.</a:t>
             </a:r>
-            <a:endParaRPr lang="en-US" sz="1500" dirty="0"/>
+            <a:endParaRPr lang="en-US" sz="1500" dirty="0">
+              <a:latin typeface="맑은 고딕" panose="020B0503020000020004" pitchFamily="34" charset="-127"/>
+            </a:endParaRPr>
           </a:p>
         </p:txBody>
       </p:sp>
@@ -2860,7 +3159,7 @@
           <a:bodyPr wrap="square" lIns="0" tIns="0" rIns="0" bIns="0" rtlCol="0" anchor="ctr"/>
           <a:lstStyle/>
           <a:p>
-            <a:pPr indent="0" marL="0">
+            <a:pPr marL="0" indent="0">
               <a:buNone/>
             </a:pPr>
             <a:r>
@@ -2868,13 +3167,427 @@
                 <a:solidFill>
                   <a:srgbClr val="7A8797"/>
                 </a:solidFill>
-                <a:latin typeface="Malgun Gothic" pitchFamily="34" charset="0"/>
-                <a:ea typeface="Malgun Gothic" pitchFamily="34" charset="-122"/>
+                <a:latin typeface="맑은 고딕" panose="020B0503020000020004" pitchFamily="34" charset="-127"/>
+                <a:ea typeface="맑은 고딕" panose="020B0503020000020004" pitchFamily="34" charset="-127"/>
                 <a:cs typeface="Malgun Gothic" pitchFamily="34" charset="-120"/>
               </a:rPr>
               <a:t>영차 1차 POC 범위 공유  |  2</a:t>
             </a:r>
-            <a:endParaRPr lang="en-US" sz="750" dirty="0"/>
+            <a:endParaRPr lang="en-US" sz="750" dirty="0">
+              <a:latin typeface="맑은 고딕" panose="020B0503020000020004" pitchFamily="34" charset="-127"/>
+            </a:endParaRPr>
+          </a:p>
+        </p:txBody>
+      </p:sp>
+      <p:sp>
+        <p:nvSpPr>
+          <p:cNvPr id="16" name="Text 8">
+            <a:extLst>
+              <a:ext uri="{FF2B5EF4-FFF2-40B4-BE49-F238E27FC236}">
+                <a16:creationId xmlns:a16="http://schemas.microsoft.com/office/drawing/2014/main" id="{F1D56BC6-8DDF-0622-91CC-AA941B7FB928}"/>
+              </a:ext>
+            </a:extLst>
+          </p:cNvPr>
+          <p:cNvSpPr/>
+          <p:nvPr/>
+        </p:nvSpPr>
+        <p:spPr>
+          <a:xfrm>
+            <a:off x="838200" y="2328672"/>
+            <a:ext cx="2468880" cy="2331720"/>
+          </a:xfrm>
+          <a:prstGeom prst="rect">
+            <a:avLst/>
+          </a:prstGeom>
+          <a:noFill/>
+          <a:ln>
+            <a:noFill/>
+          </a:ln>
+        </p:spPr>
+        <p:txBody>
+          <a:bodyPr wrap="square" lIns="2286" tIns="2286" rIns="2286" bIns="2286" rtlCol="0" anchor="t">
+            <a:normAutofit/>
+          </a:bodyPr>
+          <a:lstStyle/>
+          <a:p>
+            <a:pPr marL="285750" indent="-285750" algn="l">
+              <a:lnSpc>
+                <a:spcPct val="150000"/>
+              </a:lnSpc>
+              <a:buFont typeface="Arial" panose="020B0604020202020204" pitchFamily="34" charset="0"/>
+              <a:buChar char="•"/>
+            </a:pPr>
+            <a:r>
+              <a:rPr lang="en-US" sz="1220" dirty="0" err="1">
+                <a:solidFill>
+                  <a:srgbClr val="111827"/>
+                </a:solidFill>
+                <a:latin typeface="맑은 고딕" panose="020B0503020000020004" pitchFamily="34" charset="-127"/>
+                <a:ea typeface="맑은 고딕" panose="020B0503020000020004" pitchFamily="34" charset="-127"/>
+                <a:cs typeface="Malgun Gothic" pitchFamily="34" charset="-120"/>
+              </a:rPr>
+              <a:t>앱과</a:t>
+            </a:r>
+            <a:r>
+              <a:rPr lang="en-US" sz="1220" dirty="0">
+                <a:solidFill>
+                  <a:srgbClr val="111827"/>
+                </a:solidFill>
+                <a:latin typeface="맑은 고딕" panose="020B0503020000020004" pitchFamily="34" charset="-127"/>
+                <a:ea typeface="맑은 고딕" panose="020B0503020000020004" pitchFamily="34" charset="-127"/>
+                <a:cs typeface="Malgun Gothic" pitchFamily="34" charset="-120"/>
+              </a:rPr>
+              <a:t> 관리자 화면이 분리</a:t>
+            </a:r>
+            <a:endParaRPr lang="en-US" sz="1220" dirty="0">
+              <a:latin typeface="맑은 고딕" panose="020B0503020000020004" pitchFamily="34" charset="-127"/>
+            </a:endParaRPr>
+          </a:p>
+          <a:p>
+            <a:pPr marL="285750" indent="-285750" algn="l">
+              <a:lnSpc>
+                <a:spcPct val="150000"/>
+              </a:lnSpc>
+              <a:buFont typeface="Arial" panose="020B0604020202020204" pitchFamily="34" charset="0"/>
+              <a:buChar char="•"/>
+            </a:pPr>
+            <a:r>
+              <a:rPr lang="en-US" sz="1220" dirty="0">
+                <a:solidFill>
+                  <a:srgbClr val="111827"/>
+                </a:solidFill>
+                <a:latin typeface="맑은 고딕" panose="020B0503020000020004" pitchFamily="34" charset="-127"/>
+                <a:ea typeface="맑은 고딕" panose="020B0503020000020004" pitchFamily="34" charset="-127"/>
+                <a:cs typeface="Malgun Gothic" pitchFamily="34" charset="-120"/>
+              </a:rPr>
+              <a:t>API 연결 없음</a:t>
+            </a:r>
+            <a:endParaRPr lang="en-US" sz="1220" dirty="0">
+              <a:latin typeface="맑은 고딕" panose="020B0503020000020004" pitchFamily="34" charset="-127"/>
+            </a:endParaRPr>
+          </a:p>
+          <a:p>
+            <a:pPr marL="285750" indent="-285750" algn="l">
+              <a:lnSpc>
+                <a:spcPct val="150000"/>
+              </a:lnSpc>
+              <a:buFont typeface="Arial" panose="020B0604020202020204" pitchFamily="34" charset="0"/>
+              <a:buChar char="•"/>
+            </a:pPr>
+            <a:r>
+              <a:rPr lang="en-US" sz="1220" dirty="0">
+                <a:solidFill>
+                  <a:srgbClr val="111827"/>
+                </a:solidFill>
+                <a:latin typeface="맑은 고딕" panose="020B0503020000020004" pitchFamily="34" charset="-127"/>
+                <a:ea typeface="맑은 고딕" panose="020B0503020000020004" pitchFamily="34" charset="-127"/>
+                <a:cs typeface="Malgun Gothic" pitchFamily="34" charset="-120"/>
+              </a:rPr>
+              <a:t>목업·localStorage 중심</a:t>
+            </a:r>
+            <a:endParaRPr lang="en-US" sz="1220" dirty="0">
+              <a:latin typeface="맑은 고딕" panose="020B0503020000020004" pitchFamily="34" charset="-127"/>
+            </a:endParaRPr>
+          </a:p>
+          <a:p>
+            <a:pPr marL="285750" indent="-285750" algn="l">
+              <a:lnSpc>
+                <a:spcPct val="150000"/>
+              </a:lnSpc>
+              <a:buFont typeface="Arial" panose="020B0604020202020204" pitchFamily="34" charset="0"/>
+              <a:buChar char="•"/>
+            </a:pPr>
+            <a:r>
+              <a:rPr lang="en-US" sz="1220" dirty="0">
+                <a:solidFill>
+                  <a:srgbClr val="111827"/>
+                </a:solidFill>
+                <a:latin typeface="맑은 고딕" panose="020B0503020000020004" pitchFamily="34" charset="-127"/>
+                <a:ea typeface="맑은 고딕" panose="020B0503020000020004" pitchFamily="34" charset="-127"/>
+                <a:cs typeface="Malgun Gothic" pitchFamily="34" charset="-120"/>
+              </a:rPr>
+              <a:t>앱 6베이 / 관리자 12베이 </a:t>
+            </a:r>
+          </a:p>
+          <a:p>
+            <a:pPr algn="l">
+              <a:lnSpc>
+                <a:spcPct val="150000"/>
+              </a:lnSpc>
+            </a:pPr>
+            <a:r>
+              <a:rPr lang="en-US" sz="1220" dirty="0">
+                <a:solidFill>
+                  <a:srgbClr val="111827"/>
+                </a:solidFill>
+                <a:latin typeface="맑은 고딕" panose="020B0503020000020004" pitchFamily="34" charset="-127"/>
+                <a:ea typeface="맑은 고딕" panose="020B0503020000020004" pitchFamily="34" charset="-127"/>
+                <a:cs typeface="Malgun Gothic" pitchFamily="34" charset="-120"/>
+              </a:rPr>
+              <a:t>     </a:t>
+            </a:r>
+            <a:r>
+              <a:rPr lang="en-US" sz="1220" dirty="0" err="1">
+                <a:solidFill>
+                  <a:srgbClr val="111827"/>
+                </a:solidFill>
+                <a:latin typeface="맑은 고딕" panose="020B0503020000020004" pitchFamily="34" charset="-127"/>
+                <a:ea typeface="맑은 고딕" panose="020B0503020000020004" pitchFamily="34" charset="-127"/>
+                <a:cs typeface="Malgun Gothic" pitchFamily="34" charset="-120"/>
+              </a:rPr>
+              <a:t>불일치</a:t>
+            </a:r>
+            <a:endParaRPr lang="en-US" sz="1220" dirty="0">
+              <a:latin typeface="맑은 고딕" panose="020B0503020000020004" pitchFamily="34" charset="-127"/>
+            </a:endParaRPr>
+          </a:p>
+        </p:txBody>
+      </p:sp>
+      <p:sp>
+        <p:nvSpPr>
+          <p:cNvPr id="17" name="Text 9">
+            <a:extLst>
+              <a:ext uri="{FF2B5EF4-FFF2-40B4-BE49-F238E27FC236}">
+                <a16:creationId xmlns:a16="http://schemas.microsoft.com/office/drawing/2014/main" id="{29CC625F-5C6E-639E-FCB9-8996932D15A1}"/>
+              </a:ext>
+            </a:extLst>
+          </p:cNvPr>
+          <p:cNvSpPr/>
+          <p:nvPr/>
+        </p:nvSpPr>
+        <p:spPr>
+          <a:xfrm>
+            <a:off x="4998720" y="2328672"/>
+            <a:ext cx="2468880" cy="2331720"/>
+          </a:xfrm>
+          <a:prstGeom prst="rect">
+            <a:avLst/>
+          </a:prstGeom>
+          <a:noFill/>
+          <a:ln>
+            <a:noFill/>
+          </a:ln>
+        </p:spPr>
+        <p:txBody>
+          <a:bodyPr wrap="square" lIns="2286" tIns="2286" rIns="2286" bIns="2286" rtlCol="0" anchor="t">
+            <a:normAutofit/>
+          </a:bodyPr>
+          <a:lstStyle/>
+          <a:p>
+            <a:pPr marL="285750" indent="-285750" algn="l">
+              <a:lnSpc>
+                <a:spcPct val="150000"/>
+              </a:lnSpc>
+              <a:buFont typeface="Arial" panose="020B0604020202020204" pitchFamily="34" charset="0"/>
+              <a:buChar char="•"/>
+            </a:pPr>
+            <a:r>
+              <a:rPr lang="en-US" sz="1220" dirty="0">
+                <a:solidFill>
+                  <a:srgbClr val="111827"/>
+                </a:solidFill>
+                <a:latin typeface="맑은 고딕" panose="020B0503020000020004" pitchFamily="34" charset="-127"/>
+                <a:ea typeface="맑은 고딕" panose="020B0503020000020004" pitchFamily="34" charset="-127"/>
+                <a:cs typeface="Malgun Gothic" pitchFamily="34" charset="-120"/>
+              </a:rPr>
+              <a:t>같은 베이 데이터 사용</a:t>
+            </a:r>
+            <a:endParaRPr lang="en-US" sz="1220" dirty="0">
+              <a:latin typeface="맑은 고딕" panose="020B0503020000020004" pitchFamily="34" charset="-127"/>
+            </a:endParaRPr>
+          </a:p>
+          <a:p>
+            <a:pPr marL="285750" indent="-285750" algn="l">
+              <a:lnSpc>
+                <a:spcPct val="150000"/>
+              </a:lnSpc>
+              <a:buFont typeface="Arial" panose="020B0604020202020204" pitchFamily="34" charset="0"/>
+              <a:buChar char="•"/>
+            </a:pPr>
+            <a:r>
+              <a:rPr lang="en-US" sz="1220" dirty="0">
+                <a:solidFill>
+                  <a:srgbClr val="111827"/>
+                </a:solidFill>
+                <a:latin typeface="맑은 고딕" panose="020B0503020000020004" pitchFamily="34" charset="-127"/>
+                <a:ea typeface="맑은 고딕" panose="020B0503020000020004" pitchFamily="34" charset="-127"/>
+                <a:cs typeface="Malgun Gothic" pitchFamily="34" charset="-120"/>
+              </a:rPr>
+              <a:t>즉시 결제 후 사용 중 반영</a:t>
+            </a:r>
+            <a:endParaRPr lang="en-US" sz="1220" dirty="0">
+              <a:latin typeface="맑은 고딕" panose="020B0503020000020004" pitchFamily="34" charset="-127"/>
+            </a:endParaRPr>
+          </a:p>
+          <a:p>
+            <a:pPr marL="285750" indent="-285750" algn="l">
+              <a:lnSpc>
+                <a:spcPct val="150000"/>
+              </a:lnSpc>
+              <a:buFont typeface="Arial" panose="020B0604020202020204" pitchFamily="34" charset="0"/>
+              <a:buChar char="•"/>
+            </a:pPr>
+            <a:r>
+              <a:rPr lang="en-US" sz="1220" dirty="0">
+                <a:solidFill>
+                  <a:srgbClr val="111827"/>
+                </a:solidFill>
+                <a:latin typeface="맑은 고딕" panose="020B0503020000020004" pitchFamily="34" charset="-127"/>
+                <a:ea typeface="맑은 고딕" panose="020B0503020000020004" pitchFamily="34" charset="-127"/>
+                <a:cs typeface="Malgun Gothic" pitchFamily="34" charset="-120"/>
+              </a:rPr>
+              <a:t>완료 후 사용 가능 복귀</a:t>
+            </a:r>
+            <a:endParaRPr lang="en-US" sz="1220" dirty="0">
+              <a:latin typeface="맑은 고딕" panose="020B0503020000020004" pitchFamily="34" charset="-127"/>
+            </a:endParaRPr>
+          </a:p>
+          <a:p>
+            <a:pPr marL="285750" indent="-285750" algn="l">
+              <a:lnSpc>
+                <a:spcPct val="150000"/>
+              </a:lnSpc>
+              <a:buFont typeface="Arial" panose="020B0604020202020204" pitchFamily="34" charset="0"/>
+              <a:buChar char="•"/>
+            </a:pPr>
+            <a:r>
+              <a:rPr lang="en-US" sz="1220" dirty="0">
+                <a:solidFill>
+                  <a:srgbClr val="111827"/>
+                </a:solidFill>
+                <a:latin typeface="맑은 고딕" panose="020B0503020000020004" pitchFamily="34" charset="-127"/>
+                <a:ea typeface="맑은 고딕" panose="020B0503020000020004" pitchFamily="34" charset="-127"/>
+                <a:cs typeface="Malgun Gothic" pitchFamily="34" charset="-120"/>
+              </a:rPr>
+              <a:t>새로고침·재접속 유지</a:t>
+            </a:r>
+            <a:endParaRPr lang="en-US" sz="1220" dirty="0">
+              <a:latin typeface="맑은 고딕" panose="020B0503020000020004" pitchFamily="34" charset="-127"/>
+            </a:endParaRPr>
+          </a:p>
+        </p:txBody>
+      </p:sp>
+      <p:sp>
+        <p:nvSpPr>
+          <p:cNvPr id="18" name="Text 10">
+            <a:extLst>
+              <a:ext uri="{FF2B5EF4-FFF2-40B4-BE49-F238E27FC236}">
+                <a16:creationId xmlns:a16="http://schemas.microsoft.com/office/drawing/2014/main" id="{247F0DD2-27DD-BEC1-B8C8-8F49D5BF2C9F}"/>
+              </a:ext>
+            </a:extLst>
+          </p:cNvPr>
+          <p:cNvSpPr/>
+          <p:nvPr/>
+        </p:nvSpPr>
+        <p:spPr>
+          <a:xfrm>
+            <a:off x="9159240" y="2328672"/>
+            <a:ext cx="2468880" cy="2331720"/>
+          </a:xfrm>
+          <a:prstGeom prst="rect">
+            <a:avLst/>
+          </a:prstGeom>
+          <a:noFill/>
+          <a:ln>
+            <a:noFill/>
+          </a:ln>
+        </p:spPr>
+        <p:txBody>
+          <a:bodyPr wrap="square" lIns="2286" tIns="2286" rIns="2286" bIns="2286" rtlCol="0" anchor="t">
+            <a:normAutofit/>
+          </a:bodyPr>
+          <a:lstStyle/>
+          <a:p>
+            <a:pPr marL="285750" indent="-285750" algn="l">
+              <a:lnSpc>
+                <a:spcPct val="150000"/>
+              </a:lnSpc>
+              <a:buFont typeface="Arial" panose="020B0604020202020204" pitchFamily="34" charset="0"/>
+              <a:buChar char="•"/>
+            </a:pPr>
+            <a:r>
+              <a:rPr lang="en-US" sz="1220" dirty="0">
+                <a:solidFill>
+                  <a:srgbClr val="111827"/>
+                </a:solidFill>
+                <a:latin typeface="맑은 고딕" panose="020B0503020000020004" pitchFamily="34" charset="-127"/>
+                <a:ea typeface="맑은 고딕" panose="020B0503020000020004" pitchFamily="34" charset="-127"/>
+                <a:cs typeface="Malgun Gothic" pitchFamily="34" charset="-120"/>
+              </a:rPr>
+              <a:t>기능 7개로 개발 범위 고정</a:t>
+            </a:r>
+            <a:endParaRPr lang="en-US" sz="1220" dirty="0">
+              <a:latin typeface="맑은 고딕" panose="020B0503020000020004" pitchFamily="34" charset="-127"/>
+            </a:endParaRPr>
+          </a:p>
+          <a:p>
+            <a:pPr marL="285750" indent="-285750" algn="l">
+              <a:lnSpc>
+                <a:spcPct val="150000"/>
+              </a:lnSpc>
+              <a:buFont typeface="Arial" panose="020B0604020202020204" pitchFamily="34" charset="0"/>
+              <a:buChar char="•"/>
+            </a:pPr>
+            <a:r>
+              <a:rPr lang="en-US" sz="1220" dirty="0">
+                <a:solidFill>
+                  <a:srgbClr val="111827"/>
+                </a:solidFill>
+                <a:latin typeface="맑은 고딕" panose="020B0503020000020004" pitchFamily="34" charset="-127"/>
+                <a:ea typeface="맑은 고딕" panose="020B0503020000020004" pitchFamily="34" charset="-127"/>
+                <a:cs typeface="Malgun Gothic" pitchFamily="34" charset="-120"/>
+              </a:rPr>
+              <a:t>예약 기능 완전 제거</a:t>
+            </a:r>
+            <a:endParaRPr lang="en-US" sz="1220" dirty="0">
+              <a:latin typeface="맑은 고딕" panose="020B0503020000020004" pitchFamily="34" charset="-127"/>
+            </a:endParaRPr>
+          </a:p>
+          <a:p>
+            <a:pPr marL="285750" indent="-285750" algn="l">
+              <a:lnSpc>
+                <a:spcPct val="150000"/>
+              </a:lnSpc>
+              <a:buFont typeface="Arial" panose="020B0604020202020204" pitchFamily="34" charset="0"/>
+              <a:buChar char="•"/>
+            </a:pPr>
+            <a:r>
+              <a:rPr lang="en-US" sz="1220" dirty="0">
+                <a:solidFill>
+                  <a:srgbClr val="111827"/>
+                </a:solidFill>
+                <a:latin typeface="맑은 고딕" panose="020B0503020000020004" pitchFamily="34" charset="-127"/>
+                <a:ea typeface="맑은 고딕" panose="020B0503020000020004" pitchFamily="34" charset="-127"/>
+                <a:cs typeface="Malgun Gothic" pitchFamily="34" charset="-120"/>
+              </a:rPr>
+              <a:t>화면 모의·제외 범위 명시</a:t>
+            </a:r>
+            <a:endParaRPr lang="en-US" sz="1220" dirty="0">
+              <a:latin typeface="맑은 고딕" panose="020B0503020000020004" pitchFamily="34" charset="-127"/>
+            </a:endParaRPr>
+          </a:p>
+          <a:p>
+            <a:pPr marL="285750" indent="-285750" algn="l">
+              <a:lnSpc>
+                <a:spcPct val="150000"/>
+              </a:lnSpc>
+              <a:buFont typeface="Arial" panose="020B0604020202020204" pitchFamily="34" charset="0"/>
+              <a:buChar char="•"/>
+            </a:pPr>
+            <a:r>
+              <a:rPr lang="en-US" sz="1220" dirty="0">
+                <a:solidFill>
+                  <a:srgbClr val="111827"/>
+                </a:solidFill>
+                <a:latin typeface="맑은 고딕" panose="020B0503020000020004" pitchFamily="34" charset="-127"/>
+                <a:ea typeface="맑은 고딕" panose="020B0503020000020004" pitchFamily="34" charset="-127"/>
+                <a:cs typeface="Malgun Gothic" pitchFamily="34" charset="-120"/>
+              </a:rPr>
+              <a:t>13개 체크리스트로 검수</a:t>
+            </a:r>
+            <a:endParaRPr lang="en-US" sz="1220" dirty="0">
+              <a:latin typeface="맑은 고딕" panose="020B0503020000020004" pitchFamily="34" charset="-127"/>
+            </a:endParaRPr>
           </a:p>
         </p:txBody>
       </p:sp>
@@ -2894,6 +3607,7 @@
         <a:solidFill>
           <a:srgbClr val="F5F8FC"/>
         </a:solidFill>
+        <a:effectLst/>
       </p:bgPr>
     </p:bg>
     <p:spTree>
@@ -2931,7 +3645,7 @@
           <a:bodyPr wrap="square" lIns="0" tIns="0" rIns="0" bIns="0" rtlCol="0" anchor="ctr"/>
           <a:lstStyle/>
           <a:p>
-            <a:pPr indent="0" marL="0">
+            <a:pPr marL="0" indent="0">
               <a:buNone/>
             </a:pPr>
             <a:r>
@@ -2939,13 +3653,15 @@
                 <a:solidFill>
                   <a:srgbClr val="172B53"/>
                 </a:solidFill>
-                <a:latin typeface="Malgun Gothic" pitchFamily="34" charset="0"/>
-                <a:ea typeface="Malgun Gothic" pitchFamily="34" charset="-122"/>
+                <a:latin typeface="맑은 고딕" panose="020B0503020000020004" pitchFamily="34" charset="-127"/>
+                <a:ea typeface="맑은 고딕" panose="020B0503020000020004" pitchFamily="34" charset="-127"/>
                 <a:cs typeface="Malgun Gothic" pitchFamily="34" charset="-120"/>
               </a:rPr>
               <a:t>1차 POC 구현 범위</a:t>
             </a:r>
-            <a:endParaRPr lang="en-US" sz="2200" dirty="0"/>
+            <a:endParaRPr lang="en-US" sz="2200" dirty="0">
+              <a:latin typeface="맑은 고딕" panose="020B0503020000020004" pitchFamily="34" charset="-127"/>
+            </a:endParaRPr>
           </a:p>
         </p:txBody>
       </p:sp>
@@ -2970,7 +3686,7 @@
           <a:bodyPr wrap="square" lIns="0" tIns="0" rIns="0" bIns="0" rtlCol="0" anchor="ctr"/>
           <a:lstStyle/>
           <a:p>
-            <a:pPr indent="0" marL="0">
+            <a:pPr marL="0" indent="0">
               <a:buNone/>
             </a:pPr>
             <a:r>
@@ -2978,13 +3694,15 @@
                 <a:solidFill>
                   <a:srgbClr val="475569"/>
                 </a:solidFill>
-                <a:latin typeface="Malgun Gothic" pitchFamily="34" charset="0"/>
-                <a:ea typeface="Malgun Gothic" pitchFamily="34" charset="-122"/>
+                <a:latin typeface="맑은 고딕" panose="020B0503020000020004" pitchFamily="34" charset="-127"/>
+                <a:ea typeface="맑은 고딕" panose="020B0503020000020004" pitchFamily="34" charset="-127"/>
                 <a:cs typeface="Malgun Gothic" pitchFamily="34" charset="-120"/>
               </a:rPr>
               <a:t>개발자가 추측하지 않도록 실제 구현·간소 구현·화면 모의·제외 범위를 명확히 구분했습니다.</a:t>
             </a:r>
-            <a:endParaRPr lang="en-US" sz="950" dirty="0"/>
+            <a:endParaRPr lang="en-US" sz="950" dirty="0">
+              <a:latin typeface="맑은 고딕" panose="020B0503020000020004" pitchFamily="34" charset="-127"/>
+            </a:endParaRPr>
           </a:p>
         </p:txBody>
       </p:sp>
@@ -3015,7 +3733,7 @@
           <a:bodyPr wrap="square" lIns="254" tIns="254" rIns="254" bIns="254" rtlCol="0" anchor="ctr"/>
           <a:lstStyle/>
           <a:p>
-            <a:pPr algn="ctr" indent="0" marL="0">
+            <a:pPr marL="0" indent="0" algn="ctr">
               <a:buNone/>
             </a:pPr>
             <a:r>
@@ -3023,13 +3741,15 @@
                 <a:solidFill>
                   <a:srgbClr val="0B50D0"/>
                 </a:solidFill>
-                <a:latin typeface="Malgun Gothic" pitchFamily="34" charset="0"/>
-                <a:ea typeface="Malgun Gothic" pitchFamily="34" charset="-122"/>
+                <a:latin typeface="맑은 고딕" panose="020B0503020000020004" pitchFamily="34" charset="-127"/>
+                <a:ea typeface="맑은 고딕" panose="020B0503020000020004" pitchFamily="34" charset="-127"/>
                 <a:cs typeface="Malgun Gothic" pitchFamily="34" charset="-120"/>
               </a:rPr>
               <a:t>YOUNGCHA POC</a:t>
             </a:r>
-            <a:endParaRPr lang="en-US" sz="800" dirty="0"/>
+            <a:endParaRPr lang="en-US" sz="800" dirty="0">
+              <a:latin typeface="맑은 고딕" panose="020B0503020000020004" pitchFamily="34" charset="-127"/>
+            </a:endParaRPr>
           </a:p>
         </p:txBody>
       </p:sp>
@@ -3062,7 +3782,7 @@
           </a:bodyPr>
           <a:lstStyle/>
           <a:p>
-            <a:pPr algn="ctr" indent="0" marL="0">
+            <a:pPr marL="0" indent="0" algn="ctr">
               <a:buNone/>
             </a:pPr>
             <a:r>
@@ -3070,13 +3790,15 @@
                 <a:solidFill>
                   <a:srgbClr val="FFFFFF"/>
                 </a:solidFill>
-                <a:latin typeface="Malgun Gothic" pitchFamily="34" charset="0"/>
-                <a:ea typeface="Malgun Gothic" pitchFamily="34" charset="-122"/>
+                <a:latin typeface="맑은 고딕" panose="020B0503020000020004" pitchFamily="34" charset="-127"/>
+                <a:ea typeface="맑은 고딕" panose="020B0503020000020004" pitchFamily="34" charset="-127"/>
                 <a:cs typeface="Malgun Gothic" pitchFamily="34" charset="-120"/>
               </a:rPr>
               <a:t>실제 구현 핵심 7개</a:t>
             </a:r>
-            <a:endParaRPr lang="en-US" sz="1500" dirty="0"/>
+            <a:endParaRPr lang="en-US" sz="1500" dirty="0">
+              <a:latin typeface="맑은 고딕" panose="020B0503020000020004" pitchFamily="34" charset="-127"/>
+            </a:endParaRPr>
           </a:p>
         </p:txBody>
       </p:sp>
@@ -3088,7 +3810,7 @@
         </p:nvSpPr>
         <p:spPr>
           <a:xfrm>
-            <a:off x="4160520" y="1938528"/>
+            <a:off x="4160520" y="1807893"/>
             <a:ext cx="3886200" cy="2249424"/>
           </a:xfrm>
           <a:prstGeom prst="rect">
@@ -3109,123 +3831,12 @@
           </a:bodyPr>
           <a:lstStyle/>
           <a:p>
-            <a:pPr algn="l" indent="0" marL="0">
-              <a:buNone/>
-            </a:pPr>
-            <a:r>
-              <a:rPr lang="en-US" sz="1220" b="1" dirty="0">
-                <a:solidFill>
-                  <a:srgbClr val="111827"/>
-                </a:solidFill>
-                <a:latin typeface="Malgun Gothic" pitchFamily="34" charset="0"/>
-                <a:ea typeface="Malgun Gothic" pitchFamily="34" charset="-122"/>
-                <a:cs typeface="Malgun Gothic" pitchFamily="34" charset="-120"/>
-              </a:rPr>
-              <a:t>① 베이 상태 서버·DB 저장/조회</a:t>
-            </a:r>
-            <a:endParaRPr lang="en-US" sz="1220" dirty="0"/>
-          </a:p>
-          <a:p>
-            <a:pPr algn="l" indent="0" marL="0">
-              <a:buNone/>
-            </a:pPr>
-            <a:r>
-              <a:rPr lang="en-US" sz="1220" b="1" dirty="0">
-                <a:solidFill>
-                  <a:srgbClr val="111827"/>
-                </a:solidFill>
-                <a:latin typeface="Malgun Gothic" pitchFamily="34" charset="0"/>
-                <a:ea typeface="Malgun Gothic" pitchFamily="34" charset="-122"/>
-                <a:cs typeface="Malgun Gothic" pitchFamily="34" charset="-120"/>
-              </a:rPr>
-              <a:t>② 앱·관리자 동일 베이 데이터 사용</a:t>
-            </a:r>
-            <a:endParaRPr lang="en-US" sz="1220" dirty="0"/>
-          </a:p>
-          <a:p>
-            <a:pPr algn="l" indent="0" marL="0">
-              <a:buNone/>
-            </a:pPr>
-            <a:r>
-              <a:rPr lang="en-US" sz="1220" b="1" dirty="0">
-                <a:solidFill>
-                  <a:srgbClr val="111827"/>
-                </a:solidFill>
-                <a:latin typeface="Malgun Gothic" pitchFamily="34" charset="0"/>
-                <a:ea typeface="Malgun Gothic" pitchFamily="34" charset="-122"/>
-                <a:cs typeface="Malgun Gothic" pitchFamily="34" charset="-120"/>
-              </a:rPr>
-              <a:t>③ 앱 결제 완료 상태 생성</a:t>
-            </a:r>
-            <a:endParaRPr lang="en-US" sz="1220" dirty="0"/>
-          </a:p>
-          <a:p>
-            <a:pPr algn="l" indent="0" marL="0">
-              <a:buNone/>
-            </a:pPr>
-            <a:r>
-              <a:rPr lang="en-US" sz="1220" b="1" dirty="0">
-                <a:solidFill>
-                  <a:srgbClr val="111827"/>
-                </a:solidFill>
-                <a:latin typeface="Malgun Gothic" pitchFamily="34" charset="0"/>
-                <a:ea typeface="Malgun Gothic" pitchFamily="34" charset="-122"/>
-                <a:cs typeface="Malgun Gothic" pitchFamily="34" charset="-120"/>
-              </a:rPr>
-              <a:t>④ 세션 시작·종료 예정 시각 저장</a:t>
-            </a:r>
-            <a:endParaRPr lang="en-US" sz="1220" dirty="0"/>
-          </a:p>
-          <a:p>
-            <a:pPr algn="l" indent="0" marL="0">
-              <a:buNone/>
-            </a:pPr>
-            <a:r>
-              <a:rPr lang="en-US" sz="1220" b="1" dirty="0">
-                <a:solidFill>
-                  <a:srgbClr val="111827"/>
-                </a:solidFill>
-                <a:latin typeface="Malgun Gothic" pitchFamily="34" charset="0"/>
-                <a:ea typeface="Malgun Gothic" pitchFamily="34" charset="-122"/>
-                <a:cs typeface="Malgun Gothic" pitchFamily="34" charset="-120"/>
-              </a:rPr>
-              <a:t>⑤ 결제 완료 시 사용 중 변경</a:t>
-            </a:r>
-            <a:endParaRPr lang="en-US" sz="1220" dirty="0"/>
-          </a:p>
-          <a:p>
-            <a:pPr algn="l" indent="0" marL="0">
-              <a:buNone/>
-            </a:pPr>
-            <a:r>
-              <a:rPr lang="en-US" sz="1220" b="1" dirty="0">
-                <a:solidFill>
-                  <a:srgbClr val="111827"/>
-                </a:solidFill>
-                <a:latin typeface="Malgun Gothic" pitchFamily="34" charset="0"/>
-                <a:ea typeface="Malgun Gothic" pitchFamily="34" charset="-122"/>
-                <a:cs typeface="Malgun Gothic" pitchFamily="34" charset="-120"/>
-              </a:rPr>
-              <a:t>⑥ 완료 시 사용 가능 복귀</a:t>
-            </a:r>
-            <a:endParaRPr lang="en-US" sz="1220" dirty="0"/>
-          </a:p>
-          <a:p>
-            <a:pPr algn="l" indent="0" marL="0">
-              <a:buNone/>
-            </a:pPr>
-            <a:r>
-              <a:rPr lang="en-US" sz="1220" b="1" dirty="0">
-                <a:solidFill>
-                  <a:srgbClr val="111827"/>
-                </a:solidFill>
-                <a:latin typeface="Malgun Gothic" pitchFamily="34" charset="0"/>
-                <a:ea typeface="Malgun Gothic" pitchFamily="34" charset="-122"/>
-                <a:cs typeface="Malgun Gothic" pitchFamily="34" charset="-120"/>
-              </a:rPr>
-              <a:t>⑦ 중복 사용 방지 + 데이터 초기화</a:t>
-            </a:r>
-            <a:endParaRPr lang="en-US" sz="1220" dirty="0"/>
+            <a:pPr marL="0" indent="0" algn="l">
+              <a:buNone/>
+            </a:pPr>
+            <a:endParaRPr lang="en-US" sz="1220" dirty="0">
+              <a:latin typeface="맑은 고딕" panose="020B0503020000020004" pitchFamily="34" charset="-127"/>
+            </a:endParaRPr>
           </a:p>
         </p:txBody>
       </p:sp>
@@ -3258,112 +3869,12 @@
           </a:bodyPr>
           <a:lstStyle/>
           <a:p>
-            <a:pPr algn="l" indent="0" marL="0">
-              <a:buNone/>
-            </a:pPr>
-            <a:r>
-              <a:rPr lang="en-US" sz="1150" b="1" dirty="0">
-                <a:solidFill>
-                  <a:srgbClr val="172B53"/>
-                </a:solidFill>
-                <a:latin typeface="Malgun Gothic" pitchFamily="34" charset="0"/>
-                <a:ea typeface="Malgun Gothic" pitchFamily="34" charset="-122"/>
-                <a:cs typeface="Malgun Gothic" pitchFamily="34" charset="-120"/>
-              </a:rPr>
-              <a:t>간소 구현</a:t>
-            </a:r>
-            <a:endParaRPr lang="en-US" sz="1150" dirty="0"/>
-          </a:p>
-          <a:p>
-            <a:pPr algn="l" indent="0" marL="0">
-              <a:buNone/>
-            </a:pPr>
-            <a:endParaRPr lang="en-US" sz="1150" dirty="0"/>
-          </a:p>
-          <a:p>
-            <a:pPr algn="l" indent="0" marL="0">
-              <a:buNone/>
-            </a:pPr>
-            <a:r>
-              <a:rPr lang="en-US" sz="1150" b="1" dirty="0">
-                <a:solidFill>
-                  <a:srgbClr val="172B53"/>
-                </a:solidFill>
-                <a:latin typeface="Malgun Gothic" pitchFamily="34" charset="0"/>
-                <a:ea typeface="Malgun Gothic" pitchFamily="34" charset="-122"/>
-                <a:cs typeface="Malgun Gothic" pitchFamily="34" charset="-120"/>
-              </a:rPr>
-              <a:t>테스트 계정</a:t>
-            </a:r>
-            <a:endParaRPr lang="en-US" sz="1150" dirty="0"/>
-          </a:p>
-          <a:p>
-            <a:pPr algn="l" indent="0" marL="0">
-              <a:buNone/>
-            </a:pPr>
-            <a:r>
-              <a:rPr lang="en-US" sz="1150" b="1" dirty="0">
-                <a:solidFill>
-                  <a:srgbClr val="172B53"/>
-                </a:solidFill>
-                <a:latin typeface="Malgun Gothic" pitchFamily="34" charset="0"/>
-                <a:ea typeface="Malgun Gothic" pitchFamily="34" charset="-122"/>
-                <a:cs typeface="Malgun Gothic" pitchFamily="34" charset="-120"/>
-              </a:rPr>
-              <a:t>단일 관리자 계정</a:t>
-            </a:r>
-            <a:endParaRPr lang="en-US" sz="1150" dirty="0"/>
-          </a:p>
-          <a:p>
-            <a:pPr algn="l" indent="0" marL="0">
-              <a:buNone/>
-            </a:pPr>
-            <a:r>
-              <a:rPr lang="en-US" sz="1150" b="1" dirty="0">
-                <a:solidFill>
-                  <a:srgbClr val="172B53"/>
-                </a:solidFill>
-                <a:latin typeface="Malgun Gothic" pitchFamily="34" charset="0"/>
-                <a:ea typeface="Malgun Gothic" pitchFamily="34" charset="-122"/>
-                <a:cs typeface="Malgun Gothic" pitchFamily="34" charset="-120"/>
-              </a:rPr>
-              <a:t>결제 완료 상태만</a:t>
-            </a:r>
-            <a:endParaRPr lang="en-US" sz="1150" dirty="0"/>
-          </a:p>
-          <a:p>
-            <a:pPr algn="l" indent="0" marL="0">
-              <a:buNone/>
-            </a:pPr>
-            <a:r>
-              <a:rPr lang="en-US" sz="1150" b="1" dirty="0">
-                <a:solidFill>
-                  <a:srgbClr val="172B53"/>
-                </a:solidFill>
-                <a:latin typeface="Malgun Gothic" pitchFamily="34" charset="0"/>
-                <a:ea typeface="Malgun Gothic" pitchFamily="34" charset="-122"/>
-                <a:cs typeface="Malgun Gothic" pitchFamily="34" charset="-120"/>
-              </a:rPr>
-              <a:t>3~5초 주기 조회</a:t>
-            </a:r>
-            <a:endParaRPr lang="en-US" sz="1150" dirty="0"/>
-          </a:p>
-          <a:p>
-            <a:pPr algn="l" indent="0" marL="0">
-              <a:buNone/>
-            </a:pPr>
-            <a:r>
-              <a:rPr lang="en-US" sz="1150" b="1" dirty="0">
-                <a:solidFill>
-                  <a:srgbClr val="172B53"/>
-                </a:solidFill>
-                <a:latin typeface="Malgun Gothic" pitchFamily="34" charset="0"/>
-                <a:ea typeface="Malgun Gothic" pitchFamily="34" charset="-122"/>
-                <a:cs typeface="Malgun Gothic" pitchFamily="34" charset="-120"/>
-              </a:rPr>
-              <a:t>일반/관리자 2권한</a:t>
-            </a:r>
-            <a:endParaRPr lang="en-US" sz="1150" dirty="0"/>
+            <a:pPr marL="0" indent="0" algn="l">
+              <a:buNone/>
+            </a:pPr>
+            <a:endParaRPr lang="en-US" sz="1150" dirty="0">
+              <a:latin typeface="맑은 고딕" panose="020B0503020000020004" pitchFamily="34" charset="-127"/>
+            </a:endParaRPr>
           </a:p>
         </p:txBody>
       </p:sp>
@@ -3396,112 +3907,12 @@
           </a:bodyPr>
           <a:lstStyle/>
           <a:p>
-            <a:pPr algn="l" indent="0" marL="0">
-              <a:buNone/>
-            </a:pPr>
-            <a:r>
-              <a:rPr lang="en-US" sz="1150" b="1" dirty="0">
-                <a:solidFill>
-                  <a:srgbClr val="111827"/>
-                </a:solidFill>
-                <a:latin typeface="Malgun Gothic" pitchFamily="34" charset="0"/>
-                <a:ea typeface="Malgun Gothic" pitchFamily="34" charset="-122"/>
-                <a:cs typeface="Malgun Gothic" pitchFamily="34" charset="-120"/>
-              </a:rPr>
-              <a:t>화면 모의 유지</a:t>
-            </a:r>
-            <a:endParaRPr lang="en-US" sz="1150" dirty="0"/>
-          </a:p>
-          <a:p>
-            <a:pPr algn="l" indent="0" marL="0">
-              <a:buNone/>
-            </a:pPr>
-            <a:endParaRPr lang="en-US" sz="1150" dirty="0"/>
-          </a:p>
-          <a:p>
-            <a:pPr algn="l" indent="0" marL="0">
-              <a:buNone/>
-            </a:pPr>
-            <a:r>
-              <a:rPr lang="en-US" sz="1150" b="1" dirty="0">
-                <a:solidFill>
-                  <a:srgbClr val="111827"/>
-                </a:solidFill>
-                <a:latin typeface="Malgun Gothic" pitchFamily="34" charset="0"/>
-                <a:ea typeface="Malgun Gothic" pitchFamily="34" charset="-122"/>
-                <a:cs typeface="Malgun Gothic" pitchFamily="34" charset="-120"/>
-              </a:rPr>
-              <a:t>비전 AI</a:t>
-            </a:r>
-            <a:endParaRPr lang="en-US" sz="1150" dirty="0"/>
-          </a:p>
-          <a:p>
-            <a:pPr algn="l" indent="0" marL="0">
-              <a:buNone/>
-            </a:pPr>
-            <a:r>
-              <a:rPr lang="en-US" sz="1150" b="1" dirty="0">
-                <a:solidFill>
-                  <a:srgbClr val="111827"/>
-                </a:solidFill>
-                <a:latin typeface="Malgun Gothic" pitchFamily="34" charset="0"/>
-                <a:ea typeface="Malgun Gothic" pitchFamily="34" charset="-122"/>
-                <a:cs typeface="Malgun Gothic" pitchFamily="34" charset="-120"/>
-              </a:rPr>
-              <a:t>대시보드 KPI/차트</a:t>
-            </a:r>
-            <a:endParaRPr lang="en-US" sz="1150" dirty="0"/>
-          </a:p>
-          <a:p>
-            <a:pPr algn="l" indent="0" marL="0">
-              <a:buNone/>
-            </a:pPr>
-            <a:r>
-              <a:rPr lang="en-US" sz="1150" b="1" dirty="0">
-                <a:solidFill>
-                  <a:srgbClr val="111827"/>
-                </a:solidFill>
-                <a:latin typeface="Malgun Gothic" pitchFamily="34" charset="0"/>
-                <a:ea typeface="Malgun Gothic" pitchFamily="34" charset="-122"/>
-                <a:cs typeface="Malgun Gothic" pitchFamily="34" charset="-120"/>
-              </a:rPr>
-              <a:t>정산 통계</a:t>
-            </a:r>
-            <a:endParaRPr lang="en-US" sz="1150" dirty="0"/>
-          </a:p>
-          <a:p>
-            <a:pPr algn="l" indent="0" marL="0">
-              <a:buNone/>
-            </a:pPr>
-            <a:r>
-              <a:rPr lang="en-US" sz="1150" b="1" dirty="0">
-                <a:solidFill>
-                  <a:srgbClr val="111827"/>
-                </a:solidFill>
-                <a:latin typeface="Malgun Gothic" pitchFamily="34" charset="0"/>
-                <a:ea typeface="Malgun Gothic" pitchFamily="34" charset="-122"/>
-                <a:cs typeface="Malgun Gothic" pitchFamily="34" charset="-120"/>
-              </a:rPr>
-              <a:t>실시간 알림</a:t>
-            </a:r>
-            <a:endParaRPr lang="en-US" sz="1150" dirty="0"/>
-          </a:p>
-          <a:p>
-            <a:pPr algn="l" indent="0" marL="0">
-              <a:buNone/>
-            </a:pPr>
-            <a:r>
-              <a:rPr lang="en-US" sz="1150" b="1" dirty="0">
-                <a:solidFill>
-                  <a:srgbClr val="111827"/>
-                </a:solidFill>
-                <a:latin typeface="Malgun Gothic" pitchFamily="34" charset="0"/>
-                <a:ea typeface="Malgun Gothic" pitchFamily="34" charset="-122"/>
-                <a:cs typeface="Malgun Gothic" pitchFamily="34" charset="-120"/>
-              </a:rPr>
-              <a:t>상세 매출 분석</a:t>
-            </a:r>
-            <a:endParaRPr lang="en-US" sz="1150" dirty="0"/>
+            <a:pPr marL="0" indent="0" algn="l">
+              <a:buNone/>
+            </a:pPr>
+            <a:endParaRPr lang="en-US" sz="1150" dirty="0">
+              <a:latin typeface="맑은 고딕" panose="020B0503020000020004" pitchFamily="34" charset="-127"/>
+            </a:endParaRPr>
           </a:p>
         </p:txBody>
       </p:sp>
@@ -3513,8 +3924,8 @@
         </p:nvSpPr>
         <p:spPr>
           <a:xfrm>
-            <a:off x="685800" y="5166360"/>
-            <a:ext cx="4983480" cy="804672"/>
+            <a:off x="685799" y="4605960"/>
+            <a:ext cx="5271655" cy="1231422"/>
           </a:xfrm>
           <a:prstGeom prst="rect">
             <a:avLst/>
@@ -3534,44 +3945,12 @@
           </a:bodyPr>
           <a:lstStyle/>
           <a:p>
-            <a:pPr algn="l" indent="0" marL="0">
-              <a:buNone/>
-            </a:pPr>
-            <a:r>
-              <a:rPr lang="en-US" sz="1120" b="1" dirty="0">
-                <a:solidFill>
-                  <a:srgbClr val="EC8913"/>
-                </a:solidFill>
-                <a:latin typeface="Malgun Gothic" pitchFamily="34" charset="0"/>
-                <a:ea typeface="Malgun Gothic" pitchFamily="34" charset="-122"/>
-                <a:cs typeface="Malgun Gothic" pitchFamily="34" charset="-120"/>
-              </a:rPr>
-              <a:t>POC 제외</a:t>
-            </a:r>
-            <a:endParaRPr lang="en-US" sz="1120" dirty="0"/>
-          </a:p>
-          <a:p>
-            <a:pPr algn="l" indent="0" marL="0">
-              <a:buNone/>
-            </a:pPr>
-            <a:endParaRPr lang="en-US" sz="1120" dirty="0"/>
-          </a:p>
-          <a:p>
-            <a:pPr algn="l" indent="0" marL="0">
-              <a:buNone/>
-            </a:pPr>
-            <a:r>
-              <a:rPr lang="en-US" sz="1120" b="1" dirty="0">
-                <a:solidFill>
-                  <a:srgbClr val="EC8913"/>
-                </a:solidFill>
-                <a:latin typeface="Malgun Gothic" pitchFamily="34" charset="0"/>
-                <a:ea typeface="Malgun Gothic" pitchFamily="34" charset="-122"/>
-                <a:cs typeface="Malgun Gothic" pitchFamily="34" charset="-120"/>
-              </a:rPr>
-              <a:t>실제 소셜 로그인 · 실제 PG · SMS/카카오 알림 · 다지점/2F 베이 · 복잡 권한 · 감사 로그 · 대규모 트래픽</a:t>
-            </a:r>
-            <a:endParaRPr lang="en-US" sz="1120" dirty="0"/>
+            <a:pPr marL="0" indent="0" algn="l">
+              <a:buNone/>
+            </a:pPr>
+            <a:endParaRPr lang="en-US" sz="1120" dirty="0">
+              <a:latin typeface="맑은 고딕" panose="020B0503020000020004" pitchFamily="34" charset="-127"/>
+            </a:endParaRPr>
           </a:p>
         </p:txBody>
       </p:sp>
@@ -3583,8 +3962,8 @@
         </p:nvSpPr>
         <p:spPr>
           <a:xfrm>
-            <a:off x="6492240" y="5166360"/>
-            <a:ext cx="4983480" cy="804672"/>
+            <a:off x="6234548" y="4605960"/>
+            <a:ext cx="5241172" cy="1231422"/>
           </a:xfrm>
           <a:prstGeom prst="rect">
             <a:avLst/>
@@ -3604,44 +3983,12 @@
           </a:bodyPr>
           <a:lstStyle/>
           <a:p>
-            <a:pPr algn="l" indent="0" marL="0">
-              <a:buNone/>
-            </a:pPr>
-            <a:r>
-              <a:rPr lang="en-US" sz="1120" b="1" dirty="0">
-                <a:solidFill>
-                  <a:srgbClr val="E05C6A"/>
-                </a:solidFill>
-                <a:latin typeface="Malgun Gothic" pitchFamily="34" charset="0"/>
-                <a:ea typeface="Malgun Gothic" pitchFamily="34" charset="-122"/>
-                <a:cs typeface="Malgun Gothic" pitchFamily="34" charset="-120"/>
-              </a:rPr>
-              <a:t>서비스 정책상 미제공</a:t>
-            </a:r>
-            <a:endParaRPr lang="en-US" sz="1120" dirty="0"/>
-          </a:p>
-          <a:p>
-            <a:pPr algn="l" indent="0" marL="0">
-              <a:buNone/>
-            </a:pPr>
-            <a:endParaRPr lang="en-US" sz="1120" dirty="0"/>
-          </a:p>
-          <a:p>
-            <a:pPr algn="l" indent="0" marL="0">
-              <a:buNone/>
-            </a:pPr>
-            <a:r>
-              <a:rPr lang="en-US" sz="1120" b="1" dirty="0">
-                <a:solidFill>
-                  <a:srgbClr val="E05C6A"/>
-                </a:solidFill>
-                <a:latin typeface="Malgun Gothic" pitchFamily="34" charset="0"/>
-                <a:ea typeface="Malgun Gothic" pitchFamily="34" charset="-122"/>
-                <a:cs typeface="Malgun Gothic" pitchFamily="34" charset="-120"/>
-              </a:rPr>
-              <a:t>예약 등록·변경·취소·대기·예약 상태·예약 API·예약 데이터는 만들지 않습니다.</a:t>
-            </a:r>
-            <a:endParaRPr lang="en-US" sz="1120" dirty="0"/>
+            <a:pPr marL="0" indent="0" algn="l">
+              <a:buNone/>
+            </a:pPr>
+            <a:endParaRPr lang="en-US" sz="1120" dirty="0">
+              <a:latin typeface="맑은 고딕" panose="020B0503020000020004" pitchFamily="34" charset="-127"/>
+            </a:endParaRPr>
           </a:p>
         </p:txBody>
       </p:sp>
@@ -3666,7 +4013,7 @@
           <a:bodyPr wrap="square" lIns="0" tIns="0" rIns="0" bIns="0" rtlCol="0" anchor="ctr"/>
           <a:lstStyle/>
           <a:p>
-            <a:pPr indent="0" marL="0">
+            <a:pPr marL="0" indent="0">
               <a:buNone/>
             </a:pPr>
             <a:r>
@@ -3674,13 +4021,714 @@
                 <a:solidFill>
                   <a:srgbClr val="7A8797"/>
                 </a:solidFill>
-                <a:latin typeface="Malgun Gothic" pitchFamily="34" charset="0"/>
-                <a:ea typeface="Malgun Gothic" pitchFamily="34" charset="-122"/>
+                <a:latin typeface="맑은 고딕" panose="020B0503020000020004" pitchFamily="34" charset="-127"/>
+                <a:ea typeface="맑은 고딕" panose="020B0503020000020004" pitchFamily="34" charset="-127"/>
                 <a:cs typeface="Malgun Gothic" pitchFamily="34" charset="-120"/>
               </a:rPr>
               <a:t>영차 1차 POC 범위 공유  |  3</a:t>
             </a:r>
-            <a:endParaRPr lang="en-US" sz="750" dirty="0"/>
+            <a:endParaRPr lang="en-US" sz="750" dirty="0">
+              <a:latin typeface="맑은 고딕" panose="020B0503020000020004" pitchFamily="34" charset="-127"/>
+            </a:endParaRPr>
+          </a:p>
+        </p:txBody>
+      </p:sp>
+      <p:sp>
+        <p:nvSpPr>
+          <p:cNvPr id="12" name="Text 4">
+            <a:extLst>
+              <a:ext uri="{FF2B5EF4-FFF2-40B4-BE49-F238E27FC236}">
+                <a16:creationId xmlns:a16="http://schemas.microsoft.com/office/drawing/2014/main" id="{EDB390D9-3001-6D2F-DA19-96DE6B1A228F}"/>
+              </a:ext>
+            </a:extLst>
+          </p:cNvPr>
+          <p:cNvSpPr/>
+          <p:nvPr/>
+        </p:nvSpPr>
+        <p:spPr>
+          <a:xfrm>
+            <a:off x="4312920" y="1960293"/>
+            <a:ext cx="3886200" cy="2249424"/>
+          </a:xfrm>
+          <a:prstGeom prst="rect">
+            <a:avLst/>
+          </a:prstGeom>
+          <a:noFill/>
+          <a:ln>
+            <a:noFill/>
+          </a:ln>
+        </p:spPr>
+        <p:txBody>
+          <a:bodyPr wrap="square" lIns="2540" tIns="2540" rIns="2540" bIns="2540" rtlCol="0" anchor="t">
+            <a:normAutofit/>
+          </a:bodyPr>
+          <a:lstStyle/>
+          <a:p>
+            <a:pPr marL="0" indent="0" algn="l">
+              <a:lnSpc>
+                <a:spcPct val="150000"/>
+              </a:lnSpc>
+              <a:buNone/>
+            </a:pPr>
+            <a:r>
+              <a:rPr lang="en-US" sz="1220" b="1" dirty="0">
+                <a:solidFill>
+                  <a:srgbClr val="111827"/>
+                </a:solidFill>
+                <a:latin typeface="맑은 고딕" panose="020B0503020000020004" pitchFamily="34" charset="-127"/>
+                <a:ea typeface="맑은 고딕" panose="020B0503020000020004" pitchFamily="34" charset="-127"/>
+                <a:cs typeface="Malgun Gothic" pitchFamily="34" charset="-120"/>
+              </a:rPr>
+              <a:t>① 베이 상태 서버·DB 저장/조회</a:t>
+            </a:r>
+            <a:endParaRPr lang="en-US" sz="1220" dirty="0">
+              <a:latin typeface="맑은 고딕" panose="020B0503020000020004" pitchFamily="34" charset="-127"/>
+            </a:endParaRPr>
+          </a:p>
+          <a:p>
+            <a:pPr marL="0" indent="0" algn="l">
+              <a:lnSpc>
+                <a:spcPct val="150000"/>
+              </a:lnSpc>
+              <a:buNone/>
+            </a:pPr>
+            <a:r>
+              <a:rPr lang="en-US" sz="1220" b="1" dirty="0">
+                <a:solidFill>
+                  <a:srgbClr val="111827"/>
+                </a:solidFill>
+                <a:latin typeface="맑은 고딕" panose="020B0503020000020004" pitchFamily="34" charset="-127"/>
+                <a:ea typeface="맑은 고딕" panose="020B0503020000020004" pitchFamily="34" charset="-127"/>
+                <a:cs typeface="Malgun Gothic" pitchFamily="34" charset="-120"/>
+              </a:rPr>
+              <a:t>② 앱·관리자 동일 베이 데이터 사용</a:t>
+            </a:r>
+            <a:endParaRPr lang="en-US" sz="1220" dirty="0">
+              <a:latin typeface="맑은 고딕" panose="020B0503020000020004" pitchFamily="34" charset="-127"/>
+            </a:endParaRPr>
+          </a:p>
+          <a:p>
+            <a:pPr marL="0" indent="0" algn="l">
+              <a:lnSpc>
+                <a:spcPct val="150000"/>
+              </a:lnSpc>
+              <a:buNone/>
+            </a:pPr>
+            <a:r>
+              <a:rPr lang="en-US" sz="1220" b="1" dirty="0">
+                <a:solidFill>
+                  <a:srgbClr val="111827"/>
+                </a:solidFill>
+                <a:latin typeface="맑은 고딕" panose="020B0503020000020004" pitchFamily="34" charset="-127"/>
+                <a:ea typeface="맑은 고딕" panose="020B0503020000020004" pitchFamily="34" charset="-127"/>
+                <a:cs typeface="Malgun Gothic" pitchFamily="34" charset="-120"/>
+              </a:rPr>
+              <a:t>③ 앱 결제 완료 상태 생성</a:t>
+            </a:r>
+            <a:endParaRPr lang="en-US" sz="1220" dirty="0">
+              <a:latin typeface="맑은 고딕" panose="020B0503020000020004" pitchFamily="34" charset="-127"/>
+            </a:endParaRPr>
+          </a:p>
+          <a:p>
+            <a:pPr marL="0" indent="0" algn="l">
+              <a:lnSpc>
+                <a:spcPct val="150000"/>
+              </a:lnSpc>
+              <a:buNone/>
+            </a:pPr>
+            <a:r>
+              <a:rPr lang="en-US" sz="1220" b="1" dirty="0">
+                <a:solidFill>
+                  <a:srgbClr val="111827"/>
+                </a:solidFill>
+                <a:latin typeface="맑은 고딕" panose="020B0503020000020004" pitchFamily="34" charset="-127"/>
+                <a:ea typeface="맑은 고딕" panose="020B0503020000020004" pitchFamily="34" charset="-127"/>
+                <a:cs typeface="Malgun Gothic" pitchFamily="34" charset="-120"/>
+              </a:rPr>
+              <a:t>④ 세션 시작·종료 예정 시각 저장</a:t>
+            </a:r>
+            <a:endParaRPr lang="en-US" sz="1220" dirty="0">
+              <a:latin typeface="맑은 고딕" panose="020B0503020000020004" pitchFamily="34" charset="-127"/>
+            </a:endParaRPr>
+          </a:p>
+          <a:p>
+            <a:pPr marL="0" indent="0" algn="l">
+              <a:lnSpc>
+                <a:spcPct val="150000"/>
+              </a:lnSpc>
+              <a:buNone/>
+            </a:pPr>
+            <a:r>
+              <a:rPr lang="en-US" sz="1220" b="1" dirty="0">
+                <a:solidFill>
+                  <a:srgbClr val="111827"/>
+                </a:solidFill>
+                <a:latin typeface="맑은 고딕" panose="020B0503020000020004" pitchFamily="34" charset="-127"/>
+                <a:ea typeface="맑은 고딕" panose="020B0503020000020004" pitchFamily="34" charset="-127"/>
+                <a:cs typeface="Malgun Gothic" pitchFamily="34" charset="-120"/>
+              </a:rPr>
+              <a:t>⑤ 결제 완료 시 사용 중 변경</a:t>
+            </a:r>
+            <a:endParaRPr lang="en-US" sz="1220" dirty="0">
+              <a:latin typeface="맑은 고딕" panose="020B0503020000020004" pitchFamily="34" charset="-127"/>
+            </a:endParaRPr>
+          </a:p>
+          <a:p>
+            <a:pPr marL="0" indent="0" algn="l">
+              <a:lnSpc>
+                <a:spcPct val="150000"/>
+              </a:lnSpc>
+              <a:buNone/>
+            </a:pPr>
+            <a:r>
+              <a:rPr lang="en-US" sz="1220" b="1" dirty="0">
+                <a:solidFill>
+                  <a:srgbClr val="111827"/>
+                </a:solidFill>
+                <a:latin typeface="맑은 고딕" panose="020B0503020000020004" pitchFamily="34" charset="-127"/>
+                <a:ea typeface="맑은 고딕" panose="020B0503020000020004" pitchFamily="34" charset="-127"/>
+                <a:cs typeface="Malgun Gothic" pitchFamily="34" charset="-120"/>
+              </a:rPr>
+              <a:t>⑥ 완료 시 사용 가능 복귀</a:t>
+            </a:r>
+            <a:endParaRPr lang="en-US" sz="1220" dirty="0">
+              <a:latin typeface="맑은 고딕" panose="020B0503020000020004" pitchFamily="34" charset="-127"/>
+            </a:endParaRPr>
+          </a:p>
+          <a:p>
+            <a:pPr marL="0" indent="0" algn="l">
+              <a:lnSpc>
+                <a:spcPct val="150000"/>
+              </a:lnSpc>
+              <a:buNone/>
+            </a:pPr>
+            <a:r>
+              <a:rPr lang="en-US" sz="1220" b="1" dirty="0">
+                <a:solidFill>
+                  <a:srgbClr val="111827"/>
+                </a:solidFill>
+                <a:latin typeface="맑은 고딕" panose="020B0503020000020004" pitchFamily="34" charset="-127"/>
+                <a:ea typeface="맑은 고딕" panose="020B0503020000020004" pitchFamily="34" charset="-127"/>
+                <a:cs typeface="Malgun Gothic" pitchFamily="34" charset="-120"/>
+              </a:rPr>
+              <a:t>⑦ 중복 사용 방지 + 데이터 초기화</a:t>
+            </a:r>
+            <a:endParaRPr lang="en-US" sz="1220" dirty="0">
+              <a:latin typeface="맑은 고딕" panose="020B0503020000020004" pitchFamily="34" charset="-127"/>
+            </a:endParaRPr>
+          </a:p>
+        </p:txBody>
+      </p:sp>
+      <p:sp>
+        <p:nvSpPr>
+          <p:cNvPr id="13" name="Text 5">
+            <a:extLst>
+              <a:ext uri="{FF2B5EF4-FFF2-40B4-BE49-F238E27FC236}">
+                <a16:creationId xmlns:a16="http://schemas.microsoft.com/office/drawing/2014/main" id="{3DA22FC9-2E6E-AF4A-B442-FFF2D558CD55}"/>
+              </a:ext>
+            </a:extLst>
+          </p:cNvPr>
+          <p:cNvSpPr/>
+          <p:nvPr/>
+        </p:nvSpPr>
+        <p:spPr>
+          <a:xfrm>
+            <a:off x="838200" y="1688592"/>
+            <a:ext cx="2743200" cy="2377440"/>
+          </a:xfrm>
+          <a:prstGeom prst="rect">
+            <a:avLst/>
+          </a:prstGeom>
+          <a:noFill/>
+          <a:ln>
+            <a:noFill/>
+          </a:ln>
+        </p:spPr>
+        <p:txBody>
+          <a:bodyPr wrap="square" lIns="2540" tIns="2540" rIns="2540" bIns="2540" rtlCol="0" anchor="t">
+            <a:normAutofit/>
+          </a:bodyPr>
+          <a:lstStyle/>
+          <a:p>
+            <a:pPr marL="0" indent="0" algn="l">
+              <a:buNone/>
+            </a:pPr>
+            <a:r>
+              <a:rPr lang="en-US" sz="1150" b="1" dirty="0">
+                <a:solidFill>
+                  <a:srgbClr val="172B53"/>
+                </a:solidFill>
+                <a:latin typeface="맑은 고딕" panose="020B0503020000020004" pitchFamily="34" charset="-127"/>
+                <a:ea typeface="맑은 고딕" panose="020B0503020000020004" pitchFamily="34" charset="-127"/>
+                <a:cs typeface="Malgun Gothic" pitchFamily="34" charset="-120"/>
+              </a:rPr>
+              <a:t>간소 구현</a:t>
+            </a:r>
+            <a:endParaRPr lang="en-US" sz="1150" dirty="0">
+              <a:latin typeface="맑은 고딕" panose="020B0503020000020004" pitchFamily="34" charset="-127"/>
+            </a:endParaRPr>
+          </a:p>
+          <a:p>
+            <a:pPr marL="0" indent="0" algn="l">
+              <a:buNone/>
+            </a:pPr>
+            <a:endParaRPr lang="en-US" sz="1150" dirty="0">
+              <a:latin typeface="맑은 고딕" panose="020B0503020000020004" pitchFamily="34" charset="-127"/>
+            </a:endParaRPr>
+          </a:p>
+          <a:p>
+            <a:pPr marL="171450" indent="-171450" algn="l">
+              <a:lnSpc>
+                <a:spcPct val="150000"/>
+              </a:lnSpc>
+              <a:buFont typeface="Arial" panose="020B0604020202020204" pitchFamily="34" charset="0"/>
+              <a:buChar char="•"/>
+            </a:pPr>
+            <a:r>
+              <a:rPr lang="en-US" sz="1150" b="1" dirty="0">
+                <a:solidFill>
+                  <a:srgbClr val="172B53"/>
+                </a:solidFill>
+                <a:latin typeface="맑은 고딕" panose="020B0503020000020004" pitchFamily="34" charset="-127"/>
+                <a:ea typeface="맑은 고딕" panose="020B0503020000020004" pitchFamily="34" charset="-127"/>
+                <a:cs typeface="Malgun Gothic" pitchFamily="34" charset="-120"/>
+              </a:rPr>
+              <a:t>테스트 계정</a:t>
+            </a:r>
+            <a:endParaRPr lang="en-US" sz="1150" dirty="0">
+              <a:latin typeface="맑은 고딕" panose="020B0503020000020004" pitchFamily="34" charset="-127"/>
+            </a:endParaRPr>
+          </a:p>
+          <a:p>
+            <a:pPr marL="171450" indent="-171450" algn="l">
+              <a:lnSpc>
+                <a:spcPct val="150000"/>
+              </a:lnSpc>
+              <a:buFont typeface="Arial" panose="020B0604020202020204" pitchFamily="34" charset="0"/>
+              <a:buChar char="•"/>
+            </a:pPr>
+            <a:r>
+              <a:rPr lang="en-US" sz="1150" b="1" dirty="0">
+                <a:solidFill>
+                  <a:srgbClr val="172B53"/>
+                </a:solidFill>
+                <a:latin typeface="맑은 고딕" panose="020B0503020000020004" pitchFamily="34" charset="-127"/>
+                <a:ea typeface="맑은 고딕" panose="020B0503020000020004" pitchFamily="34" charset="-127"/>
+                <a:cs typeface="Malgun Gothic" pitchFamily="34" charset="-120"/>
+              </a:rPr>
+              <a:t>단일 관리자 계정</a:t>
+            </a:r>
+            <a:endParaRPr lang="en-US" sz="1150" dirty="0">
+              <a:latin typeface="맑은 고딕" panose="020B0503020000020004" pitchFamily="34" charset="-127"/>
+            </a:endParaRPr>
+          </a:p>
+          <a:p>
+            <a:pPr marL="171450" indent="-171450" algn="l">
+              <a:lnSpc>
+                <a:spcPct val="150000"/>
+              </a:lnSpc>
+              <a:buFont typeface="Arial" panose="020B0604020202020204" pitchFamily="34" charset="0"/>
+              <a:buChar char="•"/>
+            </a:pPr>
+            <a:r>
+              <a:rPr lang="en-US" sz="1150" b="1" dirty="0">
+                <a:solidFill>
+                  <a:srgbClr val="172B53"/>
+                </a:solidFill>
+                <a:latin typeface="맑은 고딕" panose="020B0503020000020004" pitchFamily="34" charset="-127"/>
+                <a:ea typeface="맑은 고딕" panose="020B0503020000020004" pitchFamily="34" charset="-127"/>
+                <a:cs typeface="Malgun Gothic" pitchFamily="34" charset="-120"/>
+              </a:rPr>
+              <a:t>결제 완료 상태만</a:t>
+            </a:r>
+            <a:endParaRPr lang="en-US" sz="1150" dirty="0">
+              <a:latin typeface="맑은 고딕" panose="020B0503020000020004" pitchFamily="34" charset="-127"/>
+            </a:endParaRPr>
+          </a:p>
+          <a:p>
+            <a:pPr marL="171450" indent="-171450" algn="l">
+              <a:lnSpc>
+                <a:spcPct val="150000"/>
+              </a:lnSpc>
+              <a:buFont typeface="Arial" panose="020B0604020202020204" pitchFamily="34" charset="0"/>
+              <a:buChar char="•"/>
+            </a:pPr>
+            <a:r>
+              <a:rPr lang="en-US" sz="1150" b="1" dirty="0">
+                <a:solidFill>
+                  <a:srgbClr val="172B53"/>
+                </a:solidFill>
+                <a:latin typeface="맑은 고딕" panose="020B0503020000020004" pitchFamily="34" charset="-127"/>
+                <a:ea typeface="맑은 고딕" panose="020B0503020000020004" pitchFamily="34" charset="-127"/>
+                <a:cs typeface="Malgun Gothic" pitchFamily="34" charset="-120"/>
+              </a:rPr>
+              <a:t>3~5초 주기 조회</a:t>
+            </a:r>
+            <a:endParaRPr lang="en-US" sz="1150" dirty="0">
+              <a:latin typeface="맑은 고딕" panose="020B0503020000020004" pitchFamily="34" charset="-127"/>
+            </a:endParaRPr>
+          </a:p>
+          <a:p>
+            <a:pPr marL="171450" indent="-171450" algn="l">
+              <a:lnSpc>
+                <a:spcPct val="150000"/>
+              </a:lnSpc>
+              <a:buFont typeface="Arial" panose="020B0604020202020204" pitchFamily="34" charset="0"/>
+              <a:buChar char="•"/>
+            </a:pPr>
+            <a:r>
+              <a:rPr lang="en-US" sz="1150" b="1" dirty="0">
+                <a:solidFill>
+                  <a:srgbClr val="172B53"/>
+                </a:solidFill>
+                <a:latin typeface="맑은 고딕" panose="020B0503020000020004" pitchFamily="34" charset="-127"/>
+                <a:ea typeface="맑은 고딕" panose="020B0503020000020004" pitchFamily="34" charset="-127"/>
+                <a:cs typeface="Malgun Gothic" pitchFamily="34" charset="-120"/>
+              </a:rPr>
+              <a:t>일반/관리자 2권한</a:t>
+            </a:r>
+            <a:endParaRPr lang="en-US" sz="1150" dirty="0">
+              <a:latin typeface="맑은 고딕" panose="020B0503020000020004" pitchFamily="34" charset="-127"/>
+            </a:endParaRPr>
+          </a:p>
+        </p:txBody>
+      </p:sp>
+      <p:sp>
+        <p:nvSpPr>
+          <p:cNvPr id="14" name="Text 6">
+            <a:extLst>
+              <a:ext uri="{FF2B5EF4-FFF2-40B4-BE49-F238E27FC236}">
+                <a16:creationId xmlns:a16="http://schemas.microsoft.com/office/drawing/2014/main" id="{739CE40B-21B1-C6E1-A36F-805AF88C6621}"/>
+              </a:ext>
+            </a:extLst>
+          </p:cNvPr>
+          <p:cNvSpPr/>
+          <p:nvPr/>
+        </p:nvSpPr>
+        <p:spPr>
+          <a:xfrm>
+            <a:off x="8884920" y="1688592"/>
+            <a:ext cx="2743200" cy="2377440"/>
+          </a:xfrm>
+          <a:prstGeom prst="rect">
+            <a:avLst/>
+          </a:prstGeom>
+          <a:noFill/>
+          <a:ln>
+            <a:noFill/>
+          </a:ln>
+        </p:spPr>
+        <p:txBody>
+          <a:bodyPr wrap="square" lIns="2540" tIns="2540" rIns="2540" bIns="2540" rtlCol="0" anchor="t">
+            <a:normAutofit/>
+          </a:bodyPr>
+          <a:lstStyle/>
+          <a:p>
+            <a:pPr marL="0" indent="0" algn="l">
+              <a:lnSpc>
+                <a:spcPct val="150000"/>
+              </a:lnSpc>
+              <a:buNone/>
+            </a:pPr>
+            <a:r>
+              <a:rPr lang="en-US" sz="1150" b="1" dirty="0">
+                <a:solidFill>
+                  <a:srgbClr val="111827"/>
+                </a:solidFill>
+                <a:latin typeface="맑은 고딕" panose="020B0503020000020004" pitchFamily="34" charset="-127"/>
+                <a:ea typeface="맑은 고딕" panose="020B0503020000020004" pitchFamily="34" charset="-127"/>
+                <a:cs typeface="Malgun Gothic" pitchFamily="34" charset="-120"/>
+              </a:rPr>
+              <a:t>화면 모의 유지</a:t>
+            </a:r>
+            <a:endParaRPr lang="en-US" sz="1150" dirty="0">
+              <a:latin typeface="맑은 고딕" panose="020B0503020000020004" pitchFamily="34" charset="-127"/>
+            </a:endParaRPr>
+          </a:p>
+          <a:p>
+            <a:pPr marL="0" indent="0" algn="l">
+              <a:lnSpc>
+                <a:spcPct val="150000"/>
+              </a:lnSpc>
+              <a:buNone/>
+            </a:pPr>
+            <a:endParaRPr lang="en-US" sz="1150" dirty="0">
+              <a:latin typeface="맑은 고딕" panose="020B0503020000020004" pitchFamily="34" charset="-127"/>
+            </a:endParaRPr>
+          </a:p>
+          <a:p>
+            <a:pPr marL="171450" indent="-171450" algn="l">
+              <a:lnSpc>
+                <a:spcPct val="150000"/>
+              </a:lnSpc>
+              <a:buFont typeface="Arial" panose="020B0604020202020204" pitchFamily="34" charset="0"/>
+              <a:buChar char="•"/>
+            </a:pPr>
+            <a:r>
+              <a:rPr lang="en-US" sz="1150" b="1" dirty="0">
+                <a:solidFill>
+                  <a:srgbClr val="111827"/>
+                </a:solidFill>
+                <a:latin typeface="맑은 고딕" panose="020B0503020000020004" pitchFamily="34" charset="-127"/>
+                <a:ea typeface="맑은 고딕" panose="020B0503020000020004" pitchFamily="34" charset="-127"/>
+                <a:cs typeface="Malgun Gothic" pitchFamily="34" charset="-120"/>
+              </a:rPr>
+              <a:t>비전 AI</a:t>
+            </a:r>
+            <a:endParaRPr lang="en-US" sz="1150" dirty="0">
+              <a:latin typeface="맑은 고딕" panose="020B0503020000020004" pitchFamily="34" charset="-127"/>
+            </a:endParaRPr>
+          </a:p>
+          <a:p>
+            <a:pPr marL="171450" indent="-171450" algn="l">
+              <a:lnSpc>
+                <a:spcPct val="150000"/>
+              </a:lnSpc>
+              <a:buFont typeface="Arial" panose="020B0604020202020204" pitchFamily="34" charset="0"/>
+              <a:buChar char="•"/>
+            </a:pPr>
+            <a:r>
+              <a:rPr lang="en-US" sz="1150" b="1" dirty="0">
+                <a:solidFill>
+                  <a:srgbClr val="111827"/>
+                </a:solidFill>
+                <a:latin typeface="맑은 고딕" panose="020B0503020000020004" pitchFamily="34" charset="-127"/>
+                <a:ea typeface="맑은 고딕" panose="020B0503020000020004" pitchFamily="34" charset="-127"/>
+                <a:cs typeface="Malgun Gothic" pitchFamily="34" charset="-120"/>
+              </a:rPr>
+              <a:t>대시보드 KPI/차트</a:t>
+            </a:r>
+            <a:endParaRPr lang="en-US" sz="1150" dirty="0">
+              <a:latin typeface="맑은 고딕" panose="020B0503020000020004" pitchFamily="34" charset="-127"/>
+            </a:endParaRPr>
+          </a:p>
+          <a:p>
+            <a:pPr marL="171450" indent="-171450" algn="l">
+              <a:lnSpc>
+                <a:spcPct val="150000"/>
+              </a:lnSpc>
+              <a:buFont typeface="Arial" panose="020B0604020202020204" pitchFamily="34" charset="0"/>
+              <a:buChar char="•"/>
+            </a:pPr>
+            <a:r>
+              <a:rPr lang="en-US" sz="1150" b="1" dirty="0">
+                <a:solidFill>
+                  <a:srgbClr val="111827"/>
+                </a:solidFill>
+                <a:latin typeface="맑은 고딕" panose="020B0503020000020004" pitchFamily="34" charset="-127"/>
+                <a:ea typeface="맑은 고딕" panose="020B0503020000020004" pitchFamily="34" charset="-127"/>
+                <a:cs typeface="Malgun Gothic" pitchFamily="34" charset="-120"/>
+              </a:rPr>
+              <a:t>정산 통계</a:t>
+            </a:r>
+            <a:endParaRPr lang="en-US" sz="1150" dirty="0">
+              <a:latin typeface="맑은 고딕" panose="020B0503020000020004" pitchFamily="34" charset="-127"/>
+            </a:endParaRPr>
+          </a:p>
+          <a:p>
+            <a:pPr marL="171450" indent="-171450" algn="l">
+              <a:lnSpc>
+                <a:spcPct val="150000"/>
+              </a:lnSpc>
+              <a:buFont typeface="Arial" panose="020B0604020202020204" pitchFamily="34" charset="0"/>
+              <a:buChar char="•"/>
+            </a:pPr>
+            <a:r>
+              <a:rPr lang="en-US" sz="1150" b="1" dirty="0">
+                <a:solidFill>
+                  <a:srgbClr val="111827"/>
+                </a:solidFill>
+                <a:latin typeface="맑은 고딕" panose="020B0503020000020004" pitchFamily="34" charset="-127"/>
+                <a:ea typeface="맑은 고딕" panose="020B0503020000020004" pitchFamily="34" charset="-127"/>
+                <a:cs typeface="Malgun Gothic" pitchFamily="34" charset="-120"/>
+              </a:rPr>
+              <a:t>실시간 알림</a:t>
+            </a:r>
+            <a:endParaRPr lang="en-US" sz="1150" dirty="0">
+              <a:latin typeface="맑은 고딕" panose="020B0503020000020004" pitchFamily="34" charset="-127"/>
+            </a:endParaRPr>
+          </a:p>
+          <a:p>
+            <a:pPr marL="171450" indent="-171450" algn="l">
+              <a:lnSpc>
+                <a:spcPct val="150000"/>
+              </a:lnSpc>
+              <a:buFont typeface="Arial" panose="020B0604020202020204" pitchFamily="34" charset="0"/>
+              <a:buChar char="•"/>
+            </a:pPr>
+            <a:r>
+              <a:rPr lang="en-US" sz="1150" b="1" dirty="0">
+                <a:solidFill>
+                  <a:srgbClr val="111827"/>
+                </a:solidFill>
+                <a:latin typeface="맑은 고딕" panose="020B0503020000020004" pitchFamily="34" charset="-127"/>
+                <a:ea typeface="맑은 고딕" panose="020B0503020000020004" pitchFamily="34" charset="-127"/>
+                <a:cs typeface="Malgun Gothic" pitchFamily="34" charset="-120"/>
+              </a:rPr>
+              <a:t>상세 매출 분석</a:t>
+            </a:r>
+            <a:endParaRPr lang="en-US" sz="1150" dirty="0">
+              <a:latin typeface="맑은 고딕" panose="020B0503020000020004" pitchFamily="34" charset="-127"/>
+            </a:endParaRPr>
+          </a:p>
+        </p:txBody>
+      </p:sp>
+      <p:sp>
+        <p:nvSpPr>
+          <p:cNvPr id="15" name="Text 7">
+            <a:extLst>
+              <a:ext uri="{FF2B5EF4-FFF2-40B4-BE49-F238E27FC236}">
+                <a16:creationId xmlns:a16="http://schemas.microsoft.com/office/drawing/2014/main" id="{75C8C1D9-2727-340B-D644-B69F216E0E54}"/>
+              </a:ext>
+            </a:extLst>
+          </p:cNvPr>
+          <p:cNvSpPr/>
+          <p:nvPr/>
+        </p:nvSpPr>
+        <p:spPr>
+          <a:xfrm>
+            <a:off x="838200" y="4758360"/>
+            <a:ext cx="4983480" cy="804672"/>
+          </a:xfrm>
+          <a:prstGeom prst="rect">
+            <a:avLst/>
+          </a:prstGeom>
+          <a:noFill/>
+          <a:ln>
+            <a:noFill/>
+          </a:ln>
+        </p:spPr>
+        <p:txBody>
+          <a:bodyPr wrap="square" lIns="2286" tIns="2286" rIns="2286" bIns="2286" rtlCol="0" anchor="t">
+            <a:normAutofit lnSpcReduction="10000"/>
+          </a:bodyPr>
+          <a:lstStyle/>
+          <a:p>
+            <a:pPr marL="0" indent="0" algn="l">
+              <a:buNone/>
+            </a:pPr>
+            <a:r>
+              <a:rPr lang="en-US" sz="1120" b="1" dirty="0">
+                <a:solidFill>
+                  <a:srgbClr val="EC8913"/>
+                </a:solidFill>
+                <a:latin typeface="맑은 고딕" panose="020B0503020000020004" pitchFamily="34" charset="-127"/>
+                <a:ea typeface="맑은 고딕" panose="020B0503020000020004" pitchFamily="34" charset="-127"/>
+                <a:cs typeface="Malgun Gothic" pitchFamily="34" charset="-120"/>
+              </a:rPr>
+              <a:t>POC 제외</a:t>
+            </a:r>
+            <a:endParaRPr lang="en-US" sz="1120" dirty="0">
+              <a:latin typeface="맑은 고딕" panose="020B0503020000020004" pitchFamily="34" charset="-127"/>
+            </a:endParaRPr>
+          </a:p>
+          <a:p>
+            <a:pPr marL="0" indent="0" algn="l">
+              <a:buNone/>
+            </a:pPr>
+            <a:endParaRPr lang="en-US" sz="1120" dirty="0">
+              <a:latin typeface="맑은 고딕" panose="020B0503020000020004" pitchFamily="34" charset="-127"/>
+            </a:endParaRPr>
+          </a:p>
+          <a:p>
+            <a:pPr marL="0" indent="0" algn="l">
+              <a:lnSpc>
+                <a:spcPct val="150000"/>
+              </a:lnSpc>
+              <a:buNone/>
+            </a:pPr>
+            <a:r>
+              <a:rPr lang="en-US" sz="1120" b="1" dirty="0">
+                <a:solidFill>
+                  <a:srgbClr val="EC8913"/>
+                </a:solidFill>
+                <a:latin typeface="맑은 고딕" panose="020B0503020000020004" pitchFamily="34" charset="-127"/>
+                <a:ea typeface="맑은 고딕" panose="020B0503020000020004" pitchFamily="34" charset="-127"/>
+                <a:cs typeface="Malgun Gothic" pitchFamily="34" charset="-120"/>
+              </a:rPr>
+              <a:t>실제 소셜 로그인 · 실제 PG · SMS/카카오 알림 · 다지점/2F 베이 · 복잡 권한 · 감사 로그 · 대규모 트래픽</a:t>
+            </a:r>
+            <a:endParaRPr lang="en-US" sz="1120" dirty="0">
+              <a:latin typeface="맑은 고딕" panose="020B0503020000020004" pitchFamily="34" charset="-127"/>
+            </a:endParaRPr>
+          </a:p>
+        </p:txBody>
+      </p:sp>
+      <p:sp>
+        <p:nvSpPr>
+          <p:cNvPr id="16" name="Text 8">
+            <a:extLst>
+              <a:ext uri="{FF2B5EF4-FFF2-40B4-BE49-F238E27FC236}">
+                <a16:creationId xmlns:a16="http://schemas.microsoft.com/office/drawing/2014/main" id="{784B349F-F737-5E1B-0231-DCF883762494}"/>
+              </a:ext>
+            </a:extLst>
+          </p:cNvPr>
+          <p:cNvSpPr/>
+          <p:nvPr/>
+        </p:nvSpPr>
+        <p:spPr>
+          <a:xfrm>
+            <a:off x="6393180" y="4758360"/>
+            <a:ext cx="4983480" cy="804672"/>
+          </a:xfrm>
+          <a:prstGeom prst="rect">
+            <a:avLst/>
+          </a:prstGeom>
+          <a:noFill/>
+          <a:ln>
+            <a:noFill/>
+          </a:ln>
+        </p:spPr>
+        <p:txBody>
+          <a:bodyPr wrap="square" lIns="2286" tIns="2286" rIns="2286" bIns="2286" rtlCol="0" anchor="t">
+            <a:normAutofit/>
+          </a:bodyPr>
+          <a:lstStyle/>
+          <a:p>
+            <a:pPr marL="0" indent="0" algn="l">
+              <a:buNone/>
+            </a:pPr>
+            <a:r>
+              <a:rPr lang="en-US" sz="1120" b="1" dirty="0">
+                <a:solidFill>
+                  <a:srgbClr val="E05C6A"/>
+                </a:solidFill>
+                <a:latin typeface="맑은 고딕" panose="020B0503020000020004" pitchFamily="34" charset="-127"/>
+                <a:ea typeface="맑은 고딕" panose="020B0503020000020004" pitchFamily="34" charset="-127"/>
+                <a:cs typeface="Malgun Gothic" pitchFamily="34" charset="-120"/>
+              </a:rPr>
+              <a:t>서비스 정책상 미제공</a:t>
+            </a:r>
+            <a:endParaRPr lang="en-US" sz="1120" dirty="0">
+              <a:latin typeface="맑은 고딕" panose="020B0503020000020004" pitchFamily="34" charset="-127"/>
+            </a:endParaRPr>
+          </a:p>
+          <a:p>
+            <a:pPr marL="0" indent="0" algn="l">
+              <a:buNone/>
+            </a:pPr>
+            <a:endParaRPr lang="en-US" sz="1120" dirty="0">
+              <a:latin typeface="맑은 고딕" panose="020B0503020000020004" pitchFamily="34" charset="-127"/>
+            </a:endParaRPr>
+          </a:p>
+          <a:p>
+            <a:pPr marL="0" indent="0" algn="l">
+              <a:buNone/>
+            </a:pPr>
+            <a:r>
+              <a:rPr lang="en-US" sz="1120" b="1" dirty="0">
+                <a:solidFill>
+                  <a:srgbClr val="E05C6A"/>
+                </a:solidFill>
+                <a:latin typeface="맑은 고딕" panose="020B0503020000020004" pitchFamily="34" charset="-127"/>
+                <a:ea typeface="맑은 고딕" panose="020B0503020000020004" pitchFamily="34" charset="-127"/>
+                <a:cs typeface="Malgun Gothic" pitchFamily="34" charset="-120"/>
+              </a:rPr>
+              <a:t>예약 등록·변경·취소·대기·예약 상태·예약 API·예약 데이터는 만들지 않습니다.</a:t>
+            </a:r>
+            <a:endParaRPr lang="en-US" sz="1120" dirty="0">
+              <a:latin typeface="맑은 고딕" panose="020B0503020000020004" pitchFamily="34" charset="-127"/>
+            </a:endParaRPr>
           </a:p>
         </p:txBody>
       </p:sp>
@@ -3700,6 +4748,7 @@
         <a:solidFill>
           <a:srgbClr val="F5F8FC"/>
         </a:solidFill>
+        <a:effectLst/>
       </p:bgPr>
     </p:bg>
     <p:spTree>
@@ -3737,7 +4786,7 @@
           <a:bodyPr wrap="square" lIns="0" tIns="0" rIns="0" bIns="0" rtlCol="0" anchor="ctr"/>
           <a:lstStyle/>
           <a:p>
-            <a:pPr indent="0" marL="0">
+            <a:pPr marL="0" indent="0">
               <a:buNone/>
             </a:pPr>
             <a:r>
@@ -3745,13 +4794,15 @@
                 <a:solidFill>
                   <a:srgbClr val="172B53"/>
                 </a:solidFill>
-                <a:latin typeface="Malgun Gothic" pitchFamily="34" charset="0"/>
-                <a:ea typeface="Malgun Gothic" pitchFamily="34" charset="-122"/>
+                <a:latin typeface="맑은 고딕" panose="020B0503020000020004" pitchFamily="34" charset="-127"/>
+                <a:ea typeface="맑은 고딕" panose="020B0503020000020004" pitchFamily="34" charset="-127"/>
                 <a:cs typeface="Malgun Gothic" pitchFamily="34" charset="-120"/>
               </a:rPr>
               <a:t>핵심 시나리오: 앱 ↔ 관리자 베이 상태 동기화</a:t>
             </a:r>
-            <a:endParaRPr lang="en-US" sz="2200" dirty="0"/>
+            <a:endParaRPr lang="en-US" sz="2200" dirty="0">
+              <a:latin typeface="맑은 고딕" panose="020B0503020000020004" pitchFamily="34" charset="-127"/>
+            </a:endParaRPr>
           </a:p>
         </p:txBody>
       </p:sp>
@@ -3776,7 +4827,7 @@
           <a:bodyPr wrap="square" lIns="0" tIns="0" rIns="0" bIns="0" rtlCol="0" anchor="ctr"/>
           <a:lstStyle/>
           <a:p>
-            <a:pPr indent="0" marL="0">
+            <a:pPr marL="0" indent="0">
               <a:buNone/>
             </a:pPr>
             <a:r>
@@ -3784,13 +4835,15 @@
                 <a:solidFill>
                   <a:srgbClr val="475569"/>
                 </a:solidFill>
-                <a:latin typeface="Malgun Gothic" pitchFamily="34" charset="0"/>
-                <a:ea typeface="Malgun Gothic" pitchFamily="34" charset="-122"/>
+                <a:latin typeface="맑은 고딕" panose="020B0503020000020004" pitchFamily="34" charset="-127"/>
+                <a:ea typeface="맑은 고딕" panose="020B0503020000020004" pitchFamily="34" charset="-127"/>
                 <a:cs typeface="Malgun Gothic" pitchFamily="34" charset="-120"/>
               </a:rPr>
               <a:t>사용자는 즉시 결제하고, 관리자는 같은 서버 데이터를 통해 사용 상태를 확인합니다.</a:t>
             </a:r>
-            <a:endParaRPr lang="en-US" sz="950" dirty="0"/>
+            <a:endParaRPr lang="en-US" sz="950" dirty="0">
+              <a:latin typeface="맑은 고딕" panose="020B0503020000020004" pitchFamily="34" charset="-127"/>
+            </a:endParaRPr>
           </a:p>
         </p:txBody>
       </p:sp>
@@ -3821,7 +4874,7 @@
           <a:bodyPr wrap="square" lIns="254" tIns="254" rIns="254" bIns="254" rtlCol="0" anchor="ctr"/>
           <a:lstStyle/>
           <a:p>
-            <a:pPr algn="ctr" indent="0" marL="0">
+            <a:pPr marL="0" indent="0" algn="ctr">
               <a:buNone/>
             </a:pPr>
             <a:r>
@@ -3829,13 +4882,15 @@
                 <a:solidFill>
                   <a:srgbClr val="0B50D0"/>
                 </a:solidFill>
-                <a:latin typeface="Malgun Gothic" pitchFamily="34" charset="0"/>
-                <a:ea typeface="Malgun Gothic" pitchFamily="34" charset="-122"/>
+                <a:latin typeface="맑은 고딕" panose="020B0503020000020004" pitchFamily="34" charset="-127"/>
+                <a:ea typeface="맑은 고딕" panose="020B0503020000020004" pitchFamily="34" charset="-127"/>
                 <a:cs typeface="Malgun Gothic" pitchFamily="34" charset="-120"/>
               </a:rPr>
               <a:t>YOUNGCHA POC</a:t>
             </a:r>
-            <a:endParaRPr lang="en-US" sz="800" dirty="0"/>
+            <a:endParaRPr lang="en-US" sz="800" dirty="0">
+              <a:latin typeface="맑은 고딕" panose="020B0503020000020004" pitchFamily="34" charset="-127"/>
+            </a:endParaRPr>
           </a:p>
         </p:txBody>
       </p:sp>
@@ -3868,7 +4923,7 @@
           </a:bodyPr>
           <a:lstStyle/>
           <a:p>
-            <a:pPr algn="ctr" indent="0" marL="0">
+            <a:pPr marL="0" indent="0" algn="ctr">
               <a:buNone/>
             </a:pPr>
             <a:r>
@@ -3876,13 +4931,15 @@
                 <a:solidFill>
                   <a:srgbClr val="FFFFFF"/>
                 </a:solidFill>
-                <a:latin typeface="Malgun Gothic" pitchFamily="34" charset="0"/>
-                <a:ea typeface="Malgun Gothic" pitchFamily="34" charset="-122"/>
+                <a:latin typeface="맑은 고딕" panose="020B0503020000020004" pitchFamily="34" charset="-127"/>
+                <a:ea typeface="맑은 고딕" panose="020B0503020000020004" pitchFamily="34" charset="-127"/>
                 <a:cs typeface="Malgun Gothic" pitchFamily="34" charset="-120"/>
               </a:rPr>
               <a:t>고객 앱</a:t>
             </a:r>
-            <a:endParaRPr lang="en-US" sz="1200" dirty="0"/>
+            <a:endParaRPr lang="en-US" sz="1200" dirty="0">
+              <a:latin typeface="맑은 고딕" panose="020B0503020000020004" pitchFamily="34" charset="-127"/>
+            </a:endParaRPr>
           </a:p>
         </p:txBody>
       </p:sp>
@@ -3915,7 +4972,7 @@
           </a:bodyPr>
           <a:lstStyle/>
           <a:p>
-            <a:pPr algn="ctr" indent="0" marL="0">
+            <a:pPr marL="0" indent="0" algn="ctr">
               <a:buNone/>
             </a:pPr>
             <a:r>
@@ -3923,13 +4980,15 @@
                 <a:solidFill>
                   <a:srgbClr val="FFFFFF"/>
                 </a:solidFill>
-                <a:latin typeface="Malgun Gothic" pitchFamily="34" charset="0"/>
-                <a:ea typeface="Malgun Gothic" pitchFamily="34" charset="-122"/>
+                <a:latin typeface="맑은 고딕" panose="020B0503020000020004" pitchFamily="34" charset="-127"/>
+                <a:ea typeface="맑은 고딕" panose="020B0503020000020004" pitchFamily="34" charset="-127"/>
                 <a:cs typeface="Malgun Gothic" pitchFamily="34" charset="-120"/>
               </a:rPr>
               <a:t>서버·DB</a:t>
             </a:r>
-            <a:endParaRPr lang="en-US" sz="1200" dirty="0"/>
+            <a:endParaRPr lang="en-US" sz="1200" dirty="0">
+              <a:latin typeface="맑은 고딕" panose="020B0503020000020004" pitchFamily="34" charset="-127"/>
+            </a:endParaRPr>
           </a:p>
         </p:txBody>
       </p:sp>
@@ -3962,7 +5021,7 @@
           </a:bodyPr>
           <a:lstStyle/>
           <a:p>
-            <a:pPr algn="ctr" indent="0" marL="0">
+            <a:pPr marL="0" indent="0" algn="ctr">
               <a:buNone/>
             </a:pPr>
             <a:r>
@@ -3970,13 +5029,15 @@
                 <a:solidFill>
                   <a:srgbClr val="FFFFFF"/>
                 </a:solidFill>
-                <a:latin typeface="Malgun Gothic" pitchFamily="34" charset="0"/>
-                <a:ea typeface="Malgun Gothic" pitchFamily="34" charset="-122"/>
+                <a:latin typeface="맑은 고딕" panose="020B0503020000020004" pitchFamily="34" charset="-127"/>
+                <a:ea typeface="맑은 고딕" panose="020B0503020000020004" pitchFamily="34" charset="-127"/>
                 <a:cs typeface="Malgun Gothic" pitchFamily="34" charset="-120"/>
               </a:rPr>
               <a:t>관리자</a:t>
             </a:r>
-            <a:endParaRPr lang="en-US" sz="1200" dirty="0"/>
+            <a:endParaRPr lang="en-US" sz="1200" dirty="0">
+              <a:latin typeface="맑은 고딕" panose="020B0503020000020004" pitchFamily="34" charset="-127"/>
+            </a:endParaRPr>
           </a:p>
         </p:txBody>
       </p:sp>
@@ -4009,7 +5070,7 @@
           </a:bodyPr>
           <a:lstStyle/>
           <a:p>
-            <a:pPr algn="ctr" indent="0" marL="0">
+            <a:pPr marL="0" indent="0" algn="ctr">
               <a:buNone/>
             </a:pPr>
             <a:r>
@@ -4017,13 +5078,15 @@
                 <a:solidFill>
                   <a:srgbClr val="0B50D0"/>
                 </a:solidFill>
-                <a:latin typeface="Malgun Gothic" pitchFamily="34" charset="0"/>
-                <a:ea typeface="Malgun Gothic" pitchFamily="34" charset="-122"/>
+                <a:latin typeface="맑은 고딕" panose="020B0503020000020004" pitchFamily="34" charset="-127"/>
+                <a:ea typeface="맑은 고딕" panose="020B0503020000020004" pitchFamily="34" charset="-127"/>
                 <a:cs typeface="Malgun Gothic" pitchFamily="34" charset="-120"/>
               </a:rPr>
               <a:t>빈 베이 선택</a:t>
             </a:r>
-            <a:endParaRPr lang="en-US" sz="1050" dirty="0"/>
+            <a:endParaRPr lang="en-US" sz="1050" dirty="0">
+              <a:latin typeface="맑은 고딕" panose="020B0503020000020004" pitchFamily="34" charset="-127"/>
+            </a:endParaRPr>
           </a:p>
         </p:txBody>
       </p:sp>
@@ -4056,7 +5119,7 @@
           </a:bodyPr>
           <a:lstStyle/>
           <a:p>
-            <a:pPr algn="ctr" indent="0" marL="0">
+            <a:pPr marL="0" indent="0" algn="ctr">
               <a:buNone/>
             </a:pPr>
             <a:r>
@@ -4064,13 +5127,15 @@
                 <a:solidFill>
                   <a:srgbClr val="0B50D0"/>
                 </a:solidFill>
-                <a:latin typeface="Malgun Gothic" pitchFamily="34" charset="0"/>
-                <a:ea typeface="Malgun Gothic" pitchFamily="34" charset="-122"/>
+                <a:latin typeface="맑은 고딕" panose="020B0503020000020004" pitchFamily="34" charset="-127"/>
+                <a:ea typeface="맑은 고딕" panose="020B0503020000020004" pitchFamily="34" charset="-127"/>
                 <a:cs typeface="Malgun Gothic" pitchFamily="34" charset="-120"/>
               </a:rPr>
               <a:t>즉시 결제</a:t>
             </a:r>
-            <a:endParaRPr lang="en-US" sz="1050" dirty="0"/>
+            <a:endParaRPr lang="en-US" sz="1050" dirty="0">
+              <a:latin typeface="맑은 고딕" panose="020B0503020000020004" pitchFamily="34" charset="-127"/>
+            </a:endParaRPr>
           </a:p>
         </p:txBody>
       </p:sp>
@@ -4103,7 +5168,7 @@
           </a:bodyPr>
           <a:lstStyle/>
           <a:p>
-            <a:pPr algn="ctr" indent="0" marL="0">
+            <a:pPr marL="0" indent="0" algn="ctr">
               <a:buNone/>
             </a:pPr>
             <a:r>
@@ -4111,13 +5176,15 @@
                 <a:solidFill>
                   <a:srgbClr val="0B50D0"/>
                 </a:solidFill>
-                <a:latin typeface="Malgun Gothic" pitchFamily="34" charset="0"/>
-                <a:ea typeface="Malgun Gothic" pitchFamily="34" charset="-122"/>
+                <a:latin typeface="맑은 고딕" panose="020B0503020000020004" pitchFamily="34" charset="-127"/>
+                <a:ea typeface="맑은 고딕" panose="020B0503020000020004" pitchFamily="34" charset="-127"/>
                 <a:cs typeface="Malgun Gothic" pitchFamily="34" charset="-120"/>
               </a:rPr>
               <a:t>세차 진행</a:t>
             </a:r>
-            <a:endParaRPr lang="en-US" sz="1050" dirty="0"/>
+            <a:endParaRPr lang="en-US" sz="1050" dirty="0">
+              <a:latin typeface="맑은 고딕" panose="020B0503020000020004" pitchFamily="34" charset="-127"/>
+            </a:endParaRPr>
           </a:p>
         </p:txBody>
       </p:sp>
@@ -4150,7 +5217,7 @@
           </a:bodyPr>
           <a:lstStyle/>
           <a:p>
-            <a:pPr algn="ctr" indent="0" marL="0">
+            <a:pPr marL="0" indent="0" algn="ctr">
               <a:buNone/>
             </a:pPr>
             <a:r>
@@ -4158,13 +5225,15 @@
                 <a:solidFill>
                   <a:srgbClr val="0B50D0"/>
                 </a:solidFill>
-                <a:latin typeface="Malgun Gothic" pitchFamily="34" charset="0"/>
-                <a:ea typeface="Malgun Gothic" pitchFamily="34" charset="-122"/>
+                <a:latin typeface="맑은 고딕" panose="020B0503020000020004" pitchFamily="34" charset="-127"/>
+                <a:ea typeface="맑은 고딕" panose="020B0503020000020004" pitchFamily="34" charset="-127"/>
                 <a:cs typeface="Malgun Gothic" pitchFamily="34" charset="-120"/>
               </a:rPr>
               <a:t>시간 연장</a:t>
             </a:r>
-            <a:endParaRPr lang="en-US" sz="1050" dirty="0"/>
+            <a:endParaRPr lang="en-US" sz="1050" dirty="0">
+              <a:latin typeface="맑은 고딕" panose="020B0503020000020004" pitchFamily="34" charset="-127"/>
+            </a:endParaRPr>
           </a:p>
         </p:txBody>
       </p:sp>
@@ -4197,7 +5266,7 @@
           </a:bodyPr>
           <a:lstStyle/>
           <a:p>
-            <a:pPr algn="ctr" indent="0" marL="0">
+            <a:pPr marL="0" indent="0" algn="ctr">
               <a:buNone/>
             </a:pPr>
             <a:r>
@@ -4205,13 +5274,15 @@
                 <a:solidFill>
                   <a:srgbClr val="0B50D0"/>
                 </a:solidFill>
-                <a:latin typeface="Malgun Gothic" pitchFamily="34" charset="0"/>
-                <a:ea typeface="Malgun Gothic" pitchFamily="34" charset="-122"/>
+                <a:latin typeface="맑은 고딕" panose="020B0503020000020004" pitchFamily="34" charset="-127"/>
+                <a:ea typeface="맑은 고딕" panose="020B0503020000020004" pitchFamily="34" charset="-127"/>
                 <a:cs typeface="Malgun Gothic" pitchFamily="34" charset="-120"/>
               </a:rPr>
               <a:t>완료</a:t>
             </a:r>
-            <a:endParaRPr lang="en-US" sz="1050" dirty="0"/>
+            <a:endParaRPr lang="en-US" sz="1050" dirty="0">
+              <a:latin typeface="맑은 고딕" panose="020B0503020000020004" pitchFamily="34" charset="-127"/>
+            </a:endParaRPr>
           </a:p>
         </p:txBody>
       </p:sp>
@@ -4244,7 +5315,7 @@
           </a:bodyPr>
           <a:lstStyle/>
           <a:p>
-            <a:pPr algn="ctr" indent="0" marL="0">
+            <a:pPr marL="0" indent="0" algn="ctr">
               <a:buNone/>
             </a:pPr>
             <a:r>
@@ -4252,13 +5323,15 @@
                 <a:solidFill>
                   <a:srgbClr val="FFFFFF"/>
                 </a:solidFill>
-                <a:latin typeface="Malgun Gothic" pitchFamily="34" charset="0"/>
-                <a:ea typeface="Malgun Gothic" pitchFamily="34" charset="-122"/>
+                <a:latin typeface="맑은 고딕" panose="020B0503020000020004" pitchFamily="34" charset="-127"/>
+                <a:ea typeface="맑은 고딕" panose="020B0503020000020004" pitchFamily="34" charset="-127"/>
                 <a:cs typeface="Malgun Gothic" pitchFamily="34" charset="-120"/>
               </a:rPr>
               <a:t>베이 조회</a:t>
             </a:r>
-            <a:endParaRPr lang="en-US" sz="940" dirty="0"/>
+            <a:endParaRPr lang="en-US" sz="940" dirty="0">
+              <a:latin typeface="맑은 고딕" panose="020B0503020000020004" pitchFamily="34" charset="-127"/>
+            </a:endParaRPr>
           </a:p>
         </p:txBody>
       </p:sp>
@@ -4291,7 +5364,7 @@
           </a:bodyPr>
           <a:lstStyle/>
           <a:p>
-            <a:pPr algn="ctr" indent="0" marL="0">
+            <a:pPr marL="0" indent="0" algn="ctr">
               <a:buNone/>
             </a:pPr>
             <a:r>
@@ -4299,16 +5372,18 @@
                 <a:solidFill>
                   <a:srgbClr val="FFFFFF"/>
                 </a:solidFill>
-                <a:latin typeface="Malgun Gothic" pitchFamily="34" charset="0"/>
-                <a:ea typeface="Malgun Gothic" pitchFamily="34" charset="-122"/>
+                <a:latin typeface="맑은 고딕" panose="020B0503020000020004" pitchFamily="34" charset="-127"/>
+                <a:ea typeface="맑은 고딕" panose="020B0503020000020004" pitchFamily="34" charset="-127"/>
                 <a:cs typeface="Malgun Gothic" pitchFamily="34" charset="-120"/>
               </a:rPr>
               <a:t>결제·세션 생성</a:t>
             </a:r>
-            <a:endParaRPr lang="en-US" sz="940" dirty="0"/>
-          </a:p>
-          <a:p>
-            <a:pPr algn="ctr" indent="0" marL="0">
+            <a:endParaRPr lang="en-US" sz="940" dirty="0">
+              <a:latin typeface="맑은 고딕" panose="020B0503020000020004" pitchFamily="34" charset="-127"/>
+            </a:endParaRPr>
+          </a:p>
+          <a:p>
+            <a:pPr marL="0" indent="0" algn="ctr">
               <a:buNone/>
             </a:pPr>
             <a:r>
@@ -4316,13 +5391,15 @@
                 <a:solidFill>
                   <a:srgbClr val="FFFFFF"/>
                 </a:solidFill>
-                <a:latin typeface="Malgun Gothic" pitchFamily="34" charset="0"/>
-                <a:ea typeface="Malgun Gothic" pitchFamily="34" charset="-122"/>
+                <a:latin typeface="맑은 고딕" panose="020B0503020000020004" pitchFamily="34" charset="-127"/>
+                <a:ea typeface="맑은 고딕" panose="020B0503020000020004" pitchFamily="34" charset="-127"/>
                 <a:cs typeface="Malgun Gothic" pitchFamily="34" charset="-120"/>
               </a:rPr>
               <a:t>사용 중 변경</a:t>
             </a:r>
-            <a:endParaRPr lang="en-US" sz="940" dirty="0"/>
+            <a:endParaRPr lang="en-US" sz="940" dirty="0">
+              <a:latin typeface="맑은 고딕" panose="020B0503020000020004" pitchFamily="34" charset="-127"/>
+            </a:endParaRPr>
           </a:p>
         </p:txBody>
       </p:sp>
@@ -4355,7 +5432,7 @@
           </a:bodyPr>
           <a:lstStyle/>
           <a:p>
-            <a:pPr algn="ctr" indent="0" marL="0">
+            <a:pPr marL="0" indent="0" algn="ctr">
               <a:buNone/>
             </a:pPr>
             <a:r>
@@ -4363,16 +5440,18 @@
                 <a:solidFill>
                   <a:srgbClr val="FFFFFF"/>
                 </a:solidFill>
-                <a:latin typeface="Malgun Gothic" pitchFamily="34" charset="0"/>
-                <a:ea typeface="Malgun Gothic" pitchFamily="34" charset="-122"/>
+                <a:latin typeface="맑은 고딕" panose="020B0503020000020004" pitchFamily="34" charset="-127"/>
+                <a:ea typeface="맑은 고딕" panose="020B0503020000020004" pitchFamily="34" charset="-127"/>
                 <a:cs typeface="Malgun Gothic" pitchFamily="34" charset="-120"/>
               </a:rPr>
               <a:t>시작/종료 예정</a:t>
             </a:r>
-            <a:endParaRPr lang="en-US" sz="940" dirty="0"/>
-          </a:p>
-          <a:p>
-            <a:pPr algn="ctr" indent="0" marL="0">
+            <a:endParaRPr lang="en-US" sz="940" dirty="0">
+              <a:latin typeface="맑은 고딕" panose="020B0503020000020004" pitchFamily="34" charset="-127"/>
+            </a:endParaRPr>
+          </a:p>
+          <a:p>
+            <a:pPr marL="0" indent="0" algn="ctr">
               <a:buNone/>
             </a:pPr>
             <a:r>
@@ -4380,13 +5459,15 @@
                 <a:solidFill>
                   <a:srgbClr val="FFFFFF"/>
                 </a:solidFill>
-                <a:latin typeface="Malgun Gothic" pitchFamily="34" charset="0"/>
-                <a:ea typeface="Malgun Gothic" pitchFamily="34" charset="-122"/>
+                <a:latin typeface="맑은 고딕" panose="020B0503020000020004" pitchFamily="34" charset="-127"/>
+                <a:ea typeface="맑은 고딕" panose="020B0503020000020004" pitchFamily="34" charset="-127"/>
                 <a:cs typeface="Malgun Gothic" pitchFamily="34" charset="-120"/>
               </a:rPr>
               <a:t>시각 저장</a:t>
             </a:r>
-            <a:endParaRPr lang="en-US" sz="940" dirty="0"/>
+            <a:endParaRPr lang="en-US" sz="940" dirty="0">
+              <a:latin typeface="맑은 고딕" panose="020B0503020000020004" pitchFamily="34" charset="-127"/>
+            </a:endParaRPr>
           </a:p>
         </p:txBody>
       </p:sp>
@@ -4419,7 +5500,7 @@
           </a:bodyPr>
           <a:lstStyle/>
           <a:p>
-            <a:pPr algn="ctr" indent="0" marL="0">
+            <a:pPr marL="0" indent="0" algn="ctr">
               <a:buNone/>
             </a:pPr>
             <a:r>
@@ -4427,16 +5508,18 @@
                 <a:solidFill>
                   <a:srgbClr val="FFFFFF"/>
                 </a:solidFill>
-                <a:latin typeface="Malgun Gothic" pitchFamily="34" charset="0"/>
-                <a:ea typeface="Malgun Gothic" pitchFamily="34" charset="-122"/>
+                <a:latin typeface="맑은 고딕" panose="020B0503020000020004" pitchFamily="34" charset="-127"/>
+                <a:ea typeface="맑은 고딕" panose="020B0503020000020004" pitchFamily="34" charset="-127"/>
                 <a:cs typeface="Malgun Gothic" pitchFamily="34" charset="-120"/>
               </a:rPr>
               <a:t>종료 예정</a:t>
             </a:r>
-            <a:endParaRPr lang="en-US" sz="940" dirty="0"/>
-          </a:p>
-          <a:p>
-            <a:pPr algn="ctr" indent="0" marL="0">
+            <a:endParaRPr lang="en-US" sz="940" dirty="0">
+              <a:latin typeface="맑은 고딕" panose="020B0503020000020004" pitchFamily="34" charset="-127"/>
+            </a:endParaRPr>
+          </a:p>
+          <a:p>
+            <a:pPr marL="0" indent="0" algn="ctr">
               <a:buNone/>
             </a:pPr>
             <a:r>
@@ -4444,13 +5527,15 @@
                 <a:solidFill>
                   <a:srgbClr val="FFFFFF"/>
                 </a:solidFill>
-                <a:latin typeface="Malgun Gothic" pitchFamily="34" charset="0"/>
-                <a:ea typeface="Malgun Gothic" pitchFamily="34" charset="-122"/>
+                <a:latin typeface="맑은 고딕" panose="020B0503020000020004" pitchFamily="34" charset="-127"/>
+                <a:ea typeface="맑은 고딕" panose="020B0503020000020004" pitchFamily="34" charset="-127"/>
                 <a:cs typeface="Malgun Gothic" pitchFamily="34" charset="-120"/>
               </a:rPr>
               <a:t>시각 변경</a:t>
             </a:r>
-            <a:endParaRPr lang="en-US" sz="940" dirty="0"/>
+            <a:endParaRPr lang="en-US" sz="940" dirty="0">
+              <a:latin typeface="맑은 고딕" panose="020B0503020000020004" pitchFamily="34" charset="-127"/>
+            </a:endParaRPr>
           </a:p>
         </p:txBody>
       </p:sp>
@@ -4483,7 +5568,7 @@
           </a:bodyPr>
           <a:lstStyle/>
           <a:p>
-            <a:pPr algn="ctr" indent="0" marL="0">
+            <a:pPr marL="0" indent="0" algn="ctr">
               <a:buNone/>
             </a:pPr>
             <a:r>
@@ -4491,16 +5576,18 @@
                 <a:solidFill>
                   <a:srgbClr val="FFFFFF"/>
                 </a:solidFill>
-                <a:latin typeface="Malgun Gothic" pitchFamily="34" charset="0"/>
-                <a:ea typeface="Malgun Gothic" pitchFamily="34" charset="-122"/>
+                <a:latin typeface="맑은 고딕" panose="020B0503020000020004" pitchFamily="34" charset="-127"/>
+                <a:ea typeface="맑은 고딕" panose="020B0503020000020004" pitchFamily="34" charset="-127"/>
                 <a:cs typeface="Malgun Gothic" pitchFamily="34" charset="-120"/>
               </a:rPr>
               <a:t>세션 완료</a:t>
             </a:r>
-            <a:endParaRPr lang="en-US" sz="940" dirty="0"/>
-          </a:p>
-          <a:p>
-            <a:pPr algn="ctr" indent="0" marL="0">
+            <a:endParaRPr lang="en-US" sz="940" dirty="0">
+              <a:latin typeface="맑은 고딕" panose="020B0503020000020004" pitchFamily="34" charset="-127"/>
+            </a:endParaRPr>
+          </a:p>
+          <a:p>
+            <a:pPr marL="0" indent="0" algn="ctr">
               <a:buNone/>
             </a:pPr>
             <a:r>
@@ -4508,13 +5595,15 @@
                 <a:solidFill>
                   <a:srgbClr val="FFFFFF"/>
                 </a:solidFill>
-                <a:latin typeface="Malgun Gothic" pitchFamily="34" charset="0"/>
-                <a:ea typeface="Malgun Gothic" pitchFamily="34" charset="-122"/>
+                <a:latin typeface="맑은 고딕" panose="020B0503020000020004" pitchFamily="34" charset="-127"/>
+                <a:ea typeface="맑은 고딕" panose="020B0503020000020004" pitchFamily="34" charset="-127"/>
                 <a:cs typeface="Malgun Gothic" pitchFamily="34" charset="-120"/>
               </a:rPr>
               <a:t>사용 가능 변경</a:t>
             </a:r>
-            <a:endParaRPr lang="en-US" sz="940" dirty="0"/>
+            <a:endParaRPr lang="en-US" sz="940" dirty="0">
+              <a:latin typeface="맑은 고딕" panose="020B0503020000020004" pitchFamily="34" charset="-127"/>
+            </a:endParaRPr>
           </a:p>
         </p:txBody>
       </p:sp>
@@ -4547,7 +5636,7 @@
           </a:bodyPr>
           <a:lstStyle/>
           <a:p>
-            <a:pPr algn="ctr" indent="0" marL="0">
+            <a:pPr marL="0" indent="0" algn="ctr">
               <a:buNone/>
             </a:pPr>
             <a:r>
@@ -4555,16 +5644,18 @@
                 <a:solidFill>
                   <a:srgbClr val="06A85B"/>
                 </a:solidFill>
-                <a:latin typeface="Malgun Gothic" pitchFamily="34" charset="0"/>
-                <a:ea typeface="Malgun Gothic" pitchFamily="34" charset="-122"/>
+                <a:latin typeface="맑은 고딕" panose="020B0503020000020004" pitchFamily="34" charset="-127"/>
+                <a:ea typeface="맑은 고딕" panose="020B0503020000020004" pitchFamily="34" charset="-127"/>
                 <a:cs typeface="Malgun Gothic" pitchFamily="34" charset="-120"/>
               </a:rPr>
               <a:t>동일 6개</a:t>
             </a:r>
-            <a:endParaRPr lang="en-US" sz="960" dirty="0"/>
-          </a:p>
-          <a:p>
-            <a:pPr algn="ctr" indent="0" marL="0">
+            <a:endParaRPr lang="en-US" sz="960" dirty="0">
+              <a:latin typeface="맑은 고딕" panose="020B0503020000020004" pitchFamily="34" charset="-127"/>
+            </a:endParaRPr>
+          </a:p>
+          <a:p>
+            <a:pPr marL="0" indent="0" algn="ctr">
               <a:buNone/>
             </a:pPr>
             <a:r>
@@ -4572,13 +5663,15 @@
                 <a:solidFill>
                   <a:srgbClr val="06A85B"/>
                 </a:solidFill>
-                <a:latin typeface="Malgun Gothic" pitchFamily="34" charset="0"/>
-                <a:ea typeface="Malgun Gothic" pitchFamily="34" charset="-122"/>
+                <a:latin typeface="맑은 고딕" panose="020B0503020000020004" pitchFamily="34" charset="-127"/>
+                <a:ea typeface="맑은 고딕" panose="020B0503020000020004" pitchFamily="34" charset="-127"/>
                 <a:cs typeface="Malgun Gothic" pitchFamily="34" charset="-120"/>
               </a:rPr>
               <a:t>베이 표시</a:t>
             </a:r>
-            <a:endParaRPr lang="en-US" sz="960" dirty="0"/>
+            <a:endParaRPr lang="en-US" sz="960" dirty="0">
+              <a:latin typeface="맑은 고딕" panose="020B0503020000020004" pitchFamily="34" charset="-127"/>
+            </a:endParaRPr>
           </a:p>
         </p:txBody>
       </p:sp>
@@ -4611,7 +5704,7 @@
           </a:bodyPr>
           <a:lstStyle/>
           <a:p>
-            <a:pPr algn="ctr" indent="0" marL="0">
+            <a:pPr marL="0" indent="0" algn="ctr">
               <a:buNone/>
             </a:pPr>
             <a:r>
@@ -4619,16 +5712,18 @@
                 <a:solidFill>
                   <a:srgbClr val="06A85B"/>
                 </a:solidFill>
-                <a:latin typeface="Malgun Gothic" pitchFamily="34" charset="0"/>
-                <a:ea typeface="Malgun Gothic" pitchFamily="34" charset="-122"/>
+                <a:latin typeface="맑은 고딕" panose="020B0503020000020004" pitchFamily="34" charset="-127"/>
+                <a:ea typeface="맑은 고딕" panose="020B0503020000020004" pitchFamily="34" charset="-127"/>
                 <a:cs typeface="Malgun Gothic" pitchFamily="34" charset="-120"/>
               </a:rPr>
               <a:t>해당 베이</a:t>
             </a:r>
-            <a:endParaRPr lang="en-US" sz="960" dirty="0"/>
-          </a:p>
-          <a:p>
-            <a:pPr algn="ctr" indent="0" marL="0">
+            <a:endParaRPr lang="en-US" sz="960" dirty="0">
+              <a:latin typeface="맑은 고딕" panose="020B0503020000020004" pitchFamily="34" charset="-127"/>
+            </a:endParaRPr>
+          </a:p>
+          <a:p>
+            <a:pPr marL="0" indent="0" algn="ctr">
               <a:buNone/>
             </a:pPr>
             <a:r>
@@ -4636,13 +5731,15 @@
                 <a:solidFill>
                   <a:srgbClr val="06A85B"/>
                 </a:solidFill>
-                <a:latin typeface="Malgun Gothic" pitchFamily="34" charset="0"/>
-                <a:ea typeface="Malgun Gothic" pitchFamily="34" charset="-122"/>
+                <a:latin typeface="맑은 고딕" panose="020B0503020000020004" pitchFamily="34" charset="-127"/>
+                <a:ea typeface="맑은 고딕" panose="020B0503020000020004" pitchFamily="34" charset="-127"/>
                 <a:cs typeface="Malgun Gothic" pitchFamily="34" charset="-120"/>
               </a:rPr>
               <a:t>사용 중</a:t>
             </a:r>
-            <a:endParaRPr lang="en-US" sz="960" dirty="0"/>
+            <a:endParaRPr lang="en-US" sz="960" dirty="0">
+              <a:latin typeface="맑은 고딕" panose="020B0503020000020004" pitchFamily="34" charset="-127"/>
+            </a:endParaRPr>
           </a:p>
         </p:txBody>
       </p:sp>
@@ -4675,7 +5772,7 @@
           </a:bodyPr>
           <a:lstStyle/>
           <a:p>
-            <a:pPr algn="ctr" indent="0" marL="0">
+            <a:pPr marL="0" indent="0" algn="ctr">
               <a:buNone/>
             </a:pPr>
             <a:r>
@@ -4683,16 +5780,18 @@
                 <a:solidFill>
                   <a:srgbClr val="06A85B"/>
                 </a:solidFill>
-                <a:latin typeface="Malgun Gothic" pitchFamily="34" charset="0"/>
-                <a:ea typeface="Malgun Gothic" pitchFamily="34" charset="-122"/>
+                <a:latin typeface="맑은 고딕" panose="020B0503020000020004" pitchFamily="34" charset="-127"/>
+                <a:ea typeface="맑은 고딕" panose="020B0503020000020004" pitchFamily="34" charset="-127"/>
                 <a:cs typeface="Malgun Gothic" pitchFamily="34" charset="-120"/>
               </a:rPr>
               <a:t>진행 상태</a:t>
             </a:r>
-            <a:endParaRPr lang="en-US" sz="960" dirty="0"/>
-          </a:p>
-          <a:p>
-            <a:pPr algn="ctr" indent="0" marL="0">
+            <a:endParaRPr lang="en-US" sz="960" dirty="0">
+              <a:latin typeface="맑은 고딕" panose="020B0503020000020004" pitchFamily="34" charset="-127"/>
+            </a:endParaRPr>
+          </a:p>
+          <a:p>
+            <a:pPr marL="0" indent="0" algn="ctr">
               <a:buNone/>
             </a:pPr>
             <a:r>
@@ -4700,13 +5799,15 @@
                 <a:solidFill>
                   <a:srgbClr val="06A85B"/>
                 </a:solidFill>
-                <a:latin typeface="Malgun Gothic" pitchFamily="34" charset="0"/>
-                <a:ea typeface="Malgun Gothic" pitchFamily="34" charset="-122"/>
+                <a:latin typeface="맑은 고딕" panose="020B0503020000020004" pitchFamily="34" charset="-127"/>
+                <a:ea typeface="맑은 고딕" panose="020B0503020000020004" pitchFamily="34" charset="-127"/>
                 <a:cs typeface="Malgun Gothic" pitchFamily="34" charset="-120"/>
               </a:rPr>
               <a:t>확인</a:t>
             </a:r>
-            <a:endParaRPr lang="en-US" sz="960" dirty="0"/>
+            <a:endParaRPr lang="en-US" sz="960" dirty="0">
+              <a:latin typeface="맑은 고딕" panose="020B0503020000020004" pitchFamily="34" charset="-127"/>
+            </a:endParaRPr>
           </a:p>
         </p:txBody>
       </p:sp>
@@ -4739,7 +5840,7 @@
           </a:bodyPr>
           <a:lstStyle/>
           <a:p>
-            <a:pPr algn="ctr" indent="0" marL="0">
+            <a:pPr marL="0" indent="0" algn="ctr">
               <a:buNone/>
             </a:pPr>
             <a:r>
@@ -4747,16 +5848,18 @@
                 <a:solidFill>
                   <a:srgbClr val="06A85B"/>
                 </a:solidFill>
-                <a:latin typeface="Malgun Gothic" pitchFamily="34" charset="0"/>
-                <a:ea typeface="Malgun Gothic" pitchFamily="34" charset="-122"/>
+                <a:latin typeface="맑은 고딕" panose="020B0503020000020004" pitchFamily="34" charset="-127"/>
+                <a:ea typeface="맑은 고딕" panose="020B0503020000020004" pitchFamily="34" charset="-127"/>
                 <a:cs typeface="Malgun Gothic" pitchFamily="34" charset="-120"/>
               </a:rPr>
               <a:t>동일 상태</a:t>
             </a:r>
-            <a:endParaRPr lang="en-US" sz="960" dirty="0"/>
-          </a:p>
-          <a:p>
-            <a:pPr algn="ctr" indent="0" marL="0">
+            <a:endParaRPr lang="en-US" sz="960" dirty="0">
+              <a:latin typeface="맑은 고딕" panose="020B0503020000020004" pitchFamily="34" charset="-127"/>
+            </a:endParaRPr>
+          </a:p>
+          <a:p>
+            <a:pPr marL="0" indent="0" algn="ctr">
               <a:buNone/>
             </a:pPr>
             <a:r>
@@ -4764,13 +5867,15 @@
                 <a:solidFill>
                   <a:srgbClr val="06A85B"/>
                 </a:solidFill>
-                <a:latin typeface="Malgun Gothic" pitchFamily="34" charset="0"/>
-                <a:ea typeface="Malgun Gothic" pitchFamily="34" charset="-122"/>
+                <a:latin typeface="맑은 고딕" panose="020B0503020000020004" pitchFamily="34" charset="-127"/>
+                <a:ea typeface="맑은 고딕" panose="020B0503020000020004" pitchFamily="34" charset="-127"/>
                 <a:cs typeface="Malgun Gothic" pitchFamily="34" charset="-120"/>
               </a:rPr>
               <a:t>유지</a:t>
             </a:r>
-            <a:endParaRPr lang="en-US" sz="960" dirty="0"/>
+            <a:endParaRPr lang="en-US" sz="960" dirty="0">
+              <a:latin typeface="맑은 고딕" panose="020B0503020000020004" pitchFamily="34" charset="-127"/>
+            </a:endParaRPr>
           </a:p>
         </p:txBody>
       </p:sp>
@@ -4803,7 +5908,7 @@
           </a:bodyPr>
           <a:lstStyle/>
           <a:p>
-            <a:pPr algn="ctr" indent="0" marL="0">
+            <a:pPr marL="0" indent="0" algn="ctr">
               <a:buNone/>
             </a:pPr>
             <a:r>
@@ -4811,16 +5916,18 @@
                 <a:solidFill>
                   <a:srgbClr val="06A85B"/>
                 </a:solidFill>
-                <a:latin typeface="Malgun Gothic" pitchFamily="34" charset="0"/>
-                <a:ea typeface="Malgun Gothic" pitchFamily="34" charset="-122"/>
+                <a:latin typeface="맑은 고딕" panose="020B0503020000020004" pitchFamily="34" charset="-127"/>
+                <a:ea typeface="맑은 고딕" panose="020B0503020000020004" pitchFamily="34" charset="-127"/>
                 <a:cs typeface="Malgun Gothic" pitchFamily="34" charset="-120"/>
               </a:rPr>
               <a:t>사용 가능</a:t>
             </a:r>
-            <a:endParaRPr lang="en-US" sz="960" dirty="0"/>
-          </a:p>
-          <a:p>
-            <a:pPr algn="ctr" indent="0" marL="0">
+            <a:endParaRPr lang="en-US" sz="960" dirty="0">
+              <a:latin typeface="맑은 고딕" panose="020B0503020000020004" pitchFamily="34" charset="-127"/>
+            </a:endParaRPr>
+          </a:p>
+          <a:p>
+            <a:pPr marL="0" indent="0" algn="ctr">
               <a:buNone/>
             </a:pPr>
             <a:r>
@@ -4828,13 +5935,15 @@
                 <a:solidFill>
                   <a:srgbClr val="06A85B"/>
                 </a:solidFill>
-                <a:latin typeface="Malgun Gothic" pitchFamily="34" charset="0"/>
-                <a:ea typeface="Malgun Gothic" pitchFamily="34" charset="-122"/>
+                <a:latin typeface="맑은 고딕" panose="020B0503020000020004" pitchFamily="34" charset="-127"/>
+                <a:ea typeface="맑은 고딕" panose="020B0503020000020004" pitchFamily="34" charset="-127"/>
                 <a:cs typeface="Malgun Gothic" pitchFamily="34" charset="-120"/>
               </a:rPr>
               <a:t>복귀</a:t>
             </a:r>
-            <a:endParaRPr lang="en-US" sz="960" dirty="0"/>
+            <a:endParaRPr lang="en-US" sz="960" dirty="0">
+              <a:latin typeface="맑은 고딕" panose="020B0503020000020004" pitchFamily="34" charset="-127"/>
+            </a:endParaRPr>
           </a:p>
         </p:txBody>
       </p:sp>
@@ -4861,6 +5970,15 @@
             <a:tailEnd type="triangle"/>
           </a:ln>
         </p:spPr>
+        <p:txBody>
+          <a:bodyPr/>
+          <a:lstStyle/>
+          <a:p>
+            <a:endParaRPr lang="ko-KR" altLang="en-US" dirty="0">
+              <a:latin typeface="맑은 고딕" panose="020B0503020000020004" pitchFamily="34" charset="-127"/>
+            </a:endParaRPr>
+          </a:p>
+        </p:txBody>
       </p:sp>
       <p:sp>
         <p:nvSpPr>
@@ -4885,6 +6003,15 @@
             <a:tailEnd type="triangle"/>
           </a:ln>
         </p:spPr>
+        <p:txBody>
+          <a:bodyPr/>
+          <a:lstStyle/>
+          <a:p>
+            <a:endParaRPr lang="ko-KR" altLang="en-US" dirty="0">
+              <a:latin typeface="맑은 고딕" panose="020B0503020000020004" pitchFamily="34" charset="-127"/>
+            </a:endParaRPr>
+          </a:p>
+        </p:txBody>
       </p:sp>
       <p:sp>
         <p:nvSpPr>
@@ -4909,6 +6036,15 @@
             <a:tailEnd type="triangle"/>
           </a:ln>
         </p:spPr>
+        <p:txBody>
+          <a:bodyPr/>
+          <a:lstStyle/>
+          <a:p>
+            <a:endParaRPr lang="ko-KR" altLang="en-US" dirty="0">
+              <a:latin typeface="맑은 고딕" panose="020B0503020000020004" pitchFamily="34" charset="-127"/>
+            </a:endParaRPr>
+          </a:p>
+        </p:txBody>
       </p:sp>
       <p:sp>
         <p:nvSpPr>
@@ -4933,6 +6069,15 @@
             <a:tailEnd type="triangle"/>
           </a:ln>
         </p:spPr>
+        <p:txBody>
+          <a:bodyPr/>
+          <a:lstStyle/>
+          <a:p>
+            <a:endParaRPr lang="ko-KR" altLang="en-US" dirty="0">
+              <a:latin typeface="맑은 고딕" panose="020B0503020000020004" pitchFamily="34" charset="-127"/>
+            </a:endParaRPr>
+          </a:p>
+        </p:txBody>
       </p:sp>
       <p:sp>
         <p:nvSpPr>
@@ -4957,6 +6102,15 @@
             <a:tailEnd type="triangle"/>
           </a:ln>
         </p:spPr>
+        <p:txBody>
+          <a:bodyPr/>
+          <a:lstStyle/>
+          <a:p>
+            <a:endParaRPr lang="ko-KR" altLang="en-US" dirty="0">
+              <a:latin typeface="맑은 고딕" panose="020B0503020000020004" pitchFamily="34" charset="-127"/>
+            </a:endParaRPr>
+          </a:p>
+        </p:txBody>
       </p:sp>
       <p:sp>
         <p:nvSpPr>
@@ -4981,6 +6135,15 @@
             <a:tailEnd type="triangle"/>
           </a:ln>
         </p:spPr>
+        <p:txBody>
+          <a:bodyPr/>
+          <a:lstStyle/>
+          <a:p>
+            <a:endParaRPr lang="ko-KR" altLang="en-US" dirty="0">
+              <a:latin typeface="맑은 고딕" panose="020B0503020000020004" pitchFamily="34" charset="-127"/>
+            </a:endParaRPr>
+          </a:p>
+        </p:txBody>
       </p:sp>
       <p:sp>
         <p:nvSpPr>
@@ -5005,6 +6168,15 @@
             <a:tailEnd type="triangle"/>
           </a:ln>
         </p:spPr>
+        <p:txBody>
+          <a:bodyPr/>
+          <a:lstStyle/>
+          <a:p>
+            <a:endParaRPr lang="ko-KR" altLang="en-US" dirty="0">
+              <a:latin typeface="맑은 고딕" panose="020B0503020000020004" pitchFamily="34" charset="-127"/>
+            </a:endParaRPr>
+          </a:p>
+        </p:txBody>
       </p:sp>
       <p:sp>
         <p:nvSpPr>
@@ -5029,6 +6201,15 @@
             <a:tailEnd type="triangle"/>
           </a:ln>
         </p:spPr>
+        <p:txBody>
+          <a:bodyPr/>
+          <a:lstStyle/>
+          <a:p>
+            <a:endParaRPr lang="ko-KR" altLang="en-US" dirty="0">
+              <a:latin typeface="맑은 고딕" panose="020B0503020000020004" pitchFamily="34" charset="-127"/>
+            </a:endParaRPr>
+          </a:p>
+        </p:txBody>
       </p:sp>
       <p:sp>
         <p:nvSpPr>
@@ -5053,6 +6234,15 @@
             <a:tailEnd type="triangle"/>
           </a:ln>
         </p:spPr>
+        <p:txBody>
+          <a:bodyPr/>
+          <a:lstStyle/>
+          <a:p>
+            <a:endParaRPr lang="ko-KR" altLang="en-US" dirty="0">
+              <a:latin typeface="맑은 고딕" panose="020B0503020000020004" pitchFamily="34" charset="-127"/>
+            </a:endParaRPr>
+          </a:p>
+        </p:txBody>
       </p:sp>
       <p:sp>
         <p:nvSpPr>
@@ -5077,6 +6267,15 @@
             <a:tailEnd type="triangle"/>
           </a:ln>
         </p:spPr>
+        <p:txBody>
+          <a:bodyPr/>
+          <a:lstStyle/>
+          <a:p>
+            <a:endParaRPr lang="ko-KR" altLang="en-US" dirty="0">
+              <a:latin typeface="맑은 고딕" panose="020B0503020000020004" pitchFamily="34" charset="-127"/>
+            </a:endParaRPr>
+          </a:p>
+        </p:txBody>
       </p:sp>
       <p:sp>
         <p:nvSpPr>
@@ -5101,6 +6300,15 @@
             <a:tailEnd type="triangle"/>
           </a:ln>
         </p:spPr>
+        <p:txBody>
+          <a:bodyPr/>
+          <a:lstStyle/>
+          <a:p>
+            <a:endParaRPr lang="ko-KR" altLang="en-US" dirty="0">
+              <a:latin typeface="맑은 고딕" panose="020B0503020000020004" pitchFamily="34" charset="-127"/>
+            </a:endParaRPr>
+          </a:p>
+        </p:txBody>
       </p:sp>
       <p:sp>
         <p:nvSpPr>
@@ -5125,6 +6333,15 @@
             <a:tailEnd type="triangle"/>
           </a:ln>
         </p:spPr>
+        <p:txBody>
+          <a:bodyPr/>
+          <a:lstStyle/>
+          <a:p>
+            <a:endParaRPr lang="ko-KR" altLang="en-US" dirty="0">
+              <a:latin typeface="맑은 고딕" panose="020B0503020000020004" pitchFamily="34" charset="-127"/>
+            </a:endParaRPr>
+          </a:p>
+        </p:txBody>
       </p:sp>
       <p:sp>
         <p:nvSpPr>
@@ -5150,6 +6367,15 @@
             <a:tailEnd type="triangle"/>
           </a:ln>
         </p:spPr>
+        <p:txBody>
+          <a:bodyPr/>
+          <a:lstStyle/>
+          <a:p>
+            <a:endParaRPr lang="ko-KR" altLang="en-US" dirty="0">
+              <a:latin typeface="맑은 고딕" panose="020B0503020000020004" pitchFamily="34" charset="-127"/>
+            </a:endParaRPr>
+          </a:p>
+        </p:txBody>
       </p:sp>
       <p:sp>
         <p:nvSpPr>
@@ -5175,6 +6401,15 @@
             <a:tailEnd type="triangle"/>
           </a:ln>
         </p:spPr>
+        <p:txBody>
+          <a:bodyPr/>
+          <a:lstStyle/>
+          <a:p>
+            <a:endParaRPr lang="ko-KR" altLang="en-US" dirty="0">
+              <a:latin typeface="맑은 고딕" panose="020B0503020000020004" pitchFamily="34" charset="-127"/>
+            </a:endParaRPr>
+          </a:p>
+        </p:txBody>
       </p:sp>
       <p:sp>
         <p:nvSpPr>
@@ -5197,7 +6432,7 @@
           <a:bodyPr wrap="square" lIns="0" tIns="0" rIns="0" bIns="0" rtlCol="0" anchor="ctr"/>
           <a:lstStyle/>
           <a:p>
-            <a:pPr algn="ctr" indent="0" marL="0">
+            <a:pPr marL="0" indent="0" algn="ctr">
               <a:buNone/>
             </a:pPr>
             <a:r>
@@ -5205,10 +6440,13 @@
                 <a:solidFill>
                   <a:srgbClr val="475569"/>
                 </a:solidFill>
+                <a:latin typeface="맑은 고딕" panose="020B0503020000020004" pitchFamily="34" charset="-127"/>
               </a:rPr>
               <a:t>API 조회</a:t>
             </a:r>
-            <a:endParaRPr lang="en-US" sz="680" dirty="0"/>
+            <a:endParaRPr lang="en-US" sz="680" dirty="0">
+              <a:latin typeface="맑은 고딕" panose="020B0503020000020004" pitchFamily="34" charset="-127"/>
+            </a:endParaRPr>
           </a:p>
         </p:txBody>
       </p:sp>
@@ -5236,6 +6474,15 @@
             <a:tailEnd type="triangle"/>
           </a:ln>
         </p:spPr>
+        <p:txBody>
+          <a:bodyPr/>
+          <a:lstStyle/>
+          <a:p>
+            <a:endParaRPr lang="ko-KR" altLang="en-US" dirty="0">
+              <a:latin typeface="맑은 고딕" panose="020B0503020000020004" pitchFamily="34" charset="-127"/>
+            </a:endParaRPr>
+          </a:p>
+        </p:txBody>
       </p:sp>
       <p:sp>
         <p:nvSpPr>
@@ -5261,6 +6508,15 @@
             <a:tailEnd type="triangle"/>
           </a:ln>
         </p:spPr>
+        <p:txBody>
+          <a:bodyPr/>
+          <a:lstStyle/>
+          <a:p>
+            <a:endParaRPr lang="ko-KR" altLang="en-US" dirty="0">
+              <a:latin typeface="맑은 고딕" panose="020B0503020000020004" pitchFamily="34" charset="-127"/>
+            </a:endParaRPr>
+          </a:p>
+        </p:txBody>
       </p:sp>
       <p:sp>
         <p:nvSpPr>
@@ -5283,7 +6539,7 @@
           <a:bodyPr wrap="square" lIns="0" tIns="0" rIns="0" bIns="0" rtlCol="0" anchor="ctr"/>
           <a:lstStyle/>
           <a:p>
-            <a:pPr algn="ctr" indent="0" marL="0">
+            <a:pPr marL="0" indent="0" algn="ctr">
               <a:buNone/>
             </a:pPr>
             <a:r>
@@ -5291,10 +6547,13 @@
                 <a:solidFill>
                   <a:srgbClr val="475569"/>
                 </a:solidFill>
+                <a:latin typeface="맑은 고딕" panose="020B0503020000020004" pitchFamily="34" charset="-127"/>
               </a:rPr>
               <a:t>상태 반영</a:t>
             </a:r>
-            <a:endParaRPr lang="en-US" sz="680" dirty="0"/>
+            <a:endParaRPr lang="en-US" sz="680" dirty="0">
+              <a:latin typeface="맑은 고딕" panose="020B0503020000020004" pitchFamily="34" charset="-127"/>
+            </a:endParaRPr>
           </a:p>
         </p:txBody>
       </p:sp>
@@ -5322,6 +6581,15 @@
             <a:tailEnd type="triangle"/>
           </a:ln>
         </p:spPr>
+        <p:txBody>
+          <a:bodyPr/>
+          <a:lstStyle/>
+          <a:p>
+            <a:endParaRPr lang="ko-KR" altLang="en-US" dirty="0">
+              <a:latin typeface="맑은 고딕" panose="020B0503020000020004" pitchFamily="34" charset="-127"/>
+            </a:endParaRPr>
+          </a:p>
+        </p:txBody>
       </p:sp>
       <p:sp>
         <p:nvSpPr>
@@ -5347,6 +6615,15 @@
             <a:tailEnd type="triangle"/>
           </a:ln>
         </p:spPr>
+        <p:txBody>
+          <a:bodyPr/>
+          <a:lstStyle/>
+          <a:p>
+            <a:endParaRPr lang="ko-KR" altLang="en-US" dirty="0">
+              <a:latin typeface="맑은 고딕" panose="020B0503020000020004" pitchFamily="34" charset="-127"/>
+            </a:endParaRPr>
+          </a:p>
+        </p:txBody>
       </p:sp>
       <p:sp>
         <p:nvSpPr>
@@ -5369,7 +6646,7 @@
           <a:bodyPr wrap="square" lIns="0" tIns="0" rIns="0" bIns="0" rtlCol="0" anchor="ctr"/>
           <a:lstStyle/>
           <a:p>
-            <a:pPr algn="ctr" indent="0" marL="0">
+            <a:pPr marL="0" indent="0" algn="ctr">
               <a:buNone/>
             </a:pPr>
             <a:r>
@@ -5377,10 +6654,13 @@
                 <a:solidFill>
                   <a:srgbClr val="475569"/>
                 </a:solidFill>
+                <a:latin typeface="맑은 고딕" panose="020B0503020000020004" pitchFamily="34" charset="-127"/>
               </a:rPr>
               <a:t>폴링 조회</a:t>
             </a:r>
-            <a:endParaRPr lang="en-US" sz="680" dirty="0"/>
+            <a:endParaRPr lang="en-US" sz="680" dirty="0">
+              <a:latin typeface="맑은 고딕" panose="020B0503020000020004" pitchFamily="34" charset="-127"/>
+            </a:endParaRPr>
           </a:p>
         </p:txBody>
       </p:sp>
@@ -5413,7 +6693,7 @@
           </a:bodyPr>
           <a:lstStyle/>
           <a:p>
-            <a:pPr algn="ctr" indent="0" marL="0">
+            <a:pPr marL="0" indent="0" algn="ctr">
               <a:buNone/>
             </a:pPr>
             <a:r>
@@ -5421,13 +6701,15 @@
                 <a:solidFill>
                   <a:srgbClr val="172B53"/>
                 </a:solidFill>
-                <a:latin typeface="Malgun Gothic" pitchFamily="34" charset="0"/>
-                <a:ea typeface="Malgun Gothic" pitchFamily="34" charset="-122"/>
+                <a:latin typeface="맑은 고딕" panose="020B0503020000020004" pitchFamily="34" charset="-127"/>
+                <a:ea typeface="맑은 고딕" panose="020B0503020000020004" pitchFamily="34" charset="-127"/>
                 <a:cs typeface="Malgun Gothic" pitchFamily="34" charset="-120"/>
               </a:rPr>
               <a:t>타이머 기준: 서버에는 남은 시간을 매초 저장하지 않고, 시작 시각과 종료 예정 시각만 저장합니다.</a:t>
             </a:r>
-            <a:endParaRPr lang="en-US" sz="1220" dirty="0"/>
+            <a:endParaRPr lang="en-US" sz="1220" dirty="0">
+              <a:latin typeface="맑은 고딕" panose="020B0503020000020004" pitchFamily="34" charset="-127"/>
+            </a:endParaRPr>
           </a:p>
         </p:txBody>
       </p:sp>
@@ -5452,7 +6734,7 @@
           <a:bodyPr wrap="square" lIns="0" tIns="0" rIns="0" bIns="0" rtlCol="0" anchor="ctr"/>
           <a:lstStyle/>
           <a:p>
-            <a:pPr indent="0" marL="0">
+            <a:pPr marL="0" indent="0">
               <a:buNone/>
             </a:pPr>
             <a:r>
@@ -5460,13 +6742,15 @@
                 <a:solidFill>
                   <a:srgbClr val="7A8797"/>
                 </a:solidFill>
-                <a:latin typeface="Malgun Gothic" pitchFamily="34" charset="0"/>
-                <a:ea typeface="Malgun Gothic" pitchFamily="34" charset="-122"/>
+                <a:latin typeface="맑은 고딕" panose="020B0503020000020004" pitchFamily="34" charset="-127"/>
+                <a:ea typeface="맑은 고딕" panose="020B0503020000020004" pitchFamily="34" charset="-127"/>
                 <a:cs typeface="Malgun Gothic" pitchFamily="34" charset="-120"/>
               </a:rPr>
               <a:t>영차 1차 POC 범위 공유  |  4</a:t>
             </a:r>
-            <a:endParaRPr lang="en-US" sz="750" dirty="0"/>
+            <a:endParaRPr lang="en-US" sz="750" dirty="0">
+              <a:latin typeface="맑은 고딕" panose="020B0503020000020004" pitchFamily="34" charset="-127"/>
+            </a:endParaRPr>
           </a:p>
         </p:txBody>
       </p:sp>
@@ -5486,6 +6770,7 @@
         <a:solidFill>
           <a:srgbClr val="F5F8FC"/>
         </a:solidFill>
+        <a:effectLst/>
       </p:bgPr>
     </p:bg>
     <p:spTree>
@@ -5523,7 +6808,7 @@
           <a:bodyPr wrap="square" lIns="0" tIns="0" rIns="0" bIns="0" rtlCol="0" anchor="ctr"/>
           <a:lstStyle/>
           <a:p>
-            <a:pPr indent="0" marL="0">
+            <a:pPr marL="0" indent="0">
               <a:buNone/>
             </a:pPr>
             <a:r>
@@ -5531,13 +6816,15 @@
                 <a:solidFill>
                   <a:srgbClr val="172B53"/>
                 </a:solidFill>
-                <a:latin typeface="Malgun Gothic" pitchFamily="34" charset="0"/>
-                <a:ea typeface="Malgun Gothic" pitchFamily="34" charset="-122"/>
+                <a:latin typeface="맑은 고딕" panose="020B0503020000020004" pitchFamily="34" charset="-127"/>
+                <a:ea typeface="맑은 고딕" panose="020B0503020000020004" pitchFamily="34" charset="-127"/>
                 <a:cs typeface="Malgun Gothic" pitchFamily="34" charset="-120"/>
               </a:rPr>
               <a:t>개발 진행 방식과 검수 기준</a:t>
             </a:r>
-            <a:endParaRPr lang="en-US" sz="2200" dirty="0"/>
+            <a:endParaRPr lang="en-US" sz="2200" dirty="0">
+              <a:latin typeface="맑은 고딕" panose="020B0503020000020004" pitchFamily="34" charset="-127"/>
+            </a:endParaRPr>
           </a:p>
         </p:txBody>
       </p:sp>
@@ -5562,7 +6849,7 @@
           <a:bodyPr wrap="square" lIns="0" tIns="0" rIns="0" bIns="0" rtlCol="0" anchor="ctr"/>
           <a:lstStyle/>
           <a:p>
-            <a:pPr indent="0" marL="0">
+            <a:pPr marL="0" indent="0">
               <a:buNone/>
             </a:pPr>
             <a:r>
@@ -5570,13 +6857,15 @@
                 <a:solidFill>
                   <a:srgbClr val="475569"/>
                 </a:solidFill>
-                <a:latin typeface="Malgun Gothic" pitchFamily="34" charset="0"/>
-                <a:ea typeface="Malgun Gothic" pitchFamily="34" charset="-122"/>
+                <a:latin typeface="맑은 고딕" panose="020B0503020000020004" pitchFamily="34" charset="-127"/>
+                <a:ea typeface="맑은 고딕" panose="020B0503020000020004" pitchFamily="34" charset="-127"/>
                 <a:cs typeface="Malgun Gothic" pitchFamily="34" charset="-120"/>
               </a:rPr>
               <a:t>문서 하나로 개발 범위와 검수를 동시에 관리하고, 4단계로 시연 가능한 흐름을 완성합니다.</a:t>
             </a:r>
-            <a:endParaRPr lang="en-US" sz="950" dirty="0"/>
+            <a:endParaRPr lang="en-US" sz="950" dirty="0">
+              <a:latin typeface="맑은 고딕" panose="020B0503020000020004" pitchFamily="34" charset="-127"/>
+            </a:endParaRPr>
           </a:p>
         </p:txBody>
       </p:sp>
@@ -5607,7 +6896,7 @@
           <a:bodyPr wrap="square" lIns="254" tIns="254" rIns="254" bIns="254" rtlCol="0" anchor="ctr"/>
           <a:lstStyle/>
           <a:p>
-            <a:pPr algn="ctr" indent="0" marL="0">
+            <a:pPr marL="0" indent="0" algn="ctr">
               <a:buNone/>
             </a:pPr>
             <a:r>
@@ -5615,13 +6904,15 @@
                 <a:solidFill>
                   <a:srgbClr val="0B50D0"/>
                 </a:solidFill>
-                <a:latin typeface="Malgun Gothic" pitchFamily="34" charset="0"/>
-                <a:ea typeface="Malgun Gothic" pitchFamily="34" charset="-122"/>
+                <a:latin typeface="맑은 고딕" panose="020B0503020000020004" pitchFamily="34" charset="-127"/>
+                <a:ea typeface="맑은 고딕" panose="020B0503020000020004" pitchFamily="34" charset="-127"/>
                 <a:cs typeface="Malgun Gothic" pitchFamily="34" charset="-120"/>
               </a:rPr>
               <a:t>YOUNGCHA POC</a:t>
             </a:r>
-            <a:endParaRPr lang="en-US" sz="800" dirty="0"/>
+            <a:endParaRPr lang="en-US" sz="800" dirty="0">
+              <a:latin typeface="맑은 고딕" panose="020B0503020000020004" pitchFamily="34" charset="-127"/>
+            </a:endParaRPr>
           </a:p>
         </p:txBody>
       </p:sp>
@@ -5654,7 +6945,7 @@
           </a:bodyPr>
           <a:lstStyle/>
           <a:p>
-            <a:pPr algn="ctr" indent="0" marL="0">
+            <a:pPr marL="0" indent="0" algn="ctr">
               <a:buNone/>
             </a:pPr>
             <a:r>
@@ -5662,13 +6953,15 @@
                 <a:solidFill>
                   <a:srgbClr val="FFFFFF"/>
                 </a:solidFill>
-                <a:latin typeface="Malgun Gothic" pitchFamily="34" charset="0"/>
-                <a:ea typeface="Malgun Gothic" pitchFamily="34" charset="-122"/>
+                <a:latin typeface="맑은 고딕" panose="020B0503020000020004" pitchFamily="34" charset="-127"/>
+                <a:ea typeface="맑은 고딕" panose="020B0503020000020004" pitchFamily="34" charset="-127"/>
                 <a:cs typeface="Malgun Gothic" pitchFamily="34" charset="-120"/>
               </a:rPr>
               <a:t>1단계</a:t>
             </a:r>
-            <a:endParaRPr lang="en-US" sz="1000" dirty="0"/>
+            <a:endParaRPr lang="en-US" sz="1000" dirty="0">
+              <a:latin typeface="맑은 고딕" panose="020B0503020000020004" pitchFamily="34" charset="-127"/>
+            </a:endParaRPr>
           </a:p>
         </p:txBody>
       </p:sp>
@@ -5701,61 +6994,12 @@
           </a:bodyPr>
           <a:lstStyle/>
           <a:p>
-            <a:pPr algn="l" indent="0" marL="0">
-              <a:buNone/>
-            </a:pPr>
-            <a:r>
-              <a:rPr lang="en-US" sz="1080" b="1" dirty="0">
-                <a:solidFill>
-                  <a:srgbClr val="111827"/>
-                </a:solidFill>
-                <a:latin typeface="Malgun Gothic" pitchFamily="34" charset="0"/>
-                <a:ea typeface="Malgun Gothic" pitchFamily="34" charset="-122"/>
-                <a:cs typeface="Malgun Gothic" pitchFamily="34" charset="-120"/>
-              </a:rPr>
-              <a:t>베이 상태 단일화</a:t>
-            </a:r>
-            <a:endParaRPr lang="en-US" sz="1080" dirty="0"/>
-          </a:p>
-          <a:p>
-            <a:pPr algn="l" indent="0" marL="0">
-              <a:buNone/>
-            </a:pPr>
-            <a:endParaRPr lang="en-US" sz="1080" dirty="0"/>
-          </a:p>
-          <a:p>
-            <a:pPr algn="l" indent="0" marL="0">
-              <a:buNone/>
-            </a:pPr>
-            <a:r>
-              <a:rPr lang="en-US" sz="1080" b="1" dirty="0">
-                <a:solidFill>
-                  <a:srgbClr val="111827"/>
-                </a:solidFill>
-                <a:latin typeface="Malgun Gothic" pitchFamily="34" charset="0"/>
-                <a:ea typeface="Malgun Gothic" pitchFamily="34" charset="-122"/>
-                <a:cs typeface="Malgun Gothic" pitchFamily="34" charset="-120"/>
-              </a:rPr>
-              <a:t>6개 베이를 서버 데이터로 통일</a:t>
-            </a:r>
-            <a:endParaRPr lang="en-US" sz="1080" dirty="0"/>
-          </a:p>
-          <a:p>
-            <a:pPr algn="l" indent="0" marL="0">
-              <a:buNone/>
-            </a:pPr>
-            <a:r>
-              <a:rPr lang="en-US" sz="1080" b="1" dirty="0">
-                <a:solidFill>
-                  <a:srgbClr val="111827"/>
-                </a:solidFill>
-                <a:latin typeface="Malgun Gothic" pitchFamily="34" charset="0"/>
-                <a:ea typeface="Malgun Gothic" pitchFamily="34" charset="-122"/>
-                <a:cs typeface="Malgun Gothic" pitchFamily="34" charset="-120"/>
-              </a:rPr>
-              <a:t>앱·관리자가 동일 API 조회</a:t>
-            </a:r>
-            <a:endParaRPr lang="en-US" sz="1080" dirty="0"/>
+            <a:pPr marL="0" indent="0" algn="l">
+              <a:buNone/>
+            </a:pPr>
+            <a:endParaRPr lang="en-US" sz="1080" dirty="0">
+              <a:latin typeface="맑은 고딕" panose="020B0503020000020004" pitchFamily="34" charset="-127"/>
+            </a:endParaRPr>
           </a:p>
         </p:txBody>
       </p:sp>
@@ -5780,7 +7024,7 @@
           <a:bodyPr wrap="square" lIns="0" tIns="0" rIns="0" bIns="0" rtlCol="0" anchor="ctr"/>
           <a:lstStyle/>
           <a:p>
-            <a:pPr algn="ctr" indent="0" marL="0">
+            <a:pPr marL="0" indent="0" algn="ctr">
               <a:buNone/>
             </a:pPr>
             <a:r>
@@ -5788,10 +7032,13 @@
                 <a:solidFill>
                   <a:srgbClr val="475569"/>
                 </a:solidFill>
+                <a:latin typeface="맑은 고딕" panose="020B0503020000020004" pitchFamily="34" charset="-127"/>
               </a:rPr>
               <a:t>→</a:t>
             </a:r>
-            <a:endParaRPr lang="en-US" sz="1800" dirty="0"/>
+            <a:endParaRPr lang="en-US" sz="1800" dirty="0">
+              <a:latin typeface="맑은 고딕" panose="020B0503020000020004" pitchFamily="34" charset="-127"/>
+            </a:endParaRPr>
           </a:p>
         </p:txBody>
       </p:sp>
@@ -5824,7 +7071,7 @@
           </a:bodyPr>
           <a:lstStyle/>
           <a:p>
-            <a:pPr algn="ctr" indent="0" marL="0">
+            <a:pPr marL="0" indent="0" algn="ctr">
               <a:buNone/>
             </a:pPr>
             <a:r>
@@ -5832,13 +7079,15 @@
                 <a:solidFill>
                   <a:srgbClr val="FFFFFF"/>
                 </a:solidFill>
-                <a:latin typeface="Malgun Gothic" pitchFamily="34" charset="0"/>
-                <a:ea typeface="Malgun Gothic" pitchFamily="34" charset="-122"/>
+                <a:latin typeface="맑은 고딕" panose="020B0503020000020004" pitchFamily="34" charset="-127"/>
+                <a:ea typeface="맑은 고딕" panose="020B0503020000020004" pitchFamily="34" charset="-127"/>
                 <a:cs typeface="Malgun Gothic" pitchFamily="34" charset="-120"/>
               </a:rPr>
               <a:t>2단계</a:t>
             </a:r>
-            <a:endParaRPr lang="en-US" sz="1000" dirty="0"/>
+            <a:endParaRPr lang="en-US" sz="1000" dirty="0">
+              <a:latin typeface="맑은 고딕" panose="020B0503020000020004" pitchFamily="34" charset="-127"/>
+            </a:endParaRPr>
           </a:p>
         </p:txBody>
       </p:sp>
@@ -5871,61 +7120,12 @@
           </a:bodyPr>
           <a:lstStyle/>
           <a:p>
-            <a:pPr algn="l" indent="0" marL="0">
-              <a:buNone/>
-            </a:pPr>
-            <a:r>
-              <a:rPr lang="en-US" sz="1080" b="1" dirty="0">
-                <a:solidFill>
-                  <a:srgbClr val="111827"/>
-                </a:solidFill>
-                <a:latin typeface="Malgun Gothic" pitchFamily="34" charset="0"/>
-                <a:ea typeface="Malgun Gothic" pitchFamily="34" charset="-122"/>
-                <a:cs typeface="Malgun Gothic" pitchFamily="34" charset="-120"/>
-              </a:rPr>
-              <a:t>결제와 세션 시작</a:t>
-            </a:r>
-            <a:endParaRPr lang="en-US" sz="1080" dirty="0"/>
-          </a:p>
-          <a:p>
-            <a:pPr algn="l" indent="0" marL="0">
-              <a:buNone/>
-            </a:pPr>
-            <a:endParaRPr lang="en-US" sz="1080" dirty="0"/>
-          </a:p>
-          <a:p>
-            <a:pPr algn="l" indent="0" marL="0">
-              <a:buNone/>
-            </a:pPr>
-            <a:r>
-              <a:rPr lang="en-US" sz="1080" b="1" dirty="0">
-                <a:solidFill>
-                  <a:srgbClr val="111827"/>
-                </a:solidFill>
-                <a:latin typeface="Malgun Gothic" pitchFamily="34" charset="0"/>
-                <a:ea typeface="Malgun Gothic" pitchFamily="34" charset="-122"/>
-                <a:cs typeface="Malgun Gothic" pitchFamily="34" charset="-120"/>
-              </a:rPr>
-              <a:t>결제 완료 상태 생성</a:t>
-            </a:r>
-            <a:endParaRPr lang="en-US" sz="1080" dirty="0"/>
-          </a:p>
-          <a:p>
-            <a:pPr algn="l" indent="0" marL="0">
-              <a:buNone/>
-            </a:pPr>
-            <a:r>
-              <a:rPr lang="en-US" sz="1080" b="1" dirty="0">
-                <a:solidFill>
-                  <a:srgbClr val="111827"/>
-                </a:solidFill>
-                <a:latin typeface="Malgun Gothic" pitchFamily="34" charset="0"/>
-                <a:ea typeface="Malgun Gothic" pitchFamily="34" charset="-122"/>
-                <a:cs typeface="Malgun Gothic" pitchFamily="34" charset="-120"/>
-              </a:rPr>
-              <a:t>세션 생성 + 사용 중 변경</a:t>
-            </a:r>
-            <a:endParaRPr lang="en-US" sz="1080" dirty="0"/>
+            <a:pPr marL="0" indent="0" algn="l">
+              <a:buNone/>
+            </a:pPr>
+            <a:endParaRPr lang="en-US" sz="1080" dirty="0">
+              <a:latin typeface="맑은 고딕" panose="020B0503020000020004" pitchFamily="34" charset="-127"/>
+            </a:endParaRPr>
           </a:p>
         </p:txBody>
       </p:sp>
@@ -5950,7 +7150,7 @@
           <a:bodyPr wrap="square" lIns="0" tIns="0" rIns="0" bIns="0" rtlCol="0" anchor="ctr"/>
           <a:lstStyle/>
           <a:p>
-            <a:pPr algn="ctr" indent="0" marL="0">
+            <a:pPr marL="0" indent="0" algn="ctr">
               <a:buNone/>
             </a:pPr>
             <a:r>
@@ -5958,10 +7158,13 @@
                 <a:solidFill>
                   <a:srgbClr val="475569"/>
                 </a:solidFill>
+                <a:latin typeface="맑은 고딕" panose="020B0503020000020004" pitchFamily="34" charset="-127"/>
               </a:rPr>
               <a:t>→</a:t>
             </a:r>
-            <a:endParaRPr lang="en-US" sz="1800" dirty="0"/>
+            <a:endParaRPr lang="en-US" sz="1800" dirty="0">
+              <a:latin typeface="맑은 고딕" panose="020B0503020000020004" pitchFamily="34" charset="-127"/>
+            </a:endParaRPr>
           </a:p>
         </p:txBody>
       </p:sp>
@@ -5994,7 +7197,7 @@
           </a:bodyPr>
           <a:lstStyle/>
           <a:p>
-            <a:pPr algn="ctr" indent="0" marL="0">
+            <a:pPr marL="0" indent="0" algn="ctr">
               <a:buNone/>
             </a:pPr>
             <a:r>
@@ -6002,13 +7205,15 @@
                 <a:solidFill>
                   <a:srgbClr val="FFFFFF"/>
                 </a:solidFill>
-                <a:latin typeface="Malgun Gothic" pitchFamily="34" charset="0"/>
-                <a:ea typeface="Malgun Gothic" pitchFamily="34" charset="-122"/>
+                <a:latin typeface="맑은 고딕" panose="020B0503020000020004" pitchFamily="34" charset="-127"/>
+                <a:ea typeface="맑은 고딕" panose="020B0503020000020004" pitchFamily="34" charset="-127"/>
                 <a:cs typeface="Malgun Gothic" pitchFamily="34" charset="-120"/>
               </a:rPr>
               <a:t>3단계</a:t>
             </a:r>
-            <a:endParaRPr lang="en-US" sz="1000" dirty="0"/>
+            <a:endParaRPr lang="en-US" sz="1000" dirty="0">
+              <a:latin typeface="맑은 고딕" panose="020B0503020000020004" pitchFamily="34" charset="-127"/>
+            </a:endParaRPr>
           </a:p>
         </p:txBody>
       </p:sp>
@@ -6041,61 +7246,12 @@
           </a:bodyPr>
           <a:lstStyle/>
           <a:p>
-            <a:pPr algn="l" indent="0" marL="0">
-              <a:buNone/>
-            </a:pPr>
-            <a:r>
-              <a:rPr lang="en-US" sz="1080" b="1" dirty="0">
-                <a:solidFill>
-                  <a:srgbClr val="111827"/>
-                </a:solidFill>
-                <a:latin typeface="Malgun Gothic" pitchFamily="34" charset="0"/>
-                <a:ea typeface="Malgun Gothic" pitchFamily="34" charset="-122"/>
-                <a:cs typeface="Malgun Gothic" pitchFamily="34" charset="-120"/>
-              </a:rPr>
-              <a:t>완료와 베이 복구</a:t>
-            </a:r>
-            <a:endParaRPr lang="en-US" sz="1080" dirty="0"/>
-          </a:p>
-          <a:p>
-            <a:pPr algn="l" indent="0" marL="0">
-              <a:buNone/>
-            </a:pPr>
-            <a:endParaRPr lang="en-US" sz="1080" dirty="0"/>
-          </a:p>
-          <a:p>
-            <a:pPr algn="l" indent="0" marL="0">
-              <a:buNone/>
-            </a:pPr>
-            <a:r>
-              <a:rPr lang="en-US" sz="1080" b="1" dirty="0">
-                <a:solidFill>
-                  <a:srgbClr val="111827"/>
-                </a:solidFill>
-                <a:latin typeface="Malgun Gothic" pitchFamily="34" charset="0"/>
-                <a:ea typeface="Malgun Gothic" pitchFamily="34" charset="-122"/>
-                <a:cs typeface="Malgun Gothic" pitchFamily="34" charset="-120"/>
-              </a:rPr>
-              <a:t>앱 완료 또는 관리자 이용 종료</a:t>
-            </a:r>
-            <a:endParaRPr lang="en-US" sz="1080" dirty="0"/>
-          </a:p>
-          <a:p>
-            <a:pPr algn="l" indent="0" marL="0">
-              <a:buNone/>
-            </a:pPr>
-            <a:r>
-              <a:rPr lang="en-US" sz="1080" b="1" dirty="0">
-                <a:solidFill>
-                  <a:srgbClr val="111827"/>
-                </a:solidFill>
-                <a:latin typeface="Malgun Gothic" pitchFamily="34" charset="0"/>
-                <a:ea typeface="Malgun Gothic" pitchFamily="34" charset="-122"/>
-                <a:cs typeface="Malgun Gothic" pitchFamily="34" charset="-120"/>
-              </a:rPr>
-              <a:t>사용 가능 상태로 복귀</a:t>
-            </a:r>
-            <a:endParaRPr lang="en-US" sz="1080" dirty="0"/>
+            <a:pPr marL="0" indent="0" algn="l">
+              <a:buNone/>
+            </a:pPr>
+            <a:endParaRPr lang="en-US" sz="1080" dirty="0">
+              <a:latin typeface="맑은 고딕" panose="020B0503020000020004" pitchFamily="34" charset="-127"/>
+            </a:endParaRPr>
           </a:p>
         </p:txBody>
       </p:sp>
@@ -6120,7 +7276,7 @@
           <a:bodyPr wrap="square" lIns="0" tIns="0" rIns="0" bIns="0" rtlCol="0" anchor="ctr"/>
           <a:lstStyle/>
           <a:p>
-            <a:pPr algn="ctr" indent="0" marL="0">
+            <a:pPr marL="0" indent="0" algn="ctr">
               <a:buNone/>
             </a:pPr>
             <a:r>
@@ -6128,10 +7284,13 @@
                 <a:solidFill>
                   <a:srgbClr val="475569"/>
                 </a:solidFill>
+                <a:latin typeface="맑은 고딕" panose="020B0503020000020004" pitchFamily="34" charset="-127"/>
               </a:rPr>
               <a:t>→</a:t>
             </a:r>
-            <a:endParaRPr lang="en-US" sz="1800" dirty="0"/>
+            <a:endParaRPr lang="en-US" sz="1800" dirty="0">
+              <a:latin typeface="맑은 고딕" panose="020B0503020000020004" pitchFamily="34" charset="-127"/>
+            </a:endParaRPr>
           </a:p>
         </p:txBody>
       </p:sp>
@@ -6164,7 +7323,7 @@
           </a:bodyPr>
           <a:lstStyle/>
           <a:p>
-            <a:pPr algn="ctr" indent="0" marL="0">
+            <a:pPr marL="0" indent="0" algn="ctr">
               <a:buNone/>
             </a:pPr>
             <a:r>
@@ -6172,13 +7331,15 @@
                 <a:solidFill>
                   <a:srgbClr val="FFFFFF"/>
                 </a:solidFill>
-                <a:latin typeface="Malgun Gothic" pitchFamily="34" charset="0"/>
-                <a:ea typeface="Malgun Gothic" pitchFamily="34" charset="-122"/>
+                <a:latin typeface="맑은 고딕" panose="020B0503020000020004" pitchFamily="34" charset="-127"/>
+                <a:ea typeface="맑은 고딕" panose="020B0503020000020004" pitchFamily="34" charset="-127"/>
                 <a:cs typeface="Malgun Gothic" pitchFamily="34" charset="-120"/>
               </a:rPr>
               <a:t>4단계</a:t>
             </a:r>
-            <a:endParaRPr lang="en-US" sz="1000" dirty="0"/>
+            <a:endParaRPr lang="en-US" sz="1000" dirty="0">
+              <a:latin typeface="맑은 고딕" panose="020B0503020000020004" pitchFamily="34" charset="-127"/>
+            </a:endParaRPr>
           </a:p>
         </p:txBody>
       </p:sp>
@@ -6211,61 +7372,12 @@
           </a:bodyPr>
           <a:lstStyle/>
           <a:p>
-            <a:pPr algn="l" indent="0" marL="0">
-              <a:buNone/>
-            </a:pPr>
-            <a:r>
-              <a:rPr lang="en-US" sz="1080" b="1" dirty="0">
-                <a:solidFill>
-                  <a:srgbClr val="111827"/>
-                </a:solidFill>
-                <a:latin typeface="Malgun Gothic" pitchFamily="34" charset="0"/>
-                <a:ea typeface="Malgun Gothic" pitchFamily="34" charset="-122"/>
-                <a:cs typeface="Malgun Gothic" pitchFamily="34" charset="-120"/>
-              </a:rPr>
-              <a:t>POC 안정화</a:t>
-            </a:r>
-            <a:endParaRPr lang="en-US" sz="1080" dirty="0"/>
-          </a:p>
-          <a:p>
-            <a:pPr algn="l" indent="0" marL="0">
-              <a:buNone/>
-            </a:pPr>
-            <a:endParaRPr lang="en-US" sz="1080" dirty="0"/>
-          </a:p>
-          <a:p>
-            <a:pPr algn="l" indent="0" marL="0">
-              <a:buNone/>
-            </a:pPr>
-            <a:r>
-              <a:rPr lang="en-US" sz="1080" b="1" dirty="0">
-                <a:solidFill>
-                  <a:srgbClr val="111827"/>
-                </a:solidFill>
-                <a:latin typeface="Malgun Gothic" pitchFamily="34" charset="0"/>
-                <a:ea typeface="Malgun Gothic" pitchFamily="34" charset="-122"/>
-                <a:cs typeface="Malgun Gothic" pitchFamily="34" charset="-120"/>
-              </a:rPr>
-              <a:t>새로고침·재접속 복원</a:t>
-            </a:r>
-            <a:endParaRPr lang="en-US" sz="1080" dirty="0"/>
-          </a:p>
-          <a:p>
-            <a:pPr algn="l" indent="0" marL="0">
-              <a:buNone/>
-            </a:pPr>
-            <a:r>
-              <a:rPr lang="en-US" sz="1080" b="1" dirty="0">
-                <a:solidFill>
-                  <a:srgbClr val="111827"/>
-                </a:solidFill>
-                <a:latin typeface="Malgun Gothic" pitchFamily="34" charset="0"/>
-                <a:ea typeface="Malgun Gothic" pitchFamily="34" charset="-122"/>
-                <a:cs typeface="Malgun Gothic" pitchFamily="34" charset="-120"/>
-              </a:rPr>
-              <a:t>초기화 + 3회 반복 검수</a:t>
-            </a:r>
-            <a:endParaRPr lang="en-US" sz="1080" dirty="0"/>
+            <a:pPr marL="0" indent="0" algn="l">
+              <a:buNone/>
+            </a:pPr>
+            <a:endParaRPr lang="en-US" sz="1080" dirty="0">
+              <a:latin typeface="맑은 고딕" panose="020B0503020000020004" pitchFamily="34" charset="-127"/>
+            </a:endParaRPr>
           </a:p>
         </p:txBody>
       </p:sp>
@@ -6277,7 +7389,7 @@
         </p:nvSpPr>
         <p:spPr>
           <a:xfrm>
-            <a:off x="685800" y="4160520"/>
+            <a:off x="685800" y="3826764"/>
             <a:ext cx="1371600" cy="237744"/>
           </a:xfrm>
           <a:prstGeom prst="rect">
@@ -6290,7 +7402,7 @@
           <a:bodyPr wrap="square" lIns="0" tIns="0" rIns="0" bIns="0" rtlCol="0" anchor="ctr"/>
           <a:lstStyle/>
           <a:p>
-            <a:pPr indent="0" marL="0">
+            <a:pPr marL="0" indent="0">
               <a:buNone/>
             </a:pPr>
             <a:r>
@@ -6298,13 +7410,15 @@
                 <a:solidFill>
                   <a:srgbClr val="0B50D0"/>
                 </a:solidFill>
-                <a:latin typeface="Malgun Gothic" pitchFamily="34" charset="0"/>
-                <a:ea typeface="Malgun Gothic" pitchFamily="34" charset="-122"/>
+                <a:latin typeface="맑은 고딕" panose="020B0503020000020004" pitchFamily="34" charset="-127"/>
+                <a:ea typeface="맑은 고딕" panose="020B0503020000020004" pitchFamily="34" charset="-127"/>
                 <a:cs typeface="Malgun Gothic" pitchFamily="34" charset="-120"/>
               </a:rPr>
               <a:t>검수 기준</a:t>
             </a:r>
-            <a:endParaRPr lang="en-US" sz="1050" dirty="0"/>
+            <a:endParaRPr lang="en-US" sz="1050" dirty="0">
+              <a:latin typeface="맑은 고딕" panose="020B0503020000020004" pitchFamily="34" charset="-127"/>
+            </a:endParaRPr>
           </a:p>
         </p:txBody>
       </p:sp>
@@ -6316,8 +7430,8 @@
         </p:nvSpPr>
         <p:spPr>
           <a:xfrm>
-            <a:off x="685800" y="4526280"/>
-            <a:ext cx="5074920" cy="1051560"/>
+            <a:off x="685800" y="4192524"/>
+            <a:ext cx="5376672" cy="1051560"/>
           </a:xfrm>
           <a:prstGeom prst="rect">
             <a:avLst/>
@@ -6337,38 +7451,12 @@
           </a:bodyPr>
           <a:lstStyle/>
           <a:p>
-            <a:pPr algn="l" indent="0" marL="0">
-              <a:buNone/>
-            </a:pPr>
-            <a:r>
-              <a:rPr lang="en-US" sz="1120" b="1" dirty="0">
-                <a:solidFill>
-                  <a:srgbClr val="172B53"/>
-                </a:solidFill>
-                <a:latin typeface="Malgun Gothic" pitchFamily="34" charset="0"/>
-                <a:ea typeface="Malgun Gothic" pitchFamily="34" charset="-122"/>
-                <a:cs typeface="Malgun Gothic" pitchFamily="34" charset="-120"/>
-              </a:rPr>
-              <a:t>13개 핵심 체크리스트로 검수</a:t>
-            </a:r>
-            <a:endParaRPr lang="en-US" sz="1120" dirty="0"/>
-          </a:p>
-          <a:p>
-            <a:pPr algn="l" indent="0" marL="0">
-              <a:buNone/>
-            </a:pPr>
-            <a:r>
-              <a:rPr lang="en-US" sz="1120" b="1" dirty="0">
-                <a:solidFill>
-                  <a:srgbClr val="172B53"/>
-                </a:solidFill>
-                <a:latin typeface="Malgun Gothic" pitchFamily="34" charset="0"/>
-                <a:ea typeface="Malgun Gothic" pitchFamily="34" charset="-122"/>
-                <a:cs typeface="Malgun Gothic" pitchFamily="34" charset="-120"/>
-              </a:rPr>
-              <a:t>동일 6개 베이 표시 · 사용 가능 베이만 결제 · 결제 후 사용 중 반영 · 중복 사용 방지 · 타이머 재접속 유지 · 완료 후 사용 가능 복귀 · 예약 기능 미노출</a:t>
-            </a:r>
-            <a:endParaRPr lang="en-US" sz="1120" dirty="0"/>
+            <a:pPr marL="0" indent="0" algn="l">
+              <a:buNone/>
+            </a:pPr>
+            <a:endParaRPr lang="en-US" sz="1120" dirty="0">
+              <a:latin typeface="맑은 고딕" panose="020B0503020000020004" pitchFamily="34" charset="-127"/>
+            </a:endParaRPr>
           </a:p>
         </p:txBody>
       </p:sp>
@@ -6380,7 +7468,7 @@
         </p:nvSpPr>
         <p:spPr>
           <a:xfrm>
-            <a:off x="6400800" y="4160520"/>
+            <a:off x="6400800" y="3826764"/>
             <a:ext cx="2194560" cy="237744"/>
           </a:xfrm>
           <a:prstGeom prst="rect">
@@ -6393,7 +7481,7 @@
           <a:bodyPr wrap="square" lIns="0" tIns="0" rIns="0" bIns="0" rtlCol="0" anchor="ctr"/>
           <a:lstStyle/>
           <a:p>
-            <a:pPr indent="0" marL="0">
+            <a:pPr marL="0" indent="0">
               <a:buNone/>
             </a:pPr>
             <a:r>
@@ -6401,13 +7489,15 @@
                 <a:solidFill>
                   <a:srgbClr val="EC8913"/>
                 </a:solidFill>
-                <a:latin typeface="Malgun Gothic" pitchFamily="34" charset="0"/>
-                <a:ea typeface="Malgun Gothic" pitchFamily="34" charset="-122"/>
+                <a:latin typeface="맑은 고딕" panose="020B0503020000020004" pitchFamily="34" charset="-127"/>
+                <a:ea typeface="맑은 고딕" panose="020B0503020000020004" pitchFamily="34" charset="-127"/>
                 <a:cs typeface="Malgun Gothic" pitchFamily="34" charset="-120"/>
               </a:rPr>
               <a:t>착수 전 확정 권장</a:t>
             </a:r>
-            <a:endParaRPr lang="en-US" sz="1050" dirty="0"/>
+            <a:endParaRPr lang="en-US" sz="1050" dirty="0">
+              <a:latin typeface="맑은 고딕" panose="020B0503020000020004" pitchFamily="34" charset="-127"/>
+            </a:endParaRPr>
           </a:p>
         </p:txBody>
       </p:sp>
@@ -6419,8 +7509,8 @@
         </p:nvSpPr>
         <p:spPr>
           <a:xfrm>
-            <a:off x="6400800" y="4526280"/>
-            <a:ext cx="4846320" cy="1051560"/>
+            <a:off x="6214872" y="4192524"/>
+            <a:ext cx="5077968" cy="1051560"/>
           </a:xfrm>
           <a:prstGeom prst="rect">
             <a:avLst/>
@@ -6440,72 +7530,12 @@
           </a:bodyPr>
           <a:lstStyle/>
           <a:p>
-            <a:pPr algn="l" indent="0" marL="0">
-              <a:buNone/>
-            </a:pPr>
-            <a:r>
-              <a:rPr lang="en-US" sz="1120" b="1" dirty="0">
-                <a:solidFill>
-                  <a:srgbClr val="EC8913"/>
-                </a:solidFill>
-                <a:latin typeface="Malgun Gothic" pitchFamily="34" charset="0"/>
-                <a:ea typeface="Malgun Gothic" pitchFamily="34" charset="-122"/>
-                <a:cs typeface="Malgun Gothic" pitchFamily="34" charset="-120"/>
-              </a:rPr>
-              <a:t>테스트 계정 2개</a:t>
-            </a:r>
-            <a:endParaRPr lang="en-US" sz="1120" dirty="0"/>
-          </a:p>
-          <a:p>
-            <a:pPr algn="l" indent="0" marL="0">
-              <a:buNone/>
-            </a:pPr>
-            <a:r>
-              <a:rPr lang="en-US" sz="1120" b="1" dirty="0">
-                <a:solidFill>
-                  <a:srgbClr val="EC8913"/>
-                </a:solidFill>
-                <a:latin typeface="Malgun Gothic" pitchFamily="34" charset="0"/>
-                <a:ea typeface="Malgun Gothic" pitchFamily="34" charset="-122"/>
-                <a:cs typeface="Malgun Gothic" pitchFamily="34" charset="-120"/>
-              </a:rPr>
-              <a:t>베이 초기 상태: 1~5 사용 가능 / 6 점검 중</a:t>
-            </a:r>
-            <a:endParaRPr lang="en-US" sz="1120" dirty="0"/>
-          </a:p>
-          <a:p>
-            <a:pPr algn="l" indent="0" marL="0">
-              <a:buNone/>
-            </a:pPr>
-            <a:r>
-              <a:rPr lang="en-US" sz="1120" b="1" dirty="0">
-                <a:solidFill>
-                  <a:srgbClr val="EC8913"/>
-                </a:solidFill>
-                <a:latin typeface="Malgun Gothic" pitchFamily="34" charset="0"/>
-                <a:ea typeface="Malgun Gothic" pitchFamily="34" charset="-122"/>
-                <a:cs typeface="Malgun Gothic" pitchFamily="34" charset="-120"/>
-              </a:rPr>
-              <a:t>기본 시간 15분, 연장 5분</a:t>
-            </a:r>
-            <a:endParaRPr lang="en-US" sz="1120" dirty="0"/>
-          </a:p>
-          <a:p>
-            <a:pPr algn="l" indent="0" marL="0">
-              <a:buNone/>
-            </a:pPr>
-            <a:r>
-              <a:rPr lang="en-US" sz="1120" b="1" dirty="0">
-                <a:solidFill>
-                  <a:srgbClr val="EC8913"/>
-                </a:solidFill>
-                <a:latin typeface="Malgun Gothic" pitchFamily="34" charset="0"/>
-                <a:ea typeface="Malgun Gothic" pitchFamily="34" charset="-122"/>
-                <a:cs typeface="Malgun Gothic" pitchFamily="34" charset="-120"/>
-              </a:rPr>
-              <a:t>관리자 화면에 POC 초기화 버튼</a:t>
-            </a:r>
-            <a:endParaRPr lang="en-US" sz="1120" dirty="0"/>
+            <a:pPr marL="0" indent="0" algn="l">
+              <a:buNone/>
+            </a:pPr>
+            <a:endParaRPr lang="en-US" sz="1120" dirty="0">
+              <a:latin typeface="맑은 고딕" panose="020B0503020000020004" pitchFamily="34" charset="-127"/>
+            </a:endParaRPr>
           </a:p>
         </p:txBody>
       </p:sp>
@@ -6517,8 +7547,8 @@
         </p:nvSpPr>
         <p:spPr>
           <a:xfrm>
-            <a:off x="685800" y="5897880"/>
-            <a:ext cx="10561320" cy="384048"/>
+            <a:off x="685800" y="5564124"/>
+            <a:ext cx="10561320" cy="573024"/>
           </a:xfrm>
           <a:prstGeom prst="rect">
             <a:avLst/>
@@ -6538,7 +7568,7 @@
           </a:bodyPr>
           <a:lstStyle/>
           <a:p>
-            <a:pPr algn="ctr" indent="0" marL="0">
+            <a:pPr marL="0" indent="0" algn="ctr">
               <a:buNone/>
             </a:pPr>
             <a:r>
@@ -6546,16 +7576,18 @@
                 <a:solidFill>
                   <a:srgbClr val="FFFFFF"/>
                 </a:solidFill>
-                <a:latin typeface="Malgun Gothic" pitchFamily="34" charset="0"/>
-                <a:ea typeface="Malgun Gothic" pitchFamily="34" charset="-122"/>
+                <a:latin typeface="맑은 고딕" panose="020B0503020000020004" pitchFamily="34" charset="-127"/>
+                <a:ea typeface="맑은 고딕" panose="020B0503020000020004" pitchFamily="34" charset="-127"/>
                 <a:cs typeface="Malgun Gothic" pitchFamily="34" charset="-120"/>
               </a:rPr>
               <a:t>보고 후 진행안</a:t>
             </a:r>
-            <a:endParaRPr lang="en-US" sz="1250" dirty="0"/>
-          </a:p>
-          <a:p>
-            <a:pPr algn="ctr" indent="0" marL="0">
+            <a:endParaRPr lang="en-US" sz="1250" dirty="0">
+              <a:latin typeface="맑은 고딕" panose="020B0503020000020004" pitchFamily="34" charset="-127"/>
+            </a:endParaRPr>
+          </a:p>
+          <a:p>
+            <a:pPr marL="0" indent="0" algn="ctr">
               <a:buNone/>
             </a:pPr>
             <a:r>
@@ -6563,13 +7595,15 @@
                 <a:solidFill>
                   <a:srgbClr val="FFFFFF"/>
                 </a:solidFill>
-                <a:latin typeface="Malgun Gothic" pitchFamily="34" charset="0"/>
-                <a:ea typeface="Malgun Gothic" pitchFamily="34" charset="-122"/>
+                <a:latin typeface="맑은 고딕" panose="020B0503020000020004" pitchFamily="34" charset="-127"/>
+                <a:ea typeface="맑은 고딕" panose="020B0503020000020004" pitchFamily="34" charset="-127"/>
                 <a:cs typeface="Malgun Gothic" pitchFamily="34" charset="-120"/>
               </a:rPr>
               <a:t>본 문서를 v1.0으로 고정 → 개발자 구현 확인 메모 작성 → 1단계부터 순차 개발 착수</a:t>
             </a:r>
-            <a:endParaRPr lang="en-US" sz="1250" dirty="0"/>
+            <a:endParaRPr lang="en-US" sz="1250" dirty="0">
+              <a:latin typeface="맑은 고딕" panose="020B0503020000020004" pitchFamily="34" charset="-127"/>
+            </a:endParaRPr>
           </a:p>
         </p:txBody>
       </p:sp>
@@ -6594,7 +7628,7 @@
           <a:bodyPr wrap="square" lIns="0" tIns="0" rIns="0" bIns="0" rtlCol="0" anchor="ctr"/>
           <a:lstStyle/>
           <a:p>
-            <a:pPr indent="0" marL="0">
+            <a:pPr marL="0" indent="0">
               <a:buNone/>
             </a:pPr>
             <a:r>
@@ -6602,17 +7636,2309 @@
                 <a:solidFill>
                   <a:srgbClr val="7A8797"/>
                 </a:solidFill>
-                <a:latin typeface="Malgun Gothic" pitchFamily="34" charset="0"/>
-                <a:ea typeface="Malgun Gothic" pitchFamily="34" charset="-122"/>
+                <a:latin typeface="맑은 고딕" panose="020B0503020000020004" pitchFamily="34" charset="-127"/>
+                <a:ea typeface="맑은 고딕" panose="020B0503020000020004" pitchFamily="34" charset="-127"/>
                 <a:cs typeface="Malgun Gothic" pitchFamily="34" charset="-120"/>
               </a:rPr>
               <a:t>영차 1차 POC 범위 공유  |  5</a:t>
             </a:r>
-            <a:endParaRPr lang="en-US" sz="750" dirty="0"/>
+            <a:endParaRPr lang="en-US" sz="750" dirty="0">
+              <a:latin typeface="맑은 고딕" panose="020B0503020000020004" pitchFamily="34" charset="-127"/>
+            </a:endParaRPr>
+          </a:p>
+        </p:txBody>
+      </p:sp>
+      <p:sp>
+        <p:nvSpPr>
+          <p:cNvPr id="22" name="Text 4">
+            <a:extLst>
+              <a:ext uri="{FF2B5EF4-FFF2-40B4-BE49-F238E27FC236}">
+                <a16:creationId xmlns:a16="http://schemas.microsoft.com/office/drawing/2014/main" id="{D1BA2EC2-FC0C-4D26-CAAA-BC02BFEC708D}"/>
+              </a:ext>
+            </a:extLst>
+          </p:cNvPr>
+          <p:cNvSpPr/>
+          <p:nvPr/>
+        </p:nvSpPr>
+        <p:spPr>
+          <a:xfrm>
+            <a:off x="838200" y="2054352"/>
+            <a:ext cx="2240280" cy="1645920"/>
+          </a:xfrm>
+          <a:prstGeom prst="rect">
+            <a:avLst/>
+          </a:prstGeom>
+          <a:noFill/>
+          <a:ln>
+            <a:noFill/>
+          </a:ln>
+        </p:spPr>
+        <p:txBody>
+          <a:bodyPr wrap="square" lIns="2032" tIns="2032" rIns="2032" bIns="2032" rtlCol="0" anchor="t">
+            <a:normAutofit/>
+          </a:bodyPr>
+          <a:lstStyle/>
+          <a:p>
+            <a:pPr marL="0" indent="0" algn="l">
+              <a:buNone/>
+            </a:pPr>
+            <a:r>
+              <a:rPr lang="en-US" sz="1080" b="1" dirty="0">
+                <a:solidFill>
+                  <a:srgbClr val="111827"/>
+                </a:solidFill>
+                <a:latin typeface="맑은 고딕" panose="020B0503020000020004" pitchFamily="34" charset="-127"/>
+                <a:ea typeface="맑은 고딕" panose="020B0503020000020004" pitchFamily="34" charset="-127"/>
+                <a:cs typeface="Malgun Gothic" pitchFamily="34" charset="-120"/>
+              </a:rPr>
+              <a:t>베이 상태 단일화</a:t>
+            </a:r>
+            <a:endParaRPr lang="en-US" sz="1080" dirty="0">
+              <a:latin typeface="맑은 고딕" panose="020B0503020000020004" pitchFamily="34" charset="-127"/>
+            </a:endParaRPr>
+          </a:p>
+          <a:p>
+            <a:pPr marL="0" indent="0" algn="l">
+              <a:buNone/>
+            </a:pPr>
+            <a:endParaRPr lang="en-US" sz="1080" dirty="0">
+              <a:latin typeface="맑은 고딕" panose="020B0503020000020004" pitchFamily="34" charset="-127"/>
+            </a:endParaRPr>
+          </a:p>
+          <a:p>
+            <a:pPr marL="0" indent="0" algn="l">
+              <a:buNone/>
+            </a:pPr>
+            <a:r>
+              <a:rPr lang="en-US" sz="1080" b="1" dirty="0">
+                <a:solidFill>
+                  <a:srgbClr val="111827"/>
+                </a:solidFill>
+                <a:latin typeface="맑은 고딕" panose="020B0503020000020004" pitchFamily="34" charset="-127"/>
+                <a:ea typeface="맑은 고딕" panose="020B0503020000020004" pitchFamily="34" charset="-127"/>
+                <a:cs typeface="Malgun Gothic" pitchFamily="34" charset="-120"/>
+              </a:rPr>
+              <a:t>6개 베이를 서버 데이터로 통일</a:t>
+            </a:r>
+            <a:endParaRPr lang="en-US" sz="1080" dirty="0">
+              <a:latin typeface="맑은 고딕" panose="020B0503020000020004" pitchFamily="34" charset="-127"/>
+            </a:endParaRPr>
+          </a:p>
+          <a:p>
+            <a:pPr marL="0" indent="0" algn="l">
+              <a:buNone/>
+            </a:pPr>
+            <a:r>
+              <a:rPr lang="en-US" sz="1080" b="1" dirty="0">
+                <a:solidFill>
+                  <a:srgbClr val="111827"/>
+                </a:solidFill>
+                <a:latin typeface="맑은 고딕" panose="020B0503020000020004" pitchFamily="34" charset="-127"/>
+                <a:ea typeface="맑은 고딕" panose="020B0503020000020004" pitchFamily="34" charset="-127"/>
+                <a:cs typeface="Malgun Gothic" pitchFamily="34" charset="-120"/>
+              </a:rPr>
+              <a:t>앱·관리자가 동일 API 조회</a:t>
+            </a:r>
+            <a:endParaRPr lang="en-US" sz="1080" dirty="0">
+              <a:latin typeface="맑은 고딕" panose="020B0503020000020004" pitchFamily="34" charset="-127"/>
+            </a:endParaRPr>
+          </a:p>
+        </p:txBody>
+      </p:sp>
+      <p:sp>
+        <p:nvSpPr>
+          <p:cNvPr id="23" name="Text 7">
+            <a:extLst>
+              <a:ext uri="{FF2B5EF4-FFF2-40B4-BE49-F238E27FC236}">
+                <a16:creationId xmlns:a16="http://schemas.microsoft.com/office/drawing/2014/main" id="{11CEBAFB-22A2-EAE1-42E1-112BB1127738}"/>
+              </a:ext>
+            </a:extLst>
+          </p:cNvPr>
+          <p:cNvSpPr/>
+          <p:nvPr/>
+        </p:nvSpPr>
+        <p:spPr>
+          <a:xfrm>
+            <a:off x="3627120" y="2054352"/>
+            <a:ext cx="2240280" cy="1645920"/>
+          </a:xfrm>
+          <a:prstGeom prst="rect">
+            <a:avLst/>
+          </a:prstGeom>
+          <a:noFill/>
+          <a:ln>
+            <a:noFill/>
+          </a:ln>
+        </p:spPr>
+        <p:txBody>
+          <a:bodyPr wrap="square" lIns="2032" tIns="2032" rIns="2032" bIns="2032" rtlCol="0" anchor="t">
+            <a:normAutofit/>
+          </a:bodyPr>
+          <a:lstStyle/>
+          <a:p>
+            <a:pPr marL="0" indent="0" algn="l">
+              <a:buNone/>
+            </a:pPr>
+            <a:r>
+              <a:rPr lang="en-US" sz="1080" b="1" dirty="0">
+                <a:solidFill>
+                  <a:srgbClr val="111827"/>
+                </a:solidFill>
+                <a:latin typeface="맑은 고딕" panose="020B0503020000020004" pitchFamily="34" charset="-127"/>
+                <a:ea typeface="맑은 고딕" panose="020B0503020000020004" pitchFamily="34" charset="-127"/>
+                <a:cs typeface="Malgun Gothic" pitchFamily="34" charset="-120"/>
+              </a:rPr>
+              <a:t>결제와 세션 시작</a:t>
+            </a:r>
+            <a:endParaRPr lang="en-US" sz="1080" dirty="0">
+              <a:latin typeface="맑은 고딕" panose="020B0503020000020004" pitchFamily="34" charset="-127"/>
+            </a:endParaRPr>
+          </a:p>
+          <a:p>
+            <a:pPr marL="0" indent="0" algn="l">
+              <a:buNone/>
+            </a:pPr>
+            <a:endParaRPr lang="en-US" sz="1080" dirty="0">
+              <a:latin typeface="맑은 고딕" panose="020B0503020000020004" pitchFamily="34" charset="-127"/>
+            </a:endParaRPr>
+          </a:p>
+          <a:p>
+            <a:pPr marL="0" indent="0" algn="l">
+              <a:buNone/>
+            </a:pPr>
+            <a:r>
+              <a:rPr lang="en-US" sz="1080" b="1" dirty="0">
+                <a:solidFill>
+                  <a:srgbClr val="111827"/>
+                </a:solidFill>
+                <a:latin typeface="맑은 고딕" panose="020B0503020000020004" pitchFamily="34" charset="-127"/>
+                <a:ea typeface="맑은 고딕" panose="020B0503020000020004" pitchFamily="34" charset="-127"/>
+                <a:cs typeface="Malgun Gothic" pitchFamily="34" charset="-120"/>
+              </a:rPr>
+              <a:t>결제 완료 상태 생성</a:t>
+            </a:r>
+            <a:endParaRPr lang="en-US" sz="1080" dirty="0">
+              <a:latin typeface="맑은 고딕" panose="020B0503020000020004" pitchFamily="34" charset="-127"/>
+            </a:endParaRPr>
+          </a:p>
+          <a:p>
+            <a:pPr marL="0" indent="0" algn="l">
+              <a:buNone/>
+            </a:pPr>
+            <a:r>
+              <a:rPr lang="en-US" sz="1080" b="1" dirty="0">
+                <a:solidFill>
+                  <a:srgbClr val="111827"/>
+                </a:solidFill>
+                <a:latin typeface="맑은 고딕" panose="020B0503020000020004" pitchFamily="34" charset="-127"/>
+                <a:ea typeface="맑은 고딕" panose="020B0503020000020004" pitchFamily="34" charset="-127"/>
+                <a:cs typeface="Malgun Gothic" pitchFamily="34" charset="-120"/>
+              </a:rPr>
+              <a:t>세션 생성 + 사용 중 변경</a:t>
+            </a:r>
+            <a:endParaRPr lang="en-US" sz="1080" dirty="0">
+              <a:latin typeface="맑은 고딕" panose="020B0503020000020004" pitchFamily="34" charset="-127"/>
+            </a:endParaRPr>
+          </a:p>
+        </p:txBody>
+      </p:sp>
+      <p:sp>
+        <p:nvSpPr>
+          <p:cNvPr id="24" name="Text 10">
+            <a:extLst>
+              <a:ext uri="{FF2B5EF4-FFF2-40B4-BE49-F238E27FC236}">
+                <a16:creationId xmlns:a16="http://schemas.microsoft.com/office/drawing/2014/main" id="{9F045E33-F14B-0649-596E-761184B3C82E}"/>
+              </a:ext>
+            </a:extLst>
+          </p:cNvPr>
+          <p:cNvSpPr/>
+          <p:nvPr/>
+        </p:nvSpPr>
+        <p:spPr>
+          <a:xfrm>
+            <a:off x="6416040" y="2054352"/>
+            <a:ext cx="2240280" cy="1645920"/>
+          </a:xfrm>
+          <a:prstGeom prst="rect">
+            <a:avLst/>
+          </a:prstGeom>
+          <a:noFill/>
+          <a:ln>
+            <a:noFill/>
+          </a:ln>
+        </p:spPr>
+        <p:txBody>
+          <a:bodyPr wrap="square" lIns="2032" tIns="2032" rIns="2032" bIns="2032" rtlCol="0" anchor="t">
+            <a:normAutofit/>
+          </a:bodyPr>
+          <a:lstStyle/>
+          <a:p>
+            <a:pPr marL="0" indent="0" algn="l">
+              <a:buNone/>
+            </a:pPr>
+            <a:r>
+              <a:rPr lang="en-US" sz="1080" b="1" dirty="0">
+                <a:solidFill>
+                  <a:srgbClr val="111827"/>
+                </a:solidFill>
+                <a:latin typeface="맑은 고딕" panose="020B0503020000020004" pitchFamily="34" charset="-127"/>
+                <a:ea typeface="맑은 고딕" panose="020B0503020000020004" pitchFamily="34" charset="-127"/>
+                <a:cs typeface="Malgun Gothic" pitchFamily="34" charset="-120"/>
+              </a:rPr>
+              <a:t>완료와 베이 복구</a:t>
+            </a:r>
+            <a:endParaRPr lang="en-US" sz="1080" dirty="0">
+              <a:latin typeface="맑은 고딕" panose="020B0503020000020004" pitchFamily="34" charset="-127"/>
+            </a:endParaRPr>
+          </a:p>
+          <a:p>
+            <a:pPr marL="0" indent="0" algn="l">
+              <a:buNone/>
+            </a:pPr>
+            <a:endParaRPr lang="en-US" sz="1080" dirty="0">
+              <a:latin typeface="맑은 고딕" panose="020B0503020000020004" pitchFamily="34" charset="-127"/>
+            </a:endParaRPr>
+          </a:p>
+          <a:p>
+            <a:pPr marL="0" indent="0" algn="l">
+              <a:buNone/>
+            </a:pPr>
+            <a:r>
+              <a:rPr lang="en-US" sz="1080" b="1" dirty="0">
+                <a:solidFill>
+                  <a:srgbClr val="111827"/>
+                </a:solidFill>
+                <a:latin typeface="맑은 고딕" panose="020B0503020000020004" pitchFamily="34" charset="-127"/>
+                <a:ea typeface="맑은 고딕" panose="020B0503020000020004" pitchFamily="34" charset="-127"/>
+                <a:cs typeface="Malgun Gothic" pitchFamily="34" charset="-120"/>
+              </a:rPr>
+              <a:t>앱 완료 또는 관리자 이용 종료</a:t>
+            </a:r>
+            <a:endParaRPr lang="en-US" sz="1080" dirty="0">
+              <a:latin typeface="맑은 고딕" panose="020B0503020000020004" pitchFamily="34" charset="-127"/>
+            </a:endParaRPr>
+          </a:p>
+          <a:p>
+            <a:pPr marL="0" indent="0" algn="l">
+              <a:buNone/>
+            </a:pPr>
+            <a:r>
+              <a:rPr lang="en-US" sz="1080" b="1" dirty="0">
+                <a:solidFill>
+                  <a:srgbClr val="111827"/>
+                </a:solidFill>
+                <a:latin typeface="맑은 고딕" panose="020B0503020000020004" pitchFamily="34" charset="-127"/>
+                <a:ea typeface="맑은 고딕" panose="020B0503020000020004" pitchFamily="34" charset="-127"/>
+                <a:cs typeface="Malgun Gothic" pitchFamily="34" charset="-120"/>
+              </a:rPr>
+              <a:t>사용 가능 상태로 복귀</a:t>
+            </a:r>
+            <a:endParaRPr lang="en-US" sz="1080" dirty="0">
+              <a:latin typeface="맑은 고딕" panose="020B0503020000020004" pitchFamily="34" charset="-127"/>
+            </a:endParaRPr>
+          </a:p>
+        </p:txBody>
+      </p:sp>
+      <p:sp>
+        <p:nvSpPr>
+          <p:cNvPr id="25" name="Text 13">
+            <a:extLst>
+              <a:ext uri="{FF2B5EF4-FFF2-40B4-BE49-F238E27FC236}">
+                <a16:creationId xmlns:a16="http://schemas.microsoft.com/office/drawing/2014/main" id="{FDCC4CB6-B51F-285B-A284-FECA21FC694B}"/>
+              </a:ext>
+            </a:extLst>
+          </p:cNvPr>
+          <p:cNvSpPr/>
+          <p:nvPr/>
+        </p:nvSpPr>
+        <p:spPr>
+          <a:xfrm>
+            <a:off x="9204960" y="2054352"/>
+            <a:ext cx="2240280" cy="1645920"/>
+          </a:xfrm>
+          <a:prstGeom prst="rect">
+            <a:avLst/>
+          </a:prstGeom>
+          <a:noFill/>
+          <a:ln>
+            <a:noFill/>
+          </a:ln>
+        </p:spPr>
+        <p:txBody>
+          <a:bodyPr wrap="square" lIns="2032" tIns="2032" rIns="2032" bIns="2032" rtlCol="0" anchor="t">
+            <a:normAutofit/>
+          </a:bodyPr>
+          <a:lstStyle/>
+          <a:p>
+            <a:pPr marL="0" indent="0" algn="l">
+              <a:buNone/>
+            </a:pPr>
+            <a:r>
+              <a:rPr lang="en-US" sz="1080" b="1" dirty="0">
+                <a:solidFill>
+                  <a:srgbClr val="111827"/>
+                </a:solidFill>
+                <a:latin typeface="맑은 고딕" panose="020B0503020000020004" pitchFamily="34" charset="-127"/>
+                <a:ea typeface="맑은 고딕" panose="020B0503020000020004" pitchFamily="34" charset="-127"/>
+                <a:cs typeface="Malgun Gothic" pitchFamily="34" charset="-120"/>
+              </a:rPr>
+              <a:t>POC 안정화</a:t>
+            </a:r>
+            <a:endParaRPr lang="en-US" sz="1080" dirty="0">
+              <a:latin typeface="맑은 고딕" panose="020B0503020000020004" pitchFamily="34" charset="-127"/>
+            </a:endParaRPr>
+          </a:p>
+          <a:p>
+            <a:pPr marL="0" indent="0" algn="l">
+              <a:buNone/>
+            </a:pPr>
+            <a:endParaRPr lang="en-US" sz="1080" dirty="0">
+              <a:latin typeface="맑은 고딕" panose="020B0503020000020004" pitchFamily="34" charset="-127"/>
+            </a:endParaRPr>
+          </a:p>
+          <a:p>
+            <a:pPr marL="0" indent="0" algn="l">
+              <a:buNone/>
+            </a:pPr>
+            <a:r>
+              <a:rPr lang="en-US" sz="1080" b="1" dirty="0">
+                <a:solidFill>
+                  <a:srgbClr val="111827"/>
+                </a:solidFill>
+                <a:latin typeface="맑은 고딕" panose="020B0503020000020004" pitchFamily="34" charset="-127"/>
+                <a:ea typeface="맑은 고딕" panose="020B0503020000020004" pitchFamily="34" charset="-127"/>
+                <a:cs typeface="Malgun Gothic" pitchFamily="34" charset="-120"/>
+              </a:rPr>
+              <a:t>새로고침·재접속 복원</a:t>
+            </a:r>
+            <a:endParaRPr lang="en-US" sz="1080" dirty="0">
+              <a:latin typeface="맑은 고딕" panose="020B0503020000020004" pitchFamily="34" charset="-127"/>
+            </a:endParaRPr>
+          </a:p>
+          <a:p>
+            <a:pPr marL="0" indent="0" algn="l">
+              <a:buNone/>
+            </a:pPr>
+            <a:r>
+              <a:rPr lang="en-US" sz="1080" b="1" dirty="0">
+                <a:solidFill>
+                  <a:srgbClr val="111827"/>
+                </a:solidFill>
+                <a:latin typeface="맑은 고딕" panose="020B0503020000020004" pitchFamily="34" charset="-127"/>
+                <a:ea typeface="맑은 고딕" panose="020B0503020000020004" pitchFamily="34" charset="-127"/>
+                <a:cs typeface="Malgun Gothic" pitchFamily="34" charset="-120"/>
+              </a:rPr>
+              <a:t>초기화 + 3회 반복 검수</a:t>
+            </a:r>
+            <a:endParaRPr lang="en-US" sz="1080" dirty="0">
+              <a:latin typeface="맑은 고딕" panose="020B0503020000020004" pitchFamily="34" charset="-127"/>
+            </a:endParaRPr>
+          </a:p>
+        </p:txBody>
+      </p:sp>
+      <p:sp>
+        <p:nvSpPr>
+          <p:cNvPr id="26" name="Text 15">
+            <a:extLst>
+              <a:ext uri="{FF2B5EF4-FFF2-40B4-BE49-F238E27FC236}">
+                <a16:creationId xmlns:a16="http://schemas.microsoft.com/office/drawing/2014/main" id="{1DDEA393-DB92-B5D1-33C7-BC0112C34049}"/>
+              </a:ext>
+            </a:extLst>
+          </p:cNvPr>
+          <p:cNvSpPr/>
+          <p:nvPr/>
+        </p:nvSpPr>
+        <p:spPr>
+          <a:xfrm>
+            <a:off x="838200" y="4344924"/>
+            <a:ext cx="5074920" cy="1051560"/>
+          </a:xfrm>
+          <a:prstGeom prst="rect">
+            <a:avLst/>
+          </a:prstGeom>
+          <a:noFill/>
+          <a:ln>
+            <a:noFill/>
+          </a:ln>
+        </p:spPr>
+        <p:txBody>
+          <a:bodyPr wrap="square" lIns="2032" tIns="2032" rIns="2032" bIns="2032" rtlCol="0" anchor="t">
+            <a:normAutofit/>
+          </a:bodyPr>
+          <a:lstStyle/>
+          <a:p>
+            <a:pPr marL="0" indent="0" algn="l">
+              <a:buNone/>
+            </a:pPr>
+            <a:r>
+              <a:rPr lang="en-US" sz="1120" b="1" dirty="0">
+                <a:solidFill>
+                  <a:srgbClr val="172B53"/>
+                </a:solidFill>
+                <a:latin typeface="맑은 고딕" panose="020B0503020000020004" pitchFamily="34" charset="-127"/>
+                <a:ea typeface="맑은 고딕" panose="020B0503020000020004" pitchFamily="34" charset="-127"/>
+                <a:cs typeface="Malgun Gothic" pitchFamily="34" charset="-120"/>
+              </a:rPr>
+              <a:t>13개 핵심 체크리스트로 검수</a:t>
+            </a:r>
+            <a:endParaRPr lang="en-US" sz="1120" dirty="0">
+              <a:latin typeface="맑은 고딕" panose="020B0503020000020004" pitchFamily="34" charset="-127"/>
+            </a:endParaRPr>
+          </a:p>
+          <a:p>
+            <a:pPr marL="0" indent="0" algn="l">
+              <a:buNone/>
+            </a:pPr>
+            <a:r>
+              <a:rPr lang="en-US" sz="1120" b="1" dirty="0">
+                <a:solidFill>
+                  <a:srgbClr val="172B53"/>
+                </a:solidFill>
+                <a:latin typeface="맑은 고딕" panose="020B0503020000020004" pitchFamily="34" charset="-127"/>
+                <a:ea typeface="맑은 고딕" panose="020B0503020000020004" pitchFamily="34" charset="-127"/>
+                <a:cs typeface="Malgun Gothic" pitchFamily="34" charset="-120"/>
+              </a:rPr>
+              <a:t>동일 6개 베이 표시 · 사용 가능 베이만 결제 · 결제 후 사용 중 반영 · 중복 사용 방지 · 타이머 재접속 유지 · 완료 후 사용 가능 복귀 · 예약 기능 미노출</a:t>
+            </a:r>
+            <a:endParaRPr lang="en-US" sz="1120" dirty="0">
+              <a:latin typeface="맑은 고딕" panose="020B0503020000020004" pitchFamily="34" charset="-127"/>
+            </a:endParaRPr>
+          </a:p>
+        </p:txBody>
+      </p:sp>
+      <p:sp>
+        <p:nvSpPr>
+          <p:cNvPr id="27" name="Text 17">
+            <a:extLst>
+              <a:ext uri="{FF2B5EF4-FFF2-40B4-BE49-F238E27FC236}">
+                <a16:creationId xmlns:a16="http://schemas.microsoft.com/office/drawing/2014/main" id="{3EC41F1B-5E45-7F31-D253-1ECEA3228013}"/>
+              </a:ext>
+            </a:extLst>
+          </p:cNvPr>
+          <p:cNvSpPr/>
+          <p:nvPr/>
+        </p:nvSpPr>
+        <p:spPr>
+          <a:xfrm>
+            <a:off x="6367272" y="4344924"/>
+            <a:ext cx="4846320" cy="1051560"/>
+          </a:xfrm>
+          <a:prstGeom prst="rect">
+            <a:avLst/>
+          </a:prstGeom>
+          <a:noFill/>
+          <a:ln>
+            <a:noFill/>
+          </a:ln>
+        </p:spPr>
+        <p:txBody>
+          <a:bodyPr wrap="square" lIns="2032" tIns="2032" rIns="2032" bIns="2032" rtlCol="0" anchor="t">
+            <a:normAutofit/>
+          </a:bodyPr>
+          <a:lstStyle/>
+          <a:p>
+            <a:pPr marL="0" indent="0" algn="l">
+              <a:buNone/>
+            </a:pPr>
+            <a:r>
+              <a:rPr lang="en-US" sz="1120" b="1" dirty="0">
+                <a:solidFill>
+                  <a:srgbClr val="EC8913"/>
+                </a:solidFill>
+                <a:latin typeface="맑은 고딕" panose="020B0503020000020004" pitchFamily="34" charset="-127"/>
+                <a:ea typeface="맑은 고딕" panose="020B0503020000020004" pitchFamily="34" charset="-127"/>
+                <a:cs typeface="Malgun Gothic" pitchFamily="34" charset="-120"/>
+              </a:rPr>
+              <a:t>테스트 계정 2개</a:t>
+            </a:r>
+            <a:endParaRPr lang="en-US" sz="1120" dirty="0">
+              <a:latin typeface="맑은 고딕" panose="020B0503020000020004" pitchFamily="34" charset="-127"/>
+            </a:endParaRPr>
+          </a:p>
+          <a:p>
+            <a:pPr marL="0" indent="0" algn="l">
+              <a:buNone/>
+            </a:pPr>
+            <a:r>
+              <a:rPr lang="en-US" sz="1120" b="1" dirty="0">
+                <a:solidFill>
+                  <a:srgbClr val="EC8913"/>
+                </a:solidFill>
+                <a:latin typeface="맑은 고딕" panose="020B0503020000020004" pitchFamily="34" charset="-127"/>
+                <a:ea typeface="맑은 고딕" panose="020B0503020000020004" pitchFamily="34" charset="-127"/>
+                <a:cs typeface="Malgun Gothic" pitchFamily="34" charset="-120"/>
+              </a:rPr>
+              <a:t>베이 초기 상태: 1~5 사용 가능 / 6 점검 중</a:t>
+            </a:r>
+            <a:endParaRPr lang="en-US" sz="1120" dirty="0">
+              <a:latin typeface="맑은 고딕" panose="020B0503020000020004" pitchFamily="34" charset="-127"/>
+            </a:endParaRPr>
+          </a:p>
+          <a:p>
+            <a:pPr marL="0" indent="0" algn="l">
+              <a:buNone/>
+            </a:pPr>
+            <a:r>
+              <a:rPr lang="en-US" sz="1120" b="1" dirty="0">
+                <a:solidFill>
+                  <a:srgbClr val="EC8913"/>
+                </a:solidFill>
+                <a:latin typeface="맑은 고딕" panose="020B0503020000020004" pitchFamily="34" charset="-127"/>
+                <a:ea typeface="맑은 고딕" panose="020B0503020000020004" pitchFamily="34" charset="-127"/>
+                <a:cs typeface="Malgun Gothic" pitchFamily="34" charset="-120"/>
+              </a:rPr>
+              <a:t>기본 시간 15분, 연장 5분</a:t>
+            </a:r>
+            <a:endParaRPr lang="en-US" sz="1120" dirty="0">
+              <a:latin typeface="맑은 고딕" panose="020B0503020000020004" pitchFamily="34" charset="-127"/>
+            </a:endParaRPr>
+          </a:p>
+          <a:p>
+            <a:pPr marL="0" indent="0" algn="l">
+              <a:buNone/>
+            </a:pPr>
+            <a:r>
+              <a:rPr lang="en-US" sz="1120" b="1" dirty="0">
+                <a:solidFill>
+                  <a:srgbClr val="EC8913"/>
+                </a:solidFill>
+                <a:latin typeface="맑은 고딕" panose="020B0503020000020004" pitchFamily="34" charset="-127"/>
+                <a:ea typeface="맑은 고딕" panose="020B0503020000020004" pitchFamily="34" charset="-127"/>
+                <a:cs typeface="Malgun Gothic" pitchFamily="34" charset="-120"/>
+              </a:rPr>
+              <a:t>관리자 화면에 POC 초기화 버튼</a:t>
+            </a:r>
+            <a:endParaRPr lang="en-US" sz="1120" dirty="0">
+              <a:latin typeface="맑은 고딕" panose="020B0503020000020004" pitchFamily="34" charset="-127"/>
+            </a:endParaRPr>
           </a:p>
         </p:txBody>
       </p:sp>
     </p:spTree>
+  </p:cSld>
+  <p:clrMapOvr>
+    <a:masterClrMapping/>
+  </p:clrMapOvr>
+</p:sld>
+</file>
+
+<file path=ppt/slides/slide6.xml><?xml version="1.0" encoding="utf-8"?>
+<p:sld xmlns:a="http://schemas.openxmlformats.org/drawingml/2006/main" xmlns:r="http://schemas.openxmlformats.org/officeDocument/2006/relationships" xmlns:p="http://schemas.openxmlformats.org/presentationml/2006/main">
+  <p:cSld>
+    <p:bg>
+      <p:bgPr>
+        <a:solidFill>
+          <a:srgbClr val="F5F8FC"/>
+        </a:solidFill>
+        <a:effectLst/>
+      </p:bgPr>
+    </p:bg>
+    <p:spTree>
+      <p:nvGrpSpPr>
+        <p:cNvPr id="1" name="">
+          <a:extLst>
+            <a:ext uri="{FF2B5EF4-FFF2-40B4-BE49-F238E27FC236}">
+              <a16:creationId xmlns:a16="http://schemas.microsoft.com/office/drawing/2014/main" id="{1CC8D1BE-D4B7-D35F-750B-F98E615B0415}"/>
+            </a:ext>
+          </a:extLst>
+        </p:cNvPr>
+        <p:cNvGrpSpPr/>
+        <p:nvPr/>
+      </p:nvGrpSpPr>
+      <p:grpSpPr>
+        <a:xfrm>
+          <a:off x="0" y="0"/>
+          <a:ext cx="0" cy="0"/>
+          <a:chOff x="0" y="0"/>
+          <a:chExt cx="0" cy="0"/>
+        </a:xfrm>
+      </p:grpSpPr>
+      <p:sp>
+        <p:nvSpPr>
+          <p:cNvPr id="29" name="Rectangle 1">
+            <a:extLst>
+              <a:ext uri="{FF2B5EF4-FFF2-40B4-BE49-F238E27FC236}">
+                <a16:creationId xmlns:a16="http://schemas.microsoft.com/office/drawing/2014/main" id="{F607AC6F-35C6-8BD9-8E8C-B03534CFB4B4}"/>
+              </a:ext>
+            </a:extLst>
+          </p:cNvPr>
+          <p:cNvSpPr/>
+          <p:nvPr/>
+        </p:nvSpPr>
+        <p:spPr>
+          <a:xfrm>
+            <a:off x="9784080" y="384048"/>
+            <a:ext cx="1234440" cy="256032"/>
+          </a:xfrm>
+          <a:prstGeom prst="rect">
+            <a:avLst/>
+          </a:prstGeom>
+          <a:solidFill>
+            <a:srgbClr val="E8F2FF"/>
+          </a:solidFill>
+          <a:ln>
+            <a:solidFill>
+              <a:srgbClr val="E8F2FF"/>
+            </a:solidFill>
+          </a:ln>
+        </p:spPr>
+        <p:style>
+          <a:lnRef idx="1">
+            <a:schemeClr val="accent1"/>
+          </a:lnRef>
+          <a:fillRef idx="3">
+            <a:schemeClr val="accent1"/>
+          </a:fillRef>
+          <a:effectRef idx="2">
+            <a:schemeClr val="accent1"/>
+          </a:effectRef>
+          <a:fontRef idx="minor">
+            <a:schemeClr val="lt1"/>
+          </a:fontRef>
+        </p:style>
+        <p:txBody>
+          <a:bodyPr rtlCol="0" anchor="ctr"/>
+          <a:lstStyle/>
+          <a:p>
+            <a:pPr algn="ctr"/>
+            <a:r>
+              <a:rPr sz="650" b="1">
+                <a:solidFill>
+                  <a:srgbClr val="2066DB"/>
+                </a:solidFill>
+                <a:latin typeface="Malgun Gothic"/>
+              </a:rPr>
+              <a:t>YOUNGCHA POC</a:t>
+            </a:r>
+          </a:p>
+        </p:txBody>
+      </p:sp>
+      <p:sp>
+        <p:nvSpPr>
+          <p:cNvPr id="31" name="TextBox 30">
+            <a:extLst>
+              <a:ext uri="{FF2B5EF4-FFF2-40B4-BE49-F238E27FC236}">
+                <a16:creationId xmlns:a16="http://schemas.microsoft.com/office/drawing/2014/main" id="{00CB2C6E-5F76-41E4-46EB-B7A6BB36D49A}"/>
+              </a:ext>
+            </a:extLst>
+          </p:cNvPr>
+          <p:cNvSpPr txBox="1"/>
+          <p:nvPr/>
+        </p:nvSpPr>
+        <p:spPr>
+          <a:xfrm>
+            <a:off x="512064" y="438912"/>
+            <a:ext cx="5943600" cy="457200"/>
+          </a:xfrm>
+          <a:prstGeom prst="rect">
+            <a:avLst/>
+          </a:prstGeom>
+          <a:noFill/>
+        </p:spPr>
+        <p:txBody>
+          <a:bodyPr wrap="square">
+            <a:spAutoFit/>
+          </a:bodyPr>
+          <a:lstStyle/>
+          <a:p>
+            <a:r>
+              <a:rPr sz="2400" b="1">
+                <a:solidFill>
+                  <a:srgbClr val="172B53"/>
+                </a:solidFill>
+                <a:latin typeface="Malgun Gothic"/>
+              </a:rPr>
+              <a:t>이번 보고에서 결정할 것 3가지</a:t>
+            </a:r>
+          </a:p>
+        </p:txBody>
+      </p:sp>
+      <p:sp>
+        <p:nvSpPr>
+          <p:cNvPr id="33" name="TextBox 32">
+            <a:extLst>
+              <a:ext uri="{FF2B5EF4-FFF2-40B4-BE49-F238E27FC236}">
+                <a16:creationId xmlns:a16="http://schemas.microsoft.com/office/drawing/2014/main" id="{7E38DD07-0860-150F-DEB8-5D6A1C921003}"/>
+              </a:ext>
+            </a:extLst>
+          </p:cNvPr>
+          <p:cNvSpPr txBox="1"/>
+          <p:nvPr/>
+        </p:nvSpPr>
+        <p:spPr>
+          <a:xfrm>
+            <a:off x="512064" y="896112"/>
+            <a:ext cx="4489704" cy="253916"/>
+          </a:xfrm>
+          <a:prstGeom prst="rect">
+            <a:avLst/>
+          </a:prstGeom>
+          <a:noFill/>
+        </p:spPr>
+        <p:txBody>
+          <a:bodyPr wrap="square">
+            <a:spAutoFit/>
+          </a:bodyPr>
+          <a:lstStyle/>
+          <a:p>
+            <a:r>
+              <a:rPr sz="1050">
+                <a:solidFill>
+                  <a:srgbClr val="627080"/>
+                </a:solidFill>
+                <a:latin typeface="Malgun Gothic"/>
+              </a:rPr>
+              <a:t>범위·인력·일정·정책을 확정하고 1단계 개발 착수 기준을 정합니다.</a:t>
+            </a:r>
+          </a:p>
+        </p:txBody>
+      </p:sp>
+      <p:sp>
+        <p:nvSpPr>
+          <p:cNvPr id="35" name="Rounded Rectangle 4">
+            <a:extLst>
+              <a:ext uri="{FF2B5EF4-FFF2-40B4-BE49-F238E27FC236}">
+                <a16:creationId xmlns:a16="http://schemas.microsoft.com/office/drawing/2014/main" id="{3DAC4665-BD9A-F8C4-7000-DE3DE49BB9A3}"/>
+              </a:ext>
+            </a:extLst>
+          </p:cNvPr>
+          <p:cNvSpPr/>
+          <p:nvPr/>
+        </p:nvSpPr>
+        <p:spPr>
+          <a:xfrm>
+            <a:off x="530352" y="1600200"/>
+            <a:ext cx="3520440" cy="3063240"/>
+          </a:xfrm>
+          <a:prstGeom prst="roundRect">
+            <a:avLst>
+              <a:gd name="adj" fmla="val 0"/>
+            </a:avLst>
+          </a:prstGeom>
+          <a:solidFill>
+            <a:srgbClr val="FFFFFF"/>
+          </a:solidFill>
+          <a:ln w="10160">
+            <a:solidFill>
+              <a:srgbClr val="D9E4F2"/>
+            </a:solidFill>
+          </a:ln>
+        </p:spPr>
+        <p:style>
+          <a:lnRef idx="1">
+            <a:schemeClr val="accent1"/>
+          </a:lnRef>
+          <a:fillRef idx="3">
+            <a:schemeClr val="accent1"/>
+          </a:fillRef>
+          <a:effectRef idx="2">
+            <a:schemeClr val="accent1"/>
+          </a:effectRef>
+          <a:fontRef idx="minor">
+            <a:schemeClr val="lt1"/>
+          </a:fontRef>
+        </p:style>
+        <p:txBody>
+          <a:bodyPr rtlCol="0" anchor="ctr"/>
+          <a:lstStyle/>
+          <a:p>
+            <a:pPr algn="ctr"/>
+            <a:endParaRPr/>
+          </a:p>
+        </p:txBody>
+      </p:sp>
+      <p:sp>
+        <p:nvSpPr>
+          <p:cNvPr id="37" name="Rectangle 5">
+            <a:extLst>
+              <a:ext uri="{FF2B5EF4-FFF2-40B4-BE49-F238E27FC236}">
+                <a16:creationId xmlns:a16="http://schemas.microsoft.com/office/drawing/2014/main" id="{3AC2FB4D-5D97-1CC7-B5C9-D089D24AA962}"/>
+              </a:ext>
+            </a:extLst>
+          </p:cNvPr>
+          <p:cNvSpPr/>
+          <p:nvPr/>
+        </p:nvSpPr>
+        <p:spPr>
+          <a:xfrm>
+            <a:off x="530352" y="1600200"/>
+            <a:ext cx="3520440" cy="57600"/>
+          </a:xfrm>
+          <a:prstGeom prst="rect">
+            <a:avLst/>
+          </a:prstGeom>
+          <a:solidFill>
+            <a:srgbClr val="2066DB"/>
+          </a:solidFill>
+          <a:ln>
+            <a:solidFill>
+              <a:srgbClr val="2066DB"/>
+            </a:solidFill>
+          </a:ln>
+        </p:spPr>
+        <p:style>
+          <a:lnRef idx="1">
+            <a:schemeClr val="accent1"/>
+          </a:lnRef>
+          <a:fillRef idx="3">
+            <a:schemeClr val="accent1"/>
+          </a:fillRef>
+          <a:effectRef idx="2">
+            <a:schemeClr val="accent1"/>
+          </a:effectRef>
+          <a:fontRef idx="minor">
+            <a:schemeClr val="lt1"/>
+          </a:fontRef>
+        </p:style>
+        <p:txBody>
+          <a:bodyPr rtlCol="0" anchor="ctr"/>
+          <a:lstStyle/>
+          <a:p>
+            <a:pPr algn="ctr"/>
+            <a:endParaRPr/>
+          </a:p>
+        </p:txBody>
+      </p:sp>
+      <p:sp>
+        <p:nvSpPr>
+          <p:cNvPr id="39" name="Oval 6">
+            <a:extLst>
+              <a:ext uri="{FF2B5EF4-FFF2-40B4-BE49-F238E27FC236}">
+                <a16:creationId xmlns:a16="http://schemas.microsoft.com/office/drawing/2014/main" id="{6AB96477-69B0-EFFE-29CA-AF52902FFEDA}"/>
+              </a:ext>
+            </a:extLst>
+          </p:cNvPr>
+          <p:cNvSpPr/>
+          <p:nvPr/>
+        </p:nvSpPr>
+        <p:spPr>
+          <a:xfrm>
+            <a:off x="786384" y="1947672"/>
+            <a:ext cx="438912" cy="438912"/>
+          </a:xfrm>
+          <a:prstGeom prst="ellipse">
+            <a:avLst/>
+          </a:prstGeom>
+          <a:solidFill>
+            <a:srgbClr val="2066DB"/>
+          </a:solidFill>
+          <a:ln>
+            <a:solidFill>
+              <a:srgbClr val="2066DB"/>
+            </a:solidFill>
+          </a:ln>
+        </p:spPr>
+        <p:style>
+          <a:lnRef idx="1">
+            <a:schemeClr val="accent1"/>
+          </a:lnRef>
+          <a:fillRef idx="3">
+            <a:schemeClr val="accent1"/>
+          </a:fillRef>
+          <a:effectRef idx="2">
+            <a:schemeClr val="accent1"/>
+          </a:effectRef>
+          <a:fontRef idx="minor">
+            <a:schemeClr val="lt1"/>
+          </a:fontRef>
+        </p:style>
+        <p:txBody>
+          <a:bodyPr rtlCol="0" anchor="ctr"/>
+          <a:lstStyle/>
+          <a:p>
+            <a:pPr algn="ctr"/>
+            <a:endParaRPr/>
+          </a:p>
+        </p:txBody>
+      </p:sp>
+      <p:sp>
+        <p:nvSpPr>
+          <p:cNvPr id="41" name="TextBox 40">
+            <a:extLst>
+              <a:ext uri="{FF2B5EF4-FFF2-40B4-BE49-F238E27FC236}">
+                <a16:creationId xmlns:a16="http://schemas.microsoft.com/office/drawing/2014/main" id="{81C194C8-08D8-DA8F-81B9-22F2C3774EAF}"/>
+              </a:ext>
+            </a:extLst>
+          </p:cNvPr>
+          <p:cNvSpPr txBox="1"/>
+          <p:nvPr/>
+        </p:nvSpPr>
+        <p:spPr>
+          <a:xfrm>
+            <a:off x="786384" y="1947672"/>
+            <a:ext cx="438912" cy="438912"/>
+          </a:xfrm>
+          <a:prstGeom prst="rect">
+            <a:avLst/>
+          </a:prstGeom>
+          <a:noFill/>
+        </p:spPr>
+        <p:txBody>
+          <a:bodyPr wrap="none" anchor="ctr">
+            <a:spAutoFit/>
+          </a:bodyPr>
+          <a:lstStyle/>
+          <a:p>
+            <a:pPr algn="ctr"/>
+            <a:r>
+              <a:rPr sz="1500" b="1">
+                <a:solidFill>
+                  <a:srgbClr val="FFFFFF"/>
+                </a:solidFill>
+                <a:latin typeface="Malgun Gothic"/>
+              </a:rPr>
+              <a:t>1</a:t>
+            </a:r>
+          </a:p>
+        </p:txBody>
+      </p:sp>
+      <p:sp>
+        <p:nvSpPr>
+          <p:cNvPr id="43" name="TextBox 42">
+            <a:extLst>
+              <a:ext uri="{FF2B5EF4-FFF2-40B4-BE49-F238E27FC236}">
+                <a16:creationId xmlns:a16="http://schemas.microsoft.com/office/drawing/2014/main" id="{8255CBF4-0BDC-4C18-26A1-7EB8F8B72F4E}"/>
+              </a:ext>
+            </a:extLst>
+          </p:cNvPr>
+          <p:cNvSpPr txBox="1"/>
+          <p:nvPr/>
+        </p:nvSpPr>
+        <p:spPr>
+          <a:xfrm>
+            <a:off x="1353312" y="1911096"/>
+            <a:ext cx="2468880" cy="502920"/>
+          </a:xfrm>
+          <a:prstGeom prst="rect">
+            <a:avLst/>
+          </a:prstGeom>
+          <a:noFill/>
+        </p:spPr>
+        <p:txBody>
+          <a:bodyPr wrap="square">
+            <a:spAutoFit/>
+          </a:bodyPr>
+          <a:lstStyle/>
+          <a:p>
+            <a:r>
+              <a:rPr sz="1550" b="1">
+                <a:solidFill>
+                  <a:srgbClr val="172B53"/>
+                </a:solidFill>
+                <a:latin typeface="Malgun Gothic"/>
+              </a:rPr>
+              <a:t>1차 POC 범위 승인</a:t>
+            </a:r>
+          </a:p>
+        </p:txBody>
+      </p:sp>
+      <p:sp>
+        <p:nvSpPr>
+          <p:cNvPr id="45" name="Rounded Rectangle 9">
+            <a:extLst>
+              <a:ext uri="{FF2B5EF4-FFF2-40B4-BE49-F238E27FC236}">
+                <a16:creationId xmlns:a16="http://schemas.microsoft.com/office/drawing/2014/main" id="{DD346DF6-B533-971E-1B0E-A2C3AFDA79DE}"/>
+              </a:ext>
+            </a:extLst>
+          </p:cNvPr>
+          <p:cNvSpPr/>
+          <p:nvPr/>
+        </p:nvSpPr>
+        <p:spPr>
+          <a:xfrm>
+            <a:off x="786384" y="2560320"/>
+            <a:ext cx="3008376" cy="1783080"/>
+          </a:xfrm>
+          <a:prstGeom prst="roundRect">
+            <a:avLst>
+              <a:gd name="adj" fmla="val 8379"/>
+            </a:avLst>
+          </a:prstGeom>
+          <a:solidFill>
+            <a:srgbClr val="EDF7FF"/>
+          </a:solidFill>
+          <a:ln>
+            <a:solidFill>
+              <a:srgbClr val="EDF7FF"/>
+            </a:solidFill>
+          </a:ln>
+        </p:spPr>
+        <p:style>
+          <a:lnRef idx="1">
+            <a:schemeClr val="accent1"/>
+          </a:lnRef>
+          <a:fillRef idx="3">
+            <a:schemeClr val="accent1"/>
+          </a:fillRef>
+          <a:effectRef idx="2">
+            <a:schemeClr val="accent1"/>
+          </a:effectRef>
+          <a:fontRef idx="minor">
+            <a:schemeClr val="lt1"/>
+          </a:fontRef>
+        </p:style>
+        <p:txBody>
+          <a:bodyPr rtlCol="0" anchor="ctr"/>
+          <a:lstStyle/>
+          <a:p>
+            <a:pPr algn="ctr"/>
+            <a:endParaRPr/>
+          </a:p>
+        </p:txBody>
+      </p:sp>
+      <p:sp>
+        <p:nvSpPr>
+          <p:cNvPr id="47" name="TextBox 46">
+            <a:extLst>
+              <a:ext uri="{FF2B5EF4-FFF2-40B4-BE49-F238E27FC236}">
+                <a16:creationId xmlns:a16="http://schemas.microsoft.com/office/drawing/2014/main" id="{8A43BA3B-4231-D9B2-978F-E12A3B3F9A64}"/>
+              </a:ext>
+            </a:extLst>
+          </p:cNvPr>
+          <p:cNvSpPr txBox="1"/>
+          <p:nvPr/>
+        </p:nvSpPr>
+        <p:spPr>
+          <a:xfrm>
+            <a:off x="987552" y="2743200"/>
+            <a:ext cx="2606040" cy="1463040"/>
+          </a:xfrm>
+          <a:prstGeom prst="rect">
+            <a:avLst/>
+          </a:prstGeom>
+          <a:noFill/>
+        </p:spPr>
+        <p:txBody>
+          <a:bodyPr wrap="square">
+            <a:spAutoFit/>
+          </a:bodyPr>
+          <a:lstStyle/>
+          <a:p>
+            <a:pPr>
+              <a:spcAft>
+                <a:spcPts val="400"/>
+              </a:spcAft>
+            </a:pPr>
+            <a:r>
+              <a:rPr sz="1150">
+                <a:solidFill>
+                  <a:srgbClr val="233245"/>
+                </a:solidFill>
+                <a:latin typeface="Malgun Gothic"/>
+              </a:rPr>
+              <a:t>• 6개 베이 상태 동기화</a:t>
+            </a:r>
+          </a:p>
+          <a:p>
+            <a:pPr>
+              <a:spcAft>
+                <a:spcPts val="400"/>
+              </a:spcAft>
+            </a:pPr>
+            <a:r>
+              <a:rPr sz="1150">
+                <a:solidFill>
+                  <a:srgbClr val="233245"/>
+                </a:solidFill>
+                <a:latin typeface="Malgun Gothic"/>
+              </a:rPr>
+              <a:t>• 앱·관리자 동일 서버 데이터</a:t>
+            </a:r>
+          </a:p>
+          <a:p>
+            <a:pPr>
+              <a:spcAft>
+                <a:spcPts val="400"/>
+              </a:spcAft>
+            </a:pPr>
+            <a:r>
+              <a:rPr sz="1150">
+                <a:solidFill>
+                  <a:srgbClr val="233245"/>
+                </a:solidFill>
+                <a:latin typeface="Malgun Gothic"/>
+              </a:rPr>
+              <a:t>• 실제 PG 없이 결제 완료 상태</a:t>
+            </a:r>
+          </a:p>
+          <a:p>
+            <a:pPr>
+              <a:spcAft>
+                <a:spcPts val="400"/>
+              </a:spcAft>
+            </a:pPr>
+            <a:r>
+              <a:rPr sz="1150">
+                <a:solidFill>
+                  <a:srgbClr val="233245"/>
+                </a:solidFill>
+                <a:latin typeface="Malgun Gothic"/>
+              </a:rPr>
+              <a:t>• 저장·재접속 복원까지 구현</a:t>
+            </a:r>
+          </a:p>
+        </p:txBody>
+      </p:sp>
+      <p:sp>
+        <p:nvSpPr>
+          <p:cNvPr id="49" name="Rounded Rectangle 11">
+            <a:extLst>
+              <a:ext uri="{FF2B5EF4-FFF2-40B4-BE49-F238E27FC236}">
+                <a16:creationId xmlns:a16="http://schemas.microsoft.com/office/drawing/2014/main" id="{FDBB63BB-9045-65B0-A22E-18A0FDC4E9EA}"/>
+              </a:ext>
+            </a:extLst>
+          </p:cNvPr>
+          <p:cNvSpPr/>
+          <p:nvPr/>
+        </p:nvSpPr>
+        <p:spPr>
+          <a:xfrm>
+            <a:off x="4306824" y="1600200"/>
+            <a:ext cx="3520440" cy="3063240"/>
+          </a:xfrm>
+          <a:prstGeom prst="roundRect">
+            <a:avLst>
+              <a:gd name="adj" fmla="val 0"/>
+            </a:avLst>
+          </a:prstGeom>
+          <a:solidFill>
+            <a:srgbClr val="FFFFFF"/>
+          </a:solidFill>
+          <a:ln w="10160">
+            <a:solidFill>
+              <a:srgbClr val="D9E4F2"/>
+            </a:solidFill>
+          </a:ln>
+        </p:spPr>
+        <p:style>
+          <a:lnRef idx="1">
+            <a:schemeClr val="accent1"/>
+          </a:lnRef>
+          <a:fillRef idx="3">
+            <a:schemeClr val="accent1"/>
+          </a:fillRef>
+          <a:effectRef idx="2">
+            <a:schemeClr val="accent1"/>
+          </a:effectRef>
+          <a:fontRef idx="minor">
+            <a:schemeClr val="lt1"/>
+          </a:fontRef>
+        </p:style>
+        <p:txBody>
+          <a:bodyPr rtlCol="0" anchor="ctr"/>
+          <a:lstStyle/>
+          <a:p>
+            <a:pPr algn="ctr"/>
+            <a:endParaRPr/>
+          </a:p>
+        </p:txBody>
+      </p:sp>
+      <p:sp>
+        <p:nvSpPr>
+          <p:cNvPr id="51" name="Rectangle 12">
+            <a:extLst>
+              <a:ext uri="{FF2B5EF4-FFF2-40B4-BE49-F238E27FC236}">
+                <a16:creationId xmlns:a16="http://schemas.microsoft.com/office/drawing/2014/main" id="{B53644C7-D6F7-0BB4-5019-99D3B151A0BD}"/>
+              </a:ext>
+            </a:extLst>
+          </p:cNvPr>
+          <p:cNvSpPr/>
+          <p:nvPr/>
+        </p:nvSpPr>
+        <p:spPr>
+          <a:xfrm>
+            <a:off x="4306824" y="1600200"/>
+            <a:ext cx="3520440" cy="57600"/>
+          </a:xfrm>
+          <a:prstGeom prst="rect">
+            <a:avLst/>
+          </a:prstGeom>
+          <a:solidFill>
+            <a:srgbClr val="14B8A6"/>
+          </a:solidFill>
+          <a:ln>
+            <a:solidFill>
+              <a:srgbClr val="14B8A6"/>
+            </a:solidFill>
+          </a:ln>
+        </p:spPr>
+        <p:style>
+          <a:lnRef idx="1">
+            <a:schemeClr val="accent1"/>
+          </a:lnRef>
+          <a:fillRef idx="3">
+            <a:schemeClr val="accent1"/>
+          </a:fillRef>
+          <a:effectRef idx="2">
+            <a:schemeClr val="accent1"/>
+          </a:effectRef>
+          <a:fontRef idx="minor">
+            <a:schemeClr val="lt1"/>
+          </a:fontRef>
+        </p:style>
+        <p:txBody>
+          <a:bodyPr rtlCol="0" anchor="ctr"/>
+          <a:lstStyle/>
+          <a:p>
+            <a:pPr algn="ctr"/>
+            <a:endParaRPr/>
+          </a:p>
+        </p:txBody>
+      </p:sp>
+      <p:sp>
+        <p:nvSpPr>
+          <p:cNvPr id="53" name="Oval 13">
+            <a:extLst>
+              <a:ext uri="{FF2B5EF4-FFF2-40B4-BE49-F238E27FC236}">
+                <a16:creationId xmlns:a16="http://schemas.microsoft.com/office/drawing/2014/main" id="{7FD0BAE1-70CB-2FBF-207C-ACF78B796864}"/>
+              </a:ext>
+            </a:extLst>
+          </p:cNvPr>
+          <p:cNvSpPr/>
+          <p:nvPr/>
+        </p:nvSpPr>
+        <p:spPr>
+          <a:xfrm>
+            <a:off x="4562856" y="1947672"/>
+            <a:ext cx="438912" cy="438912"/>
+          </a:xfrm>
+          <a:prstGeom prst="ellipse">
+            <a:avLst/>
+          </a:prstGeom>
+          <a:solidFill>
+            <a:srgbClr val="14B8A6"/>
+          </a:solidFill>
+          <a:ln>
+            <a:solidFill>
+              <a:srgbClr val="14B8A6"/>
+            </a:solidFill>
+          </a:ln>
+        </p:spPr>
+        <p:style>
+          <a:lnRef idx="1">
+            <a:schemeClr val="accent1"/>
+          </a:lnRef>
+          <a:fillRef idx="3">
+            <a:schemeClr val="accent1"/>
+          </a:fillRef>
+          <a:effectRef idx="2">
+            <a:schemeClr val="accent1"/>
+          </a:effectRef>
+          <a:fontRef idx="minor">
+            <a:schemeClr val="lt1"/>
+          </a:fontRef>
+        </p:style>
+        <p:txBody>
+          <a:bodyPr rtlCol="0" anchor="ctr"/>
+          <a:lstStyle/>
+          <a:p>
+            <a:pPr algn="ctr"/>
+            <a:endParaRPr/>
+          </a:p>
+        </p:txBody>
+      </p:sp>
+      <p:sp>
+        <p:nvSpPr>
+          <p:cNvPr id="55" name="TextBox 54">
+            <a:extLst>
+              <a:ext uri="{FF2B5EF4-FFF2-40B4-BE49-F238E27FC236}">
+                <a16:creationId xmlns:a16="http://schemas.microsoft.com/office/drawing/2014/main" id="{EC0AE000-E881-4D37-7D01-F4AD66BDF4EF}"/>
+              </a:ext>
+            </a:extLst>
+          </p:cNvPr>
+          <p:cNvSpPr txBox="1"/>
+          <p:nvPr/>
+        </p:nvSpPr>
+        <p:spPr>
+          <a:xfrm>
+            <a:off x="4562856" y="1947672"/>
+            <a:ext cx="438912" cy="438912"/>
+          </a:xfrm>
+          <a:prstGeom prst="rect">
+            <a:avLst/>
+          </a:prstGeom>
+          <a:noFill/>
+        </p:spPr>
+        <p:txBody>
+          <a:bodyPr wrap="none" anchor="ctr">
+            <a:spAutoFit/>
+          </a:bodyPr>
+          <a:lstStyle/>
+          <a:p>
+            <a:pPr algn="ctr"/>
+            <a:r>
+              <a:rPr sz="1500" b="1">
+                <a:solidFill>
+                  <a:srgbClr val="FFFFFF"/>
+                </a:solidFill>
+                <a:latin typeface="Malgun Gothic"/>
+              </a:rPr>
+              <a:t>2</a:t>
+            </a:r>
+          </a:p>
+        </p:txBody>
+      </p:sp>
+      <p:sp>
+        <p:nvSpPr>
+          <p:cNvPr id="57" name="TextBox 56">
+            <a:extLst>
+              <a:ext uri="{FF2B5EF4-FFF2-40B4-BE49-F238E27FC236}">
+                <a16:creationId xmlns:a16="http://schemas.microsoft.com/office/drawing/2014/main" id="{F90EE456-E89D-8468-F425-9BC4F63D7C77}"/>
+              </a:ext>
+            </a:extLst>
+          </p:cNvPr>
+          <p:cNvSpPr txBox="1"/>
+          <p:nvPr/>
+        </p:nvSpPr>
+        <p:spPr>
+          <a:xfrm>
+            <a:off x="5129784" y="1911096"/>
+            <a:ext cx="2468880" cy="502920"/>
+          </a:xfrm>
+          <a:prstGeom prst="rect">
+            <a:avLst/>
+          </a:prstGeom>
+          <a:noFill/>
+        </p:spPr>
+        <p:txBody>
+          <a:bodyPr wrap="square">
+            <a:spAutoFit/>
+          </a:bodyPr>
+          <a:lstStyle/>
+          <a:p>
+            <a:r>
+              <a:rPr sz="1550" b="1">
+                <a:solidFill>
+                  <a:srgbClr val="172B53"/>
+                </a:solidFill>
+                <a:latin typeface="Malgun Gothic"/>
+              </a:rPr>
+              <a:t>추진 조건 승인</a:t>
+            </a:r>
+          </a:p>
+        </p:txBody>
+      </p:sp>
+      <p:sp>
+        <p:nvSpPr>
+          <p:cNvPr id="59" name="Rounded Rectangle 16">
+            <a:extLst>
+              <a:ext uri="{FF2B5EF4-FFF2-40B4-BE49-F238E27FC236}">
+                <a16:creationId xmlns:a16="http://schemas.microsoft.com/office/drawing/2014/main" id="{9FFA2AF1-A851-9049-BBB8-A1B869546CD5}"/>
+              </a:ext>
+            </a:extLst>
+          </p:cNvPr>
+          <p:cNvSpPr/>
+          <p:nvPr/>
+        </p:nvSpPr>
+        <p:spPr>
+          <a:xfrm>
+            <a:off x="4562856" y="2560320"/>
+            <a:ext cx="3008376" cy="1783080"/>
+          </a:xfrm>
+          <a:prstGeom prst="roundRect">
+            <a:avLst>
+              <a:gd name="adj" fmla="val 6307"/>
+            </a:avLst>
+          </a:prstGeom>
+          <a:solidFill>
+            <a:srgbClr val="E7F9F5"/>
+          </a:solidFill>
+          <a:ln>
+            <a:solidFill>
+              <a:srgbClr val="E7F9F5"/>
+            </a:solidFill>
+          </a:ln>
+        </p:spPr>
+        <p:style>
+          <a:lnRef idx="1">
+            <a:schemeClr val="accent1"/>
+          </a:lnRef>
+          <a:fillRef idx="3">
+            <a:schemeClr val="accent1"/>
+          </a:fillRef>
+          <a:effectRef idx="2">
+            <a:schemeClr val="accent1"/>
+          </a:effectRef>
+          <a:fontRef idx="minor">
+            <a:schemeClr val="lt1"/>
+          </a:fontRef>
+        </p:style>
+        <p:txBody>
+          <a:bodyPr rtlCol="0" anchor="ctr"/>
+          <a:lstStyle/>
+          <a:p>
+            <a:pPr algn="ctr"/>
+            <a:endParaRPr/>
+          </a:p>
+        </p:txBody>
+      </p:sp>
+      <p:sp>
+        <p:nvSpPr>
+          <p:cNvPr id="61" name="TextBox 60">
+            <a:extLst>
+              <a:ext uri="{FF2B5EF4-FFF2-40B4-BE49-F238E27FC236}">
+                <a16:creationId xmlns:a16="http://schemas.microsoft.com/office/drawing/2014/main" id="{81CCA012-7566-42AC-B0D7-F4D246E3037F}"/>
+              </a:ext>
+            </a:extLst>
+          </p:cNvPr>
+          <p:cNvSpPr txBox="1"/>
+          <p:nvPr/>
+        </p:nvSpPr>
+        <p:spPr>
+          <a:xfrm>
+            <a:off x="4764024" y="2743200"/>
+            <a:ext cx="2606040" cy="954107"/>
+          </a:xfrm>
+          <a:prstGeom prst="rect">
+            <a:avLst/>
+          </a:prstGeom>
+          <a:noFill/>
+        </p:spPr>
+        <p:txBody>
+          <a:bodyPr wrap="square">
+            <a:spAutoFit/>
+          </a:bodyPr>
+          <a:lstStyle/>
+          <a:p>
+            <a:pPr>
+              <a:spcAft>
+                <a:spcPts val="400"/>
+              </a:spcAft>
+            </a:pPr>
+            <a:r>
+              <a:rPr sz="1150" dirty="0">
+                <a:solidFill>
+                  <a:srgbClr val="233245"/>
+                </a:solidFill>
+                <a:latin typeface="Malgun Gothic"/>
+              </a:rPr>
+              <a:t>• </a:t>
+            </a:r>
+            <a:r>
+              <a:rPr sz="1150" dirty="0" err="1">
+                <a:solidFill>
+                  <a:srgbClr val="233245"/>
+                </a:solidFill>
+                <a:latin typeface="Malgun Gothic"/>
+              </a:rPr>
+              <a:t>프론트엔드</a:t>
+            </a:r>
+            <a:r>
+              <a:rPr sz="1150" dirty="0">
+                <a:solidFill>
+                  <a:srgbClr val="233245"/>
+                </a:solidFill>
+                <a:latin typeface="Malgun Gothic"/>
+              </a:rPr>
+              <a:t> </a:t>
+            </a:r>
+            <a:r>
+              <a:rPr sz="1150" dirty="0" err="1">
+                <a:solidFill>
+                  <a:srgbClr val="233245"/>
+                </a:solidFill>
+                <a:latin typeface="Malgun Gothic"/>
+              </a:rPr>
+              <a:t>신입</a:t>
+            </a:r>
+            <a:r>
+              <a:rPr sz="1150" dirty="0">
+                <a:solidFill>
+                  <a:srgbClr val="233245"/>
+                </a:solidFill>
+                <a:latin typeface="Malgun Gothic"/>
+              </a:rPr>
+              <a:t> 1명 </a:t>
+            </a:r>
+            <a:r>
+              <a:rPr sz="1150" dirty="0" err="1">
+                <a:solidFill>
+                  <a:srgbClr val="233245"/>
+                </a:solidFill>
+                <a:latin typeface="Malgun Gothic"/>
+              </a:rPr>
+              <a:t>전담</a:t>
+            </a:r>
+            <a:endParaRPr sz="1150" dirty="0">
+              <a:solidFill>
+                <a:srgbClr val="233245"/>
+              </a:solidFill>
+              <a:latin typeface="Malgun Gothic"/>
+            </a:endParaRPr>
+          </a:p>
+          <a:p>
+            <a:pPr>
+              <a:spcAft>
+                <a:spcPts val="400"/>
+              </a:spcAft>
+            </a:pPr>
+            <a:r>
+              <a:rPr sz="1150" dirty="0">
+                <a:solidFill>
+                  <a:srgbClr val="233245"/>
+                </a:solidFill>
+                <a:latin typeface="Malgun Gothic"/>
+              </a:rPr>
+              <a:t>• </a:t>
+            </a:r>
+            <a:r>
+              <a:rPr sz="1150" dirty="0" err="1">
+                <a:solidFill>
+                  <a:srgbClr val="233245"/>
+                </a:solidFill>
+                <a:latin typeface="Malgun Gothic"/>
+              </a:rPr>
+              <a:t>백엔드</a:t>
+            </a:r>
+            <a:r>
+              <a:rPr sz="1150" dirty="0">
+                <a:solidFill>
+                  <a:srgbClr val="233245"/>
+                </a:solidFill>
+                <a:latin typeface="Malgun Gothic"/>
+              </a:rPr>
+              <a:t> </a:t>
+            </a:r>
+            <a:r>
+              <a:rPr sz="1150" dirty="0" err="1">
+                <a:solidFill>
+                  <a:srgbClr val="233245"/>
+                </a:solidFill>
+                <a:latin typeface="Malgun Gothic"/>
+              </a:rPr>
+              <a:t>입문</a:t>
+            </a:r>
+            <a:r>
+              <a:rPr sz="1150" dirty="0">
+                <a:solidFill>
+                  <a:srgbClr val="233245"/>
+                </a:solidFill>
+                <a:latin typeface="Malgun Gothic"/>
+              </a:rPr>
+              <a:t> </a:t>
+            </a:r>
+            <a:r>
+              <a:rPr sz="1150" dirty="0" err="1">
+                <a:solidFill>
+                  <a:srgbClr val="233245"/>
+                </a:solidFill>
+                <a:latin typeface="Malgun Gothic"/>
+              </a:rPr>
+              <a:t>프로젝트로</a:t>
+            </a:r>
+            <a:r>
+              <a:rPr sz="1150" dirty="0">
+                <a:solidFill>
+                  <a:srgbClr val="233245"/>
+                </a:solidFill>
+                <a:latin typeface="Malgun Gothic"/>
+              </a:rPr>
+              <a:t> </a:t>
+            </a:r>
+            <a:r>
+              <a:rPr sz="1150" dirty="0" err="1">
+                <a:solidFill>
+                  <a:srgbClr val="233245"/>
+                </a:solidFill>
+                <a:latin typeface="Malgun Gothic"/>
+              </a:rPr>
+              <a:t>진행</a:t>
+            </a:r>
+            <a:endParaRPr sz="1150" dirty="0">
+              <a:solidFill>
+                <a:srgbClr val="233245"/>
+              </a:solidFill>
+              <a:latin typeface="Malgun Gothic"/>
+            </a:endParaRPr>
+          </a:p>
+          <a:p>
+            <a:pPr>
+              <a:spcAft>
+                <a:spcPts val="400"/>
+              </a:spcAft>
+            </a:pPr>
+            <a:r>
+              <a:rPr sz="1150" dirty="0">
+                <a:solidFill>
+                  <a:srgbClr val="233245"/>
+                </a:solidFill>
+                <a:latin typeface="Malgun Gothic"/>
+              </a:rPr>
+              <a:t>• Claude </a:t>
+            </a:r>
+            <a:r>
+              <a:rPr sz="1150" dirty="0" err="1">
+                <a:solidFill>
+                  <a:srgbClr val="233245"/>
+                </a:solidFill>
+                <a:latin typeface="Malgun Gothic"/>
+              </a:rPr>
+              <a:t>보조</a:t>
+            </a:r>
+            <a:r>
+              <a:rPr sz="1150" dirty="0">
+                <a:solidFill>
+                  <a:srgbClr val="233245"/>
+                </a:solidFill>
+                <a:latin typeface="Malgun Gothic"/>
+              </a:rPr>
+              <a:t> </a:t>
+            </a:r>
+            <a:r>
+              <a:rPr sz="1150" dirty="0" err="1">
+                <a:solidFill>
+                  <a:srgbClr val="233245"/>
+                </a:solidFill>
+                <a:latin typeface="Malgun Gothic"/>
+              </a:rPr>
+              <a:t>도구</a:t>
+            </a:r>
+            <a:r>
+              <a:rPr sz="1150" dirty="0">
+                <a:solidFill>
+                  <a:srgbClr val="233245"/>
+                </a:solidFill>
+                <a:latin typeface="Malgun Gothic"/>
+              </a:rPr>
+              <a:t> </a:t>
+            </a:r>
+            <a:r>
+              <a:rPr sz="1150" dirty="0" err="1">
+                <a:solidFill>
+                  <a:srgbClr val="233245"/>
+                </a:solidFill>
+                <a:latin typeface="Malgun Gothic"/>
+              </a:rPr>
+              <a:t>활용</a:t>
+            </a:r>
+            <a:endParaRPr sz="1150" dirty="0">
+              <a:solidFill>
+                <a:srgbClr val="233245"/>
+              </a:solidFill>
+              <a:latin typeface="Malgun Gothic"/>
+            </a:endParaRPr>
+          </a:p>
+          <a:p>
+            <a:pPr>
+              <a:spcAft>
+                <a:spcPts val="400"/>
+              </a:spcAft>
+            </a:pPr>
+            <a:r>
+              <a:rPr sz="1150" dirty="0">
+                <a:solidFill>
+                  <a:srgbClr val="233245"/>
+                </a:solidFill>
+                <a:latin typeface="Malgun Gothic"/>
+              </a:rPr>
+              <a:t>• </a:t>
+            </a:r>
+            <a:r>
+              <a:rPr sz="1150" dirty="0" err="1">
+                <a:solidFill>
+                  <a:srgbClr val="233245"/>
+                </a:solidFill>
+                <a:latin typeface="Malgun Gothic"/>
+              </a:rPr>
+              <a:t>개발</a:t>
+            </a:r>
+            <a:r>
+              <a:rPr sz="1150" dirty="0">
+                <a:solidFill>
+                  <a:srgbClr val="233245"/>
+                </a:solidFill>
+                <a:latin typeface="Malgun Gothic"/>
+              </a:rPr>
+              <a:t> </a:t>
+            </a:r>
+            <a:r>
+              <a:rPr sz="1150" dirty="0" err="1">
+                <a:solidFill>
+                  <a:srgbClr val="233245"/>
+                </a:solidFill>
+                <a:latin typeface="Malgun Gothic"/>
+              </a:rPr>
+              <a:t>기간</a:t>
+            </a:r>
+            <a:r>
+              <a:rPr sz="1150" dirty="0">
+                <a:solidFill>
+                  <a:srgbClr val="233245"/>
+                </a:solidFill>
+                <a:latin typeface="Malgun Gothic"/>
+              </a:rPr>
+              <a:t> </a:t>
+            </a:r>
+            <a:r>
+              <a:rPr lang="ko-KR" altLang="en-US" sz="1150" dirty="0">
+                <a:solidFill>
+                  <a:srgbClr val="233245"/>
+                </a:solidFill>
+                <a:latin typeface="Malgun Gothic"/>
+              </a:rPr>
+              <a:t>확정</a:t>
+            </a:r>
+            <a:endParaRPr sz="1150" dirty="0">
+              <a:solidFill>
+                <a:srgbClr val="233245"/>
+              </a:solidFill>
+              <a:latin typeface="Malgun Gothic"/>
+            </a:endParaRPr>
+          </a:p>
+        </p:txBody>
+      </p:sp>
+      <p:sp>
+        <p:nvSpPr>
+          <p:cNvPr id="63" name="Rounded Rectangle 18">
+            <a:extLst>
+              <a:ext uri="{FF2B5EF4-FFF2-40B4-BE49-F238E27FC236}">
+                <a16:creationId xmlns:a16="http://schemas.microsoft.com/office/drawing/2014/main" id="{C5593417-3FFB-DC7E-6CC2-7770E5AB3700}"/>
+              </a:ext>
+            </a:extLst>
+          </p:cNvPr>
+          <p:cNvSpPr/>
+          <p:nvPr/>
+        </p:nvSpPr>
+        <p:spPr>
+          <a:xfrm>
+            <a:off x="8083296" y="1600200"/>
+            <a:ext cx="3520440" cy="3063240"/>
+          </a:xfrm>
+          <a:prstGeom prst="roundRect">
+            <a:avLst>
+              <a:gd name="adj" fmla="val 0"/>
+            </a:avLst>
+          </a:prstGeom>
+          <a:solidFill>
+            <a:srgbClr val="FFFFFF"/>
+          </a:solidFill>
+          <a:ln w="10160">
+            <a:solidFill>
+              <a:srgbClr val="D9E4F2"/>
+            </a:solidFill>
+          </a:ln>
+        </p:spPr>
+        <p:style>
+          <a:lnRef idx="1">
+            <a:schemeClr val="accent1"/>
+          </a:lnRef>
+          <a:fillRef idx="3">
+            <a:schemeClr val="accent1"/>
+          </a:fillRef>
+          <a:effectRef idx="2">
+            <a:schemeClr val="accent1"/>
+          </a:effectRef>
+          <a:fontRef idx="minor">
+            <a:schemeClr val="lt1"/>
+          </a:fontRef>
+        </p:style>
+        <p:txBody>
+          <a:bodyPr rtlCol="0" anchor="ctr"/>
+          <a:lstStyle/>
+          <a:p>
+            <a:pPr algn="ctr"/>
+            <a:endParaRPr/>
+          </a:p>
+        </p:txBody>
+      </p:sp>
+      <p:sp>
+        <p:nvSpPr>
+          <p:cNvPr id="65" name="Rectangle 19">
+            <a:extLst>
+              <a:ext uri="{FF2B5EF4-FFF2-40B4-BE49-F238E27FC236}">
+                <a16:creationId xmlns:a16="http://schemas.microsoft.com/office/drawing/2014/main" id="{7F3C31AA-7970-13C9-157F-9C037D265092}"/>
+              </a:ext>
+            </a:extLst>
+          </p:cNvPr>
+          <p:cNvSpPr/>
+          <p:nvPr/>
+        </p:nvSpPr>
+        <p:spPr>
+          <a:xfrm>
+            <a:off x="8083296" y="1600200"/>
+            <a:ext cx="3520440" cy="57600"/>
+          </a:xfrm>
+          <a:prstGeom prst="rect">
+            <a:avLst/>
+          </a:prstGeom>
+          <a:solidFill>
+            <a:srgbClr val="F58E21"/>
+          </a:solidFill>
+          <a:ln>
+            <a:solidFill>
+              <a:srgbClr val="F58E21"/>
+            </a:solidFill>
+          </a:ln>
+        </p:spPr>
+        <p:style>
+          <a:lnRef idx="1">
+            <a:schemeClr val="accent1"/>
+          </a:lnRef>
+          <a:fillRef idx="3">
+            <a:schemeClr val="accent1"/>
+          </a:fillRef>
+          <a:effectRef idx="2">
+            <a:schemeClr val="accent1"/>
+          </a:effectRef>
+          <a:fontRef idx="minor">
+            <a:schemeClr val="lt1"/>
+          </a:fontRef>
+        </p:style>
+        <p:txBody>
+          <a:bodyPr rtlCol="0" anchor="ctr"/>
+          <a:lstStyle/>
+          <a:p>
+            <a:pPr algn="ctr"/>
+            <a:endParaRPr/>
+          </a:p>
+        </p:txBody>
+      </p:sp>
+      <p:sp>
+        <p:nvSpPr>
+          <p:cNvPr id="67" name="Oval 20">
+            <a:extLst>
+              <a:ext uri="{FF2B5EF4-FFF2-40B4-BE49-F238E27FC236}">
+                <a16:creationId xmlns:a16="http://schemas.microsoft.com/office/drawing/2014/main" id="{0DD4E709-A0B8-10F3-AF2F-674C5A182FCE}"/>
+              </a:ext>
+            </a:extLst>
+          </p:cNvPr>
+          <p:cNvSpPr/>
+          <p:nvPr/>
+        </p:nvSpPr>
+        <p:spPr>
+          <a:xfrm>
+            <a:off x="8339328" y="1947672"/>
+            <a:ext cx="438912" cy="438912"/>
+          </a:xfrm>
+          <a:prstGeom prst="ellipse">
+            <a:avLst/>
+          </a:prstGeom>
+          <a:solidFill>
+            <a:srgbClr val="F58E21"/>
+          </a:solidFill>
+          <a:ln>
+            <a:solidFill>
+              <a:srgbClr val="F58E21"/>
+            </a:solidFill>
+          </a:ln>
+        </p:spPr>
+        <p:style>
+          <a:lnRef idx="1">
+            <a:schemeClr val="accent1"/>
+          </a:lnRef>
+          <a:fillRef idx="3">
+            <a:schemeClr val="accent1"/>
+          </a:fillRef>
+          <a:effectRef idx="2">
+            <a:schemeClr val="accent1"/>
+          </a:effectRef>
+          <a:fontRef idx="minor">
+            <a:schemeClr val="lt1"/>
+          </a:fontRef>
+        </p:style>
+        <p:txBody>
+          <a:bodyPr rtlCol="0" anchor="ctr"/>
+          <a:lstStyle/>
+          <a:p>
+            <a:pPr algn="ctr"/>
+            <a:endParaRPr/>
+          </a:p>
+        </p:txBody>
+      </p:sp>
+      <p:sp>
+        <p:nvSpPr>
+          <p:cNvPr id="69" name="TextBox 68">
+            <a:extLst>
+              <a:ext uri="{FF2B5EF4-FFF2-40B4-BE49-F238E27FC236}">
+                <a16:creationId xmlns:a16="http://schemas.microsoft.com/office/drawing/2014/main" id="{D29437C3-551B-7AAC-8110-8D3AD8ABA258}"/>
+              </a:ext>
+            </a:extLst>
+          </p:cNvPr>
+          <p:cNvSpPr txBox="1"/>
+          <p:nvPr/>
+        </p:nvSpPr>
+        <p:spPr>
+          <a:xfrm>
+            <a:off x="8339328" y="1947672"/>
+            <a:ext cx="438912" cy="438912"/>
+          </a:xfrm>
+          <a:prstGeom prst="rect">
+            <a:avLst/>
+          </a:prstGeom>
+          <a:noFill/>
+        </p:spPr>
+        <p:txBody>
+          <a:bodyPr wrap="none" anchor="ctr">
+            <a:spAutoFit/>
+          </a:bodyPr>
+          <a:lstStyle/>
+          <a:p>
+            <a:pPr algn="ctr"/>
+            <a:r>
+              <a:rPr sz="1500" b="1">
+                <a:solidFill>
+                  <a:srgbClr val="FFFFFF"/>
+                </a:solidFill>
+                <a:latin typeface="Malgun Gothic"/>
+              </a:rPr>
+              <a:t>3</a:t>
+            </a:r>
+          </a:p>
+        </p:txBody>
+      </p:sp>
+      <p:sp>
+        <p:nvSpPr>
+          <p:cNvPr id="71" name="TextBox 70">
+            <a:extLst>
+              <a:ext uri="{FF2B5EF4-FFF2-40B4-BE49-F238E27FC236}">
+                <a16:creationId xmlns:a16="http://schemas.microsoft.com/office/drawing/2014/main" id="{1683B4F0-450F-267E-4F1E-5176B815F06F}"/>
+              </a:ext>
+            </a:extLst>
+          </p:cNvPr>
+          <p:cNvSpPr txBox="1"/>
+          <p:nvPr/>
+        </p:nvSpPr>
+        <p:spPr>
+          <a:xfrm>
+            <a:off x="8906256" y="1911096"/>
+            <a:ext cx="2468880" cy="502920"/>
+          </a:xfrm>
+          <a:prstGeom prst="rect">
+            <a:avLst/>
+          </a:prstGeom>
+          <a:noFill/>
+        </p:spPr>
+        <p:txBody>
+          <a:bodyPr wrap="square">
+            <a:spAutoFit/>
+          </a:bodyPr>
+          <a:lstStyle/>
+          <a:p>
+            <a:r>
+              <a:rPr sz="1550" b="1">
+                <a:solidFill>
+                  <a:srgbClr val="172B53"/>
+                </a:solidFill>
+                <a:latin typeface="Malgun Gothic"/>
+              </a:rPr>
+              <a:t>정책·검수 기준 승인</a:t>
+            </a:r>
+          </a:p>
+        </p:txBody>
+      </p:sp>
+      <p:sp>
+        <p:nvSpPr>
+          <p:cNvPr id="73" name="Rounded Rectangle 23">
+            <a:extLst>
+              <a:ext uri="{FF2B5EF4-FFF2-40B4-BE49-F238E27FC236}">
+                <a16:creationId xmlns:a16="http://schemas.microsoft.com/office/drawing/2014/main" id="{AA66B504-AB3B-F4BF-F311-F63007859A27}"/>
+              </a:ext>
+            </a:extLst>
+          </p:cNvPr>
+          <p:cNvSpPr/>
+          <p:nvPr/>
+        </p:nvSpPr>
+        <p:spPr>
+          <a:xfrm>
+            <a:off x="8339328" y="2560320"/>
+            <a:ext cx="3008376" cy="1783080"/>
+          </a:xfrm>
+          <a:prstGeom prst="roundRect">
+            <a:avLst>
+              <a:gd name="adj" fmla="val 8897"/>
+            </a:avLst>
+          </a:prstGeom>
+          <a:solidFill>
+            <a:srgbClr val="FFF6E8"/>
+          </a:solidFill>
+          <a:ln>
+            <a:solidFill>
+              <a:srgbClr val="FFF6E8"/>
+            </a:solidFill>
+          </a:ln>
+        </p:spPr>
+        <p:style>
+          <a:lnRef idx="1">
+            <a:schemeClr val="accent1"/>
+          </a:lnRef>
+          <a:fillRef idx="3">
+            <a:schemeClr val="accent1"/>
+          </a:fillRef>
+          <a:effectRef idx="2">
+            <a:schemeClr val="accent1"/>
+          </a:effectRef>
+          <a:fontRef idx="minor">
+            <a:schemeClr val="lt1"/>
+          </a:fontRef>
+        </p:style>
+        <p:txBody>
+          <a:bodyPr rtlCol="0" anchor="ctr"/>
+          <a:lstStyle/>
+          <a:p>
+            <a:pPr algn="ctr"/>
+            <a:endParaRPr/>
+          </a:p>
+        </p:txBody>
+      </p:sp>
+      <p:sp>
+        <p:nvSpPr>
+          <p:cNvPr id="75" name="TextBox 74">
+            <a:extLst>
+              <a:ext uri="{FF2B5EF4-FFF2-40B4-BE49-F238E27FC236}">
+                <a16:creationId xmlns:a16="http://schemas.microsoft.com/office/drawing/2014/main" id="{C9FFAE49-97A2-B59C-F68D-BF00081DA754}"/>
+              </a:ext>
+            </a:extLst>
+          </p:cNvPr>
+          <p:cNvSpPr txBox="1"/>
+          <p:nvPr/>
+        </p:nvSpPr>
+        <p:spPr>
+          <a:xfrm>
+            <a:off x="8540496" y="2743200"/>
+            <a:ext cx="2606040" cy="1463040"/>
+          </a:xfrm>
+          <a:prstGeom prst="rect">
+            <a:avLst/>
+          </a:prstGeom>
+          <a:noFill/>
+        </p:spPr>
+        <p:txBody>
+          <a:bodyPr wrap="square">
+            <a:spAutoFit/>
+          </a:bodyPr>
+          <a:lstStyle/>
+          <a:p>
+            <a:pPr>
+              <a:spcAft>
+                <a:spcPts val="400"/>
+              </a:spcAft>
+            </a:pPr>
+            <a:r>
+              <a:rPr sz="1150">
+                <a:solidFill>
+                  <a:srgbClr val="233245"/>
+                </a:solidFill>
+                <a:latin typeface="Malgun Gothic"/>
+              </a:rPr>
+              <a:t>• 예약 기능은 서비스 정책상 미제공</a:t>
+            </a:r>
+          </a:p>
+          <a:p>
+            <a:pPr>
+              <a:spcAft>
+                <a:spcPts val="400"/>
+              </a:spcAft>
+            </a:pPr>
+            <a:r>
+              <a:rPr sz="1150">
+                <a:solidFill>
+                  <a:srgbClr val="233245"/>
+                </a:solidFill>
+                <a:latin typeface="Malgun Gothic"/>
+              </a:rPr>
+              <a:t>• 관리자 POC 초기화 제공</a:t>
+            </a:r>
+          </a:p>
+          <a:p>
+            <a:pPr>
+              <a:spcAft>
+                <a:spcPts val="400"/>
+              </a:spcAft>
+            </a:pPr>
+            <a:r>
+              <a:rPr sz="1150">
+                <a:solidFill>
+                  <a:srgbClr val="233245"/>
+                </a:solidFill>
+                <a:latin typeface="Malgun Gothic"/>
+              </a:rPr>
+              <a:t>• 개발자 조작 없는 E2E 검수</a:t>
+            </a:r>
+          </a:p>
+          <a:p>
+            <a:pPr>
+              <a:spcAft>
+                <a:spcPts val="400"/>
+              </a:spcAft>
+            </a:pPr>
+            <a:r>
+              <a:rPr sz="1150">
+                <a:solidFill>
+                  <a:srgbClr val="233245"/>
+                </a:solidFill>
+                <a:latin typeface="Malgun Gothic"/>
+              </a:rPr>
+              <a:t>• 동일 흐름 3회 연속 성공</a:t>
+            </a:r>
+          </a:p>
+        </p:txBody>
+      </p:sp>
+      <p:sp>
+        <p:nvSpPr>
+          <p:cNvPr id="77" name="Rounded Rectangle 25">
+            <a:extLst>
+              <a:ext uri="{FF2B5EF4-FFF2-40B4-BE49-F238E27FC236}">
+                <a16:creationId xmlns:a16="http://schemas.microsoft.com/office/drawing/2014/main" id="{3BD103E1-7CEF-FDA7-5562-F3E80CF18DED}"/>
+              </a:ext>
+            </a:extLst>
+          </p:cNvPr>
+          <p:cNvSpPr/>
+          <p:nvPr/>
+        </p:nvSpPr>
+        <p:spPr>
+          <a:xfrm>
+            <a:off x="530352" y="4983480"/>
+            <a:ext cx="10789920" cy="987552"/>
+          </a:xfrm>
+          <a:prstGeom prst="roundRect">
+            <a:avLst/>
+          </a:prstGeom>
+          <a:solidFill>
+            <a:srgbClr val="172B53"/>
+          </a:solidFill>
+          <a:ln>
+            <a:solidFill>
+              <a:srgbClr val="172B53"/>
+            </a:solidFill>
+          </a:ln>
+        </p:spPr>
+        <p:style>
+          <a:lnRef idx="1">
+            <a:schemeClr val="accent1"/>
+          </a:lnRef>
+          <a:fillRef idx="3">
+            <a:schemeClr val="accent1"/>
+          </a:fillRef>
+          <a:effectRef idx="2">
+            <a:schemeClr val="accent1"/>
+          </a:effectRef>
+          <a:fontRef idx="minor">
+            <a:schemeClr val="lt1"/>
+          </a:fontRef>
+        </p:style>
+        <p:txBody>
+          <a:bodyPr rtlCol="0" anchor="ctr"/>
+          <a:lstStyle/>
+          <a:p>
+            <a:pPr algn="ctr"/>
+            <a:endParaRPr/>
+          </a:p>
+        </p:txBody>
+      </p:sp>
+      <p:sp>
+        <p:nvSpPr>
+          <p:cNvPr id="79" name="TextBox 78">
+            <a:extLst>
+              <a:ext uri="{FF2B5EF4-FFF2-40B4-BE49-F238E27FC236}">
+                <a16:creationId xmlns:a16="http://schemas.microsoft.com/office/drawing/2014/main" id="{AF0C13F4-1B89-7F4B-CBBC-18B3D7DBCE42}"/>
+              </a:ext>
+            </a:extLst>
+          </p:cNvPr>
+          <p:cNvSpPr txBox="1"/>
+          <p:nvPr/>
+        </p:nvSpPr>
+        <p:spPr>
+          <a:xfrm>
+            <a:off x="822960" y="5166360"/>
+            <a:ext cx="10149840" cy="502920"/>
+          </a:xfrm>
+          <a:prstGeom prst="rect">
+            <a:avLst/>
+          </a:prstGeom>
+          <a:noFill/>
+        </p:spPr>
+        <p:txBody>
+          <a:bodyPr wrap="square" anchor="ctr">
+            <a:spAutoFit/>
+          </a:bodyPr>
+          <a:lstStyle/>
+          <a:p>
+            <a:pPr algn="ctr"/>
+            <a:r>
+              <a:rPr sz="1250" b="0">
+                <a:solidFill>
+                  <a:srgbClr val="FFFFFF"/>
+                </a:solidFill>
+                <a:latin typeface="Malgun Gothic"/>
+              </a:rPr>
+              <a:t>결정 후 진행안: </a:t>
+            </a:r>
+            <a:r>
+              <a:rPr sz="1250" b="1">
+                <a:solidFill>
+                  <a:srgbClr val="6EE7B7"/>
+                </a:solidFill>
+                <a:latin typeface="Malgun Gothic"/>
+              </a:rPr>
+              <a:t>구현·검수 정의서 v1.0 고정</a:t>
+            </a:r>
+            <a:r>
+              <a:rPr sz="1250" b="0">
+                <a:solidFill>
+                  <a:srgbClr val="FFFFFF"/>
+                </a:solidFill>
+                <a:latin typeface="Malgun Gothic"/>
+              </a:rPr>
+              <a:t> → 개발자 구현 확인 메모 작성 → </a:t>
+            </a:r>
+            <a:r>
+              <a:rPr sz="1250" b="1">
+                <a:solidFill>
+                  <a:srgbClr val="93C5FD"/>
+                </a:solidFill>
+                <a:latin typeface="Malgun Gothic"/>
+              </a:rPr>
+              <a:t>1단계 베이 상태 단일화 착수</a:t>
+            </a:r>
+          </a:p>
+        </p:txBody>
+      </p:sp>
+      <p:sp>
+        <p:nvSpPr>
+          <p:cNvPr id="81" name="TextBox 80">
+            <a:extLst>
+              <a:ext uri="{FF2B5EF4-FFF2-40B4-BE49-F238E27FC236}">
+                <a16:creationId xmlns:a16="http://schemas.microsoft.com/office/drawing/2014/main" id="{D664F620-70A0-D867-6BC1-00AEECEA436B}"/>
+              </a:ext>
+            </a:extLst>
+          </p:cNvPr>
+          <p:cNvSpPr txBox="1"/>
+          <p:nvPr/>
+        </p:nvSpPr>
+        <p:spPr>
+          <a:xfrm>
+            <a:off x="384048" y="6492240"/>
+            <a:ext cx="2286000" cy="182880"/>
+          </a:xfrm>
+          <a:prstGeom prst="rect">
+            <a:avLst/>
+          </a:prstGeom>
+          <a:noFill/>
+        </p:spPr>
+        <p:txBody>
+          <a:bodyPr wrap="none">
+            <a:spAutoFit/>
+          </a:bodyPr>
+          <a:lstStyle/>
+          <a:p>
+            <a:r>
+              <a:rPr sz="550">
+                <a:solidFill>
+                  <a:srgbClr val="5A697D"/>
+                </a:solidFill>
+                <a:latin typeface="Malgun Gothic"/>
+              </a:rPr>
+              <a:t>영차 1차 POC 범위 공유  |  6</a:t>
+            </a:r>
+          </a:p>
+        </p:txBody>
+      </p:sp>
+    </p:spTree>
+    <p:extLst>
+      <p:ext uri="{BB962C8B-B14F-4D97-AF65-F5344CB8AC3E}">
+        <p14:creationId xmlns:p14="http://schemas.microsoft.com/office/powerpoint/2010/main" val="4399073"/>
+      </p:ext>
+    </p:extLst>
   </p:cSld>
   <p:clrMapOvr>
     <a:masterClrMapping/>
@@ -6913,4 +10239,319 @@
     </a:ext>
   </a:extLst>
 </a:theme>
+</file>
+
+<file path=ppt/theme/theme2.xml><?xml version="1.0" encoding="utf-8"?>
+<a:theme xmlns:a="http://schemas.openxmlformats.org/drawingml/2006/main" name="Office 테마">
+  <a:themeElements>
+    <a:clrScheme name="Office">
+      <a:dk1>
+        <a:sysClr val="windowText" lastClr="000000"/>
+      </a:dk1>
+      <a:lt1>
+        <a:sysClr val="window" lastClr="FFFFFF"/>
+      </a:lt1>
+      <a:dk2>
+        <a:srgbClr val="0E2841"/>
+      </a:dk2>
+      <a:lt2>
+        <a:srgbClr val="E8E8E8"/>
+      </a:lt2>
+      <a:accent1>
+        <a:srgbClr val="156082"/>
+      </a:accent1>
+      <a:accent2>
+        <a:srgbClr val="E97132"/>
+      </a:accent2>
+      <a:accent3>
+        <a:srgbClr val="196B24"/>
+      </a:accent3>
+      <a:accent4>
+        <a:srgbClr val="0F9ED5"/>
+      </a:accent4>
+      <a:accent5>
+        <a:srgbClr val="A02B93"/>
+      </a:accent5>
+      <a:accent6>
+        <a:srgbClr val="4EA72E"/>
+      </a:accent6>
+      <a:hlink>
+        <a:srgbClr val="467886"/>
+      </a:hlink>
+      <a:folHlink>
+        <a:srgbClr val="96607D"/>
+      </a:folHlink>
+    </a:clrScheme>
+    <a:fontScheme name="Office">
+      <a:majorFont>
+        <a:latin typeface="맑은 고딕" panose="02110004020202020204"/>
+        <a:ea typeface=""/>
+        <a:cs typeface=""/>
+        <a:font script="Jpan" typeface="游ゴシック Light"/>
+        <a:font script="Hang" typeface="맑은 고딕"/>
+        <a:font script="Hans" typeface="等线 Light"/>
+        <a:font script="Hant" typeface="新細明體"/>
+        <a:font script="Arab" typeface="Times New Roman"/>
+        <a:font script="Hebr" typeface="Times New Roman"/>
+        <a:font script="Thai" typeface="Angsana New"/>
+        <a:font script="Ethi" typeface="Nyala"/>
+        <a:font script="Beng" typeface="Vrinda"/>
+        <a:font script="Gujr" typeface="Shruti"/>
+        <a:font script="Khmr" typeface="MoolBoran"/>
+        <a:font script="Knda" typeface="Tunga"/>
+        <a:font script="Guru" typeface="Raavi"/>
+        <a:font script="Cans" typeface="Euphemia"/>
+        <a:font script="Cher" typeface="Plantagenet Cherokee"/>
+        <a:font script="Yiii" typeface="Microsoft Yi Baiti"/>
+        <a:font script="Tibt" typeface="Microsoft Himalaya"/>
+        <a:font script="Thaa" typeface="MV Boli"/>
+        <a:font script="Deva" typeface="Mangal"/>
+        <a:font script="Telu" typeface="Gautami"/>
+        <a:font script="Taml" typeface="Latha"/>
+        <a:font script="Syrc" typeface="Estrangelo Edessa"/>
+        <a:font script="Orya" typeface="Kalinga"/>
+        <a:font script="Mlym" typeface="Kartika"/>
+        <a:font script="Laoo" typeface="DokChampa"/>
+        <a:font script="Sinh" typeface="Iskoola Pota"/>
+        <a:font script="Mong" typeface="Mongolian Baiti"/>
+        <a:font script="Viet" typeface="Times New Roman"/>
+        <a:font script="Uigh" typeface="Microsoft Uighur"/>
+        <a:font script="Geor" typeface="Sylfaen"/>
+        <a:font script="Armn" typeface="Arial"/>
+        <a:font script="Bugi" typeface="Leelawadee UI"/>
+        <a:font script="Bopo" typeface="Microsoft JhengHei"/>
+        <a:font script="Java" typeface="Javanese Text"/>
+        <a:font script="Lisu" typeface="Segoe UI"/>
+        <a:font script="Mymr" typeface="Myanmar Text"/>
+        <a:font script="Nkoo" typeface="Ebrima"/>
+        <a:font script="Olck" typeface="Nirmala UI"/>
+        <a:font script="Osma" typeface="Ebrima"/>
+        <a:font script="Phag" typeface="Phagspa"/>
+        <a:font script="Syrn" typeface="Estrangelo Edessa"/>
+        <a:font script="Syrj" typeface="Estrangelo Edessa"/>
+        <a:font script="Syre" typeface="Estrangelo Edessa"/>
+        <a:font script="Sora" typeface="Nirmala UI"/>
+        <a:font script="Tale" typeface="Microsoft Tai Le"/>
+        <a:font script="Talu" typeface="Microsoft New Tai Lue"/>
+        <a:font script="Tfng" typeface="Ebrima"/>
+      </a:majorFont>
+      <a:minorFont>
+        <a:latin typeface="맑은 고딕" panose="02110004020202020204"/>
+        <a:ea typeface=""/>
+        <a:cs typeface=""/>
+        <a:font script="Jpan" typeface="游ゴシック"/>
+        <a:font script="Hang" typeface="맑은 고딕"/>
+        <a:font script="Hans" typeface="等线"/>
+        <a:font script="Hant" typeface="新細明體"/>
+        <a:font script="Arab" typeface="Arial"/>
+        <a:font script="Hebr" typeface="Arial"/>
+        <a:font script="Thai" typeface="Cordia New"/>
+        <a:font script="Ethi" typeface="Nyala"/>
+        <a:font script="Beng" typeface="Vrinda"/>
+        <a:font script="Gujr" typeface="Shruti"/>
+        <a:font script="Khmr" typeface="DaunPenh"/>
+        <a:font script="Knda" typeface="Tunga"/>
+        <a:font script="Guru" typeface="Raavi"/>
+        <a:font script="Cans" typeface="Euphemia"/>
+        <a:font script="Cher" typeface="Plantagenet Cherokee"/>
+        <a:font script="Yiii" typeface="Microsoft Yi Baiti"/>
+        <a:font script="Tibt" typeface="Microsoft Himalaya"/>
+        <a:font script="Thaa" typeface="MV Boli"/>
+        <a:font script="Deva" typeface="Mangal"/>
+        <a:font script="Telu" typeface="Gautami"/>
+        <a:font script="Taml" typeface="Latha"/>
+        <a:font script="Syrc" typeface="Estrangelo Edessa"/>
+        <a:font script="Orya" typeface="Kalinga"/>
+        <a:font script="Mlym" typeface="Kartika"/>
+        <a:font script="Laoo" typeface="DokChampa"/>
+        <a:font script="Sinh" typeface="Iskoola Pota"/>
+        <a:font script="Mong" typeface="Mongolian Baiti"/>
+        <a:font script="Viet" typeface="Arial"/>
+        <a:font script="Uigh" typeface="Microsoft Uighur"/>
+        <a:font script="Geor" typeface="Sylfaen"/>
+        <a:font script="Armn" typeface="Arial"/>
+        <a:font script="Bugi" typeface="Leelawadee UI"/>
+        <a:font script="Bopo" typeface="Microsoft JhengHei"/>
+        <a:font script="Java" typeface="Javanese Text"/>
+        <a:font script="Lisu" typeface="Segoe UI"/>
+        <a:font script="Mymr" typeface="Myanmar Text"/>
+        <a:font script="Nkoo" typeface="Ebrima"/>
+        <a:font script="Olck" typeface="Nirmala UI"/>
+        <a:font script="Osma" typeface="Ebrima"/>
+        <a:font script="Phag" typeface="Phagspa"/>
+        <a:font script="Syrn" typeface="Estrangelo Edessa"/>
+        <a:font script="Syrj" typeface="Estrangelo Edessa"/>
+        <a:font script="Syre" typeface="Estrangelo Edessa"/>
+        <a:font script="Sora" typeface="Nirmala UI"/>
+        <a:font script="Tale" typeface="Microsoft Tai Le"/>
+        <a:font script="Talu" typeface="Microsoft New Tai Lue"/>
+        <a:font script="Tfng" typeface="Ebrima"/>
+      </a:minorFont>
+    </a:fontScheme>
+    <a:fmtScheme name="Office">
+      <a:fillStyleLst>
+        <a:solidFill>
+          <a:schemeClr val="phClr"/>
+        </a:solidFill>
+        <a:gradFill rotWithShape="1">
+          <a:gsLst>
+            <a:gs pos="0">
+              <a:schemeClr val="phClr">
+                <a:lumMod val="110000"/>
+                <a:satMod val="105000"/>
+                <a:tint val="67000"/>
+              </a:schemeClr>
+            </a:gs>
+            <a:gs pos="50000">
+              <a:schemeClr val="phClr">
+                <a:lumMod val="105000"/>
+                <a:satMod val="103000"/>
+                <a:tint val="73000"/>
+              </a:schemeClr>
+            </a:gs>
+            <a:gs pos="100000">
+              <a:schemeClr val="phClr">
+                <a:lumMod val="105000"/>
+                <a:satMod val="109000"/>
+                <a:tint val="81000"/>
+              </a:schemeClr>
+            </a:gs>
+          </a:gsLst>
+          <a:lin ang="5400000" scaled="0"/>
+        </a:gradFill>
+        <a:gradFill rotWithShape="1">
+          <a:gsLst>
+            <a:gs pos="0">
+              <a:schemeClr val="phClr">
+                <a:satMod val="103000"/>
+                <a:lumMod val="102000"/>
+                <a:tint val="94000"/>
+              </a:schemeClr>
+            </a:gs>
+            <a:gs pos="50000">
+              <a:schemeClr val="phClr">
+                <a:satMod val="110000"/>
+                <a:lumMod val="100000"/>
+                <a:shade val="100000"/>
+              </a:schemeClr>
+            </a:gs>
+            <a:gs pos="100000">
+              <a:schemeClr val="phClr">
+                <a:lumMod val="99000"/>
+                <a:satMod val="120000"/>
+                <a:shade val="78000"/>
+              </a:schemeClr>
+            </a:gs>
+          </a:gsLst>
+          <a:lin ang="5400000" scaled="0"/>
+        </a:gradFill>
+      </a:fillStyleLst>
+      <a:lnStyleLst>
+        <a:ln w="12700" cap="flat" cmpd="sng" algn="ctr">
+          <a:solidFill>
+            <a:schemeClr val="phClr"/>
+          </a:solidFill>
+          <a:prstDash val="solid"/>
+          <a:miter lim="800000"/>
+        </a:ln>
+        <a:ln w="19050" cap="flat" cmpd="sng" algn="ctr">
+          <a:solidFill>
+            <a:schemeClr val="phClr"/>
+          </a:solidFill>
+          <a:prstDash val="solid"/>
+          <a:miter lim="800000"/>
+        </a:ln>
+        <a:ln w="25400" cap="flat" cmpd="sng" algn="ctr">
+          <a:solidFill>
+            <a:schemeClr val="phClr"/>
+          </a:solidFill>
+          <a:prstDash val="solid"/>
+          <a:miter lim="800000"/>
+        </a:ln>
+      </a:lnStyleLst>
+      <a:effectStyleLst>
+        <a:effectStyle>
+          <a:effectLst/>
+        </a:effectStyle>
+        <a:effectStyle>
+          <a:effectLst/>
+        </a:effectStyle>
+        <a:effectStyle>
+          <a:effectLst>
+            <a:outerShdw blurRad="57150" dist="19050" dir="5400000" algn="ctr" rotWithShape="0">
+              <a:srgbClr val="000000">
+                <a:alpha val="63000"/>
+              </a:srgbClr>
+            </a:outerShdw>
+          </a:effectLst>
+        </a:effectStyle>
+      </a:effectStyleLst>
+      <a:bgFillStyleLst>
+        <a:solidFill>
+          <a:schemeClr val="phClr"/>
+        </a:solidFill>
+        <a:solidFill>
+          <a:schemeClr val="phClr">
+            <a:tint val="95000"/>
+            <a:satMod val="170000"/>
+          </a:schemeClr>
+        </a:solidFill>
+        <a:gradFill rotWithShape="1">
+          <a:gsLst>
+            <a:gs pos="0">
+              <a:schemeClr val="phClr">
+                <a:tint val="93000"/>
+                <a:satMod val="150000"/>
+                <a:shade val="98000"/>
+                <a:lumMod val="102000"/>
+              </a:schemeClr>
+            </a:gs>
+            <a:gs pos="50000">
+              <a:schemeClr val="phClr">
+                <a:tint val="98000"/>
+                <a:satMod val="130000"/>
+                <a:shade val="90000"/>
+                <a:lumMod val="103000"/>
+              </a:schemeClr>
+            </a:gs>
+            <a:gs pos="100000">
+              <a:schemeClr val="phClr">
+                <a:shade val="63000"/>
+                <a:satMod val="120000"/>
+              </a:schemeClr>
+            </a:gs>
+          </a:gsLst>
+          <a:lin ang="5400000" scaled="0"/>
+        </a:gradFill>
+      </a:bgFillStyleLst>
+    </a:fmtScheme>
+  </a:themeElements>
+  <a:objectDefaults>
+    <a:lnDef>
+      <a:spPr/>
+      <a:bodyPr/>
+      <a:lstStyle/>
+      <a:style>
+        <a:lnRef idx="2">
+          <a:schemeClr val="accent1"/>
+        </a:lnRef>
+        <a:fillRef idx="0">
+          <a:schemeClr val="accent1"/>
+        </a:fillRef>
+        <a:effectRef idx="1">
+          <a:schemeClr val="accent1"/>
+        </a:effectRef>
+        <a:fontRef idx="minor">
+          <a:schemeClr val="tx1"/>
+        </a:fontRef>
+      </a:style>
+    </a:lnDef>
+  </a:objectDefaults>
+  <a:extraClrSchemeLst/>
+  <a:extLst>
+    <a:ext uri="{05A4C25C-085E-4340-85A3-A5531E510DB2}">
+      <thm15:themeFamily xmlns:thm15="http://schemas.microsoft.com/office/thememl/2012/main" name="Office Theme" id="{2E142A2C-CD16-42D6-873A-C26D2A0506FA}" vid="{1BDDFF52-6CD6-40A5-AB3C-68EB2F1E4D0A}"/>
+    </a:ext>
+  </a:extLst>
+</a:theme>
 </file>